--- a/_static/images/concurrency/Presentation1.pptx
+++ b/_static/images/concurrency/Presentation1.pptx
@@ -18,6 +18,13 @@
     <p:sldId id="266" r:id="rId12"/>
     <p:sldId id="267" r:id="rId13"/>
     <p:sldId id="268" r:id="rId14"/>
+    <p:sldId id="269" r:id="rId15"/>
+    <p:sldId id="270" r:id="rId16"/>
+    <p:sldId id="271" r:id="rId17"/>
+    <p:sldId id="272" r:id="rId18"/>
+    <p:sldId id="273" r:id="rId19"/>
+    <p:sldId id="274" r:id="rId20"/>
+    <p:sldId id="275" r:id="rId21"/>
   </p:sldIdLst>
   <p:sldSz cx="12192000" cy="6858000"/>
   <p:notesSz cx="6858000" cy="9144000"/>
@@ -271,7 +278,7 @@
           <a:p>
             <a:fld id="{8864B806-D088-C24B-BAA0-8204A6CA2F81}" type="datetimeFigureOut">
               <a:rPr lang="en-US" smtClean="0"/>
-              <a:t>4/20/26</a:t>
+              <a:t>9/1/26</a:t>
             </a:fld>
             <a:endParaRPr lang="en-US"/>
           </a:p>
@@ -469,7 +476,7 @@
           <a:p>
             <a:fld id="{8864B806-D088-C24B-BAA0-8204A6CA2F81}" type="datetimeFigureOut">
               <a:rPr lang="en-US" smtClean="0"/>
-              <a:t>4/20/26</a:t>
+              <a:t>9/1/26</a:t>
             </a:fld>
             <a:endParaRPr lang="en-US"/>
           </a:p>
@@ -677,7 +684,7 @@
           <a:p>
             <a:fld id="{8864B806-D088-C24B-BAA0-8204A6CA2F81}" type="datetimeFigureOut">
               <a:rPr lang="en-US" smtClean="0"/>
-              <a:t>4/20/26</a:t>
+              <a:t>9/1/26</a:t>
             </a:fld>
             <a:endParaRPr lang="en-US"/>
           </a:p>
@@ -875,7 +882,7 @@
           <a:p>
             <a:fld id="{8864B806-D088-C24B-BAA0-8204A6CA2F81}" type="datetimeFigureOut">
               <a:rPr lang="en-US" smtClean="0"/>
-              <a:t>4/20/26</a:t>
+              <a:t>9/1/26</a:t>
             </a:fld>
             <a:endParaRPr lang="en-US"/>
           </a:p>
@@ -1150,7 +1157,7 @@
           <a:p>
             <a:fld id="{8864B806-D088-C24B-BAA0-8204A6CA2F81}" type="datetimeFigureOut">
               <a:rPr lang="en-US" smtClean="0"/>
-              <a:t>4/20/26</a:t>
+              <a:t>9/1/26</a:t>
             </a:fld>
             <a:endParaRPr lang="en-US"/>
           </a:p>
@@ -1415,7 +1422,7 @@
           <a:p>
             <a:fld id="{8864B806-D088-C24B-BAA0-8204A6CA2F81}" type="datetimeFigureOut">
               <a:rPr lang="en-US" smtClean="0"/>
-              <a:t>4/20/26</a:t>
+              <a:t>9/1/26</a:t>
             </a:fld>
             <a:endParaRPr lang="en-US"/>
           </a:p>
@@ -1827,7 +1834,7 @@
           <a:p>
             <a:fld id="{8864B806-D088-C24B-BAA0-8204A6CA2F81}" type="datetimeFigureOut">
               <a:rPr lang="en-US" smtClean="0"/>
-              <a:t>4/20/26</a:t>
+              <a:t>9/1/26</a:t>
             </a:fld>
             <a:endParaRPr lang="en-US"/>
           </a:p>
@@ -1968,7 +1975,7 @@
           <a:p>
             <a:fld id="{8864B806-D088-C24B-BAA0-8204A6CA2F81}" type="datetimeFigureOut">
               <a:rPr lang="en-US" smtClean="0"/>
-              <a:t>4/20/26</a:t>
+              <a:t>9/1/26</a:t>
             </a:fld>
             <a:endParaRPr lang="en-US"/>
           </a:p>
@@ -2081,7 +2088,7 @@
           <a:p>
             <a:fld id="{8864B806-D088-C24B-BAA0-8204A6CA2F81}" type="datetimeFigureOut">
               <a:rPr lang="en-US" smtClean="0"/>
-              <a:t>4/20/26</a:t>
+              <a:t>9/1/26</a:t>
             </a:fld>
             <a:endParaRPr lang="en-US"/>
           </a:p>
@@ -2392,7 +2399,7 @@
           <a:p>
             <a:fld id="{8864B806-D088-C24B-BAA0-8204A6CA2F81}" type="datetimeFigureOut">
               <a:rPr lang="en-US" smtClean="0"/>
-              <a:t>4/20/26</a:t>
+              <a:t>9/1/26</a:t>
             </a:fld>
             <a:endParaRPr lang="en-US"/>
           </a:p>
@@ -2680,7 +2687,7 @@
           <a:p>
             <a:fld id="{8864B806-D088-C24B-BAA0-8204A6CA2F81}" type="datetimeFigureOut">
               <a:rPr lang="en-US" smtClean="0"/>
-              <a:t>4/20/26</a:t>
+              <a:t>9/1/26</a:t>
             </a:fld>
             <a:endParaRPr lang="en-US"/>
           </a:p>
@@ -2921,7 +2928,7 @@
           <a:p>
             <a:fld id="{8864B806-D088-C24B-BAA0-8204A6CA2F81}" type="datetimeFigureOut">
               <a:rPr lang="en-US" smtClean="0"/>
-              <a:t>4/20/26</a:t>
+              <a:t>9/1/26</a:t>
             </a:fld>
             <a:endParaRPr lang="en-US"/>
           </a:p>
@@ -7473,6 +7480,5376 @@
 </p:sld>
 </file>
 
+<file path=ppt/slides/slide14.xml><?xml version="1.0" encoding="utf-8"?>
+<p:sld xmlns:a="http://schemas.openxmlformats.org/drawingml/2006/main" xmlns:r="http://schemas.openxmlformats.org/officeDocument/2006/relationships" xmlns:p="http://schemas.openxmlformats.org/presentationml/2006/main">
+  <p:cSld>
+    <p:spTree>
+      <p:nvGrpSpPr>
+        <p:cNvPr id="1" name=""/>
+        <p:cNvGrpSpPr/>
+        <p:nvPr/>
+      </p:nvGrpSpPr>
+      <p:grpSpPr>
+        <a:xfrm>
+          <a:off x="0" y="0"/>
+          <a:ext cx="0" cy="0"/>
+          <a:chOff x="0" y="0"/>
+          <a:chExt cx="0" cy="0"/>
+        </a:xfrm>
+      </p:grpSpPr>
+      <p:graphicFrame>
+        <p:nvGraphicFramePr>
+          <p:cNvPr id="4" name="Table 3">
+            <a:extLst>
+              <a:ext uri="{FF2B5EF4-FFF2-40B4-BE49-F238E27FC236}">
+                <a16:creationId xmlns:a16="http://schemas.microsoft.com/office/drawing/2014/main" id="{B8E26CB4-1981-A160-FCE4-020408C22270}"/>
+              </a:ext>
+            </a:extLst>
+          </p:cNvPr>
+          <p:cNvGraphicFramePr>
+            <a:graphicFrameLocks noGrp="1"/>
+          </p:cNvGraphicFramePr>
+          <p:nvPr>
+            <p:extLst>
+              <p:ext uri="{D42A27DB-BD31-4B8C-83A1-F6EECF244321}">
+                <p14:modId xmlns:p14="http://schemas.microsoft.com/office/powerpoint/2010/main" val="2621810703"/>
+              </p:ext>
+            </p:extLst>
+          </p:nvPr>
+        </p:nvGraphicFramePr>
+        <p:xfrm>
+          <a:off x="2106429" y="1035388"/>
+          <a:ext cx="1891413" cy="365760"/>
+        </p:xfrm>
+        <a:graphic>
+          <a:graphicData uri="http://schemas.openxmlformats.org/drawingml/2006/table">
+            <a:tbl>
+              <a:tblPr firstRow="1" bandRow="1">
+                <a:tableStyleId>{5940675A-B579-460E-94D1-54222C63F5DA}</a:tableStyleId>
+              </a:tblPr>
+              <a:tblGrid>
+                <a:gridCol w="630471">
+                  <a:extLst>
+                    <a:ext uri="{9D8B030D-6E8A-4147-A177-3AD203B41FA5}">
+                      <a16:colId xmlns:a16="http://schemas.microsoft.com/office/drawing/2014/main" val="3136262100"/>
+                    </a:ext>
+                  </a:extLst>
+                </a:gridCol>
+                <a:gridCol w="630471">
+                  <a:extLst>
+                    <a:ext uri="{9D8B030D-6E8A-4147-A177-3AD203B41FA5}">
+                      <a16:colId xmlns:a16="http://schemas.microsoft.com/office/drawing/2014/main" val="2693352234"/>
+                    </a:ext>
+                  </a:extLst>
+                </a:gridCol>
+                <a:gridCol w="630471">
+                  <a:extLst>
+                    <a:ext uri="{9D8B030D-6E8A-4147-A177-3AD203B41FA5}">
+                      <a16:colId xmlns:a16="http://schemas.microsoft.com/office/drawing/2014/main" val="3761018242"/>
+                    </a:ext>
+                  </a:extLst>
+                </a:gridCol>
+              </a:tblGrid>
+              <a:tr h="361389">
+                <a:tc>
+                  <a:txBody>
+                    <a:bodyPr/>
+                    <a:lstStyle/>
+                    <a:p>
+                      <a:pPr algn="ctr"/>
+                      <a:r>
+                        <a:rPr lang="en-US" dirty="0"/>
+                        <a:t>10</a:t>
+                      </a:r>
+                    </a:p>
+                  </a:txBody>
+                  <a:tcPr/>
+                </a:tc>
+                <a:tc>
+                  <a:txBody>
+                    <a:bodyPr/>
+                    <a:lstStyle/>
+                    <a:p>
+                      <a:pPr algn="ctr"/>
+                      <a:r>
+                        <a:rPr lang="en-US" dirty="0"/>
+                        <a:t>20</a:t>
+                      </a:r>
+                    </a:p>
+                  </a:txBody>
+                  <a:tcPr/>
+                </a:tc>
+                <a:tc>
+                  <a:txBody>
+                    <a:bodyPr/>
+                    <a:lstStyle/>
+                    <a:p>
+                      <a:pPr algn="ctr"/>
+                      <a:r>
+                        <a:rPr lang="en-US" dirty="0"/>
+                        <a:t>30</a:t>
+                      </a:r>
+                    </a:p>
+                  </a:txBody>
+                  <a:tcPr/>
+                </a:tc>
+                <a:extLst>
+                  <a:ext uri="{0D108BD9-81ED-4DB2-BD59-A6C34878D82A}">
+                    <a16:rowId xmlns:a16="http://schemas.microsoft.com/office/drawing/2014/main" val="3161247"/>
+                  </a:ext>
+                </a:extLst>
+              </a:tr>
+            </a:tbl>
+          </a:graphicData>
+        </a:graphic>
+      </p:graphicFrame>
+      <p:graphicFrame>
+        <p:nvGraphicFramePr>
+          <p:cNvPr id="5" name="Table 4">
+            <a:extLst>
+              <a:ext uri="{FF2B5EF4-FFF2-40B4-BE49-F238E27FC236}">
+                <a16:creationId xmlns:a16="http://schemas.microsoft.com/office/drawing/2014/main" id="{81E8E103-D494-3E9A-2974-70FABC387138}"/>
+              </a:ext>
+            </a:extLst>
+          </p:cNvPr>
+          <p:cNvGraphicFramePr>
+            <a:graphicFrameLocks noGrp="1"/>
+          </p:cNvGraphicFramePr>
+          <p:nvPr>
+            <p:extLst>
+              <p:ext uri="{D42A27DB-BD31-4B8C-83A1-F6EECF244321}">
+                <p14:modId xmlns:p14="http://schemas.microsoft.com/office/powerpoint/2010/main" val="2275398826"/>
+              </p:ext>
+            </p:extLst>
+          </p:nvPr>
+        </p:nvGraphicFramePr>
+        <p:xfrm>
+          <a:off x="2106429" y="2027761"/>
+          <a:ext cx="1891413" cy="365760"/>
+        </p:xfrm>
+        <a:graphic>
+          <a:graphicData uri="http://schemas.openxmlformats.org/drawingml/2006/table">
+            <a:tbl>
+              <a:tblPr firstRow="1" bandRow="1">
+                <a:tableStyleId>{5940675A-B579-460E-94D1-54222C63F5DA}</a:tableStyleId>
+              </a:tblPr>
+              <a:tblGrid>
+                <a:gridCol w="630471">
+                  <a:extLst>
+                    <a:ext uri="{9D8B030D-6E8A-4147-A177-3AD203B41FA5}">
+                      <a16:colId xmlns:a16="http://schemas.microsoft.com/office/drawing/2014/main" val="3136262100"/>
+                    </a:ext>
+                  </a:extLst>
+                </a:gridCol>
+                <a:gridCol w="630471">
+                  <a:extLst>
+                    <a:ext uri="{9D8B030D-6E8A-4147-A177-3AD203B41FA5}">
+                      <a16:colId xmlns:a16="http://schemas.microsoft.com/office/drawing/2014/main" val="2693352234"/>
+                    </a:ext>
+                  </a:extLst>
+                </a:gridCol>
+                <a:gridCol w="630471">
+                  <a:extLst>
+                    <a:ext uri="{9D8B030D-6E8A-4147-A177-3AD203B41FA5}">
+                      <a16:colId xmlns:a16="http://schemas.microsoft.com/office/drawing/2014/main" val="3761018242"/>
+                    </a:ext>
+                  </a:extLst>
+                </a:gridCol>
+              </a:tblGrid>
+              <a:tr h="361389">
+                <a:tc>
+                  <a:txBody>
+                    <a:bodyPr/>
+                    <a:lstStyle/>
+                    <a:p>
+                      <a:pPr algn="ctr"/>
+                      <a:r>
+                        <a:rPr lang="en-US" dirty="0"/>
+                        <a:t>10</a:t>
+                      </a:r>
+                    </a:p>
+                  </a:txBody>
+                  <a:tcPr/>
+                </a:tc>
+                <a:tc>
+                  <a:txBody>
+                    <a:bodyPr/>
+                    <a:lstStyle/>
+                    <a:p>
+                      <a:pPr algn="ctr"/>
+                      <a:r>
+                        <a:rPr lang="en-US" dirty="0"/>
+                        <a:t>20</a:t>
+                      </a:r>
+                    </a:p>
+                  </a:txBody>
+                  <a:tcPr/>
+                </a:tc>
+                <a:tc>
+                  <a:txBody>
+                    <a:bodyPr/>
+                    <a:lstStyle/>
+                    <a:p>
+                      <a:pPr algn="ctr"/>
+                      <a:r>
+                        <a:rPr lang="en-US" dirty="0"/>
+                        <a:t>30</a:t>
+                      </a:r>
+                    </a:p>
+                  </a:txBody>
+                  <a:tcPr/>
+                </a:tc>
+                <a:extLst>
+                  <a:ext uri="{0D108BD9-81ED-4DB2-BD59-A6C34878D82A}">
+                    <a16:rowId xmlns:a16="http://schemas.microsoft.com/office/drawing/2014/main" val="3161247"/>
+                  </a:ext>
+                </a:extLst>
+              </a:tr>
+            </a:tbl>
+          </a:graphicData>
+        </a:graphic>
+      </p:graphicFrame>
+      <p:sp>
+        <p:nvSpPr>
+          <p:cNvPr id="6" name="TextBox 5">
+            <a:extLst>
+              <a:ext uri="{FF2B5EF4-FFF2-40B4-BE49-F238E27FC236}">
+                <a16:creationId xmlns:a16="http://schemas.microsoft.com/office/drawing/2014/main" id="{1410BCBE-131C-95C2-9DCC-6A017E534E0A}"/>
+              </a:ext>
+            </a:extLst>
+          </p:cNvPr>
+          <p:cNvSpPr txBox="1"/>
+          <p:nvPr/>
+        </p:nvSpPr>
+        <p:spPr>
+          <a:xfrm>
+            <a:off x="265815" y="765543"/>
+            <a:ext cx="1031358" cy="369332"/>
+          </a:xfrm>
+          <a:prstGeom prst="rect">
+            <a:avLst/>
+          </a:prstGeom>
+          <a:noFill/>
+        </p:spPr>
+        <p:txBody>
+          <a:bodyPr wrap="square" rtlCol="0">
+            <a:spAutoFit/>
+          </a:bodyPr>
+          <a:lstStyle/>
+          <a:p>
+            <a:r>
+              <a:rPr lang="en-US" dirty="0" err="1"/>
+              <a:t>oldVals</a:t>
+            </a:r>
+            <a:endParaRPr lang="en-US" dirty="0"/>
+          </a:p>
+        </p:txBody>
+      </p:sp>
+      <p:sp>
+        <p:nvSpPr>
+          <p:cNvPr id="7" name="TextBox 6">
+            <a:extLst>
+              <a:ext uri="{FF2B5EF4-FFF2-40B4-BE49-F238E27FC236}">
+                <a16:creationId xmlns:a16="http://schemas.microsoft.com/office/drawing/2014/main" id="{D08A0183-85B1-866B-4CC4-F6C156829946}"/>
+              </a:ext>
+            </a:extLst>
+          </p:cNvPr>
+          <p:cNvSpPr txBox="1"/>
+          <p:nvPr/>
+        </p:nvSpPr>
+        <p:spPr>
+          <a:xfrm>
+            <a:off x="127593" y="1218268"/>
+            <a:ext cx="1169580" cy="369332"/>
+          </a:xfrm>
+          <a:prstGeom prst="rect">
+            <a:avLst/>
+          </a:prstGeom>
+          <a:noFill/>
+        </p:spPr>
+        <p:txBody>
+          <a:bodyPr wrap="square" rtlCol="0">
+            <a:spAutoFit/>
+          </a:bodyPr>
+          <a:lstStyle/>
+          <a:p>
+            <a:r>
+              <a:rPr lang="en-US" dirty="0" err="1"/>
+              <a:t>aliasVals</a:t>
+            </a:r>
+            <a:endParaRPr lang="en-US" dirty="0"/>
+          </a:p>
+        </p:txBody>
+      </p:sp>
+      <p:sp>
+        <p:nvSpPr>
+          <p:cNvPr id="8" name="TextBox 7">
+            <a:extLst>
+              <a:ext uri="{FF2B5EF4-FFF2-40B4-BE49-F238E27FC236}">
+                <a16:creationId xmlns:a16="http://schemas.microsoft.com/office/drawing/2014/main" id="{68BF3CE8-5F7B-550E-CECD-E005E4EF9996}"/>
+              </a:ext>
+            </a:extLst>
+          </p:cNvPr>
+          <p:cNvSpPr txBox="1"/>
+          <p:nvPr/>
+        </p:nvSpPr>
+        <p:spPr>
+          <a:xfrm>
+            <a:off x="127593" y="2027761"/>
+            <a:ext cx="1169580" cy="369332"/>
+          </a:xfrm>
+          <a:prstGeom prst="rect">
+            <a:avLst/>
+          </a:prstGeom>
+          <a:noFill/>
+        </p:spPr>
+        <p:txBody>
+          <a:bodyPr wrap="square" rtlCol="0">
+            <a:spAutoFit/>
+          </a:bodyPr>
+          <a:lstStyle/>
+          <a:p>
+            <a:r>
+              <a:rPr lang="en-US" dirty="0" err="1"/>
+              <a:t>copyVals</a:t>
+            </a:r>
+            <a:endParaRPr lang="en-US" dirty="0"/>
+          </a:p>
+        </p:txBody>
+      </p:sp>
+      <p:cxnSp>
+        <p:nvCxnSpPr>
+          <p:cNvPr id="10" name="Straight Arrow Connector 9">
+            <a:extLst>
+              <a:ext uri="{FF2B5EF4-FFF2-40B4-BE49-F238E27FC236}">
+                <a16:creationId xmlns:a16="http://schemas.microsoft.com/office/drawing/2014/main" id="{4E7E4552-58B8-CCFE-FE40-FCA6C1BE1BDE}"/>
+              </a:ext>
+            </a:extLst>
+          </p:cNvPr>
+          <p:cNvCxnSpPr>
+            <a:stCxn id="6" idx="3"/>
+            <a:endCxn id="4" idx="1"/>
+          </p:cNvCxnSpPr>
+          <p:nvPr/>
+        </p:nvCxnSpPr>
+        <p:spPr>
+          <a:xfrm>
+            <a:off x="1297173" y="950209"/>
+            <a:ext cx="809256" cy="268059"/>
+          </a:xfrm>
+          <a:prstGeom prst="straightConnector1">
+            <a:avLst/>
+          </a:prstGeom>
+          <a:ln>
+            <a:tailEnd type="triangle"/>
+          </a:ln>
+        </p:spPr>
+        <p:style>
+          <a:lnRef idx="2">
+            <a:schemeClr val="dk1"/>
+          </a:lnRef>
+          <a:fillRef idx="0">
+            <a:schemeClr val="dk1"/>
+          </a:fillRef>
+          <a:effectRef idx="1">
+            <a:schemeClr val="dk1"/>
+          </a:effectRef>
+          <a:fontRef idx="minor">
+            <a:schemeClr val="tx1"/>
+          </a:fontRef>
+        </p:style>
+      </p:cxnSp>
+      <p:cxnSp>
+        <p:nvCxnSpPr>
+          <p:cNvPr id="12" name="Straight Arrow Connector 11">
+            <a:extLst>
+              <a:ext uri="{FF2B5EF4-FFF2-40B4-BE49-F238E27FC236}">
+                <a16:creationId xmlns:a16="http://schemas.microsoft.com/office/drawing/2014/main" id="{D2DA47A4-AB76-476A-DCF1-3213DC08F8A4}"/>
+              </a:ext>
+            </a:extLst>
+          </p:cNvPr>
+          <p:cNvCxnSpPr>
+            <a:stCxn id="7" idx="3"/>
+            <a:endCxn id="4" idx="1"/>
+          </p:cNvCxnSpPr>
+          <p:nvPr/>
+        </p:nvCxnSpPr>
+        <p:spPr>
+          <a:xfrm flipV="1">
+            <a:off x="1297173" y="1218268"/>
+            <a:ext cx="809256" cy="184666"/>
+          </a:xfrm>
+          <a:prstGeom prst="straightConnector1">
+            <a:avLst/>
+          </a:prstGeom>
+          <a:ln>
+            <a:tailEnd type="triangle"/>
+          </a:ln>
+        </p:spPr>
+        <p:style>
+          <a:lnRef idx="2">
+            <a:schemeClr val="dk1"/>
+          </a:lnRef>
+          <a:fillRef idx="0">
+            <a:schemeClr val="dk1"/>
+          </a:fillRef>
+          <a:effectRef idx="1">
+            <a:schemeClr val="dk1"/>
+          </a:effectRef>
+          <a:fontRef idx="minor">
+            <a:schemeClr val="tx1"/>
+          </a:fontRef>
+        </p:style>
+      </p:cxnSp>
+      <p:cxnSp>
+        <p:nvCxnSpPr>
+          <p:cNvPr id="15" name="Straight Arrow Connector 14">
+            <a:extLst>
+              <a:ext uri="{FF2B5EF4-FFF2-40B4-BE49-F238E27FC236}">
+                <a16:creationId xmlns:a16="http://schemas.microsoft.com/office/drawing/2014/main" id="{03DE2F5D-15DF-737F-1C41-47EF4EECBF56}"/>
+              </a:ext>
+            </a:extLst>
+          </p:cNvPr>
+          <p:cNvCxnSpPr>
+            <a:stCxn id="8" idx="3"/>
+            <a:endCxn id="5" idx="1"/>
+          </p:cNvCxnSpPr>
+          <p:nvPr/>
+        </p:nvCxnSpPr>
+        <p:spPr>
+          <a:xfrm flipV="1">
+            <a:off x="1297173" y="2210641"/>
+            <a:ext cx="809256" cy="1786"/>
+          </a:xfrm>
+          <a:prstGeom prst="straightConnector1">
+            <a:avLst/>
+          </a:prstGeom>
+          <a:ln>
+            <a:tailEnd type="triangle"/>
+          </a:ln>
+        </p:spPr>
+        <p:style>
+          <a:lnRef idx="2">
+            <a:schemeClr val="dk1"/>
+          </a:lnRef>
+          <a:fillRef idx="0">
+            <a:schemeClr val="dk1"/>
+          </a:fillRef>
+          <a:effectRef idx="1">
+            <a:schemeClr val="dk1"/>
+          </a:effectRef>
+          <a:fontRef idx="minor">
+            <a:schemeClr val="tx1"/>
+          </a:fontRef>
+        </p:style>
+      </p:cxnSp>
+      <p:sp>
+        <p:nvSpPr>
+          <p:cNvPr id="2" name="TextBox 1">
+            <a:extLst>
+              <a:ext uri="{FF2B5EF4-FFF2-40B4-BE49-F238E27FC236}">
+                <a16:creationId xmlns:a16="http://schemas.microsoft.com/office/drawing/2014/main" id="{BDE49E5A-A78C-41E9-5271-569DF6A25E4A}"/>
+              </a:ext>
+            </a:extLst>
+          </p:cNvPr>
+          <p:cNvSpPr txBox="1"/>
+          <p:nvPr/>
+        </p:nvSpPr>
+        <p:spPr>
+          <a:xfrm>
+            <a:off x="102786" y="5462396"/>
+            <a:ext cx="1389319" cy="369332"/>
+          </a:xfrm>
+          <a:prstGeom prst="rect">
+            <a:avLst/>
+          </a:prstGeom>
+          <a:noFill/>
+        </p:spPr>
+        <p:txBody>
+          <a:bodyPr wrap="square" rtlCol="0">
+            <a:spAutoFit/>
+          </a:bodyPr>
+          <a:lstStyle/>
+          <a:p>
+            <a:pPr algn="ctr"/>
+            <a:r>
+              <a:rPr lang="en-US" b="1" dirty="0" err="1"/>
+              <a:t>currentRun</a:t>
+            </a:r>
+            <a:endParaRPr lang="en-US" b="1" dirty="0"/>
+          </a:p>
+        </p:txBody>
+      </p:sp>
+      <p:sp>
+        <p:nvSpPr>
+          <p:cNvPr id="3" name="TextBox 2">
+            <a:extLst>
+              <a:ext uri="{FF2B5EF4-FFF2-40B4-BE49-F238E27FC236}">
+                <a16:creationId xmlns:a16="http://schemas.microsoft.com/office/drawing/2014/main" id="{93FBAE85-4385-97F1-F800-CA0BC415FF55}"/>
+              </a:ext>
+            </a:extLst>
+          </p:cNvPr>
+          <p:cNvSpPr txBox="1"/>
+          <p:nvPr/>
+        </p:nvSpPr>
+        <p:spPr>
+          <a:xfrm>
+            <a:off x="182526" y="4056057"/>
+            <a:ext cx="1031358" cy="369332"/>
+          </a:xfrm>
+          <a:prstGeom prst="rect">
+            <a:avLst/>
+          </a:prstGeom>
+          <a:noFill/>
+        </p:spPr>
+        <p:txBody>
+          <a:bodyPr wrap="square" rtlCol="0">
+            <a:spAutoFit/>
+          </a:bodyPr>
+          <a:lstStyle/>
+          <a:p>
+            <a:pPr algn="ctr"/>
+            <a:r>
+              <a:rPr lang="en-US" b="1" dirty="0" err="1"/>
+              <a:t>lastRun</a:t>
+            </a:r>
+            <a:endParaRPr lang="en-US" b="1" dirty="0"/>
+          </a:p>
+        </p:txBody>
+      </p:sp>
+      <p:sp>
+        <p:nvSpPr>
+          <p:cNvPr id="9" name="Rounded Rectangle 8">
+            <a:extLst>
+              <a:ext uri="{FF2B5EF4-FFF2-40B4-BE49-F238E27FC236}">
+                <a16:creationId xmlns:a16="http://schemas.microsoft.com/office/drawing/2014/main" id="{8C0B1795-6496-587F-9E19-5A2CB42658B6}"/>
+              </a:ext>
+            </a:extLst>
+          </p:cNvPr>
+          <p:cNvSpPr/>
+          <p:nvPr/>
+        </p:nvSpPr>
+        <p:spPr>
+          <a:xfrm>
+            <a:off x="127592" y="4425389"/>
+            <a:ext cx="1307804" cy="382772"/>
+          </a:xfrm>
+          <a:prstGeom prst="roundRect">
+            <a:avLst/>
+          </a:prstGeom>
+        </p:spPr>
+        <p:style>
+          <a:lnRef idx="1">
+            <a:schemeClr val="accent4"/>
+          </a:lnRef>
+          <a:fillRef idx="2">
+            <a:schemeClr val="accent4"/>
+          </a:fillRef>
+          <a:effectRef idx="1">
+            <a:schemeClr val="accent4"/>
+          </a:effectRef>
+          <a:fontRef idx="minor">
+            <a:schemeClr val="dk1"/>
+          </a:fontRef>
+        </p:style>
+        <p:txBody>
+          <a:bodyPr rtlCol="0" anchor="ctr"/>
+          <a:lstStyle/>
+          <a:p>
+            <a:pPr algn="ctr"/>
+            <a:r>
+              <a:rPr lang="en-US" dirty="0"/>
+              <a:t>0x5ab12c</a:t>
+            </a:r>
+          </a:p>
+        </p:txBody>
+      </p:sp>
+      <p:sp>
+        <p:nvSpPr>
+          <p:cNvPr id="13" name="Rounded Rectangle 12">
+            <a:extLst>
+              <a:ext uri="{FF2B5EF4-FFF2-40B4-BE49-F238E27FC236}">
+                <a16:creationId xmlns:a16="http://schemas.microsoft.com/office/drawing/2014/main" id="{F476DC43-7DE7-5227-405D-24BFBF7C45AD}"/>
+              </a:ext>
+            </a:extLst>
+          </p:cNvPr>
+          <p:cNvSpPr/>
+          <p:nvPr/>
+        </p:nvSpPr>
+        <p:spPr>
+          <a:xfrm>
+            <a:off x="127592" y="5915121"/>
+            <a:ext cx="1307804" cy="382772"/>
+          </a:xfrm>
+          <a:prstGeom prst="roundRect">
+            <a:avLst/>
+          </a:prstGeom>
+        </p:spPr>
+        <p:style>
+          <a:lnRef idx="1">
+            <a:schemeClr val="accent4"/>
+          </a:lnRef>
+          <a:fillRef idx="2">
+            <a:schemeClr val="accent4"/>
+          </a:fillRef>
+          <a:effectRef idx="1">
+            <a:schemeClr val="accent4"/>
+          </a:effectRef>
+          <a:fontRef idx="minor">
+            <a:schemeClr val="dk1"/>
+          </a:fontRef>
+        </p:style>
+        <p:txBody>
+          <a:bodyPr rtlCol="0" anchor="ctr"/>
+          <a:lstStyle/>
+          <a:p>
+            <a:pPr algn="ctr"/>
+            <a:r>
+              <a:rPr lang="en-US" dirty="0"/>
+              <a:t>0x5ab12c</a:t>
+            </a:r>
+          </a:p>
+        </p:txBody>
+      </p:sp>
+      <p:sp>
+        <p:nvSpPr>
+          <p:cNvPr id="16" name="TextBox 15">
+            <a:extLst>
+              <a:ext uri="{FF2B5EF4-FFF2-40B4-BE49-F238E27FC236}">
+                <a16:creationId xmlns:a16="http://schemas.microsoft.com/office/drawing/2014/main" id="{D1299313-BA18-2E88-92BC-6BA0F8C84A83}"/>
+              </a:ext>
+            </a:extLst>
+          </p:cNvPr>
+          <p:cNvSpPr txBox="1"/>
+          <p:nvPr/>
+        </p:nvSpPr>
+        <p:spPr>
+          <a:xfrm>
+            <a:off x="3220779" y="4438829"/>
+            <a:ext cx="1554124" cy="369332"/>
+          </a:xfrm>
+          <a:prstGeom prst="rect">
+            <a:avLst/>
+          </a:prstGeom>
+          <a:noFill/>
+        </p:spPr>
+        <p:txBody>
+          <a:bodyPr wrap="square" rtlCol="0">
+            <a:spAutoFit/>
+          </a:bodyPr>
+          <a:lstStyle/>
+          <a:p>
+            <a:pPr algn="ctr"/>
+            <a:r>
+              <a:rPr lang="en-US" b="1" dirty="0"/>
+              <a:t>Run Record</a:t>
+            </a:r>
+          </a:p>
+        </p:txBody>
+      </p:sp>
+      <p:sp>
+        <p:nvSpPr>
+          <p:cNvPr id="17" name="Rounded Rectangle 16">
+            <a:extLst>
+              <a:ext uri="{FF2B5EF4-FFF2-40B4-BE49-F238E27FC236}">
+                <a16:creationId xmlns:a16="http://schemas.microsoft.com/office/drawing/2014/main" id="{7B71A79E-F1DD-B915-966C-8CD77DF62517}"/>
+              </a:ext>
+            </a:extLst>
+          </p:cNvPr>
+          <p:cNvSpPr/>
+          <p:nvPr/>
+        </p:nvSpPr>
+        <p:spPr>
+          <a:xfrm>
+            <a:off x="3030279" y="4814881"/>
+            <a:ext cx="1935125" cy="1100240"/>
+          </a:xfrm>
+          <a:prstGeom prst="roundRect">
+            <a:avLst/>
+          </a:prstGeom>
+        </p:spPr>
+        <p:style>
+          <a:lnRef idx="1">
+            <a:schemeClr val="accent4"/>
+          </a:lnRef>
+          <a:fillRef idx="2">
+            <a:schemeClr val="accent4"/>
+          </a:fillRef>
+          <a:effectRef idx="1">
+            <a:schemeClr val="accent4"/>
+          </a:effectRef>
+          <a:fontRef idx="minor">
+            <a:schemeClr val="dk1"/>
+          </a:fontRef>
+        </p:style>
+        <p:txBody>
+          <a:bodyPr rtlCol="0" anchor="ctr"/>
+          <a:lstStyle/>
+          <a:p>
+            <a:r>
+              <a:rPr lang="en-US" dirty="0"/>
+              <a:t>seconds: 300</a:t>
+            </a:r>
+          </a:p>
+          <a:p>
+            <a:r>
+              <a:rPr lang="en-US" dirty="0"/>
+              <a:t>miles = 1.5</a:t>
+            </a:r>
+          </a:p>
+        </p:txBody>
+      </p:sp>
+      <p:cxnSp>
+        <p:nvCxnSpPr>
+          <p:cNvPr id="18" name="Straight Arrow Connector 17">
+            <a:extLst>
+              <a:ext uri="{FF2B5EF4-FFF2-40B4-BE49-F238E27FC236}">
+                <a16:creationId xmlns:a16="http://schemas.microsoft.com/office/drawing/2014/main" id="{1F8A2272-1E20-7057-0B08-DACDF2874E2B}"/>
+              </a:ext>
+            </a:extLst>
+          </p:cNvPr>
+          <p:cNvCxnSpPr>
+            <a:cxnSpLocks/>
+            <a:stCxn id="9" idx="3"/>
+            <a:endCxn id="17" idx="1"/>
+          </p:cNvCxnSpPr>
+          <p:nvPr/>
+        </p:nvCxnSpPr>
+        <p:spPr>
+          <a:xfrm>
+            <a:off x="1435396" y="4616775"/>
+            <a:ext cx="1594883" cy="748226"/>
+          </a:xfrm>
+          <a:prstGeom prst="straightConnector1">
+            <a:avLst/>
+          </a:prstGeom>
+          <a:ln>
+            <a:tailEnd type="triangle"/>
+          </a:ln>
+        </p:spPr>
+        <p:style>
+          <a:lnRef idx="2">
+            <a:schemeClr val="dk1"/>
+          </a:lnRef>
+          <a:fillRef idx="0">
+            <a:schemeClr val="dk1"/>
+          </a:fillRef>
+          <a:effectRef idx="1">
+            <a:schemeClr val="dk1"/>
+          </a:effectRef>
+          <a:fontRef idx="minor">
+            <a:schemeClr val="tx1"/>
+          </a:fontRef>
+        </p:style>
+      </p:cxnSp>
+      <p:cxnSp>
+        <p:nvCxnSpPr>
+          <p:cNvPr id="21" name="Straight Arrow Connector 20">
+            <a:extLst>
+              <a:ext uri="{FF2B5EF4-FFF2-40B4-BE49-F238E27FC236}">
+                <a16:creationId xmlns:a16="http://schemas.microsoft.com/office/drawing/2014/main" id="{BA0DC101-3A6B-5B53-6D4D-591EAA6322E0}"/>
+              </a:ext>
+            </a:extLst>
+          </p:cNvPr>
+          <p:cNvCxnSpPr>
+            <a:cxnSpLocks/>
+            <a:stCxn id="13" idx="3"/>
+            <a:endCxn id="17" idx="1"/>
+          </p:cNvCxnSpPr>
+          <p:nvPr/>
+        </p:nvCxnSpPr>
+        <p:spPr>
+          <a:xfrm flipV="1">
+            <a:off x="1435396" y="5365001"/>
+            <a:ext cx="1594883" cy="741506"/>
+          </a:xfrm>
+          <a:prstGeom prst="straightConnector1">
+            <a:avLst/>
+          </a:prstGeom>
+          <a:ln>
+            <a:tailEnd type="triangle"/>
+          </a:ln>
+        </p:spPr>
+        <p:style>
+          <a:lnRef idx="2">
+            <a:schemeClr val="dk1"/>
+          </a:lnRef>
+          <a:fillRef idx="0">
+            <a:schemeClr val="dk1"/>
+          </a:fillRef>
+          <a:effectRef idx="1">
+            <a:schemeClr val="dk1"/>
+          </a:effectRef>
+          <a:fontRef idx="minor">
+            <a:schemeClr val="tx1"/>
+          </a:fontRef>
+        </p:style>
+      </p:cxnSp>
+      <p:graphicFrame>
+        <p:nvGraphicFramePr>
+          <p:cNvPr id="28" name="Table 27">
+            <a:extLst>
+              <a:ext uri="{FF2B5EF4-FFF2-40B4-BE49-F238E27FC236}">
+                <a16:creationId xmlns:a16="http://schemas.microsoft.com/office/drawing/2014/main" id="{C3D8CADC-874C-76D5-DCE7-29C5E1BB5497}"/>
+              </a:ext>
+            </a:extLst>
+          </p:cNvPr>
+          <p:cNvGraphicFramePr>
+            <a:graphicFrameLocks noGrp="1"/>
+          </p:cNvGraphicFramePr>
+          <p:nvPr>
+            <p:extLst>
+              <p:ext uri="{D42A27DB-BD31-4B8C-83A1-F6EECF244321}">
+                <p14:modId xmlns:p14="http://schemas.microsoft.com/office/powerpoint/2010/main" val="2737390586"/>
+              </p:ext>
+            </p:extLst>
+          </p:nvPr>
+        </p:nvGraphicFramePr>
+        <p:xfrm>
+          <a:off x="4774903" y="1587600"/>
+          <a:ext cx="2082800" cy="1483360"/>
+        </p:xfrm>
+        <a:graphic>
+          <a:graphicData uri="http://schemas.openxmlformats.org/drawingml/2006/table">
+            <a:tbl>
+              <a:tblPr firstRow="1" bandRow="1">
+                <a:tableStyleId>{5940675A-B579-460E-94D1-54222C63F5DA}</a:tableStyleId>
+              </a:tblPr>
+              <a:tblGrid>
+                <a:gridCol w="2082800">
+                  <a:extLst>
+                    <a:ext uri="{9D8B030D-6E8A-4147-A177-3AD203B41FA5}">
+                      <a16:colId xmlns:a16="http://schemas.microsoft.com/office/drawing/2014/main" val="249780186"/>
+                    </a:ext>
+                  </a:extLst>
+                </a:gridCol>
+              </a:tblGrid>
+              <a:tr h="370840">
+                <a:tc>
+                  <a:txBody>
+                    <a:bodyPr/>
+                    <a:lstStyle/>
+                    <a:p>
+                      <a:pPr algn="ctr"/>
+                      <a:r>
+                        <a:rPr lang="en-US" dirty="0" err="1"/>
+                        <a:t>totalMinutes</a:t>
+                      </a:r>
+                      <a:r>
+                        <a:rPr lang="en-US" dirty="0"/>
+                        <a:t>: 156</a:t>
+                      </a:r>
+                    </a:p>
+                  </a:txBody>
+                  <a:tcPr/>
+                </a:tc>
+                <a:extLst>
+                  <a:ext uri="{0D108BD9-81ED-4DB2-BD59-A6C34878D82A}">
+                    <a16:rowId xmlns:a16="http://schemas.microsoft.com/office/drawing/2014/main" val="2565510757"/>
+                  </a:ext>
+                </a:extLst>
+              </a:tr>
+              <a:tr h="370840">
+                <a:tc>
+                  <a:txBody>
+                    <a:bodyPr/>
+                    <a:lstStyle/>
+                    <a:p>
+                      <a:pPr algn="ctr"/>
+                      <a:r>
+                        <a:rPr lang="en-US" dirty="0"/>
+                        <a:t>hours: 0</a:t>
+                      </a:r>
+                    </a:p>
+                  </a:txBody>
+                  <a:tcPr/>
+                </a:tc>
+                <a:extLst>
+                  <a:ext uri="{0D108BD9-81ED-4DB2-BD59-A6C34878D82A}">
+                    <a16:rowId xmlns:a16="http://schemas.microsoft.com/office/drawing/2014/main" val="1487820406"/>
+                  </a:ext>
+                </a:extLst>
+              </a:tr>
+              <a:tr h="370840">
+                <a:tc>
+                  <a:txBody>
+                    <a:bodyPr/>
+                    <a:lstStyle/>
+                    <a:p>
+                      <a:pPr algn="ctr"/>
+                      <a:r>
+                        <a:rPr lang="en-US" dirty="0"/>
+                        <a:t>minutes: 0</a:t>
+                      </a:r>
+                    </a:p>
+                  </a:txBody>
+                  <a:tcPr/>
+                </a:tc>
+                <a:extLst>
+                  <a:ext uri="{0D108BD9-81ED-4DB2-BD59-A6C34878D82A}">
+                    <a16:rowId xmlns:a16="http://schemas.microsoft.com/office/drawing/2014/main" val="2198563267"/>
+                  </a:ext>
+                </a:extLst>
+              </a:tr>
+              <a:tr h="370840">
+                <a:tc>
+                  <a:txBody>
+                    <a:bodyPr/>
+                    <a:lstStyle/>
+                    <a:p>
+                      <a:pPr algn="ctr"/>
+                      <a:r>
+                        <a:rPr lang="en-US" dirty="0"/>
+                        <a:t>result: 0x12345a</a:t>
+                      </a:r>
+                    </a:p>
+                  </a:txBody>
+                  <a:tcPr/>
+                </a:tc>
+                <a:extLst>
+                  <a:ext uri="{0D108BD9-81ED-4DB2-BD59-A6C34878D82A}">
+                    <a16:rowId xmlns:a16="http://schemas.microsoft.com/office/drawing/2014/main" val="820625412"/>
+                  </a:ext>
+                </a:extLst>
+              </a:tr>
+            </a:tbl>
+          </a:graphicData>
+        </a:graphic>
+      </p:graphicFrame>
+      <p:graphicFrame>
+        <p:nvGraphicFramePr>
+          <p:cNvPr id="29" name="Table 28">
+            <a:extLst>
+              <a:ext uri="{FF2B5EF4-FFF2-40B4-BE49-F238E27FC236}">
+                <a16:creationId xmlns:a16="http://schemas.microsoft.com/office/drawing/2014/main" id="{72F4D992-E2BF-DC11-4FA2-076CE65F6DCF}"/>
+              </a:ext>
+            </a:extLst>
+          </p:cNvPr>
+          <p:cNvGraphicFramePr>
+            <a:graphicFrameLocks noGrp="1"/>
+          </p:cNvGraphicFramePr>
+          <p:nvPr>
+            <p:extLst>
+              <p:ext uri="{D42A27DB-BD31-4B8C-83A1-F6EECF244321}">
+                <p14:modId xmlns:p14="http://schemas.microsoft.com/office/powerpoint/2010/main" val="977006838"/>
+              </p:ext>
+            </p:extLst>
+          </p:nvPr>
+        </p:nvGraphicFramePr>
+        <p:xfrm>
+          <a:off x="8741144" y="1242882"/>
+          <a:ext cx="2082800" cy="1112520"/>
+        </p:xfrm>
+        <a:graphic>
+          <a:graphicData uri="http://schemas.openxmlformats.org/drawingml/2006/table">
+            <a:tbl>
+              <a:tblPr firstRow="1" bandRow="1">
+                <a:tableStyleId>{5940675A-B579-460E-94D1-54222C63F5DA}</a:tableStyleId>
+              </a:tblPr>
+              <a:tblGrid>
+                <a:gridCol w="2082800">
+                  <a:extLst>
+                    <a:ext uri="{9D8B030D-6E8A-4147-A177-3AD203B41FA5}">
+                      <a16:colId xmlns:a16="http://schemas.microsoft.com/office/drawing/2014/main" val="249780186"/>
+                    </a:ext>
+                  </a:extLst>
+                </a:gridCol>
+              </a:tblGrid>
+              <a:tr h="370840">
+                <a:tc>
+                  <a:txBody>
+                    <a:bodyPr/>
+                    <a:lstStyle/>
+                    <a:p>
+                      <a:pPr algn="ctr"/>
+                      <a:r>
+                        <a:rPr lang="en-US" dirty="0" err="1"/>
+                        <a:t>totalMinutes</a:t>
+                      </a:r>
+                      <a:r>
+                        <a:rPr lang="en-US" dirty="0"/>
+                        <a:t>: 156</a:t>
+                      </a:r>
+                    </a:p>
+                  </a:txBody>
+                  <a:tcPr/>
+                </a:tc>
+                <a:extLst>
+                  <a:ext uri="{0D108BD9-81ED-4DB2-BD59-A6C34878D82A}">
+                    <a16:rowId xmlns:a16="http://schemas.microsoft.com/office/drawing/2014/main" val="2565510757"/>
+                  </a:ext>
+                </a:extLst>
+              </a:tr>
+              <a:tr h="370840">
+                <a:tc>
+                  <a:txBody>
+                    <a:bodyPr/>
+                    <a:lstStyle/>
+                    <a:p>
+                      <a:pPr algn="ctr"/>
+                      <a:r>
+                        <a:rPr lang="en-US" dirty="0"/>
+                        <a:t>hours: 0</a:t>
+                      </a:r>
+                    </a:p>
+                  </a:txBody>
+                  <a:tcPr/>
+                </a:tc>
+                <a:extLst>
+                  <a:ext uri="{0D108BD9-81ED-4DB2-BD59-A6C34878D82A}">
+                    <a16:rowId xmlns:a16="http://schemas.microsoft.com/office/drawing/2014/main" val="1487820406"/>
+                  </a:ext>
+                </a:extLst>
+              </a:tr>
+              <a:tr h="370840">
+                <a:tc>
+                  <a:txBody>
+                    <a:bodyPr/>
+                    <a:lstStyle/>
+                    <a:p>
+                      <a:pPr algn="ctr"/>
+                      <a:r>
+                        <a:rPr lang="en-US" dirty="0"/>
+                        <a:t>minutes: 0</a:t>
+                      </a:r>
+                    </a:p>
+                  </a:txBody>
+                  <a:tcPr/>
+                </a:tc>
+                <a:extLst>
+                  <a:ext uri="{0D108BD9-81ED-4DB2-BD59-A6C34878D82A}">
+                    <a16:rowId xmlns:a16="http://schemas.microsoft.com/office/drawing/2014/main" val="2198563267"/>
+                  </a:ext>
+                </a:extLst>
+              </a:tr>
+            </a:tbl>
+          </a:graphicData>
+        </a:graphic>
+      </p:graphicFrame>
+      <p:graphicFrame>
+        <p:nvGraphicFramePr>
+          <p:cNvPr id="30" name="Table 29">
+            <a:extLst>
+              <a:ext uri="{FF2B5EF4-FFF2-40B4-BE49-F238E27FC236}">
+                <a16:creationId xmlns:a16="http://schemas.microsoft.com/office/drawing/2014/main" id="{4703328F-A99E-289A-9B11-78A677079FAF}"/>
+              </a:ext>
+            </a:extLst>
+          </p:cNvPr>
+          <p:cNvGraphicFramePr>
+            <a:graphicFrameLocks noGrp="1"/>
+          </p:cNvGraphicFramePr>
+          <p:nvPr>
+            <p:extLst>
+              <p:ext uri="{D42A27DB-BD31-4B8C-83A1-F6EECF244321}">
+                <p14:modId xmlns:p14="http://schemas.microsoft.com/office/powerpoint/2010/main" val="1898248427"/>
+              </p:ext>
+            </p:extLst>
+          </p:nvPr>
+        </p:nvGraphicFramePr>
+        <p:xfrm>
+          <a:off x="8741144" y="3156020"/>
+          <a:ext cx="2082800" cy="741680"/>
+        </p:xfrm>
+        <a:graphic>
+          <a:graphicData uri="http://schemas.openxmlformats.org/drawingml/2006/table">
+            <a:tbl>
+              <a:tblPr firstRow="1" bandRow="1">
+                <a:tableStyleId>{5940675A-B579-460E-94D1-54222C63F5DA}</a:tableStyleId>
+              </a:tblPr>
+              <a:tblGrid>
+                <a:gridCol w="2082800">
+                  <a:extLst>
+                    <a:ext uri="{9D8B030D-6E8A-4147-A177-3AD203B41FA5}">
+                      <a16:colId xmlns:a16="http://schemas.microsoft.com/office/drawing/2014/main" val="249780186"/>
+                    </a:ext>
+                  </a:extLst>
+                </a:gridCol>
+              </a:tblGrid>
+              <a:tr h="370840">
+                <a:tc>
+                  <a:txBody>
+                    <a:bodyPr/>
+                    <a:lstStyle/>
+                    <a:p>
+                      <a:pPr algn="ctr"/>
+                      <a:r>
+                        <a:rPr lang="en-US" dirty="0" err="1"/>
+                        <a:t>totalMinutes</a:t>
+                      </a:r>
+                      <a:r>
+                        <a:rPr lang="en-US" dirty="0"/>
+                        <a:t>: 156</a:t>
+                      </a:r>
+                    </a:p>
+                  </a:txBody>
+                  <a:tcPr/>
+                </a:tc>
+                <a:extLst>
+                  <a:ext uri="{0D108BD9-81ED-4DB2-BD59-A6C34878D82A}">
+                    <a16:rowId xmlns:a16="http://schemas.microsoft.com/office/drawing/2014/main" val="2565510757"/>
+                  </a:ext>
+                </a:extLst>
+              </a:tr>
+              <a:tr h="370840">
+                <a:tc>
+                  <a:txBody>
+                    <a:bodyPr/>
+                    <a:lstStyle/>
+                    <a:p>
+                      <a:pPr algn="ctr"/>
+                      <a:r>
+                        <a:rPr lang="en-US" dirty="0"/>
+                        <a:t>result: 0x12345a</a:t>
+                      </a:r>
+                    </a:p>
+                  </a:txBody>
+                  <a:tcPr/>
+                </a:tc>
+                <a:extLst>
+                  <a:ext uri="{0D108BD9-81ED-4DB2-BD59-A6C34878D82A}">
+                    <a16:rowId xmlns:a16="http://schemas.microsoft.com/office/drawing/2014/main" val="1487820406"/>
+                  </a:ext>
+                </a:extLst>
+              </a:tr>
+            </a:tbl>
+          </a:graphicData>
+        </a:graphic>
+      </p:graphicFrame>
+      <p:sp>
+        <p:nvSpPr>
+          <p:cNvPr id="31" name="TextBox 30">
+            <a:extLst>
+              <a:ext uri="{FF2B5EF4-FFF2-40B4-BE49-F238E27FC236}">
+                <a16:creationId xmlns:a16="http://schemas.microsoft.com/office/drawing/2014/main" id="{0AAEF4CD-8C25-4319-3D04-338EA7C5ABAF}"/>
+              </a:ext>
+            </a:extLst>
+          </p:cNvPr>
+          <p:cNvSpPr txBox="1"/>
+          <p:nvPr/>
+        </p:nvSpPr>
+        <p:spPr>
+          <a:xfrm>
+            <a:off x="5174215" y="1058216"/>
+            <a:ext cx="1284176" cy="369332"/>
+          </a:xfrm>
+          <a:prstGeom prst="rect">
+            <a:avLst/>
+          </a:prstGeom>
+          <a:noFill/>
+        </p:spPr>
+        <p:txBody>
+          <a:bodyPr wrap="square" rtlCol="0">
+            <a:spAutoFit/>
+          </a:bodyPr>
+          <a:lstStyle/>
+          <a:p>
+            <a:pPr algn="ctr"/>
+            <a:r>
+              <a:rPr lang="en-US" b="1" dirty="0"/>
+              <a:t>in main()</a:t>
+            </a:r>
+          </a:p>
+        </p:txBody>
+      </p:sp>
+      <p:sp>
+        <p:nvSpPr>
+          <p:cNvPr id="32" name="TextBox 31">
+            <a:extLst>
+              <a:ext uri="{FF2B5EF4-FFF2-40B4-BE49-F238E27FC236}">
+                <a16:creationId xmlns:a16="http://schemas.microsoft.com/office/drawing/2014/main" id="{9F00455D-4FCA-0F32-3EC2-4CE0BE057456}"/>
+              </a:ext>
+            </a:extLst>
+          </p:cNvPr>
+          <p:cNvSpPr txBox="1"/>
+          <p:nvPr/>
+        </p:nvSpPr>
+        <p:spPr>
+          <a:xfrm>
+            <a:off x="8579293" y="765543"/>
+            <a:ext cx="2406502" cy="369332"/>
+          </a:xfrm>
+          <a:prstGeom prst="rect">
+            <a:avLst/>
+          </a:prstGeom>
+          <a:noFill/>
+        </p:spPr>
+        <p:txBody>
+          <a:bodyPr wrap="square" rtlCol="0">
+            <a:spAutoFit/>
+          </a:bodyPr>
+          <a:lstStyle/>
+          <a:p>
+            <a:pPr algn="ctr"/>
+            <a:r>
+              <a:rPr lang="en-US" b="1" dirty="0"/>
+              <a:t>in </a:t>
+            </a:r>
+            <a:r>
+              <a:rPr lang="en-US" b="1" dirty="0" err="1"/>
+              <a:t>convertPrimitive</a:t>
+            </a:r>
+            <a:r>
+              <a:rPr lang="en-US" b="1" dirty="0"/>
+              <a:t>()</a:t>
+            </a:r>
+          </a:p>
+        </p:txBody>
+      </p:sp>
+      <p:sp>
+        <p:nvSpPr>
+          <p:cNvPr id="33" name="TextBox 32">
+            <a:extLst>
+              <a:ext uri="{FF2B5EF4-FFF2-40B4-BE49-F238E27FC236}">
+                <a16:creationId xmlns:a16="http://schemas.microsoft.com/office/drawing/2014/main" id="{FF13288F-1CEB-629D-39EE-A317CDEEEDFA}"/>
+              </a:ext>
+            </a:extLst>
+          </p:cNvPr>
+          <p:cNvSpPr txBox="1"/>
+          <p:nvPr/>
+        </p:nvSpPr>
+        <p:spPr>
+          <a:xfrm>
+            <a:off x="8579293" y="2701628"/>
+            <a:ext cx="2406502" cy="369332"/>
+          </a:xfrm>
+          <a:prstGeom prst="rect">
+            <a:avLst/>
+          </a:prstGeom>
+          <a:noFill/>
+        </p:spPr>
+        <p:txBody>
+          <a:bodyPr wrap="square" rtlCol="0">
+            <a:spAutoFit/>
+          </a:bodyPr>
+          <a:lstStyle/>
+          <a:p>
+            <a:pPr algn="ctr"/>
+            <a:r>
+              <a:rPr lang="en-US" b="1" dirty="0"/>
+              <a:t>in </a:t>
+            </a:r>
+            <a:r>
+              <a:rPr lang="en-US" b="1" dirty="0" err="1"/>
+              <a:t>convertObjective</a:t>
+            </a:r>
+            <a:r>
+              <a:rPr lang="en-US" b="1" dirty="0"/>
+              <a:t>()</a:t>
+            </a:r>
+          </a:p>
+        </p:txBody>
+      </p:sp>
+    </p:spTree>
+    <p:extLst>
+      <p:ext uri="{BB962C8B-B14F-4D97-AF65-F5344CB8AC3E}">
+        <p14:creationId xmlns:p14="http://schemas.microsoft.com/office/powerpoint/2010/main" val="1604995810"/>
+      </p:ext>
+    </p:extLst>
+  </p:cSld>
+  <p:clrMapOvr>
+    <a:masterClrMapping/>
+  </p:clrMapOvr>
+</p:sld>
+</file>
+
+<file path=ppt/slides/slide15.xml><?xml version="1.0" encoding="utf-8"?>
+<p:sld xmlns:a="http://schemas.openxmlformats.org/drawingml/2006/main" xmlns:r="http://schemas.openxmlformats.org/officeDocument/2006/relationships" xmlns:p="http://schemas.openxmlformats.org/presentationml/2006/main">
+  <p:cSld>
+    <p:spTree>
+      <p:nvGrpSpPr>
+        <p:cNvPr id="1" name=""/>
+        <p:cNvGrpSpPr/>
+        <p:nvPr/>
+      </p:nvGrpSpPr>
+      <p:grpSpPr>
+        <a:xfrm>
+          <a:off x="0" y="0"/>
+          <a:ext cx="0" cy="0"/>
+          <a:chOff x="0" y="0"/>
+          <a:chExt cx="0" cy="0"/>
+        </a:xfrm>
+      </p:grpSpPr>
+      <p:graphicFrame>
+        <p:nvGraphicFramePr>
+          <p:cNvPr id="4" name="Table 3">
+            <a:extLst>
+              <a:ext uri="{FF2B5EF4-FFF2-40B4-BE49-F238E27FC236}">
+                <a16:creationId xmlns:a16="http://schemas.microsoft.com/office/drawing/2014/main" id="{AD53EA27-1F7C-5A2E-0DF0-1BA063138369}"/>
+              </a:ext>
+            </a:extLst>
+          </p:cNvPr>
+          <p:cNvGraphicFramePr>
+            <a:graphicFrameLocks noGrp="1"/>
+          </p:cNvGraphicFramePr>
+          <p:nvPr>
+            <p:extLst>
+              <p:ext uri="{D42A27DB-BD31-4B8C-83A1-F6EECF244321}">
+                <p14:modId xmlns:p14="http://schemas.microsoft.com/office/powerpoint/2010/main" val="3471075950"/>
+              </p:ext>
+            </p:extLst>
+          </p:nvPr>
+        </p:nvGraphicFramePr>
+        <p:xfrm>
+          <a:off x="618386" y="939308"/>
+          <a:ext cx="2082800" cy="1483360"/>
+        </p:xfrm>
+        <a:graphic>
+          <a:graphicData uri="http://schemas.openxmlformats.org/drawingml/2006/table">
+            <a:tbl>
+              <a:tblPr firstRow="1" bandRow="1">
+                <a:tableStyleId>{5940675A-B579-460E-94D1-54222C63F5DA}</a:tableStyleId>
+              </a:tblPr>
+              <a:tblGrid>
+                <a:gridCol w="2082800">
+                  <a:extLst>
+                    <a:ext uri="{9D8B030D-6E8A-4147-A177-3AD203B41FA5}">
+                      <a16:colId xmlns:a16="http://schemas.microsoft.com/office/drawing/2014/main" val="249780186"/>
+                    </a:ext>
+                  </a:extLst>
+                </a:gridCol>
+              </a:tblGrid>
+              <a:tr h="370840">
+                <a:tc>
+                  <a:txBody>
+                    <a:bodyPr/>
+                    <a:lstStyle/>
+                    <a:p>
+                      <a:pPr algn="ctr"/>
+                      <a:r>
+                        <a:rPr lang="en-US" dirty="0" err="1"/>
+                        <a:t>totalMinutes</a:t>
+                      </a:r>
+                      <a:r>
+                        <a:rPr lang="en-US" dirty="0"/>
+                        <a:t>: 156</a:t>
+                      </a:r>
+                    </a:p>
+                  </a:txBody>
+                  <a:tcPr/>
+                </a:tc>
+                <a:extLst>
+                  <a:ext uri="{0D108BD9-81ED-4DB2-BD59-A6C34878D82A}">
+                    <a16:rowId xmlns:a16="http://schemas.microsoft.com/office/drawing/2014/main" val="2565510757"/>
+                  </a:ext>
+                </a:extLst>
+              </a:tr>
+              <a:tr h="370840">
+                <a:tc>
+                  <a:txBody>
+                    <a:bodyPr/>
+                    <a:lstStyle/>
+                    <a:p>
+                      <a:pPr algn="ctr"/>
+                      <a:r>
+                        <a:rPr lang="en-US" dirty="0"/>
+                        <a:t>hours: 0</a:t>
+                      </a:r>
+                    </a:p>
+                  </a:txBody>
+                  <a:tcPr/>
+                </a:tc>
+                <a:extLst>
+                  <a:ext uri="{0D108BD9-81ED-4DB2-BD59-A6C34878D82A}">
+                    <a16:rowId xmlns:a16="http://schemas.microsoft.com/office/drawing/2014/main" val="1487820406"/>
+                  </a:ext>
+                </a:extLst>
+              </a:tr>
+              <a:tr h="370840">
+                <a:tc>
+                  <a:txBody>
+                    <a:bodyPr/>
+                    <a:lstStyle/>
+                    <a:p>
+                      <a:pPr algn="ctr"/>
+                      <a:r>
+                        <a:rPr lang="en-US" dirty="0"/>
+                        <a:t>minutes: 0</a:t>
+                      </a:r>
+                    </a:p>
+                  </a:txBody>
+                  <a:tcPr/>
+                </a:tc>
+                <a:extLst>
+                  <a:ext uri="{0D108BD9-81ED-4DB2-BD59-A6C34878D82A}">
+                    <a16:rowId xmlns:a16="http://schemas.microsoft.com/office/drawing/2014/main" val="2198563267"/>
+                  </a:ext>
+                </a:extLst>
+              </a:tr>
+              <a:tr h="370840">
+                <a:tc>
+                  <a:txBody>
+                    <a:bodyPr/>
+                    <a:lstStyle/>
+                    <a:p>
+                      <a:pPr algn="ctr"/>
+                      <a:r>
+                        <a:rPr lang="en-US" dirty="0"/>
+                        <a:t>result: 0x12345a</a:t>
+                      </a:r>
+                    </a:p>
+                  </a:txBody>
+                  <a:tcPr/>
+                </a:tc>
+                <a:extLst>
+                  <a:ext uri="{0D108BD9-81ED-4DB2-BD59-A6C34878D82A}">
+                    <a16:rowId xmlns:a16="http://schemas.microsoft.com/office/drawing/2014/main" val="820625412"/>
+                  </a:ext>
+                </a:extLst>
+              </a:tr>
+            </a:tbl>
+          </a:graphicData>
+        </a:graphic>
+      </p:graphicFrame>
+      <p:graphicFrame>
+        <p:nvGraphicFramePr>
+          <p:cNvPr id="5" name="Table 4">
+            <a:extLst>
+              <a:ext uri="{FF2B5EF4-FFF2-40B4-BE49-F238E27FC236}">
+                <a16:creationId xmlns:a16="http://schemas.microsoft.com/office/drawing/2014/main" id="{BFE476F0-525D-C6F9-82EB-87824E1F0C74}"/>
+              </a:ext>
+            </a:extLst>
+          </p:cNvPr>
+          <p:cNvGraphicFramePr>
+            <a:graphicFrameLocks noGrp="1"/>
+          </p:cNvGraphicFramePr>
+          <p:nvPr>
+            <p:extLst>
+              <p:ext uri="{D42A27DB-BD31-4B8C-83A1-F6EECF244321}">
+                <p14:modId xmlns:p14="http://schemas.microsoft.com/office/powerpoint/2010/main" val="2452166191"/>
+              </p:ext>
+            </p:extLst>
+          </p:nvPr>
+        </p:nvGraphicFramePr>
+        <p:xfrm>
+          <a:off x="5261935" y="939308"/>
+          <a:ext cx="2082800" cy="1112520"/>
+        </p:xfrm>
+        <a:graphic>
+          <a:graphicData uri="http://schemas.openxmlformats.org/drawingml/2006/table">
+            <a:tbl>
+              <a:tblPr firstRow="1" bandRow="1">
+                <a:tableStyleId>{5940675A-B579-460E-94D1-54222C63F5DA}</a:tableStyleId>
+              </a:tblPr>
+              <a:tblGrid>
+                <a:gridCol w="2082800">
+                  <a:extLst>
+                    <a:ext uri="{9D8B030D-6E8A-4147-A177-3AD203B41FA5}">
+                      <a16:colId xmlns:a16="http://schemas.microsoft.com/office/drawing/2014/main" val="249780186"/>
+                    </a:ext>
+                  </a:extLst>
+                </a:gridCol>
+              </a:tblGrid>
+              <a:tr h="370840">
+                <a:tc>
+                  <a:txBody>
+                    <a:bodyPr/>
+                    <a:lstStyle/>
+                    <a:p>
+                      <a:pPr algn="ctr"/>
+                      <a:r>
+                        <a:rPr lang="en-US" dirty="0" err="1"/>
+                        <a:t>totalMinutes</a:t>
+                      </a:r>
+                      <a:r>
+                        <a:rPr lang="en-US" dirty="0"/>
+                        <a:t>: 156</a:t>
+                      </a:r>
+                    </a:p>
+                  </a:txBody>
+                  <a:tcPr/>
+                </a:tc>
+                <a:extLst>
+                  <a:ext uri="{0D108BD9-81ED-4DB2-BD59-A6C34878D82A}">
+                    <a16:rowId xmlns:a16="http://schemas.microsoft.com/office/drawing/2014/main" val="2565510757"/>
+                  </a:ext>
+                </a:extLst>
+              </a:tr>
+              <a:tr h="370840">
+                <a:tc>
+                  <a:txBody>
+                    <a:bodyPr/>
+                    <a:lstStyle/>
+                    <a:p>
+                      <a:pPr algn="ctr"/>
+                      <a:r>
+                        <a:rPr lang="en-US" dirty="0"/>
+                        <a:t>hours: 0</a:t>
+                      </a:r>
+                    </a:p>
+                  </a:txBody>
+                  <a:tcPr/>
+                </a:tc>
+                <a:extLst>
+                  <a:ext uri="{0D108BD9-81ED-4DB2-BD59-A6C34878D82A}">
+                    <a16:rowId xmlns:a16="http://schemas.microsoft.com/office/drawing/2014/main" val="1487820406"/>
+                  </a:ext>
+                </a:extLst>
+              </a:tr>
+              <a:tr h="370840">
+                <a:tc>
+                  <a:txBody>
+                    <a:bodyPr/>
+                    <a:lstStyle/>
+                    <a:p>
+                      <a:pPr algn="ctr"/>
+                      <a:r>
+                        <a:rPr lang="en-US" dirty="0"/>
+                        <a:t>minutes: 0</a:t>
+                      </a:r>
+                    </a:p>
+                  </a:txBody>
+                  <a:tcPr/>
+                </a:tc>
+                <a:extLst>
+                  <a:ext uri="{0D108BD9-81ED-4DB2-BD59-A6C34878D82A}">
+                    <a16:rowId xmlns:a16="http://schemas.microsoft.com/office/drawing/2014/main" val="2198563267"/>
+                  </a:ext>
+                </a:extLst>
+              </a:tr>
+            </a:tbl>
+          </a:graphicData>
+        </a:graphic>
+      </p:graphicFrame>
+      <p:graphicFrame>
+        <p:nvGraphicFramePr>
+          <p:cNvPr id="6" name="Table 5">
+            <a:extLst>
+              <a:ext uri="{FF2B5EF4-FFF2-40B4-BE49-F238E27FC236}">
+                <a16:creationId xmlns:a16="http://schemas.microsoft.com/office/drawing/2014/main" id="{056D64C0-E270-843E-7E1B-B9B799BB8A7D}"/>
+              </a:ext>
+            </a:extLst>
+          </p:cNvPr>
+          <p:cNvGraphicFramePr>
+            <a:graphicFrameLocks noGrp="1"/>
+          </p:cNvGraphicFramePr>
+          <p:nvPr>
+            <p:extLst>
+              <p:ext uri="{D42A27DB-BD31-4B8C-83A1-F6EECF244321}">
+                <p14:modId xmlns:p14="http://schemas.microsoft.com/office/powerpoint/2010/main" val="1414327079"/>
+              </p:ext>
+            </p:extLst>
+          </p:nvPr>
+        </p:nvGraphicFramePr>
+        <p:xfrm>
+          <a:off x="618385" y="3863783"/>
+          <a:ext cx="2082800" cy="741680"/>
+        </p:xfrm>
+        <a:graphic>
+          <a:graphicData uri="http://schemas.openxmlformats.org/drawingml/2006/table">
+            <a:tbl>
+              <a:tblPr firstRow="1" bandRow="1">
+                <a:tableStyleId>{5940675A-B579-460E-94D1-54222C63F5DA}</a:tableStyleId>
+              </a:tblPr>
+              <a:tblGrid>
+                <a:gridCol w="2082800">
+                  <a:extLst>
+                    <a:ext uri="{9D8B030D-6E8A-4147-A177-3AD203B41FA5}">
+                      <a16:colId xmlns:a16="http://schemas.microsoft.com/office/drawing/2014/main" val="249780186"/>
+                    </a:ext>
+                  </a:extLst>
+                </a:gridCol>
+              </a:tblGrid>
+              <a:tr h="370840">
+                <a:tc>
+                  <a:txBody>
+                    <a:bodyPr/>
+                    <a:lstStyle/>
+                    <a:p>
+                      <a:pPr algn="ctr"/>
+                      <a:r>
+                        <a:rPr lang="en-US" dirty="0" err="1"/>
+                        <a:t>totalMinutes</a:t>
+                      </a:r>
+                      <a:r>
+                        <a:rPr lang="en-US" dirty="0"/>
+                        <a:t>: 156</a:t>
+                      </a:r>
+                    </a:p>
+                  </a:txBody>
+                  <a:tcPr/>
+                </a:tc>
+                <a:extLst>
+                  <a:ext uri="{0D108BD9-81ED-4DB2-BD59-A6C34878D82A}">
+                    <a16:rowId xmlns:a16="http://schemas.microsoft.com/office/drawing/2014/main" val="2565510757"/>
+                  </a:ext>
+                </a:extLst>
+              </a:tr>
+              <a:tr h="370840">
+                <a:tc>
+                  <a:txBody>
+                    <a:bodyPr/>
+                    <a:lstStyle/>
+                    <a:p>
+                      <a:pPr algn="ctr"/>
+                      <a:r>
+                        <a:rPr lang="en-US" dirty="0"/>
+                        <a:t>result: 0x12345a</a:t>
+                      </a:r>
+                    </a:p>
+                  </a:txBody>
+                  <a:tcPr/>
+                </a:tc>
+                <a:extLst>
+                  <a:ext uri="{0D108BD9-81ED-4DB2-BD59-A6C34878D82A}">
+                    <a16:rowId xmlns:a16="http://schemas.microsoft.com/office/drawing/2014/main" val="1487820406"/>
+                  </a:ext>
+                </a:extLst>
+              </a:tr>
+            </a:tbl>
+          </a:graphicData>
+        </a:graphic>
+      </p:graphicFrame>
+      <p:sp>
+        <p:nvSpPr>
+          <p:cNvPr id="7" name="TextBox 6">
+            <a:extLst>
+              <a:ext uri="{FF2B5EF4-FFF2-40B4-BE49-F238E27FC236}">
+                <a16:creationId xmlns:a16="http://schemas.microsoft.com/office/drawing/2014/main" id="{4629DA9C-E5C0-A4A9-A598-BD25051ABF94}"/>
+              </a:ext>
+            </a:extLst>
+          </p:cNvPr>
+          <p:cNvSpPr txBox="1"/>
+          <p:nvPr/>
+        </p:nvSpPr>
+        <p:spPr>
+          <a:xfrm>
+            <a:off x="1017698" y="461969"/>
+            <a:ext cx="1284176" cy="369332"/>
+          </a:xfrm>
+          <a:prstGeom prst="rect">
+            <a:avLst/>
+          </a:prstGeom>
+          <a:noFill/>
+        </p:spPr>
+        <p:txBody>
+          <a:bodyPr wrap="square" rtlCol="0">
+            <a:spAutoFit/>
+          </a:bodyPr>
+          <a:lstStyle/>
+          <a:p>
+            <a:pPr algn="ctr"/>
+            <a:r>
+              <a:rPr lang="en-US" b="1" dirty="0"/>
+              <a:t>in main()</a:t>
+            </a:r>
+          </a:p>
+        </p:txBody>
+      </p:sp>
+      <p:sp>
+        <p:nvSpPr>
+          <p:cNvPr id="8" name="TextBox 7">
+            <a:extLst>
+              <a:ext uri="{FF2B5EF4-FFF2-40B4-BE49-F238E27FC236}">
+                <a16:creationId xmlns:a16="http://schemas.microsoft.com/office/drawing/2014/main" id="{F35F7EC6-EACA-75B2-E416-C34096F70C24}"/>
+              </a:ext>
+            </a:extLst>
+          </p:cNvPr>
+          <p:cNvSpPr txBox="1"/>
+          <p:nvPr/>
+        </p:nvSpPr>
+        <p:spPr>
+          <a:xfrm>
+            <a:off x="5100084" y="461969"/>
+            <a:ext cx="2406502" cy="369332"/>
+          </a:xfrm>
+          <a:prstGeom prst="rect">
+            <a:avLst/>
+          </a:prstGeom>
+          <a:noFill/>
+        </p:spPr>
+        <p:txBody>
+          <a:bodyPr wrap="square" rtlCol="0">
+            <a:spAutoFit/>
+          </a:bodyPr>
+          <a:lstStyle/>
+          <a:p>
+            <a:pPr algn="ctr"/>
+            <a:r>
+              <a:rPr lang="en-US" b="1" dirty="0"/>
+              <a:t>in </a:t>
+            </a:r>
+            <a:r>
+              <a:rPr lang="en-US" b="1" dirty="0" err="1"/>
+              <a:t>convertPrimitive</a:t>
+            </a:r>
+            <a:r>
+              <a:rPr lang="en-US" b="1" dirty="0"/>
+              <a:t>()</a:t>
+            </a:r>
+          </a:p>
+        </p:txBody>
+      </p:sp>
+      <p:sp>
+        <p:nvSpPr>
+          <p:cNvPr id="9" name="TextBox 8">
+            <a:extLst>
+              <a:ext uri="{FF2B5EF4-FFF2-40B4-BE49-F238E27FC236}">
+                <a16:creationId xmlns:a16="http://schemas.microsoft.com/office/drawing/2014/main" id="{8F485928-2819-1329-DD41-DC5152D37834}"/>
+              </a:ext>
+            </a:extLst>
+          </p:cNvPr>
+          <p:cNvSpPr txBox="1"/>
+          <p:nvPr/>
+        </p:nvSpPr>
+        <p:spPr>
+          <a:xfrm>
+            <a:off x="456534" y="3471597"/>
+            <a:ext cx="2406502" cy="369332"/>
+          </a:xfrm>
+          <a:prstGeom prst="rect">
+            <a:avLst/>
+          </a:prstGeom>
+          <a:noFill/>
+        </p:spPr>
+        <p:txBody>
+          <a:bodyPr wrap="square" rtlCol="0">
+            <a:spAutoFit/>
+          </a:bodyPr>
+          <a:lstStyle/>
+          <a:p>
+            <a:pPr algn="ctr"/>
+            <a:r>
+              <a:rPr lang="en-US" b="1" dirty="0"/>
+              <a:t>in </a:t>
+            </a:r>
+            <a:r>
+              <a:rPr lang="en-US" b="1" dirty="0" err="1"/>
+              <a:t>convertObjective</a:t>
+            </a:r>
+            <a:r>
+              <a:rPr lang="en-US" b="1" dirty="0"/>
+              <a:t>()</a:t>
+            </a:r>
+          </a:p>
+        </p:txBody>
+      </p:sp>
+      <p:graphicFrame>
+        <p:nvGraphicFramePr>
+          <p:cNvPr id="10" name="Table 9">
+            <a:extLst>
+              <a:ext uri="{FF2B5EF4-FFF2-40B4-BE49-F238E27FC236}">
+                <a16:creationId xmlns:a16="http://schemas.microsoft.com/office/drawing/2014/main" id="{CF883BC1-C6EF-1217-4CBE-64D794551B66}"/>
+              </a:ext>
+            </a:extLst>
+          </p:cNvPr>
+          <p:cNvGraphicFramePr>
+            <a:graphicFrameLocks noGrp="1"/>
+          </p:cNvGraphicFramePr>
+          <p:nvPr>
+            <p:extLst>
+              <p:ext uri="{D42A27DB-BD31-4B8C-83A1-F6EECF244321}">
+                <p14:modId xmlns:p14="http://schemas.microsoft.com/office/powerpoint/2010/main" val="3786324385"/>
+              </p:ext>
+            </p:extLst>
+          </p:nvPr>
+        </p:nvGraphicFramePr>
+        <p:xfrm>
+          <a:off x="5311150" y="3863783"/>
+          <a:ext cx="2082800" cy="741680"/>
+        </p:xfrm>
+        <a:graphic>
+          <a:graphicData uri="http://schemas.openxmlformats.org/drawingml/2006/table">
+            <a:tbl>
+              <a:tblPr firstRow="1" bandRow="1">
+                <a:tableStyleId>{5940675A-B579-460E-94D1-54222C63F5DA}</a:tableStyleId>
+              </a:tblPr>
+              <a:tblGrid>
+                <a:gridCol w="2082800">
+                  <a:extLst>
+                    <a:ext uri="{9D8B030D-6E8A-4147-A177-3AD203B41FA5}">
+                      <a16:colId xmlns:a16="http://schemas.microsoft.com/office/drawing/2014/main" val="249780186"/>
+                    </a:ext>
+                  </a:extLst>
+                </a:gridCol>
+              </a:tblGrid>
+              <a:tr h="370840">
+                <a:tc>
+                  <a:txBody>
+                    <a:bodyPr/>
+                    <a:lstStyle/>
+                    <a:p>
+                      <a:pPr algn="ctr"/>
+                      <a:r>
+                        <a:rPr lang="en-US" dirty="0"/>
+                        <a:t>hours: 2</a:t>
+                      </a:r>
+                    </a:p>
+                  </a:txBody>
+                  <a:tcPr/>
+                </a:tc>
+                <a:extLst>
+                  <a:ext uri="{0D108BD9-81ED-4DB2-BD59-A6C34878D82A}">
+                    <a16:rowId xmlns:a16="http://schemas.microsoft.com/office/drawing/2014/main" val="2565510757"/>
+                  </a:ext>
+                </a:extLst>
+              </a:tr>
+              <a:tr h="370840">
+                <a:tc>
+                  <a:txBody>
+                    <a:bodyPr/>
+                    <a:lstStyle/>
+                    <a:p>
+                      <a:pPr algn="ctr"/>
+                      <a:r>
+                        <a:rPr lang="en-US" dirty="0"/>
+                        <a:t>minutes: 36</a:t>
+                      </a:r>
+                    </a:p>
+                  </a:txBody>
+                  <a:tcPr/>
+                </a:tc>
+                <a:extLst>
+                  <a:ext uri="{0D108BD9-81ED-4DB2-BD59-A6C34878D82A}">
+                    <a16:rowId xmlns:a16="http://schemas.microsoft.com/office/drawing/2014/main" val="1487820406"/>
+                  </a:ext>
+                </a:extLst>
+              </a:tr>
+            </a:tbl>
+          </a:graphicData>
+        </a:graphic>
+      </p:graphicFrame>
+      <p:sp>
+        <p:nvSpPr>
+          <p:cNvPr id="11" name="TextBox 10">
+            <a:extLst>
+              <a:ext uri="{FF2B5EF4-FFF2-40B4-BE49-F238E27FC236}">
+                <a16:creationId xmlns:a16="http://schemas.microsoft.com/office/drawing/2014/main" id="{71E0F932-596D-38B8-329B-6AEE2D69373C}"/>
+              </a:ext>
+            </a:extLst>
+          </p:cNvPr>
+          <p:cNvSpPr txBox="1"/>
+          <p:nvPr/>
+        </p:nvSpPr>
+        <p:spPr>
+          <a:xfrm>
+            <a:off x="5149299" y="3425219"/>
+            <a:ext cx="2406502" cy="369332"/>
+          </a:xfrm>
+          <a:prstGeom prst="rect">
+            <a:avLst/>
+          </a:prstGeom>
+          <a:noFill/>
+        </p:spPr>
+        <p:txBody>
+          <a:bodyPr wrap="square" rtlCol="0">
+            <a:spAutoFit/>
+          </a:bodyPr>
+          <a:lstStyle/>
+          <a:p>
+            <a:pPr algn="ctr"/>
+            <a:r>
+              <a:rPr lang="en-US" b="1" dirty="0" err="1"/>
+              <a:t>TimeResult</a:t>
+            </a:r>
+            <a:r>
+              <a:rPr lang="en-US" b="1" dirty="0"/>
+              <a:t> Object</a:t>
+            </a:r>
+          </a:p>
+        </p:txBody>
+      </p:sp>
+      <p:cxnSp>
+        <p:nvCxnSpPr>
+          <p:cNvPr id="13" name="Straight Arrow Connector 12">
+            <a:extLst>
+              <a:ext uri="{FF2B5EF4-FFF2-40B4-BE49-F238E27FC236}">
+                <a16:creationId xmlns:a16="http://schemas.microsoft.com/office/drawing/2014/main" id="{0AB48BA5-E2A6-AE95-11E9-7331F38C7254}"/>
+              </a:ext>
+            </a:extLst>
+          </p:cNvPr>
+          <p:cNvCxnSpPr/>
+          <p:nvPr/>
+        </p:nvCxnSpPr>
+        <p:spPr>
+          <a:xfrm>
+            <a:off x="2764355" y="1988236"/>
+            <a:ext cx="2465869" cy="0"/>
+          </a:xfrm>
+          <a:prstGeom prst="straightConnector1">
+            <a:avLst/>
+          </a:prstGeom>
+          <a:ln>
+            <a:tailEnd type="triangle"/>
+          </a:ln>
+        </p:spPr>
+        <p:style>
+          <a:lnRef idx="2">
+            <a:schemeClr val="dk1"/>
+          </a:lnRef>
+          <a:fillRef idx="0">
+            <a:schemeClr val="dk1"/>
+          </a:fillRef>
+          <a:effectRef idx="1">
+            <a:schemeClr val="dk1"/>
+          </a:effectRef>
+          <a:fontRef idx="minor">
+            <a:schemeClr val="tx1"/>
+          </a:fontRef>
+        </p:style>
+      </p:cxnSp>
+      <p:sp>
+        <p:nvSpPr>
+          <p:cNvPr id="14" name="TextBox 13">
+            <a:extLst>
+              <a:ext uri="{FF2B5EF4-FFF2-40B4-BE49-F238E27FC236}">
+                <a16:creationId xmlns:a16="http://schemas.microsoft.com/office/drawing/2014/main" id="{FC18F8ED-D4F2-D898-D3B4-FDAFFDAC04A3}"/>
+              </a:ext>
+            </a:extLst>
+          </p:cNvPr>
+          <p:cNvSpPr txBox="1"/>
+          <p:nvPr/>
+        </p:nvSpPr>
+        <p:spPr>
+          <a:xfrm>
+            <a:off x="3132210" y="1589792"/>
+            <a:ext cx="1698701" cy="307777"/>
+          </a:xfrm>
+          <a:prstGeom prst="rect">
+            <a:avLst/>
+          </a:prstGeom>
+          <a:noFill/>
+        </p:spPr>
+        <p:txBody>
+          <a:bodyPr wrap="square" rtlCol="0">
+            <a:spAutoFit/>
+          </a:bodyPr>
+          <a:lstStyle/>
+          <a:p>
+            <a:pPr algn="ctr"/>
+            <a:r>
+              <a:rPr lang="en-US" sz="1400" dirty="0"/>
+              <a:t>copies values</a:t>
+            </a:r>
+          </a:p>
+        </p:txBody>
+      </p:sp>
+      <p:sp>
+        <p:nvSpPr>
+          <p:cNvPr id="16" name="TextBox 15">
+            <a:extLst>
+              <a:ext uri="{FF2B5EF4-FFF2-40B4-BE49-F238E27FC236}">
+                <a16:creationId xmlns:a16="http://schemas.microsoft.com/office/drawing/2014/main" id="{B003FEF5-D1E4-2911-CD4C-7ECE99A75FB7}"/>
+              </a:ext>
+            </a:extLst>
+          </p:cNvPr>
+          <p:cNvSpPr txBox="1"/>
+          <p:nvPr/>
+        </p:nvSpPr>
+        <p:spPr>
+          <a:xfrm>
+            <a:off x="1376507" y="2924015"/>
+            <a:ext cx="2242955" cy="307777"/>
+          </a:xfrm>
+          <a:prstGeom prst="rect">
+            <a:avLst/>
+          </a:prstGeom>
+          <a:noFill/>
+        </p:spPr>
+        <p:txBody>
+          <a:bodyPr wrap="square" rtlCol="0">
+            <a:spAutoFit/>
+          </a:bodyPr>
+          <a:lstStyle/>
+          <a:p>
+            <a:pPr algn="ctr"/>
+            <a:r>
+              <a:rPr lang="en-US" sz="1400" dirty="0"/>
+              <a:t>copies the reference</a:t>
+            </a:r>
+          </a:p>
+        </p:txBody>
+      </p:sp>
+      <p:cxnSp>
+        <p:nvCxnSpPr>
+          <p:cNvPr id="45" name="Straight Arrow Connector 44">
+            <a:extLst>
+              <a:ext uri="{FF2B5EF4-FFF2-40B4-BE49-F238E27FC236}">
+                <a16:creationId xmlns:a16="http://schemas.microsoft.com/office/drawing/2014/main" id="{633632F8-A14A-5D2B-18C4-3F8494081763}"/>
+              </a:ext>
+            </a:extLst>
+          </p:cNvPr>
+          <p:cNvCxnSpPr>
+            <a:cxnSpLocks/>
+          </p:cNvCxnSpPr>
+          <p:nvPr/>
+        </p:nvCxnSpPr>
+        <p:spPr>
+          <a:xfrm>
+            <a:off x="2701184" y="4440518"/>
+            <a:ext cx="2529040" cy="0"/>
+          </a:xfrm>
+          <a:prstGeom prst="straightConnector1">
+            <a:avLst/>
+          </a:prstGeom>
+          <a:ln>
+            <a:solidFill>
+              <a:schemeClr val="tx1"/>
+            </a:solidFill>
+            <a:prstDash val="sysDot"/>
+            <a:tailEnd type="triangle"/>
+          </a:ln>
+        </p:spPr>
+        <p:style>
+          <a:lnRef idx="2">
+            <a:schemeClr val="dk1"/>
+          </a:lnRef>
+          <a:fillRef idx="0">
+            <a:schemeClr val="dk1"/>
+          </a:fillRef>
+          <a:effectRef idx="1">
+            <a:schemeClr val="dk1"/>
+          </a:effectRef>
+          <a:fontRef idx="minor">
+            <a:schemeClr val="tx1"/>
+          </a:fontRef>
+        </p:style>
+      </p:cxnSp>
+      <p:cxnSp>
+        <p:nvCxnSpPr>
+          <p:cNvPr id="51" name="Straight Arrow Connector 50">
+            <a:extLst>
+              <a:ext uri="{FF2B5EF4-FFF2-40B4-BE49-F238E27FC236}">
+                <a16:creationId xmlns:a16="http://schemas.microsoft.com/office/drawing/2014/main" id="{F5BC1E96-DE84-B8D4-4E38-C92D2ED9D72B}"/>
+              </a:ext>
+            </a:extLst>
+          </p:cNvPr>
+          <p:cNvCxnSpPr>
+            <a:cxnSpLocks/>
+            <a:endCxn id="11" idx="1"/>
+          </p:cNvCxnSpPr>
+          <p:nvPr/>
+        </p:nvCxnSpPr>
+        <p:spPr>
+          <a:xfrm>
+            <a:off x="2701184" y="2317836"/>
+            <a:ext cx="2448115" cy="1292049"/>
+          </a:xfrm>
+          <a:prstGeom prst="straightConnector1">
+            <a:avLst/>
+          </a:prstGeom>
+          <a:ln>
+            <a:prstDash val="sysDot"/>
+            <a:tailEnd type="triangle"/>
+          </a:ln>
+        </p:spPr>
+        <p:style>
+          <a:lnRef idx="2">
+            <a:schemeClr val="dk1"/>
+          </a:lnRef>
+          <a:fillRef idx="0">
+            <a:schemeClr val="dk1"/>
+          </a:fillRef>
+          <a:effectRef idx="1">
+            <a:schemeClr val="dk1"/>
+          </a:effectRef>
+          <a:fontRef idx="minor">
+            <a:schemeClr val="tx1"/>
+          </a:fontRef>
+        </p:style>
+      </p:cxnSp>
+      <p:sp>
+        <p:nvSpPr>
+          <p:cNvPr id="57" name="TextBox 56">
+            <a:extLst>
+              <a:ext uri="{FF2B5EF4-FFF2-40B4-BE49-F238E27FC236}">
+                <a16:creationId xmlns:a16="http://schemas.microsoft.com/office/drawing/2014/main" id="{DFFE4942-1DD2-5AAF-9631-3236F058C39A}"/>
+              </a:ext>
+            </a:extLst>
+          </p:cNvPr>
+          <p:cNvSpPr txBox="1"/>
+          <p:nvPr/>
+        </p:nvSpPr>
+        <p:spPr>
+          <a:xfrm>
+            <a:off x="4852862" y="2043764"/>
+            <a:ext cx="2999376" cy="523220"/>
+          </a:xfrm>
+          <a:prstGeom prst="rect">
+            <a:avLst/>
+          </a:prstGeom>
+          <a:noFill/>
+        </p:spPr>
+        <p:txBody>
+          <a:bodyPr wrap="square" rtlCol="0">
+            <a:spAutoFit/>
+          </a:bodyPr>
+          <a:lstStyle/>
+          <a:p>
+            <a:pPr algn="ctr"/>
+            <a:r>
+              <a:rPr lang="en-US" sz="1400" dirty="0"/>
+              <a:t>copy of primitive values changes stay local</a:t>
+            </a:r>
+          </a:p>
+        </p:txBody>
+      </p:sp>
+      <p:cxnSp>
+        <p:nvCxnSpPr>
+          <p:cNvPr id="67" name="Straight Arrow Connector 66">
+            <a:extLst>
+              <a:ext uri="{FF2B5EF4-FFF2-40B4-BE49-F238E27FC236}">
+                <a16:creationId xmlns:a16="http://schemas.microsoft.com/office/drawing/2014/main" id="{22CD4F16-2378-978B-B375-491A3D0730E9}"/>
+              </a:ext>
+            </a:extLst>
+          </p:cNvPr>
+          <p:cNvCxnSpPr>
+            <a:cxnSpLocks/>
+            <a:stCxn id="4" idx="2"/>
+            <a:endCxn id="9" idx="0"/>
+          </p:cNvCxnSpPr>
+          <p:nvPr/>
+        </p:nvCxnSpPr>
+        <p:spPr>
+          <a:xfrm flipH="1">
+            <a:off x="1659785" y="2422668"/>
+            <a:ext cx="1" cy="1048929"/>
+          </a:xfrm>
+          <a:prstGeom prst="straightConnector1">
+            <a:avLst/>
+          </a:prstGeom>
+          <a:ln>
+            <a:tailEnd type="triangle"/>
+          </a:ln>
+        </p:spPr>
+        <p:style>
+          <a:lnRef idx="2">
+            <a:schemeClr val="dk1"/>
+          </a:lnRef>
+          <a:fillRef idx="0">
+            <a:schemeClr val="dk1"/>
+          </a:fillRef>
+          <a:effectRef idx="1">
+            <a:schemeClr val="dk1"/>
+          </a:effectRef>
+          <a:fontRef idx="minor">
+            <a:schemeClr val="tx1"/>
+          </a:fontRef>
+        </p:style>
+      </p:cxnSp>
+      <p:sp>
+        <p:nvSpPr>
+          <p:cNvPr id="77" name="TextBox 76">
+            <a:extLst>
+              <a:ext uri="{FF2B5EF4-FFF2-40B4-BE49-F238E27FC236}">
+                <a16:creationId xmlns:a16="http://schemas.microsoft.com/office/drawing/2014/main" id="{3262BBB6-B62D-3D92-744C-4597358E0A81}"/>
+              </a:ext>
+            </a:extLst>
+          </p:cNvPr>
+          <p:cNvSpPr txBox="1"/>
+          <p:nvPr/>
+        </p:nvSpPr>
+        <p:spPr>
+          <a:xfrm>
+            <a:off x="295803" y="4628317"/>
+            <a:ext cx="2999376" cy="523220"/>
+          </a:xfrm>
+          <a:prstGeom prst="rect">
+            <a:avLst/>
+          </a:prstGeom>
+          <a:noFill/>
+        </p:spPr>
+        <p:txBody>
+          <a:bodyPr wrap="square" rtlCol="0">
+            <a:spAutoFit/>
+          </a:bodyPr>
+          <a:lstStyle/>
+          <a:p>
+            <a:pPr algn="ctr"/>
+            <a:r>
+              <a:rPr lang="en-US" sz="1400" dirty="0"/>
+              <a:t>The reference is copied, but both references point to the same object</a:t>
+            </a:r>
+          </a:p>
+        </p:txBody>
+      </p:sp>
+    </p:spTree>
+    <p:extLst>
+      <p:ext uri="{BB962C8B-B14F-4D97-AF65-F5344CB8AC3E}">
+        <p14:creationId xmlns:p14="http://schemas.microsoft.com/office/powerpoint/2010/main" val="4288923033"/>
+      </p:ext>
+    </p:extLst>
+  </p:cSld>
+  <p:clrMapOvr>
+    <a:masterClrMapping/>
+  </p:clrMapOvr>
+</p:sld>
+</file>
+
+<file path=ppt/slides/slide16.xml><?xml version="1.0" encoding="utf-8"?>
+<p:sld xmlns:a="http://schemas.openxmlformats.org/drawingml/2006/main" xmlns:r="http://schemas.openxmlformats.org/officeDocument/2006/relationships" xmlns:p="http://schemas.openxmlformats.org/presentationml/2006/main">
+  <p:cSld>
+    <p:spTree>
+      <p:nvGrpSpPr>
+        <p:cNvPr id="1" name=""/>
+        <p:cNvGrpSpPr/>
+        <p:nvPr/>
+      </p:nvGrpSpPr>
+      <p:grpSpPr>
+        <a:xfrm>
+          <a:off x="0" y="0"/>
+          <a:ext cx="0" cy="0"/>
+          <a:chOff x="0" y="0"/>
+          <a:chExt cx="0" cy="0"/>
+        </a:xfrm>
+      </p:grpSpPr>
+      <p:graphicFrame>
+        <p:nvGraphicFramePr>
+          <p:cNvPr id="4" name="Table 3">
+            <a:extLst>
+              <a:ext uri="{FF2B5EF4-FFF2-40B4-BE49-F238E27FC236}">
+                <a16:creationId xmlns:a16="http://schemas.microsoft.com/office/drawing/2014/main" id="{17CC1AE1-E137-0287-FC92-4E456F7B0BCC}"/>
+              </a:ext>
+            </a:extLst>
+          </p:cNvPr>
+          <p:cNvGraphicFramePr>
+            <a:graphicFrameLocks noGrp="1"/>
+          </p:cNvGraphicFramePr>
+          <p:nvPr>
+            <p:extLst>
+              <p:ext uri="{D42A27DB-BD31-4B8C-83A1-F6EECF244321}">
+                <p14:modId xmlns:p14="http://schemas.microsoft.com/office/powerpoint/2010/main" val="731634096"/>
+              </p:ext>
+            </p:extLst>
+          </p:nvPr>
+        </p:nvGraphicFramePr>
+        <p:xfrm>
+          <a:off x="5261935" y="939308"/>
+          <a:ext cx="2082800" cy="1010920"/>
+        </p:xfrm>
+        <a:graphic>
+          <a:graphicData uri="http://schemas.openxmlformats.org/drawingml/2006/table">
+            <a:tbl>
+              <a:tblPr firstRow="1" bandRow="1">
+                <a:tableStyleId>{5940675A-B579-460E-94D1-54222C63F5DA}</a:tableStyleId>
+              </a:tblPr>
+              <a:tblGrid>
+                <a:gridCol w="2082800">
+                  <a:extLst>
+                    <a:ext uri="{9D8B030D-6E8A-4147-A177-3AD203B41FA5}">
+                      <a16:colId xmlns:a16="http://schemas.microsoft.com/office/drawing/2014/main" val="249780186"/>
+                    </a:ext>
+                  </a:extLst>
+                </a:gridCol>
+              </a:tblGrid>
+              <a:tr h="370840">
+                <a:tc>
+                  <a:txBody>
+                    <a:bodyPr/>
+                    <a:lstStyle/>
+                    <a:p>
+                      <a:pPr algn="ctr"/>
+                      <a:r>
+                        <a:rPr lang="en-US" dirty="0"/>
+                        <a:t>&lt;&lt;interface&gt;&gt;</a:t>
+                      </a:r>
+                    </a:p>
+                    <a:p>
+                      <a:pPr algn="ctr"/>
+                      <a:r>
+                        <a:rPr lang="en-US" dirty="0"/>
+                        <a:t>DrawableInterface</a:t>
+                      </a:r>
+                    </a:p>
+                  </a:txBody>
+                  <a:tcPr/>
+                </a:tc>
+                <a:extLst>
+                  <a:ext uri="{0D108BD9-81ED-4DB2-BD59-A6C34878D82A}">
+                    <a16:rowId xmlns:a16="http://schemas.microsoft.com/office/drawing/2014/main" val="2565510757"/>
+                  </a:ext>
+                </a:extLst>
+              </a:tr>
+              <a:tr h="370840">
+                <a:tc>
+                  <a:txBody>
+                    <a:bodyPr/>
+                    <a:lstStyle/>
+                    <a:p>
+                      <a:pPr algn="ctr"/>
+                      <a:r>
+                        <a:rPr lang="en-US" dirty="0"/>
+                        <a:t>+drawMe(): void</a:t>
+                      </a:r>
+                    </a:p>
+                  </a:txBody>
+                  <a:tcPr/>
+                </a:tc>
+                <a:extLst>
+                  <a:ext uri="{0D108BD9-81ED-4DB2-BD59-A6C34878D82A}">
+                    <a16:rowId xmlns:a16="http://schemas.microsoft.com/office/drawing/2014/main" val="1487820406"/>
+                  </a:ext>
+                </a:extLst>
+              </a:tr>
+            </a:tbl>
+          </a:graphicData>
+        </a:graphic>
+      </p:graphicFrame>
+      <p:graphicFrame>
+        <p:nvGraphicFramePr>
+          <p:cNvPr id="5" name="Table 4">
+            <a:extLst>
+              <a:ext uri="{FF2B5EF4-FFF2-40B4-BE49-F238E27FC236}">
+                <a16:creationId xmlns:a16="http://schemas.microsoft.com/office/drawing/2014/main" id="{9571DC8D-387E-5160-63B1-7AADE4E726FF}"/>
+              </a:ext>
+            </a:extLst>
+          </p:cNvPr>
+          <p:cNvGraphicFramePr>
+            <a:graphicFrameLocks noGrp="1"/>
+          </p:cNvGraphicFramePr>
+          <p:nvPr>
+            <p:extLst>
+              <p:ext uri="{D42A27DB-BD31-4B8C-83A1-F6EECF244321}">
+                <p14:modId xmlns:p14="http://schemas.microsoft.com/office/powerpoint/2010/main" val="1704681770"/>
+              </p:ext>
+            </p:extLst>
+          </p:nvPr>
+        </p:nvGraphicFramePr>
+        <p:xfrm>
+          <a:off x="1118781" y="2923540"/>
+          <a:ext cx="2082800" cy="1010920"/>
+        </p:xfrm>
+        <a:graphic>
+          <a:graphicData uri="http://schemas.openxmlformats.org/drawingml/2006/table">
+            <a:tbl>
+              <a:tblPr firstRow="1" bandRow="1">
+                <a:tableStyleId>{5940675A-B579-460E-94D1-54222C63F5DA}</a:tableStyleId>
+              </a:tblPr>
+              <a:tblGrid>
+                <a:gridCol w="2082800">
+                  <a:extLst>
+                    <a:ext uri="{9D8B030D-6E8A-4147-A177-3AD203B41FA5}">
+                      <a16:colId xmlns:a16="http://schemas.microsoft.com/office/drawing/2014/main" val="249780186"/>
+                    </a:ext>
+                  </a:extLst>
+                </a:gridCol>
+              </a:tblGrid>
+              <a:tr h="370840">
+                <a:tc>
+                  <a:txBody>
+                    <a:bodyPr/>
+                    <a:lstStyle/>
+                    <a:p>
+                      <a:pPr algn="ctr"/>
+                      <a:r>
+                        <a:rPr lang="en-US" i="1" dirty="0">
+                          <a:highlight>
+                            <a:srgbClr val="FFFF00"/>
+                          </a:highlight>
+                        </a:rPr>
+                        <a:t>Shape</a:t>
+                      </a:r>
+                    </a:p>
+                  </a:txBody>
+                  <a:tcPr/>
+                </a:tc>
+                <a:extLst>
+                  <a:ext uri="{0D108BD9-81ED-4DB2-BD59-A6C34878D82A}">
+                    <a16:rowId xmlns:a16="http://schemas.microsoft.com/office/drawing/2014/main" val="2565510757"/>
+                  </a:ext>
+                </a:extLst>
+              </a:tr>
+              <a:tr h="370840">
+                <a:tc>
+                  <a:txBody>
+                    <a:bodyPr/>
+                    <a:lstStyle/>
+                    <a:p>
+                      <a:pPr algn="ctr"/>
+                      <a:r>
+                        <a:rPr lang="en-US" dirty="0"/>
+                        <a:t>+</a:t>
+                      </a:r>
+                      <a:r>
+                        <a:rPr lang="en-US" dirty="0" err="1"/>
+                        <a:t>getName</a:t>
+                      </a:r>
+                      <a:r>
+                        <a:rPr lang="en-US" dirty="0"/>
+                        <a:t>(): String</a:t>
+                      </a:r>
+                    </a:p>
+                    <a:p>
+                      <a:pPr algn="ctr"/>
+                      <a:r>
+                        <a:rPr lang="en-US" i="1" dirty="0">
+                          <a:highlight>
+                            <a:srgbClr val="FFFF00"/>
+                          </a:highlight>
+                        </a:rPr>
+                        <a:t>+</a:t>
+                      </a:r>
+                      <a:r>
+                        <a:rPr lang="en-US" i="1" dirty="0" err="1">
+                          <a:highlight>
+                            <a:srgbClr val="FFFF00"/>
+                          </a:highlight>
+                        </a:rPr>
+                        <a:t>getArea</a:t>
+                      </a:r>
+                      <a:r>
+                        <a:rPr lang="en-US" i="1" dirty="0">
+                          <a:highlight>
+                            <a:srgbClr val="FFFF00"/>
+                          </a:highlight>
+                        </a:rPr>
+                        <a:t>(): double</a:t>
+                      </a:r>
+                    </a:p>
+                  </a:txBody>
+                  <a:tcPr/>
+                </a:tc>
+                <a:extLst>
+                  <a:ext uri="{0D108BD9-81ED-4DB2-BD59-A6C34878D82A}">
+                    <a16:rowId xmlns:a16="http://schemas.microsoft.com/office/drawing/2014/main" val="1487820406"/>
+                  </a:ext>
+                </a:extLst>
+              </a:tr>
+            </a:tbl>
+          </a:graphicData>
+        </a:graphic>
+      </p:graphicFrame>
+      <p:graphicFrame>
+        <p:nvGraphicFramePr>
+          <p:cNvPr id="6" name="Table 5">
+            <a:extLst>
+              <a:ext uri="{FF2B5EF4-FFF2-40B4-BE49-F238E27FC236}">
+                <a16:creationId xmlns:a16="http://schemas.microsoft.com/office/drawing/2014/main" id="{EC2AFD4D-5778-D32F-28C9-A4DBC3AF0C81}"/>
+              </a:ext>
+            </a:extLst>
+          </p:cNvPr>
+          <p:cNvGraphicFramePr>
+            <a:graphicFrameLocks noGrp="1"/>
+          </p:cNvGraphicFramePr>
+          <p:nvPr>
+            <p:extLst>
+              <p:ext uri="{D42A27DB-BD31-4B8C-83A1-F6EECF244321}">
+                <p14:modId xmlns:p14="http://schemas.microsoft.com/office/powerpoint/2010/main" val="588749323"/>
+              </p:ext>
+            </p:extLst>
+          </p:nvPr>
+        </p:nvGraphicFramePr>
+        <p:xfrm>
+          <a:off x="4131339" y="2923540"/>
+          <a:ext cx="3683591" cy="1010920"/>
+        </p:xfrm>
+        <a:graphic>
+          <a:graphicData uri="http://schemas.openxmlformats.org/drawingml/2006/table">
+            <a:tbl>
+              <a:tblPr firstRow="1" bandRow="1">
+                <a:tableStyleId>{5940675A-B579-460E-94D1-54222C63F5DA}</a:tableStyleId>
+              </a:tblPr>
+              <a:tblGrid>
+                <a:gridCol w="3683591">
+                  <a:extLst>
+                    <a:ext uri="{9D8B030D-6E8A-4147-A177-3AD203B41FA5}">
+                      <a16:colId xmlns:a16="http://schemas.microsoft.com/office/drawing/2014/main" val="249780186"/>
+                    </a:ext>
+                  </a:extLst>
+                </a:gridCol>
+              </a:tblGrid>
+              <a:tr h="370840">
+                <a:tc>
+                  <a:txBody>
+                    <a:bodyPr/>
+                    <a:lstStyle/>
+                    <a:p>
+                      <a:pPr algn="ctr"/>
+                      <a:r>
+                        <a:rPr lang="en-US" i="0" dirty="0"/>
+                        <a:t>Shape </a:t>
+                      </a:r>
+                      <a:r>
+                        <a:rPr lang="en-US" i="0" dirty="0">
+                          <a:highlight>
+                            <a:srgbClr val="C0C0C0"/>
+                          </a:highlight>
+                        </a:rPr>
+                        <a:t>{abstract}</a:t>
+                      </a:r>
+                    </a:p>
+                  </a:txBody>
+                  <a:tcPr/>
+                </a:tc>
+                <a:extLst>
+                  <a:ext uri="{0D108BD9-81ED-4DB2-BD59-A6C34878D82A}">
+                    <a16:rowId xmlns:a16="http://schemas.microsoft.com/office/drawing/2014/main" val="2565510757"/>
+                  </a:ext>
+                </a:extLst>
+              </a:tr>
+              <a:tr h="370840">
+                <a:tc>
+                  <a:txBody>
+                    <a:bodyPr/>
+                    <a:lstStyle/>
+                    <a:p>
+                      <a:pPr algn="ctr"/>
+                      <a:r>
+                        <a:rPr lang="en-US" i="0" dirty="0"/>
+                        <a:t>+</a:t>
+                      </a:r>
+                      <a:r>
+                        <a:rPr lang="en-US" i="0" dirty="0" err="1"/>
+                        <a:t>getName</a:t>
+                      </a:r>
+                      <a:r>
+                        <a:rPr lang="en-US" i="0" dirty="0"/>
+                        <a:t>(): String</a:t>
+                      </a:r>
+                    </a:p>
+                    <a:p>
+                      <a:pPr algn="ctr"/>
+                      <a:r>
+                        <a:rPr lang="en-US" i="0" dirty="0"/>
+                        <a:t>+</a:t>
+                      </a:r>
+                      <a:r>
+                        <a:rPr lang="en-US" i="0" dirty="0" err="1"/>
+                        <a:t>getArea</a:t>
+                      </a:r>
+                      <a:r>
+                        <a:rPr lang="en-US" i="0" dirty="0"/>
+                        <a:t>(): double </a:t>
+                      </a:r>
+                      <a:r>
+                        <a:rPr lang="en-US" i="0" dirty="0">
+                          <a:highlight>
+                            <a:srgbClr val="C0C0C0"/>
+                          </a:highlight>
+                        </a:rPr>
+                        <a:t>{abstract}</a:t>
+                      </a:r>
+                    </a:p>
+                  </a:txBody>
+                  <a:tcPr/>
+                </a:tc>
+                <a:extLst>
+                  <a:ext uri="{0D108BD9-81ED-4DB2-BD59-A6C34878D82A}">
+                    <a16:rowId xmlns:a16="http://schemas.microsoft.com/office/drawing/2014/main" val="1487820406"/>
+                  </a:ext>
+                </a:extLst>
+              </a:tr>
+            </a:tbl>
+          </a:graphicData>
+        </a:graphic>
+      </p:graphicFrame>
+    </p:spTree>
+    <p:extLst>
+      <p:ext uri="{BB962C8B-B14F-4D97-AF65-F5344CB8AC3E}">
+        <p14:creationId xmlns:p14="http://schemas.microsoft.com/office/powerpoint/2010/main" val="1794617447"/>
+      </p:ext>
+    </p:extLst>
+  </p:cSld>
+  <p:clrMapOvr>
+    <a:masterClrMapping/>
+  </p:clrMapOvr>
+</p:sld>
+</file>
+
+<file path=ppt/slides/slide17.xml><?xml version="1.0" encoding="utf-8"?>
+<p:sld xmlns:a="http://schemas.openxmlformats.org/drawingml/2006/main" xmlns:r="http://schemas.openxmlformats.org/officeDocument/2006/relationships" xmlns:p="http://schemas.openxmlformats.org/presentationml/2006/main">
+  <p:cSld>
+    <p:spTree>
+      <p:nvGrpSpPr>
+        <p:cNvPr id="1" name=""/>
+        <p:cNvGrpSpPr/>
+        <p:nvPr/>
+      </p:nvGrpSpPr>
+      <p:grpSpPr>
+        <a:xfrm>
+          <a:off x="0" y="0"/>
+          <a:ext cx="0" cy="0"/>
+          <a:chOff x="0" y="0"/>
+          <a:chExt cx="0" cy="0"/>
+        </a:xfrm>
+      </p:grpSpPr>
+      <p:graphicFrame>
+        <p:nvGraphicFramePr>
+          <p:cNvPr id="4" name="Table 3">
+            <a:extLst>
+              <a:ext uri="{FF2B5EF4-FFF2-40B4-BE49-F238E27FC236}">
+                <a16:creationId xmlns:a16="http://schemas.microsoft.com/office/drawing/2014/main" id="{F7C3E4EF-0F9D-00AE-5046-D72302D54C14}"/>
+              </a:ext>
+            </a:extLst>
+          </p:cNvPr>
+          <p:cNvGraphicFramePr>
+            <a:graphicFrameLocks noGrp="1"/>
+          </p:cNvGraphicFramePr>
+          <p:nvPr>
+            <p:extLst>
+              <p:ext uri="{D42A27DB-BD31-4B8C-83A1-F6EECF244321}">
+                <p14:modId xmlns:p14="http://schemas.microsoft.com/office/powerpoint/2010/main" val="402402869"/>
+              </p:ext>
+            </p:extLst>
+          </p:nvPr>
+        </p:nvGraphicFramePr>
+        <p:xfrm>
+          <a:off x="2032000" y="719664"/>
+          <a:ext cx="3698949" cy="5022675"/>
+        </p:xfrm>
+        <a:graphic>
+          <a:graphicData uri="http://schemas.openxmlformats.org/drawingml/2006/table">
+            <a:tbl>
+              <a:tblPr firstRow="1" bandRow="1">
+                <a:tableStyleId>{5940675A-B579-460E-94D1-54222C63F5DA}</a:tableStyleId>
+              </a:tblPr>
+              <a:tblGrid>
+                <a:gridCol w="3698949">
+                  <a:extLst>
+                    <a:ext uri="{9D8B030D-6E8A-4147-A177-3AD203B41FA5}">
+                      <a16:colId xmlns:a16="http://schemas.microsoft.com/office/drawing/2014/main" val="3210903352"/>
+                    </a:ext>
+                  </a:extLst>
+                </a:gridCol>
+              </a:tblGrid>
+              <a:tr h="1247505">
+                <a:tc>
+                  <a:txBody>
+                    <a:bodyPr/>
+                    <a:lstStyle/>
+                    <a:p>
+                      <a:pPr algn="ctr"/>
+                      <a:r>
+                        <a:rPr lang="en-US" sz="2400" b="1" dirty="0"/>
+                        <a:t>countDown(1)</a:t>
+                      </a:r>
+                    </a:p>
+                    <a:p>
+                      <a:pPr algn="ctr"/>
+                      <a:r>
+                        <a:rPr lang="en-US" dirty="0"/>
+                        <a:t>int n = 1</a:t>
+                      </a:r>
+                    </a:p>
+                    <a:p>
+                      <a:pPr algn="ctr"/>
+                      <a:r>
+                        <a:rPr lang="en-US" dirty="0"/>
+                        <a:t>waiting for deeper call to return</a:t>
+                      </a:r>
+                    </a:p>
+                  </a:txBody>
+                  <a:tcPr/>
+                </a:tc>
+                <a:extLst>
+                  <a:ext uri="{0D108BD9-81ED-4DB2-BD59-A6C34878D82A}">
+                    <a16:rowId xmlns:a16="http://schemas.microsoft.com/office/drawing/2014/main" val="1628083421"/>
+                  </a:ext>
+                </a:extLst>
+              </a:tr>
+              <a:tr h="1247505">
+                <a:tc>
+                  <a:txBody>
+                    <a:bodyPr/>
+                    <a:lstStyle/>
+                    <a:p>
+                      <a:pPr algn="ctr"/>
+                      <a:r>
+                        <a:rPr lang="en-US" sz="2400" b="1" dirty="0"/>
+                        <a:t>countDown(2)</a:t>
+                      </a:r>
+                    </a:p>
+                    <a:p>
+                      <a:pPr algn="ctr"/>
+                      <a:r>
+                        <a:rPr lang="en-US" dirty="0"/>
+                        <a:t>int n = 2</a:t>
+                      </a:r>
+                    </a:p>
+                    <a:p>
+                      <a:pPr algn="ctr"/>
+                      <a:r>
+                        <a:rPr lang="en-US" dirty="0"/>
+                        <a:t>waiting for deeper call to return</a:t>
+                      </a:r>
+                    </a:p>
+                  </a:txBody>
+                  <a:tcPr/>
+                </a:tc>
+                <a:extLst>
+                  <a:ext uri="{0D108BD9-81ED-4DB2-BD59-A6C34878D82A}">
+                    <a16:rowId xmlns:a16="http://schemas.microsoft.com/office/drawing/2014/main" val="2669103063"/>
+                  </a:ext>
+                </a:extLst>
+              </a:tr>
+              <a:tr h="1247505">
+                <a:tc>
+                  <a:txBody>
+                    <a:bodyPr/>
+                    <a:lstStyle/>
+                    <a:p>
+                      <a:pPr algn="ctr"/>
+                      <a:r>
+                        <a:rPr lang="en-US" sz="2400" b="1" dirty="0"/>
+                        <a:t>countDown(3)</a:t>
+                      </a:r>
+                    </a:p>
+                    <a:p>
+                      <a:pPr algn="ctr"/>
+                      <a:r>
+                        <a:rPr lang="en-US" dirty="0"/>
+                        <a:t>int n = 3</a:t>
+                      </a:r>
+                    </a:p>
+                    <a:p>
+                      <a:pPr algn="ctr"/>
+                      <a:r>
+                        <a:rPr lang="en-US" dirty="0"/>
+                        <a:t>waiting for deeper call to return</a:t>
+                      </a:r>
+                    </a:p>
+                  </a:txBody>
+                  <a:tcPr/>
+                </a:tc>
+                <a:extLst>
+                  <a:ext uri="{0D108BD9-81ED-4DB2-BD59-A6C34878D82A}">
+                    <a16:rowId xmlns:a16="http://schemas.microsoft.com/office/drawing/2014/main" val="1274038093"/>
+                  </a:ext>
+                </a:extLst>
+              </a:tr>
+              <a:tr h="1247505">
+                <a:tc>
+                  <a:txBody>
+                    <a:bodyPr/>
+                    <a:lstStyle/>
+                    <a:p>
+                      <a:pPr algn="ctr"/>
+                      <a:r>
+                        <a:rPr lang="en-US" sz="2400" b="1" dirty="0"/>
+                        <a:t>main()</a:t>
+                      </a:r>
+                    </a:p>
+                    <a:p>
+                      <a:pPr algn="ctr"/>
+                      <a:r>
+                        <a:rPr lang="en-US" dirty="0"/>
+                        <a:t>(program entry point)</a:t>
+                      </a:r>
+                    </a:p>
+                    <a:p>
+                      <a:pPr algn="ctr"/>
+                      <a:r>
+                        <a:rPr lang="en-US" dirty="0"/>
+                        <a:t>will receive result when recursion completes</a:t>
+                      </a:r>
+                    </a:p>
+                  </a:txBody>
+                  <a:tcPr/>
+                </a:tc>
+                <a:extLst>
+                  <a:ext uri="{0D108BD9-81ED-4DB2-BD59-A6C34878D82A}">
+                    <a16:rowId xmlns:a16="http://schemas.microsoft.com/office/drawing/2014/main" val="246241983"/>
+                  </a:ext>
+                </a:extLst>
+              </a:tr>
+            </a:tbl>
+          </a:graphicData>
+        </a:graphic>
+      </p:graphicFrame>
+    </p:spTree>
+    <p:extLst>
+      <p:ext uri="{BB962C8B-B14F-4D97-AF65-F5344CB8AC3E}">
+        <p14:creationId xmlns:p14="http://schemas.microsoft.com/office/powerpoint/2010/main" val="734759130"/>
+      </p:ext>
+    </p:extLst>
+  </p:cSld>
+  <p:clrMapOvr>
+    <a:masterClrMapping/>
+  </p:clrMapOvr>
+</p:sld>
+</file>
+
+<file path=ppt/slides/slide18.xml><?xml version="1.0" encoding="utf-8"?>
+<p:sld xmlns:a="http://schemas.openxmlformats.org/drawingml/2006/main" xmlns:r="http://schemas.openxmlformats.org/officeDocument/2006/relationships" xmlns:p="http://schemas.openxmlformats.org/presentationml/2006/main">
+  <p:cSld>
+    <p:spTree>
+      <p:nvGrpSpPr>
+        <p:cNvPr id="1" name=""/>
+        <p:cNvGrpSpPr/>
+        <p:nvPr/>
+      </p:nvGrpSpPr>
+      <p:grpSpPr>
+        <a:xfrm>
+          <a:off x="0" y="0"/>
+          <a:ext cx="0" cy="0"/>
+          <a:chOff x="0" y="0"/>
+          <a:chExt cx="0" cy="0"/>
+        </a:xfrm>
+      </p:grpSpPr>
+      <p:sp>
+        <p:nvSpPr>
+          <p:cNvPr id="4" name="Rectangle 3">
+            <a:extLst>
+              <a:ext uri="{FF2B5EF4-FFF2-40B4-BE49-F238E27FC236}">
+                <a16:creationId xmlns:a16="http://schemas.microsoft.com/office/drawing/2014/main" id="{E03EFCAB-59E8-547C-8287-9EF8C77F8DDC}"/>
+              </a:ext>
+            </a:extLst>
+          </p:cNvPr>
+          <p:cNvSpPr/>
+          <p:nvPr/>
+        </p:nvSpPr>
+        <p:spPr>
+          <a:xfrm>
+            <a:off x="1552354" y="2047406"/>
+            <a:ext cx="1424763" cy="637953"/>
+          </a:xfrm>
+          <a:prstGeom prst="rect">
+            <a:avLst/>
+          </a:prstGeom>
+          <a:noFill/>
+        </p:spPr>
+        <p:style>
+          <a:lnRef idx="2">
+            <a:schemeClr val="accent1">
+              <a:shade val="15000"/>
+            </a:schemeClr>
+          </a:lnRef>
+          <a:fillRef idx="1">
+            <a:schemeClr val="accent1"/>
+          </a:fillRef>
+          <a:effectRef idx="0">
+            <a:schemeClr val="accent1"/>
+          </a:effectRef>
+          <a:fontRef idx="minor">
+            <a:schemeClr val="lt1"/>
+          </a:fontRef>
+        </p:style>
+        <p:txBody>
+          <a:bodyPr rtlCol="0" anchor="ctr"/>
+          <a:lstStyle/>
+          <a:p>
+            <a:pPr algn="ctr"/>
+            <a:r>
+              <a:rPr lang="en-US" sz="2000" b="1" dirty="0">
+                <a:solidFill>
+                  <a:schemeClr val="tx2">
+                    <a:lumMod val="75000"/>
+                    <a:lumOff val="25000"/>
+                  </a:schemeClr>
+                </a:solidFill>
+              </a:rPr>
+              <a:t>0x7000</a:t>
+            </a:r>
+          </a:p>
+        </p:txBody>
+      </p:sp>
+      <p:sp>
+        <p:nvSpPr>
+          <p:cNvPr id="6" name="Rectangle 5">
+            <a:extLst>
+              <a:ext uri="{FF2B5EF4-FFF2-40B4-BE49-F238E27FC236}">
+                <a16:creationId xmlns:a16="http://schemas.microsoft.com/office/drawing/2014/main" id="{1ECB8AFC-5583-2339-51BA-5E2240E86F21}"/>
+              </a:ext>
+            </a:extLst>
+          </p:cNvPr>
+          <p:cNvSpPr/>
+          <p:nvPr/>
+        </p:nvSpPr>
+        <p:spPr>
+          <a:xfrm>
+            <a:off x="1552353" y="3512289"/>
+            <a:ext cx="1424763" cy="637953"/>
+          </a:xfrm>
+          <a:prstGeom prst="rect">
+            <a:avLst/>
+          </a:prstGeom>
+          <a:noFill/>
+        </p:spPr>
+        <p:style>
+          <a:lnRef idx="2">
+            <a:schemeClr val="accent1">
+              <a:shade val="15000"/>
+            </a:schemeClr>
+          </a:lnRef>
+          <a:fillRef idx="1">
+            <a:schemeClr val="accent1"/>
+          </a:fillRef>
+          <a:effectRef idx="0">
+            <a:schemeClr val="accent1"/>
+          </a:effectRef>
+          <a:fontRef idx="minor">
+            <a:schemeClr val="lt1"/>
+          </a:fontRef>
+        </p:style>
+        <p:txBody>
+          <a:bodyPr rtlCol="0" anchor="ctr"/>
+          <a:lstStyle/>
+          <a:p>
+            <a:pPr algn="ctr"/>
+            <a:r>
+              <a:rPr lang="en-US" sz="2000" b="1" dirty="0">
+                <a:solidFill>
+                  <a:schemeClr val="tx2">
+                    <a:lumMod val="75000"/>
+                    <a:lumOff val="25000"/>
+                  </a:schemeClr>
+                </a:solidFill>
+              </a:rPr>
+              <a:t>0x7000</a:t>
+            </a:r>
+          </a:p>
+        </p:txBody>
+      </p:sp>
+      <p:sp>
+        <p:nvSpPr>
+          <p:cNvPr id="7" name="TextBox 6">
+            <a:extLst>
+              <a:ext uri="{FF2B5EF4-FFF2-40B4-BE49-F238E27FC236}">
+                <a16:creationId xmlns:a16="http://schemas.microsoft.com/office/drawing/2014/main" id="{61EC4D3C-AFCF-1166-9CAD-825C17A25328}"/>
+              </a:ext>
+            </a:extLst>
+          </p:cNvPr>
+          <p:cNvSpPr txBox="1"/>
+          <p:nvPr/>
+        </p:nvSpPr>
+        <p:spPr>
+          <a:xfrm>
+            <a:off x="1701208" y="1600839"/>
+            <a:ext cx="1127051" cy="400110"/>
+          </a:xfrm>
+          <a:prstGeom prst="rect">
+            <a:avLst/>
+          </a:prstGeom>
+          <a:noFill/>
+        </p:spPr>
+        <p:txBody>
+          <a:bodyPr wrap="square" rtlCol="0">
+            <a:spAutoFit/>
+          </a:bodyPr>
+          <a:lstStyle/>
+          <a:p>
+            <a:pPr algn="ctr"/>
+            <a:r>
+              <a:rPr lang="en-US" sz="2000" dirty="0"/>
+              <a:t>obj a</a:t>
+            </a:r>
+          </a:p>
+        </p:txBody>
+      </p:sp>
+      <p:sp>
+        <p:nvSpPr>
+          <p:cNvPr id="8" name="TextBox 7">
+            <a:extLst>
+              <a:ext uri="{FF2B5EF4-FFF2-40B4-BE49-F238E27FC236}">
+                <a16:creationId xmlns:a16="http://schemas.microsoft.com/office/drawing/2014/main" id="{7C713027-9AF0-FC08-DAE2-F30EE5E05369}"/>
+              </a:ext>
+            </a:extLst>
+          </p:cNvPr>
+          <p:cNvSpPr txBox="1"/>
+          <p:nvPr/>
+        </p:nvSpPr>
+        <p:spPr>
+          <a:xfrm>
+            <a:off x="1701207" y="3065722"/>
+            <a:ext cx="1127051" cy="400110"/>
+          </a:xfrm>
+          <a:prstGeom prst="rect">
+            <a:avLst/>
+          </a:prstGeom>
+          <a:noFill/>
+        </p:spPr>
+        <p:txBody>
+          <a:bodyPr wrap="square" rtlCol="0">
+            <a:spAutoFit/>
+          </a:bodyPr>
+          <a:lstStyle/>
+          <a:p>
+            <a:pPr algn="ctr"/>
+            <a:r>
+              <a:rPr lang="en-US" sz="2000" dirty="0"/>
+              <a:t>obj b</a:t>
+            </a:r>
+          </a:p>
+        </p:txBody>
+      </p:sp>
+      <p:sp>
+        <p:nvSpPr>
+          <p:cNvPr id="9" name="TextBox 8">
+            <a:extLst>
+              <a:ext uri="{FF2B5EF4-FFF2-40B4-BE49-F238E27FC236}">
+                <a16:creationId xmlns:a16="http://schemas.microsoft.com/office/drawing/2014/main" id="{B0A63270-0D12-77A3-3FA2-A1E9AFF0AC90}"/>
+              </a:ext>
+            </a:extLst>
+          </p:cNvPr>
+          <p:cNvSpPr txBox="1"/>
+          <p:nvPr/>
+        </p:nvSpPr>
+        <p:spPr>
+          <a:xfrm>
+            <a:off x="1701207" y="904294"/>
+            <a:ext cx="1127051" cy="492443"/>
+          </a:xfrm>
+          <a:prstGeom prst="rect">
+            <a:avLst/>
+          </a:prstGeom>
+          <a:noFill/>
+        </p:spPr>
+        <p:txBody>
+          <a:bodyPr wrap="square" rtlCol="0">
+            <a:spAutoFit/>
+          </a:bodyPr>
+          <a:lstStyle/>
+          <a:p>
+            <a:pPr algn="ctr"/>
+            <a:r>
+              <a:rPr lang="en-US" sz="2600" b="1" dirty="0"/>
+              <a:t>Stack</a:t>
+            </a:r>
+          </a:p>
+        </p:txBody>
+      </p:sp>
+      <p:sp>
+        <p:nvSpPr>
+          <p:cNvPr id="10" name="TextBox 9">
+            <a:extLst>
+              <a:ext uri="{FF2B5EF4-FFF2-40B4-BE49-F238E27FC236}">
+                <a16:creationId xmlns:a16="http://schemas.microsoft.com/office/drawing/2014/main" id="{8DA854E9-FF28-FF88-22F8-50A5E7EC8198}"/>
+              </a:ext>
+            </a:extLst>
+          </p:cNvPr>
+          <p:cNvSpPr txBox="1"/>
+          <p:nvPr/>
+        </p:nvSpPr>
+        <p:spPr>
+          <a:xfrm>
+            <a:off x="5372984" y="908223"/>
+            <a:ext cx="1127051" cy="492443"/>
+          </a:xfrm>
+          <a:prstGeom prst="rect">
+            <a:avLst/>
+          </a:prstGeom>
+          <a:noFill/>
+        </p:spPr>
+        <p:txBody>
+          <a:bodyPr wrap="square" rtlCol="0">
+            <a:spAutoFit/>
+          </a:bodyPr>
+          <a:lstStyle/>
+          <a:p>
+            <a:pPr algn="ctr"/>
+            <a:r>
+              <a:rPr lang="en-US" sz="2600" b="1" dirty="0"/>
+              <a:t>Heap</a:t>
+            </a:r>
+          </a:p>
+        </p:txBody>
+      </p:sp>
+      <p:graphicFrame>
+        <p:nvGraphicFramePr>
+          <p:cNvPr id="11" name="Table 10">
+            <a:extLst>
+              <a:ext uri="{FF2B5EF4-FFF2-40B4-BE49-F238E27FC236}">
+                <a16:creationId xmlns:a16="http://schemas.microsoft.com/office/drawing/2014/main" id="{69EF52E1-8AB1-FE5F-2B69-E04072827E52}"/>
+              </a:ext>
+            </a:extLst>
+          </p:cNvPr>
+          <p:cNvGraphicFramePr>
+            <a:graphicFrameLocks noGrp="1"/>
+          </p:cNvGraphicFramePr>
+          <p:nvPr>
+            <p:extLst>
+              <p:ext uri="{D42A27DB-BD31-4B8C-83A1-F6EECF244321}">
+                <p14:modId xmlns:p14="http://schemas.microsoft.com/office/powerpoint/2010/main" val="2655900968"/>
+              </p:ext>
+            </p:extLst>
+          </p:nvPr>
+        </p:nvGraphicFramePr>
+        <p:xfrm>
+          <a:off x="4316818" y="2847946"/>
+          <a:ext cx="3179136" cy="457200"/>
+        </p:xfrm>
+        <a:graphic>
+          <a:graphicData uri="http://schemas.openxmlformats.org/drawingml/2006/table">
+            <a:tbl>
+              <a:tblPr firstRow="1" bandRow="1">
+                <a:tableStyleId>{5940675A-B579-460E-94D1-54222C63F5DA}</a:tableStyleId>
+              </a:tblPr>
+              <a:tblGrid>
+                <a:gridCol w="1059712">
+                  <a:extLst>
+                    <a:ext uri="{9D8B030D-6E8A-4147-A177-3AD203B41FA5}">
+                      <a16:colId xmlns:a16="http://schemas.microsoft.com/office/drawing/2014/main" val="2803643667"/>
+                    </a:ext>
+                  </a:extLst>
+                </a:gridCol>
+                <a:gridCol w="1059712">
+                  <a:extLst>
+                    <a:ext uri="{9D8B030D-6E8A-4147-A177-3AD203B41FA5}">
+                      <a16:colId xmlns:a16="http://schemas.microsoft.com/office/drawing/2014/main" val="2661749885"/>
+                    </a:ext>
+                  </a:extLst>
+                </a:gridCol>
+                <a:gridCol w="1059712">
+                  <a:extLst>
+                    <a:ext uri="{9D8B030D-6E8A-4147-A177-3AD203B41FA5}">
+                      <a16:colId xmlns:a16="http://schemas.microsoft.com/office/drawing/2014/main" val="3600845548"/>
+                    </a:ext>
+                  </a:extLst>
+                </a:gridCol>
+              </a:tblGrid>
+              <a:tr h="437898">
+                <a:tc>
+                  <a:txBody>
+                    <a:bodyPr/>
+                    <a:lstStyle/>
+                    <a:p>
+                      <a:pPr algn="ctr"/>
+                      <a:r>
+                        <a:rPr lang="en-US" sz="2400" dirty="0"/>
+                        <a:t>1</a:t>
+                      </a:r>
+                    </a:p>
+                  </a:txBody>
+                  <a:tcPr/>
+                </a:tc>
+                <a:tc>
+                  <a:txBody>
+                    <a:bodyPr/>
+                    <a:lstStyle/>
+                    <a:p>
+                      <a:pPr algn="ctr"/>
+                      <a:r>
+                        <a:rPr lang="en-US" sz="2400" dirty="0"/>
+                        <a:t>2</a:t>
+                      </a:r>
+                    </a:p>
+                  </a:txBody>
+                  <a:tcPr/>
+                </a:tc>
+                <a:tc>
+                  <a:txBody>
+                    <a:bodyPr/>
+                    <a:lstStyle/>
+                    <a:p>
+                      <a:pPr algn="ctr"/>
+                      <a:r>
+                        <a:rPr lang="en-US" sz="2400" dirty="0"/>
+                        <a:t>3</a:t>
+                      </a:r>
+                    </a:p>
+                  </a:txBody>
+                  <a:tcPr/>
+                </a:tc>
+                <a:extLst>
+                  <a:ext uri="{0D108BD9-81ED-4DB2-BD59-A6C34878D82A}">
+                    <a16:rowId xmlns:a16="http://schemas.microsoft.com/office/drawing/2014/main" val="2377271649"/>
+                  </a:ext>
+                </a:extLst>
+              </a:tr>
+            </a:tbl>
+          </a:graphicData>
+        </a:graphic>
+      </p:graphicFrame>
+      <p:sp>
+        <p:nvSpPr>
+          <p:cNvPr id="12" name="TextBox 11">
+            <a:extLst>
+              <a:ext uri="{FF2B5EF4-FFF2-40B4-BE49-F238E27FC236}">
+                <a16:creationId xmlns:a16="http://schemas.microsoft.com/office/drawing/2014/main" id="{470BB105-CD1B-605E-7A93-2E7C0C517573}"/>
+              </a:ext>
+            </a:extLst>
+          </p:cNvPr>
+          <p:cNvSpPr txBox="1"/>
+          <p:nvPr/>
+        </p:nvSpPr>
+        <p:spPr>
+          <a:xfrm>
+            <a:off x="4536556" y="2332075"/>
+            <a:ext cx="2739659" cy="400110"/>
+          </a:xfrm>
+          <a:prstGeom prst="rect">
+            <a:avLst/>
+          </a:prstGeom>
+          <a:noFill/>
+        </p:spPr>
+        <p:txBody>
+          <a:bodyPr wrap="square" rtlCol="0">
+            <a:spAutoFit/>
+          </a:bodyPr>
+          <a:lstStyle/>
+          <a:p>
+            <a:pPr algn="ctr"/>
+            <a:r>
+              <a:rPr lang="en-US" sz="2000" dirty="0"/>
+              <a:t>Heap array at </a:t>
+            </a:r>
+            <a:r>
+              <a:rPr lang="en-US" sz="2000" b="1" dirty="0">
+                <a:solidFill>
+                  <a:schemeClr val="tx2">
+                    <a:lumMod val="75000"/>
+                    <a:lumOff val="25000"/>
+                  </a:schemeClr>
+                </a:solidFill>
+              </a:rPr>
+              <a:t>0x7000</a:t>
+            </a:r>
+          </a:p>
+        </p:txBody>
+      </p:sp>
+      <p:cxnSp>
+        <p:nvCxnSpPr>
+          <p:cNvPr id="14" name="Straight Arrow Connector 13">
+            <a:extLst>
+              <a:ext uri="{FF2B5EF4-FFF2-40B4-BE49-F238E27FC236}">
+                <a16:creationId xmlns:a16="http://schemas.microsoft.com/office/drawing/2014/main" id="{AE57C55B-A48F-9AE4-90F9-60BF20F86AB8}"/>
+              </a:ext>
+            </a:extLst>
+          </p:cNvPr>
+          <p:cNvCxnSpPr>
+            <a:cxnSpLocks/>
+            <a:stCxn id="4" idx="3"/>
+            <a:endCxn id="11" idx="1"/>
+          </p:cNvCxnSpPr>
+          <p:nvPr/>
+        </p:nvCxnSpPr>
+        <p:spPr>
+          <a:xfrm>
+            <a:off x="2977117" y="2366382"/>
+            <a:ext cx="1339701" cy="758952"/>
+          </a:xfrm>
+          <a:prstGeom prst="straightConnector1">
+            <a:avLst/>
+          </a:prstGeom>
+          <a:ln>
+            <a:tailEnd type="triangle"/>
+          </a:ln>
+        </p:spPr>
+        <p:style>
+          <a:lnRef idx="2">
+            <a:schemeClr val="dk1"/>
+          </a:lnRef>
+          <a:fillRef idx="0">
+            <a:schemeClr val="dk1"/>
+          </a:fillRef>
+          <a:effectRef idx="1">
+            <a:schemeClr val="dk1"/>
+          </a:effectRef>
+          <a:fontRef idx="minor">
+            <a:schemeClr val="tx1"/>
+          </a:fontRef>
+        </p:style>
+      </p:cxnSp>
+      <p:cxnSp>
+        <p:nvCxnSpPr>
+          <p:cNvPr id="16" name="Straight Arrow Connector 15">
+            <a:extLst>
+              <a:ext uri="{FF2B5EF4-FFF2-40B4-BE49-F238E27FC236}">
+                <a16:creationId xmlns:a16="http://schemas.microsoft.com/office/drawing/2014/main" id="{F551C8D6-70D7-182C-BDBF-83369F5F4469}"/>
+              </a:ext>
+            </a:extLst>
+          </p:cNvPr>
+          <p:cNvCxnSpPr>
+            <a:stCxn id="6" idx="3"/>
+            <a:endCxn id="11" idx="1"/>
+          </p:cNvCxnSpPr>
+          <p:nvPr/>
+        </p:nvCxnSpPr>
+        <p:spPr>
+          <a:xfrm flipV="1">
+            <a:off x="2977116" y="3076546"/>
+            <a:ext cx="1339702" cy="754720"/>
+          </a:xfrm>
+          <a:prstGeom prst="straightConnector1">
+            <a:avLst/>
+          </a:prstGeom>
+          <a:ln>
+            <a:tailEnd type="triangle"/>
+          </a:ln>
+        </p:spPr>
+        <p:style>
+          <a:lnRef idx="2">
+            <a:schemeClr val="dk1"/>
+          </a:lnRef>
+          <a:fillRef idx="0">
+            <a:schemeClr val="dk1"/>
+          </a:fillRef>
+          <a:effectRef idx="1">
+            <a:schemeClr val="dk1"/>
+          </a:effectRef>
+          <a:fontRef idx="minor">
+            <a:schemeClr val="tx1"/>
+          </a:fontRef>
+        </p:style>
+      </p:cxnSp>
+    </p:spTree>
+    <p:extLst>
+      <p:ext uri="{BB962C8B-B14F-4D97-AF65-F5344CB8AC3E}">
+        <p14:creationId xmlns:p14="http://schemas.microsoft.com/office/powerpoint/2010/main" val="761039049"/>
+      </p:ext>
+    </p:extLst>
+  </p:cSld>
+  <p:clrMapOvr>
+    <a:masterClrMapping/>
+  </p:clrMapOvr>
+</p:sld>
+</file>
+
+<file path=ppt/slides/slide19.xml><?xml version="1.0" encoding="utf-8"?>
+<p:sld xmlns:a="http://schemas.openxmlformats.org/drawingml/2006/main" xmlns:r="http://schemas.openxmlformats.org/officeDocument/2006/relationships" xmlns:p="http://schemas.openxmlformats.org/presentationml/2006/main">
+  <p:cSld>
+    <p:spTree>
+      <p:nvGrpSpPr>
+        <p:cNvPr id="1" name=""/>
+        <p:cNvGrpSpPr/>
+        <p:nvPr/>
+      </p:nvGrpSpPr>
+      <p:grpSpPr>
+        <a:xfrm>
+          <a:off x="0" y="0"/>
+          <a:ext cx="0" cy="0"/>
+          <a:chOff x="0" y="0"/>
+          <a:chExt cx="0" cy="0"/>
+        </a:xfrm>
+      </p:grpSpPr>
+      <p:sp>
+        <p:nvSpPr>
+          <p:cNvPr id="4" name="Rectangle 3">
+            <a:extLst>
+              <a:ext uri="{FF2B5EF4-FFF2-40B4-BE49-F238E27FC236}">
+                <a16:creationId xmlns:a16="http://schemas.microsoft.com/office/drawing/2014/main" id="{3E5E922D-B96B-DE25-EB91-2AADD7D11C5F}"/>
+              </a:ext>
+            </a:extLst>
+          </p:cNvPr>
+          <p:cNvSpPr/>
+          <p:nvPr/>
+        </p:nvSpPr>
+        <p:spPr>
+          <a:xfrm>
+            <a:off x="1392868" y="1964115"/>
+            <a:ext cx="1424763" cy="543414"/>
+          </a:xfrm>
+          <a:prstGeom prst="rect">
+            <a:avLst/>
+          </a:prstGeom>
+          <a:noFill/>
+        </p:spPr>
+        <p:style>
+          <a:lnRef idx="2">
+            <a:schemeClr val="accent1">
+              <a:shade val="15000"/>
+            </a:schemeClr>
+          </a:lnRef>
+          <a:fillRef idx="1">
+            <a:schemeClr val="accent1"/>
+          </a:fillRef>
+          <a:effectRef idx="0">
+            <a:schemeClr val="accent1"/>
+          </a:effectRef>
+          <a:fontRef idx="minor">
+            <a:schemeClr val="lt1"/>
+          </a:fontRef>
+        </p:style>
+        <p:txBody>
+          <a:bodyPr rtlCol="0" anchor="ctr"/>
+          <a:lstStyle/>
+          <a:p>
+            <a:pPr algn="ctr"/>
+            <a:r>
+              <a:rPr lang="en-US" sz="2000" dirty="0">
+                <a:solidFill>
+                  <a:schemeClr val="tx1"/>
+                </a:solidFill>
+              </a:rPr>
+              <a:t>0x6000</a:t>
+            </a:r>
+          </a:p>
+        </p:txBody>
+      </p:sp>
+      <p:sp>
+        <p:nvSpPr>
+          <p:cNvPr id="6" name="TextBox 5">
+            <a:extLst>
+              <a:ext uri="{FF2B5EF4-FFF2-40B4-BE49-F238E27FC236}">
+                <a16:creationId xmlns:a16="http://schemas.microsoft.com/office/drawing/2014/main" id="{F688A72D-2354-625C-7B06-7DB4A8BCB6F2}"/>
+              </a:ext>
+            </a:extLst>
+          </p:cNvPr>
+          <p:cNvSpPr txBox="1"/>
+          <p:nvPr/>
+        </p:nvSpPr>
+        <p:spPr>
+          <a:xfrm>
+            <a:off x="1541722" y="1517547"/>
+            <a:ext cx="1127051" cy="400110"/>
+          </a:xfrm>
+          <a:prstGeom prst="rect">
+            <a:avLst/>
+          </a:prstGeom>
+          <a:noFill/>
+        </p:spPr>
+        <p:txBody>
+          <a:bodyPr wrap="square" rtlCol="0">
+            <a:spAutoFit/>
+          </a:bodyPr>
+          <a:lstStyle/>
+          <a:p>
+            <a:pPr algn="ctr"/>
+            <a:r>
+              <a:rPr lang="en-US" sz="2000" dirty="0"/>
+              <a:t>table</a:t>
+            </a:r>
+          </a:p>
+        </p:txBody>
+      </p:sp>
+      <p:graphicFrame>
+        <p:nvGraphicFramePr>
+          <p:cNvPr id="8" name="Table 7">
+            <a:extLst>
+              <a:ext uri="{FF2B5EF4-FFF2-40B4-BE49-F238E27FC236}">
+                <a16:creationId xmlns:a16="http://schemas.microsoft.com/office/drawing/2014/main" id="{BA028842-1F2A-3C44-E209-48E7A9773010}"/>
+              </a:ext>
+            </a:extLst>
+          </p:cNvPr>
+          <p:cNvGraphicFramePr>
+            <a:graphicFrameLocks noGrp="1"/>
+          </p:cNvGraphicFramePr>
+          <p:nvPr>
+            <p:extLst>
+              <p:ext uri="{D42A27DB-BD31-4B8C-83A1-F6EECF244321}">
+                <p14:modId xmlns:p14="http://schemas.microsoft.com/office/powerpoint/2010/main" val="3567583470"/>
+              </p:ext>
+            </p:extLst>
+          </p:nvPr>
+        </p:nvGraphicFramePr>
+        <p:xfrm>
+          <a:off x="4316818" y="2056092"/>
+          <a:ext cx="2640164" cy="400110"/>
+        </p:xfrm>
+        <a:graphic>
+          <a:graphicData uri="http://schemas.openxmlformats.org/drawingml/2006/table">
+            <a:tbl>
+              <a:tblPr firstRow="1" bandRow="1">
+                <a:tableStyleId>{5940675A-B579-460E-94D1-54222C63F5DA}</a:tableStyleId>
+              </a:tblPr>
+              <a:tblGrid>
+                <a:gridCol w="1320082">
+                  <a:extLst>
+                    <a:ext uri="{9D8B030D-6E8A-4147-A177-3AD203B41FA5}">
+                      <a16:colId xmlns:a16="http://schemas.microsoft.com/office/drawing/2014/main" val="2803643667"/>
+                    </a:ext>
+                  </a:extLst>
+                </a:gridCol>
+                <a:gridCol w="1320082">
+                  <a:extLst>
+                    <a:ext uri="{9D8B030D-6E8A-4147-A177-3AD203B41FA5}">
+                      <a16:colId xmlns:a16="http://schemas.microsoft.com/office/drawing/2014/main" val="2661749885"/>
+                    </a:ext>
+                  </a:extLst>
+                </a:gridCol>
+              </a:tblGrid>
+              <a:tr h="400110">
+                <a:tc>
+                  <a:txBody>
+                    <a:bodyPr/>
+                    <a:lstStyle/>
+                    <a:p>
+                      <a:pPr marL="0" marR="0" lvl="0" indent="0" algn="ctr" defTabSz="914400" rtl="0" eaLnBrk="1" fontAlgn="auto" latinLnBrk="0" hangingPunct="1">
+                        <a:lnSpc>
+                          <a:spcPct val="100000"/>
+                        </a:lnSpc>
+                        <a:spcBef>
+                          <a:spcPts val="0"/>
+                        </a:spcBef>
+                        <a:spcAft>
+                          <a:spcPts val="0"/>
+                        </a:spcAft>
+                        <a:buClrTx/>
+                        <a:buSzTx/>
+                        <a:buFontTx/>
+                        <a:buNone/>
+                        <a:tabLst/>
+                        <a:defRPr/>
+                      </a:pPr>
+                      <a:r>
+                        <a:rPr lang="en-US" sz="2000" b="0" dirty="0">
+                          <a:solidFill>
+                            <a:schemeClr val="tx2">
+                              <a:lumMod val="75000"/>
+                              <a:lumOff val="25000"/>
+                            </a:schemeClr>
+                          </a:solidFill>
+                        </a:rPr>
+                        <a:t>0x6000</a:t>
+                      </a:r>
+                    </a:p>
+                  </a:txBody>
+                  <a:tcPr/>
+                </a:tc>
+                <a:tc>
+                  <a:txBody>
+                    <a:bodyPr/>
+                    <a:lstStyle/>
+                    <a:p>
+                      <a:pPr algn="ctr"/>
+                      <a:r>
+                        <a:rPr lang="en-US" sz="2000" dirty="0"/>
+                        <a:t>0x7000</a:t>
+                      </a:r>
+                    </a:p>
+                  </a:txBody>
+                  <a:tcPr/>
+                </a:tc>
+                <a:extLst>
+                  <a:ext uri="{0D108BD9-81ED-4DB2-BD59-A6C34878D82A}">
+                    <a16:rowId xmlns:a16="http://schemas.microsoft.com/office/drawing/2014/main" val="2377271649"/>
+                  </a:ext>
+                </a:extLst>
+              </a:tr>
+            </a:tbl>
+          </a:graphicData>
+        </a:graphic>
+      </p:graphicFrame>
+      <p:sp>
+        <p:nvSpPr>
+          <p:cNvPr id="9" name="TextBox 8">
+            <a:extLst>
+              <a:ext uri="{FF2B5EF4-FFF2-40B4-BE49-F238E27FC236}">
+                <a16:creationId xmlns:a16="http://schemas.microsoft.com/office/drawing/2014/main" id="{F7939D8A-5E99-6C04-0C6A-12DC89C5F74B}"/>
+              </a:ext>
+            </a:extLst>
+          </p:cNvPr>
+          <p:cNvSpPr txBox="1"/>
+          <p:nvPr/>
+        </p:nvSpPr>
+        <p:spPr>
+          <a:xfrm>
+            <a:off x="4316818" y="988136"/>
+            <a:ext cx="2739659" cy="707886"/>
+          </a:xfrm>
+          <a:prstGeom prst="rect">
+            <a:avLst/>
+          </a:prstGeom>
+          <a:noFill/>
+        </p:spPr>
+        <p:txBody>
+          <a:bodyPr wrap="square" rtlCol="0">
+            <a:spAutoFit/>
+          </a:bodyPr>
+          <a:lstStyle/>
+          <a:p>
+            <a:pPr algn="ctr"/>
+            <a:r>
+              <a:rPr lang="en-US" sz="2000" dirty="0"/>
+              <a:t>row-pointer table</a:t>
+            </a:r>
+          </a:p>
+          <a:p>
+            <a:pPr algn="ctr"/>
+            <a:r>
+              <a:rPr lang="en-US" sz="2000" dirty="0">
+                <a:solidFill>
+                  <a:schemeClr val="tx2">
+                    <a:lumMod val="75000"/>
+                    <a:lumOff val="25000"/>
+                  </a:schemeClr>
+                </a:solidFill>
+              </a:rPr>
+              <a:t>(heap 0x6000)</a:t>
+            </a:r>
+          </a:p>
+        </p:txBody>
+      </p:sp>
+      <p:cxnSp>
+        <p:nvCxnSpPr>
+          <p:cNvPr id="10" name="Straight Arrow Connector 9">
+            <a:extLst>
+              <a:ext uri="{FF2B5EF4-FFF2-40B4-BE49-F238E27FC236}">
+                <a16:creationId xmlns:a16="http://schemas.microsoft.com/office/drawing/2014/main" id="{9F04C135-7857-577E-134F-110508B08F85}"/>
+              </a:ext>
+            </a:extLst>
+          </p:cNvPr>
+          <p:cNvCxnSpPr>
+            <a:cxnSpLocks/>
+          </p:cNvCxnSpPr>
+          <p:nvPr/>
+        </p:nvCxnSpPr>
+        <p:spPr>
+          <a:xfrm>
+            <a:off x="2852614" y="2278747"/>
+            <a:ext cx="620216" cy="0"/>
+          </a:xfrm>
+          <a:prstGeom prst="straightConnector1">
+            <a:avLst/>
+          </a:prstGeom>
+          <a:ln>
+            <a:tailEnd type="triangle"/>
+          </a:ln>
+        </p:spPr>
+        <p:style>
+          <a:lnRef idx="2">
+            <a:schemeClr val="dk1"/>
+          </a:lnRef>
+          <a:fillRef idx="0">
+            <a:schemeClr val="dk1"/>
+          </a:fillRef>
+          <a:effectRef idx="1">
+            <a:schemeClr val="dk1"/>
+          </a:effectRef>
+          <a:fontRef idx="minor">
+            <a:schemeClr val="tx1"/>
+          </a:fontRef>
+        </p:style>
+      </p:cxnSp>
+      <p:sp>
+        <p:nvSpPr>
+          <p:cNvPr id="18" name="TextBox 17">
+            <a:extLst>
+              <a:ext uri="{FF2B5EF4-FFF2-40B4-BE49-F238E27FC236}">
+                <a16:creationId xmlns:a16="http://schemas.microsoft.com/office/drawing/2014/main" id="{F4481198-8610-6594-DFE7-2D9C6BEC5C62}"/>
+              </a:ext>
+            </a:extLst>
+          </p:cNvPr>
+          <p:cNvSpPr txBox="1"/>
+          <p:nvPr/>
+        </p:nvSpPr>
+        <p:spPr>
+          <a:xfrm>
+            <a:off x="3346577" y="2066974"/>
+            <a:ext cx="1127051" cy="400110"/>
+          </a:xfrm>
+          <a:prstGeom prst="rect">
+            <a:avLst/>
+          </a:prstGeom>
+          <a:noFill/>
+        </p:spPr>
+        <p:txBody>
+          <a:bodyPr wrap="square" rtlCol="0">
+            <a:spAutoFit/>
+          </a:bodyPr>
+          <a:lstStyle/>
+          <a:p>
+            <a:pPr algn="ctr"/>
+            <a:r>
+              <a:rPr lang="en-US" sz="2000" dirty="0"/>
+              <a:t>row 0</a:t>
+            </a:r>
+          </a:p>
+        </p:txBody>
+      </p:sp>
+      <p:graphicFrame>
+        <p:nvGraphicFramePr>
+          <p:cNvPr id="19" name="Table 18">
+            <a:extLst>
+              <a:ext uri="{FF2B5EF4-FFF2-40B4-BE49-F238E27FC236}">
+                <a16:creationId xmlns:a16="http://schemas.microsoft.com/office/drawing/2014/main" id="{3EF93671-6BE9-E092-28FC-77BF648318F9}"/>
+              </a:ext>
+            </a:extLst>
+          </p:cNvPr>
+          <p:cNvGraphicFramePr>
+            <a:graphicFrameLocks noGrp="1"/>
+          </p:cNvGraphicFramePr>
+          <p:nvPr>
+            <p:extLst>
+              <p:ext uri="{D42A27DB-BD31-4B8C-83A1-F6EECF244321}">
+                <p14:modId xmlns:p14="http://schemas.microsoft.com/office/powerpoint/2010/main" val="3728510161"/>
+              </p:ext>
+            </p:extLst>
+          </p:nvPr>
+        </p:nvGraphicFramePr>
+        <p:xfrm>
+          <a:off x="4316818" y="2471369"/>
+          <a:ext cx="2640164" cy="400110"/>
+        </p:xfrm>
+        <a:graphic>
+          <a:graphicData uri="http://schemas.openxmlformats.org/drawingml/2006/table">
+            <a:tbl>
+              <a:tblPr firstRow="1" bandRow="1">
+                <a:tableStyleId>{5940675A-B579-460E-94D1-54222C63F5DA}</a:tableStyleId>
+              </a:tblPr>
+              <a:tblGrid>
+                <a:gridCol w="1320082">
+                  <a:extLst>
+                    <a:ext uri="{9D8B030D-6E8A-4147-A177-3AD203B41FA5}">
+                      <a16:colId xmlns:a16="http://schemas.microsoft.com/office/drawing/2014/main" val="2803643667"/>
+                    </a:ext>
+                  </a:extLst>
+                </a:gridCol>
+                <a:gridCol w="1320082">
+                  <a:extLst>
+                    <a:ext uri="{9D8B030D-6E8A-4147-A177-3AD203B41FA5}">
+                      <a16:colId xmlns:a16="http://schemas.microsoft.com/office/drawing/2014/main" val="2661749885"/>
+                    </a:ext>
+                  </a:extLst>
+                </a:gridCol>
+              </a:tblGrid>
+              <a:tr h="400110">
+                <a:tc>
+                  <a:txBody>
+                    <a:bodyPr/>
+                    <a:lstStyle/>
+                    <a:p>
+                      <a:pPr marL="0" marR="0" lvl="0" indent="0" algn="ctr" defTabSz="914400" rtl="0" eaLnBrk="1" fontAlgn="auto" latinLnBrk="0" hangingPunct="1">
+                        <a:lnSpc>
+                          <a:spcPct val="100000"/>
+                        </a:lnSpc>
+                        <a:spcBef>
+                          <a:spcPts val="0"/>
+                        </a:spcBef>
+                        <a:spcAft>
+                          <a:spcPts val="0"/>
+                        </a:spcAft>
+                        <a:buClrTx/>
+                        <a:buSzTx/>
+                        <a:buFontTx/>
+                        <a:buNone/>
+                        <a:tabLst/>
+                        <a:defRPr/>
+                      </a:pPr>
+                      <a:r>
+                        <a:rPr lang="en-US" sz="2000" b="0" dirty="0">
+                          <a:solidFill>
+                            <a:schemeClr val="tx2">
+                              <a:lumMod val="75000"/>
+                              <a:lumOff val="25000"/>
+                            </a:schemeClr>
+                          </a:solidFill>
+                        </a:rPr>
+                        <a:t>0x6008</a:t>
+                      </a:r>
+                    </a:p>
+                  </a:txBody>
+                  <a:tcPr/>
+                </a:tc>
+                <a:tc>
+                  <a:txBody>
+                    <a:bodyPr/>
+                    <a:lstStyle/>
+                    <a:p>
+                      <a:pPr algn="ctr"/>
+                      <a:r>
+                        <a:rPr lang="en-US" sz="2000" dirty="0"/>
+                        <a:t>0x9000</a:t>
+                      </a:r>
+                    </a:p>
+                  </a:txBody>
+                  <a:tcPr/>
+                </a:tc>
+                <a:extLst>
+                  <a:ext uri="{0D108BD9-81ED-4DB2-BD59-A6C34878D82A}">
+                    <a16:rowId xmlns:a16="http://schemas.microsoft.com/office/drawing/2014/main" val="2377271649"/>
+                  </a:ext>
+                </a:extLst>
+              </a:tr>
+            </a:tbl>
+          </a:graphicData>
+        </a:graphic>
+      </p:graphicFrame>
+      <p:sp>
+        <p:nvSpPr>
+          <p:cNvPr id="20" name="TextBox 19">
+            <a:extLst>
+              <a:ext uri="{FF2B5EF4-FFF2-40B4-BE49-F238E27FC236}">
+                <a16:creationId xmlns:a16="http://schemas.microsoft.com/office/drawing/2014/main" id="{11497FF3-7427-030F-949B-6174AB606A23}"/>
+              </a:ext>
+            </a:extLst>
+          </p:cNvPr>
+          <p:cNvSpPr txBox="1"/>
+          <p:nvPr/>
+        </p:nvSpPr>
+        <p:spPr>
+          <a:xfrm>
+            <a:off x="3346577" y="2472827"/>
+            <a:ext cx="1127051" cy="400110"/>
+          </a:xfrm>
+          <a:prstGeom prst="rect">
+            <a:avLst/>
+          </a:prstGeom>
+          <a:noFill/>
+        </p:spPr>
+        <p:txBody>
+          <a:bodyPr wrap="square" rtlCol="0">
+            <a:spAutoFit/>
+          </a:bodyPr>
+          <a:lstStyle/>
+          <a:p>
+            <a:pPr algn="ctr"/>
+            <a:r>
+              <a:rPr lang="en-US" sz="2000" dirty="0"/>
+              <a:t>row 1</a:t>
+            </a:r>
+          </a:p>
+        </p:txBody>
+      </p:sp>
+      <p:graphicFrame>
+        <p:nvGraphicFramePr>
+          <p:cNvPr id="21" name="Table 20">
+            <a:extLst>
+              <a:ext uri="{FF2B5EF4-FFF2-40B4-BE49-F238E27FC236}">
+                <a16:creationId xmlns:a16="http://schemas.microsoft.com/office/drawing/2014/main" id="{63E2D9F7-C3CD-CD0E-E9A6-C3D3F91C5810}"/>
+              </a:ext>
+            </a:extLst>
+          </p:cNvPr>
+          <p:cNvGraphicFramePr>
+            <a:graphicFrameLocks noGrp="1"/>
+          </p:cNvGraphicFramePr>
+          <p:nvPr>
+            <p:extLst>
+              <p:ext uri="{D42A27DB-BD31-4B8C-83A1-F6EECF244321}">
+                <p14:modId xmlns:p14="http://schemas.microsoft.com/office/powerpoint/2010/main" val="2910053756"/>
+              </p:ext>
+            </p:extLst>
+          </p:nvPr>
+        </p:nvGraphicFramePr>
+        <p:xfrm>
+          <a:off x="8131456" y="1329965"/>
+          <a:ext cx="3190131" cy="707886"/>
+        </p:xfrm>
+        <a:graphic>
+          <a:graphicData uri="http://schemas.openxmlformats.org/drawingml/2006/table">
+            <a:tbl>
+              <a:tblPr firstRow="1" bandRow="1">
+                <a:tableStyleId>{5940675A-B579-460E-94D1-54222C63F5DA}</a:tableStyleId>
+              </a:tblPr>
+              <a:tblGrid>
+                <a:gridCol w="1063377">
+                  <a:extLst>
+                    <a:ext uri="{9D8B030D-6E8A-4147-A177-3AD203B41FA5}">
+                      <a16:colId xmlns:a16="http://schemas.microsoft.com/office/drawing/2014/main" val="2803643667"/>
+                    </a:ext>
+                  </a:extLst>
+                </a:gridCol>
+                <a:gridCol w="1063377">
+                  <a:extLst>
+                    <a:ext uri="{9D8B030D-6E8A-4147-A177-3AD203B41FA5}">
+                      <a16:colId xmlns:a16="http://schemas.microsoft.com/office/drawing/2014/main" val="2661749885"/>
+                    </a:ext>
+                  </a:extLst>
+                </a:gridCol>
+                <a:gridCol w="1063377">
+                  <a:extLst>
+                    <a:ext uri="{9D8B030D-6E8A-4147-A177-3AD203B41FA5}">
+                      <a16:colId xmlns:a16="http://schemas.microsoft.com/office/drawing/2014/main" val="1057916831"/>
+                    </a:ext>
+                  </a:extLst>
+                </a:gridCol>
+              </a:tblGrid>
+              <a:tr h="707886">
+                <a:tc>
+                  <a:txBody>
+                    <a:bodyPr/>
+                    <a:lstStyle/>
+                    <a:p>
+                      <a:pPr marL="0" marR="0" lvl="0" indent="0" algn="ctr" defTabSz="914400" rtl="0" eaLnBrk="1" fontAlgn="auto" latinLnBrk="0" hangingPunct="1">
+                        <a:lnSpc>
+                          <a:spcPct val="100000"/>
+                        </a:lnSpc>
+                        <a:spcBef>
+                          <a:spcPts val="0"/>
+                        </a:spcBef>
+                        <a:spcAft>
+                          <a:spcPts val="0"/>
+                        </a:spcAft>
+                        <a:buClrTx/>
+                        <a:buSzTx/>
+                        <a:buFontTx/>
+                        <a:buNone/>
+                        <a:tabLst/>
+                        <a:defRPr/>
+                      </a:pPr>
+                      <a:r>
+                        <a:rPr lang="en-US" sz="2000" b="0" dirty="0">
+                          <a:solidFill>
+                            <a:schemeClr val="tx1"/>
+                          </a:solidFill>
+                        </a:rPr>
+                        <a:t>1</a:t>
+                      </a:r>
+                    </a:p>
+                    <a:p>
+                      <a:pPr marL="0" marR="0" lvl="0" indent="0" algn="ctr" defTabSz="914400" rtl="0" eaLnBrk="1" fontAlgn="auto" latinLnBrk="0" hangingPunct="1">
+                        <a:lnSpc>
+                          <a:spcPct val="100000"/>
+                        </a:lnSpc>
+                        <a:spcBef>
+                          <a:spcPts val="0"/>
+                        </a:spcBef>
+                        <a:spcAft>
+                          <a:spcPts val="0"/>
+                        </a:spcAft>
+                        <a:buClrTx/>
+                        <a:buSzTx/>
+                        <a:buFontTx/>
+                        <a:buNone/>
+                        <a:tabLst/>
+                        <a:defRPr/>
+                      </a:pPr>
+                      <a:r>
+                        <a:rPr lang="en-US" sz="2000" b="0" dirty="0">
+                          <a:solidFill>
+                            <a:schemeClr val="tx2">
+                              <a:lumMod val="75000"/>
+                              <a:lumOff val="25000"/>
+                            </a:schemeClr>
+                          </a:solidFill>
+                        </a:rPr>
+                        <a:t>0x7000</a:t>
+                      </a:r>
+                    </a:p>
+                  </a:txBody>
+                  <a:tcPr/>
+                </a:tc>
+                <a:tc>
+                  <a:txBody>
+                    <a:bodyPr/>
+                    <a:lstStyle/>
+                    <a:p>
+                      <a:pPr algn="ctr"/>
+                      <a:r>
+                        <a:rPr lang="en-US" sz="2000" dirty="0"/>
+                        <a:t>2</a:t>
+                      </a:r>
+                    </a:p>
+                    <a:p>
+                      <a:pPr marL="0" marR="0" lvl="0" indent="0" algn="ctr" defTabSz="914400" rtl="0" eaLnBrk="1" fontAlgn="auto" latinLnBrk="0" hangingPunct="1">
+                        <a:lnSpc>
+                          <a:spcPct val="100000"/>
+                        </a:lnSpc>
+                        <a:spcBef>
+                          <a:spcPts val="0"/>
+                        </a:spcBef>
+                        <a:spcAft>
+                          <a:spcPts val="0"/>
+                        </a:spcAft>
+                        <a:buClrTx/>
+                        <a:buSzTx/>
+                        <a:buFontTx/>
+                        <a:buNone/>
+                        <a:tabLst/>
+                        <a:defRPr/>
+                      </a:pPr>
+                      <a:r>
+                        <a:rPr lang="en-US" sz="2000" b="0" dirty="0">
+                          <a:solidFill>
+                            <a:schemeClr val="tx2">
+                              <a:lumMod val="75000"/>
+                              <a:lumOff val="25000"/>
+                            </a:schemeClr>
+                          </a:solidFill>
+                        </a:rPr>
+                        <a:t>0x7004</a:t>
+                      </a:r>
+                    </a:p>
+                  </a:txBody>
+                  <a:tcPr/>
+                </a:tc>
+                <a:tc>
+                  <a:txBody>
+                    <a:bodyPr/>
+                    <a:lstStyle/>
+                    <a:p>
+                      <a:pPr algn="ctr"/>
+                      <a:r>
+                        <a:rPr lang="en-US" sz="2000" dirty="0"/>
+                        <a:t>3</a:t>
+                      </a:r>
+                    </a:p>
+                    <a:p>
+                      <a:pPr marL="0" marR="0" lvl="0" indent="0" algn="ctr" defTabSz="914400" rtl="0" eaLnBrk="1" fontAlgn="auto" latinLnBrk="0" hangingPunct="1">
+                        <a:lnSpc>
+                          <a:spcPct val="100000"/>
+                        </a:lnSpc>
+                        <a:spcBef>
+                          <a:spcPts val="0"/>
+                        </a:spcBef>
+                        <a:spcAft>
+                          <a:spcPts val="0"/>
+                        </a:spcAft>
+                        <a:buClrTx/>
+                        <a:buSzTx/>
+                        <a:buFontTx/>
+                        <a:buNone/>
+                        <a:tabLst/>
+                        <a:defRPr/>
+                      </a:pPr>
+                      <a:r>
+                        <a:rPr lang="en-US" sz="2000" b="0" dirty="0">
+                          <a:solidFill>
+                            <a:schemeClr val="tx2">
+                              <a:lumMod val="75000"/>
+                              <a:lumOff val="25000"/>
+                            </a:schemeClr>
+                          </a:solidFill>
+                        </a:rPr>
+                        <a:t>0x7008</a:t>
+                      </a:r>
+                    </a:p>
+                  </a:txBody>
+                  <a:tcPr/>
+                </a:tc>
+                <a:extLst>
+                  <a:ext uri="{0D108BD9-81ED-4DB2-BD59-A6C34878D82A}">
+                    <a16:rowId xmlns:a16="http://schemas.microsoft.com/office/drawing/2014/main" val="2377271649"/>
+                  </a:ext>
+                </a:extLst>
+              </a:tr>
+            </a:tbl>
+          </a:graphicData>
+        </a:graphic>
+      </p:graphicFrame>
+      <p:graphicFrame>
+        <p:nvGraphicFramePr>
+          <p:cNvPr id="22" name="Table 21">
+            <a:extLst>
+              <a:ext uri="{FF2B5EF4-FFF2-40B4-BE49-F238E27FC236}">
+                <a16:creationId xmlns:a16="http://schemas.microsoft.com/office/drawing/2014/main" id="{69D2811F-228C-57C6-47B7-A8125553D3AB}"/>
+              </a:ext>
+            </a:extLst>
+          </p:cNvPr>
+          <p:cNvGraphicFramePr>
+            <a:graphicFrameLocks noGrp="1"/>
+          </p:cNvGraphicFramePr>
+          <p:nvPr>
+            <p:extLst>
+              <p:ext uri="{D42A27DB-BD31-4B8C-83A1-F6EECF244321}">
+                <p14:modId xmlns:p14="http://schemas.microsoft.com/office/powerpoint/2010/main" val="4190279221"/>
+              </p:ext>
+            </p:extLst>
+          </p:nvPr>
+        </p:nvGraphicFramePr>
+        <p:xfrm>
+          <a:off x="8131455" y="3006203"/>
+          <a:ext cx="3190131" cy="707886"/>
+        </p:xfrm>
+        <a:graphic>
+          <a:graphicData uri="http://schemas.openxmlformats.org/drawingml/2006/table">
+            <a:tbl>
+              <a:tblPr firstRow="1" bandRow="1">
+                <a:tableStyleId>{5940675A-B579-460E-94D1-54222C63F5DA}</a:tableStyleId>
+              </a:tblPr>
+              <a:tblGrid>
+                <a:gridCol w="1063377">
+                  <a:extLst>
+                    <a:ext uri="{9D8B030D-6E8A-4147-A177-3AD203B41FA5}">
+                      <a16:colId xmlns:a16="http://schemas.microsoft.com/office/drawing/2014/main" val="2803643667"/>
+                    </a:ext>
+                  </a:extLst>
+                </a:gridCol>
+                <a:gridCol w="1063377">
+                  <a:extLst>
+                    <a:ext uri="{9D8B030D-6E8A-4147-A177-3AD203B41FA5}">
+                      <a16:colId xmlns:a16="http://schemas.microsoft.com/office/drawing/2014/main" val="2661749885"/>
+                    </a:ext>
+                  </a:extLst>
+                </a:gridCol>
+                <a:gridCol w="1063377">
+                  <a:extLst>
+                    <a:ext uri="{9D8B030D-6E8A-4147-A177-3AD203B41FA5}">
+                      <a16:colId xmlns:a16="http://schemas.microsoft.com/office/drawing/2014/main" val="1057916831"/>
+                    </a:ext>
+                  </a:extLst>
+                </a:gridCol>
+              </a:tblGrid>
+              <a:tr h="707886">
+                <a:tc>
+                  <a:txBody>
+                    <a:bodyPr/>
+                    <a:lstStyle/>
+                    <a:p>
+                      <a:pPr marL="0" marR="0" lvl="0" indent="0" algn="ctr" defTabSz="914400" rtl="0" eaLnBrk="1" fontAlgn="auto" latinLnBrk="0" hangingPunct="1">
+                        <a:lnSpc>
+                          <a:spcPct val="100000"/>
+                        </a:lnSpc>
+                        <a:spcBef>
+                          <a:spcPts val="0"/>
+                        </a:spcBef>
+                        <a:spcAft>
+                          <a:spcPts val="0"/>
+                        </a:spcAft>
+                        <a:buClrTx/>
+                        <a:buSzTx/>
+                        <a:buFontTx/>
+                        <a:buNone/>
+                        <a:tabLst/>
+                        <a:defRPr/>
+                      </a:pPr>
+                      <a:r>
+                        <a:rPr lang="en-US" sz="2000" b="0" dirty="0">
+                          <a:solidFill>
+                            <a:schemeClr val="tx1"/>
+                          </a:solidFill>
+                        </a:rPr>
+                        <a:t>4</a:t>
+                      </a:r>
+                    </a:p>
+                    <a:p>
+                      <a:pPr marL="0" marR="0" lvl="0" indent="0" algn="ctr" defTabSz="914400" rtl="0" eaLnBrk="1" fontAlgn="auto" latinLnBrk="0" hangingPunct="1">
+                        <a:lnSpc>
+                          <a:spcPct val="100000"/>
+                        </a:lnSpc>
+                        <a:spcBef>
+                          <a:spcPts val="0"/>
+                        </a:spcBef>
+                        <a:spcAft>
+                          <a:spcPts val="0"/>
+                        </a:spcAft>
+                        <a:buClrTx/>
+                        <a:buSzTx/>
+                        <a:buFontTx/>
+                        <a:buNone/>
+                        <a:tabLst/>
+                        <a:defRPr/>
+                      </a:pPr>
+                      <a:r>
+                        <a:rPr lang="en-US" sz="2000" b="0" dirty="0">
+                          <a:solidFill>
+                            <a:schemeClr val="tx2">
+                              <a:lumMod val="75000"/>
+                              <a:lumOff val="25000"/>
+                            </a:schemeClr>
+                          </a:solidFill>
+                        </a:rPr>
+                        <a:t>0x9000</a:t>
+                      </a:r>
+                    </a:p>
+                  </a:txBody>
+                  <a:tcPr/>
+                </a:tc>
+                <a:tc>
+                  <a:txBody>
+                    <a:bodyPr/>
+                    <a:lstStyle/>
+                    <a:p>
+                      <a:pPr algn="ctr"/>
+                      <a:r>
+                        <a:rPr lang="en-US" sz="2000" dirty="0"/>
+                        <a:t>5</a:t>
+                      </a:r>
+                    </a:p>
+                    <a:p>
+                      <a:pPr marL="0" marR="0" lvl="0" indent="0" algn="ctr" defTabSz="914400" rtl="0" eaLnBrk="1" fontAlgn="auto" latinLnBrk="0" hangingPunct="1">
+                        <a:lnSpc>
+                          <a:spcPct val="100000"/>
+                        </a:lnSpc>
+                        <a:spcBef>
+                          <a:spcPts val="0"/>
+                        </a:spcBef>
+                        <a:spcAft>
+                          <a:spcPts val="0"/>
+                        </a:spcAft>
+                        <a:buClrTx/>
+                        <a:buSzTx/>
+                        <a:buFontTx/>
+                        <a:buNone/>
+                        <a:tabLst/>
+                        <a:defRPr/>
+                      </a:pPr>
+                      <a:r>
+                        <a:rPr lang="en-US" sz="2000" b="0" dirty="0">
+                          <a:solidFill>
+                            <a:schemeClr val="tx2">
+                              <a:lumMod val="75000"/>
+                              <a:lumOff val="25000"/>
+                            </a:schemeClr>
+                          </a:solidFill>
+                        </a:rPr>
+                        <a:t>0x9004</a:t>
+                      </a:r>
+                    </a:p>
+                  </a:txBody>
+                  <a:tcPr/>
+                </a:tc>
+                <a:tc>
+                  <a:txBody>
+                    <a:bodyPr/>
+                    <a:lstStyle/>
+                    <a:p>
+                      <a:pPr algn="ctr"/>
+                      <a:r>
+                        <a:rPr lang="en-US" sz="2000" dirty="0"/>
+                        <a:t>6</a:t>
+                      </a:r>
+                    </a:p>
+                    <a:p>
+                      <a:pPr marL="0" marR="0" lvl="0" indent="0" algn="ctr" defTabSz="914400" rtl="0" eaLnBrk="1" fontAlgn="auto" latinLnBrk="0" hangingPunct="1">
+                        <a:lnSpc>
+                          <a:spcPct val="100000"/>
+                        </a:lnSpc>
+                        <a:spcBef>
+                          <a:spcPts val="0"/>
+                        </a:spcBef>
+                        <a:spcAft>
+                          <a:spcPts val="0"/>
+                        </a:spcAft>
+                        <a:buClrTx/>
+                        <a:buSzTx/>
+                        <a:buFontTx/>
+                        <a:buNone/>
+                        <a:tabLst/>
+                        <a:defRPr/>
+                      </a:pPr>
+                      <a:r>
+                        <a:rPr lang="en-US" sz="2000" b="0" dirty="0">
+                          <a:solidFill>
+                            <a:schemeClr val="tx2">
+                              <a:lumMod val="75000"/>
+                              <a:lumOff val="25000"/>
+                            </a:schemeClr>
+                          </a:solidFill>
+                        </a:rPr>
+                        <a:t>0x9008</a:t>
+                      </a:r>
+                    </a:p>
+                  </a:txBody>
+                  <a:tcPr/>
+                </a:tc>
+                <a:extLst>
+                  <a:ext uri="{0D108BD9-81ED-4DB2-BD59-A6C34878D82A}">
+                    <a16:rowId xmlns:a16="http://schemas.microsoft.com/office/drawing/2014/main" val="2377271649"/>
+                  </a:ext>
+                </a:extLst>
+              </a:tr>
+            </a:tbl>
+          </a:graphicData>
+        </a:graphic>
+      </p:graphicFrame>
+      <p:sp>
+        <p:nvSpPr>
+          <p:cNvPr id="24" name="TextBox 23">
+            <a:extLst>
+              <a:ext uri="{FF2B5EF4-FFF2-40B4-BE49-F238E27FC236}">
+                <a16:creationId xmlns:a16="http://schemas.microsoft.com/office/drawing/2014/main" id="{6682673B-4123-076A-2F9C-2B768E85A9AA}"/>
+              </a:ext>
+            </a:extLst>
+          </p:cNvPr>
+          <p:cNvSpPr txBox="1"/>
+          <p:nvPr/>
+        </p:nvSpPr>
+        <p:spPr>
+          <a:xfrm>
+            <a:off x="8385557" y="804558"/>
+            <a:ext cx="2681926" cy="400110"/>
+          </a:xfrm>
+          <a:prstGeom prst="rect">
+            <a:avLst/>
+          </a:prstGeom>
+          <a:noFill/>
+        </p:spPr>
+        <p:txBody>
+          <a:bodyPr wrap="square">
+            <a:spAutoFit/>
+          </a:bodyPr>
+          <a:lstStyle/>
+          <a:p>
+            <a:pPr algn="ctr"/>
+            <a:r>
+              <a:rPr lang="en-US" sz="2000" dirty="0">
+                <a:solidFill>
+                  <a:schemeClr val="tx2">
+                    <a:lumMod val="75000"/>
+                    <a:lumOff val="25000"/>
+                  </a:schemeClr>
+                </a:solidFill>
+              </a:rPr>
+              <a:t>(heap 0x7000)</a:t>
+            </a:r>
+          </a:p>
+        </p:txBody>
+      </p:sp>
+      <p:sp>
+        <p:nvSpPr>
+          <p:cNvPr id="25" name="TextBox 24">
+            <a:extLst>
+              <a:ext uri="{FF2B5EF4-FFF2-40B4-BE49-F238E27FC236}">
+                <a16:creationId xmlns:a16="http://schemas.microsoft.com/office/drawing/2014/main" id="{E25494CB-C0B8-91EE-5615-D87D07A4A1F0}"/>
+              </a:ext>
+            </a:extLst>
+          </p:cNvPr>
+          <p:cNvSpPr txBox="1"/>
+          <p:nvPr/>
+        </p:nvSpPr>
+        <p:spPr>
+          <a:xfrm>
+            <a:off x="8385557" y="2480796"/>
+            <a:ext cx="2681926" cy="400110"/>
+          </a:xfrm>
+          <a:prstGeom prst="rect">
+            <a:avLst/>
+          </a:prstGeom>
+          <a:noFill/>
+        </p:spPr>
+        <p:txBody>
+          <a:bodyPr wrap="square">
+            <a:spAutoFit/>
+          </a:bodyPr>
+          <a:lstStyle/>
+          <a:p>
+            <a:pPr algn="ctr"/>
+            <a:r>
+              <a:rPr lang="en-US" sz="2000" dirty="0">
+                <a:solidFill>
+                  <a:schemeClr val="tx2">
+                    <a:lumMod val="75000"/>
+                    <a:lumOff val="25000"/>
+                  </a:schemeClr>
+                </a:solidFill>
+              </a:rPr>
+              <a:t>(heap 0x9000)</a:t>
+            </a:r>
+          </a:p>
+        </p:txBody>
+      </p:sp>
+      <p:cxnSp>
+        <p:nvCxnSpPr>
+          <p:cNvPr id="27" name="Straight Arrow Connector 26">
+            <a:extLst>
+              <a:ext uri="{FF2B5EF4-FFF2-40B4-BE49-F238E27FC236}">
+                <a16:creationId xmlns:a16="http://schemas.microsoft.com/office/drawing/2014/main" id="{0D08EBDC-B563-DF31-49B6-2058F19BF7F9}"/>
+              </a:ext>
+            </a:extLst>
+          </p:cNvPr>
+          <p:cNvCxnSpPr>
+            <a:cxnSpLocks/>
+            <a:stCxn id="8" idx="3"/>
+            <a:endCxn id="21" idx="1"/>
+          </p:cNvCxnSpPr>
+          <p:nvPr/>
+        </p:nvCxnSpPr>
+        <p:spPr>
+          <a:xfrm flipV="1">
+            <a:off x="6956982" y="1683908"/>
+            <a:ext cx="1174474" cy="572239"/>
+          </a:xfrm>
+          <a:prstGeom prst="straightConnector1">
+            <a:avLst/>
+          </a:prstGeom>
+          <a:ln>
+            <a:tailEnd type="triangle"/>
+          </a:ln>
+        </p:spPr>
+        <p:style>
+          <a:lnRef idx="2">
+            <a:schemeClr val="dk1"/>
+          </a:lnRef>
+          <a:fillRef idx="0">
+            <a:schemeClr val="dk1"/>
+          </a:fillRef>
+          <a:effectRef idx="1">
+            <a:schemeClr val="dk1"/>
+          </a:effectRef>
+          <a:fontRef idx="minor">
+            <a:schemeClr val="tx1"/>
+          </a:fontRef>
+        </p:style>
+      </p:cxnSp>
+      <p:cxnSp>
+        <p:nvCxnSpPr>
+          <p:cNvPr id="30" name="Straight Arrow Connector 29">
+            <a:extLst>
+              <a:ext uri="{FF2B5EF4-FFF2-40B4-BE49-F238E27FC236}">
+                <a16:creationId xmlns:a16="http://schemas.microsoft.com/office/drawing/2014/main" id="{C7438BF2-CF36-DD96-5729-854F8672E2C2}"/>
+              </a:ext>
+            </a:extLst>
+          </p:cNvPr>
+          <p:cNvCxnSpPr>
+            <a:cxnSpLocks/>
+            <a:stCxn id="19" idx="3"/>
+            <a:endCxn id="22" idx="1"/>
+          </p:cNvCxnSpPr>
+          <p:nvPr/>
+        </p:nvCxnSpPr>
+        <p:spPr>
+          <a:xfrm>
+            <a:off x="6956982" y="2671424"/>
+            <a:ext cx="1174473" cy="688722"/>
+          </a:xfrm>
+          <a:prstGeom prst="straightConnector1">
+            <a:avLst/>
+          </a:prstGeom>
+          <a:ln>
+            <a:tailEnd type="triangle"/>
+          </a:ln>
+        </p:spPr>
+        <p:style>
+          <a:lnRef idx="2">
+            <a:schemeClr val="dk1"/>
+          </a:lnRef>
+          <a:fillRef idx="0">
+            <a:schemeClr val="dk1"/>
+          </a:fillRef>
+          <a:effectRef idx="1">
+            <a:schemeClr val="dk1"/>
+          </a:effectRef>
+          <a:fontRef idx="minor">
+            <a:schemeClr val="tx1"/>
+          </a:fontRef>
+        </p:style>
+      </p:cxnSp>
+      <p:graphicFrame>
+        <p:nvGraphicFramePr>
+          <p:cNvPr id="43" name="Table 42">
+            <a:extLst>
+              <a:ext uri="{FF2B5EF4-FFF2-40B4-BE49-F238E27FC236}">
+                <a16:creationId xmlns:a16="http://schemas.microsoft.com/office/drawing/2014/main" id="{6AC64562-4395-6AED-6B4D-6FA0F3866AE2}"/>
+              </a:ext>
+            </a:extLst>
+          </p:cNvPr>
+          <p:cNvGraphicFramePr>
+            <a:graphicFrameLocks noGrp="1"/>
+          </p:cNvGraphicFramePr>
+          <p:nvPr>
+            <p:extLst>
+              <p:ext uri="{D42A27DB-BD31-4B8C-83A1-F6EECF244321}">
+                <p14:modId xmlns:p14="http://schemas.microsoft.com/office/powerpoint/2010/main" val="1266488371"/>
+              </p:ext>
+            </p:extLst>
+          </p:nvPr>
+        </p:nvGraphicFramePr>
+        <p:xfrm>
+          <a:off x="6096000" y="5174092"/>
+          <a:ext cx="5946954" cy="707886"/>
+        </p:xfrm>
+        <a:graphic>
+          <a:graphicData uri="http://schemas.openxmlformats.org/drawingml/2006/table">
+            <a:tbl>
+              <a:tblPr firstRow="1" bandRow="1">
+                <a:tableStyleId>{5940675A-B579-460E-94D1-54222C63F5DA}</a:tableStyleId>
+              </a:tblPr>
+              <a:tblGrid>
+                <a:gridCol w="991159">
+                  <a:extLst>
+                    <a:ext uri="{9D8B030D-6E8A-4147-A177-3AD203B41FA5}">
+                      <a16:colId xmlns:a16="http://schemas.microsoft.com/office/drawing/2014/main" val="2803643667"/>
+                    </a:ext>
+                  </a:extLst>
+                </a:gridCol>
+                <a:gridCol w="991159">
+                  <a:extLst>
+                    <a:ext uri="{9D8B030D-6E8A-4147-A177-3AD203B41FA5}">
+                      <a16:colId xmlns:a16="http://schemas.microsoft.com/office/drawing/2014/main" val="2661749885"/>
+                    </a:ext>
+                  </a:extLst>
+                </a:gridCol>
+                <a:gridCol w="991159">
+                  <a:extLst>
+                    <a:ext uri="{9D8B030D-6E8A-4147-A177-3AD203B41FA5}">
+                      <a16:colId xmlns:a16="http://schemas.microsoft.com/office/drawing/2014/main" val="1057916831"/>
+                    </a:ext>
+                  </a:extLst>
+                </a:gridCol>
+                <a:gridCol w="991159">
+                  <a:extLst>
+                    <a:ext uri="{9D8B030D-6E8A-4147-A177-3AD203B41FA5}">
+                      <a16:colId xmlns:a16="http://schemas.microsoft.com/office/drawing/2014/main" val="1412991784"/>
+                    </a:ext>
+                  </a:extLst>
+                </a:gridCol>
+                <a:gridCol w="991159">
+                  <a:extLst>
+                    <a:ext uri="{9D8B030D-6E8A-4147-A177-3AD203B41FA5}">
+                      <a16:colId xmlns:a16="http://schemas.microsoft.com/office/drawing/2014/main" val="2530980497"/>
+                    </a:ext>
+                  </a:extLst>
+                </a:gridCol>
+                <a:gridCol w="991159">
+                  <a:extLst>
+                    <a:ext uri="{9D8B030D-6E8A-4147-A177-3AD203B41FA5}">
+                      <a16:colId xmlns:a16="http://schemas.microsoft.com/office/drawing/2014/main" val="3474105227"/>
+                    </a:ext>
+                  </a:extLst>
+                </a:gridCol>
+              </a:tblGrid>
+              <a:tr h="707886">
+                <a:tc>
+                  <a:txBody>
+                    <a:bodyPr/>
+                    <a:lstStyle/>
+                    <a:p>
+                      <a:pPr marL="0" marR="0" lvl="0" indent="0" algn="ctr" defTabSz="914400" rtl="0" eaLnBrk="1" fontAlgn="auto" latinLnBrk="0" hangingPunct="1">
+                        <a:lnSpc>
+                          <a:spcPct val="100000"/>
+                        </a:lnSpc>
+                        <a:spcBef>
+                          <a:spcPts val="0"/>
+                        </a:spcBef>
+                        <a:spcAft>
+                          <a:spcPts val="0"/>
+                        </a:spcAft>
+                        <a:buClrTx/>
+                        <a:buSzTx/>
+                        <a:buFontTx/>
+                        <a:buNone/>
+                        <a:tabLst/>
+                        <a:defRPr/>
+                      </a:pPr>
+                      <a:r>
+                        <a:rPr lang="en-US" sz="2000" b="0" dirty="0">
+                          <a:solidFill>
+                            <a:schemeClr val="tx1"/>
+                          </a:solidFill>
+                        </a:rPr>
+                        <a:t>1</a:t>
+                      </a:r>
+                    </a:p>
+                    <a:p>
+                      <a:pPr marL="0" marR="0" lvl="0" indent="0" algn="ctr" defTabSz="914400" rtl="0" eaLnBrk="1" fontAlgn="auto" latinLnBrk="0" hangingPunct="1">
+                        <a:lnSpc>
+                          <a:spcPct val="100000"/>
+                        </a:lnSpc>
+                        <a:spcBef>
+                          <a:spcPts val="0"/>
+                        </a:spcBef>
+                        <a:spcAft>
+                          <a:spcPts val="0"/>
+                        </a:spcAft>
+                        <a:buClrTx/>
+                        <a:buSzTx/>
+                        <a:buFontTx/>
+                        <a:buNone/>
+                        <a:tabLst/>
+                        <a:defRPr/>
+                      </a:pPr>
+                      <a:r>
+                        <a:rPr lang="en-US" sz="2000" b="0" dirty="0">
+                          <a:solidFill>
+                            <a:schemeClr val="tx2">
+                              <a:lumMod val="75000"/>
+                              <a:lumOff val="25000"/>
+                            </a:schemeClr>
+                          </a:solidFill>
+                        </a:rPr>
+                        <a:t>0x7000</a:t>
+                      </a:r>
+                    </a:p>
+                  </a:txBody>
+                  <a:tcPr/>
+                </a:tc>
+                <a:tc>
+                  <a:txBody>
+                    <a:bodyPr/>
+                    <a:lstStyle/>
+                    <a:p>
+                      <a:pPr algn="ctr"/>
+                      <a:r>
+                        <a:rPr lang="en-US" sz="2000" dirty="0"/>
+                        <a:t>2</a:t>
+                      </a:r>
+                    </a:p>
+                    <a:p>
+                      <a:pPr marL="0" marR="0" lvl="0" indent="0" algn="ctr" defTabSz="914400" rtl="0" eaLnBrk="1" fontAlgn="auto" latinLnBrk="0" hangingPunct="1">
+                        <a:lnSpc>
+                          <a:spcPct val="100000"/>
+                        </a:lnSpc>
+                        <a:spcBef>
+                          <a:spcPts val="0"/>
+                        </a:spcBef>
+                        <a:spcAft>
+                          <a:spcPts val="0"/>
+                        </a:spcAft>
+                        <a:buClrTx/>
+                        <a:buSzTx/>
+                        <a:buFontTx/>
+                        <a:buNone/>
+                        <a:tabLst/>
+                        <a:defRPr/>
+                      </a:pPr>
+                      <a:r>
+                        <a:rPr lang="en-US" sz="2000" b="0" dirty="0">
+                          <a:solidFill>
+                            <a:schemeClr val="tx2">
+                              <a:lumMod val="75000"/>
+                              <a:lumOff val="25000"/>
+                            </a:schemeClr>
+                          </a:solidFill>
+                        </a:rPr>
+                        <a:t>0x7004</a:t>
+                      </a:r>
+                    </a:p>
+                  </a:txBody>
+                  <a:tcPr/>
+                </a:tc>
+                <a:tc>
+                  <a:txBody>
+                    <a:bodyPr/>
+                    <a:lstStyle/>
+                    <a:p>
+                      <a:pPr algn="ctr"/>
+                      <a:r>
+                        <a:rPr lang="en-US" sz="2000" dirty="0"/>
+                        <a:t>3</a:t>
+                      </a:r>
+                    </a:p>
+                    <a:p>
+                      <a:pPr marL="0" marR="0" lvl="0" indent="0" algn="ctr" defTabSz="914400" rtl="0" eaLnBrk="1" fontAlgn="auto" latinLnBrk="0" hangingPunct="1">
+                        <a:lnSpc>
+                          <a:spcPct val="100000"/>
+                        </a:lnSpc>
+                        <a:spcBef>
+                          <a:spcPts val="0"/>
+                        </a:spcBef>
+                        <a:spcAft>
+                          <a:spcPts val="0"/>
+                        </a:spcAft>
+                        <a:buClrTx/>
+                        <a:buSzTx/>
+                        <a:buFontTx/>
+                        <a:buNone/>
+                        <a:tabLst/>
+                        <a:defRPr/>
+                      </a:pPr>
+                      <a:r>
+                        <a:rPr lang="en-US" sz="2000" b="0" dirty="0">
+                          <a:solidFill>
+                            <a:schemeClr val="tx2">
+                              <a:lumMod val="75000"/>
+                              <a:lumOff val="25000"/>
+                            </a:schemeClr>
+                          </a:solidFill>
+                        </a:rPr>
+                        <a:t>0x7008</a:t>
+                      </a:r>
+                    </a:p>
+                  </a:txBody>
+                  <a:tcPr/>
+                </a:tc>
+                <a:tc>
+                  <a:txBody>
+                    <a:bodyPr/>
+                    <a:lstStyle/>
+                    <a:p>
+                      <a:pPr algn="ctr"/>
+                      <a:r>
+                        <a:rPr lang="en-US" sz="2000" dirty="0"/>
+                        <a:t>4</a:t>
+                      </a:r>
+                    </a:p>
+                    <a:p>
+                      <a:pPr marL="0" marR="0" lvl="0" indent="0" algn="ctr" defTabSz="914400" rtl="0" eaLnBrk="1" fontAlgn="auto" latinLnBrk="0" hangingPunct="1">
+                        <a:lnSpc>
+                          <a:spcPct val="100000"/>
+                        </a:lnSpc>
+                        <a:spcBef>
+                          <a:spcPts val="0"/>
+                        </a:spcBef>
+                        <a:spcAft>
+                          <a:spcPts val="0"/>
+                        </a:spcAft>
+                        <a:buClrTx/>
+                        <a:buSzTx/>
+                        <a:buFontTx/>
+                        <a:buNone/>
+                        <a:tabLst/>
+                        <a:defRPr/>
+                      </a:pPr>
+                      <a:r>
+                        <a:rPr lang="en-US" sz="2000" b="0" dirty="0">
+                          <a:solidFill>
+                            <a:schemeClr val="tx2">
+                              <a:lumMod val="75000"/>
+                              <a:lumOff val="25000"/>
+                            </a:schemeClr>
+                          </a:solidFill>
+                        </a:rPr>
+                        <a:t>0x7012</a:t>
+                      </a:r>
+                    </a:p>
+                  </a:txBody>
+                  <a:tcPr/>
+                </a:tc>
+                <a:tc>
+                  <a:txBody>
+                    <a:bodyPr/>
+                    <a:lstStyle/>
+                    <a:p>
+                      <a:pPr algn="ctr"/>
+                      <a:r>
+                        <a:rPr lang="en-US" sz="2000" dirty="0"/>
+                        <a:t>5</a:t>
+                      </a:r>
+                    </a:p>
+                    <a:p>
+                      <a:pPr marL="0" marR="0" lvl="0" indent="0" algn="ctr" defTabSz="914400" rtl="0" eaLnBrk="1" fontAlgn="auto" latinLnBrk="0" hangingPunct="1">
+                        <a:lnSpc>
+                          <a:spcPct val="100000"/>
+                        </a:lnSpc>
+                        <a:spcBef>
+                          <a:spcPts val="0"/>
+                        </a:spcBef>
+                        <a:spcAft>
+                          <a:spcPts val="0"/>
+                        </a:spcAft>
+                        <a:buClrTx/>
+                        <a:buSzTx/>
+                        <a:buFontTx/>
+                        <a:buNone/>
+                        <a:tabLst/>
+                        <a:defRPr/>
+                      </a:pPr>
+                      <a:r>
+                        <a:rPr lang="en-US" sz="2000" b="0" dirty="0">
+                          <a:solidFill>
+                            <a:schemeClr val="tx2">
+                              <a:lumMod val="75000"/>
+                              <a:lumOff val="25000"/>
+                            </a:schemeClr>
+                          </a:solidFill>
+                        </a:rPr>
+                        <a:t>0x7016</a:t>
+                      </a:r>
+                    </a:p>
+                  </a:txBody>
+                  <a:tcPr/>
+                </a:tc>
+                <a:tc>
+                  <a:txBody>
+                    <a:bodyPr/>
+                    <a:lstStyle/>
+                    <a:p>
+                      <a:pPr algn="ctr"/>
+                      <a:r>
+                        <a:rPr lang="en-US" sz="2000" dirty="0"/>
+                        <a:t>6</a:t>
+                      </a:r>
+                    </a:p>
+                    <a:p>
+                      <a:pPr marL="0" marR="0" lvl="0" indent="0" algn="ctr" defTabSz="914400" rtl="0" eaLnBrk="1" fontAlgn="auto" latinLnBrk="0" hangingPunct="1">
+                        <a:lnSpc>
+                          <a:spcPct val="100000"/>
+                        </a:lnSpc>
+                        <a:spcBef>
+                          <a:spcPts val="0"/>
+                        </a:spcBef>
+                        <a:spcAft>
+                          <a:spcPts val="0"/>
+                        </a:spcAft>
+                        <a:buClrTx/>
+                        <a:buSzTx/>
+                        <a:buFontTx/>
+                        <a:buNone/>
+                        <a:tabLst/>
+                        <a:defRPr/>
+                      </a:pPr>
+                      <a:r>
+                        <a:rPr lang="en-US" sz="2000" b="0" dirty="0">
+                          <a:solidFill>
+                            <a:schemeClr val="tx2">
+                              <a:lumMod val="75000"/>
+                              <a:lumOff val="25000"/>
+                            </a:schemeClr>
+                          </a:solidFill>
+                        </a:rPr>
+                        <a:t>0x7020</a:t>
+                      </a:r>
+                    </a:p>
+                  </a:txBody>
+                  <a:tcPr/>
+                </a:tc>
+                <a:extLst>
+                  <a:ext uri="{0D108BD9-81ED-4DB2-BD59-A6C34878D82A}">
+                    <a16:rowId xmlns:a16="http://schemas.microsoft.com/office/drawing/2014/main" val="2377271649"/>
+                  </a:ext>
+                </a:extLst>
+              </a:tr>
+            </a:tbl>
+          </a:graphicData>
+        </a:graphic>
+      </p:graphicFrame>
+      <p:sp>
+        <p:nvSpPr>
+          <p:cNvPr id="45" name="TextBox 44">
+            <a:extLst>
+              <a:ext uri="{FF2B5EF4-FFF2-40B4-BE49-F238E27FC236}">
+                <a16:creationId xmlns:a16="http://schemas.microsoft.com/office/drawing/2014/main" id="{44DDB77C-0A02-2022-0660-F22374DFF9AF}"/>
+              </a:ext>
+            </a:extLst>
+          </p:cNvPr>
+          <p:cNvSpPr txBox="1"/>
+          <p:nvPr/>
+        </p:nvSpPr>
+        <p:spPr>
+          <a:xfrm>
+            <a:off x="7728514" y="4620094"/>
+            <a:ext cx="2681926" cy="400110"/>
+          </a:xfrm>
+          <a:prstGeom prst="rect">
+            <a:avLst/>
+          </a:prstGeom>
+          <a:noFill/>
+        </p:spPr>
+        <p:txBody>
+          <a:bodyPr wrap="square">
+            <a:spAutoFit/>
+          </a:bodyPr>
+          <a:lstStyle/>
+          <a:p>
+            <a:pPr algn="ctr"/>
+            <a:r>
+              <a:rPr lang="en-US" sz="2000" dirty="0">
+                <a:solidFill>
+                  <a:schemeClr val="tx2">
+                    <a:lumMod val="75000"/>
+                    <a:lumOff val="25000"/>
+                  </a:schemeClr>
+                </a:solidFill>
+              </a:rPr>
+              <a:t>(stack 0x7000)</a:t>
+            </a:r>
+          </a:p>
+        </p:txBody>
+      </p:sp>
+      <p:sp>
+        <p:nvSpPr>
+          <p:cNvPr id="49" name="Left Bracket 48">
+            <a:extLst>
+              <a:ext uri="{FF2B5EF4-FFF2-40B4-BE49-F238E27FC236}">
+                <a16:creationId xmlns:a16="http://schemas.microsoft.com/office/drawing/2014/main" id="{1D45267C-F2A6-CAAD-2BF9-C81BD1BA6976}"/>
+              </a:ext>
+            </a:extLst>
+          </p:cNvPr>
+          <p:cNvSpPr/>
+          <p:nvPr/>
+        </p:nvSpPr>
+        <p:spPr>
+          <a:xfrm rot="16200000">
+            <a:off x="7422307" y="4720371"/>
+            <a:ext cx="304693" cy="2752623"/>
+          </a:xfrm>
+          <a:prstGeom prst="leftBracket">
+            <a:avLst/>
+          </a:prstGeom>
+        </p:spPr>
+        <p:style>
+          <a:lnRef idx="2">
+            <a:schemeClr val="dk1"/>
+          </a:lnRef>
+          <a:fillRef idx="0">
+            <a:schemeClr val="dk1"/>
+          </a:fillRef>
+          <a:effectRef idx="1">
+            <a:schemeClr val="dk1"/>
+          </a:effectRef>
+          <a:fontRef idx="minor">
+            <a:schemeClr val="tx1"/>
+          </a:fontRef>
+        </p:style>
+        <p:txBody>
+          <a:bodyPr rtlCol="0" anchor="ctr"/>
+          <a:lstStyle/>
+          <a:p>
+            <a:pPr algn="ctr"/>
+            <a:endParaRPr lang="en-US"/>
+          </a:p>
+        </p:txBody>
+      </p:sp>
+      <p:sp>
+        <p:nvSpPr>
+          <p:cNvPr id="50" name="Left Bracket 49">
+            <a:extLst>
+              <a:ext uri="{FF2B5EF4-FFF2-40B4-BE49-F238E27FC236}">
+                <a16:creationId xmlns:a16="http://schemas.microsoft.com/office/drawing/2014/main" id="{5FFB89F9-5972-CE72-F1EE-85967D00DC78}"/>
+              </a:ext>
+            </a:extLst>
+          </p:cNvPr>
+          <p:cNvSpPr/>
+          <p:nvPr/>
+        </p:nvSpPr>
+        <p:spPr>
+          <a:xfrm rot="16200000">
+            <a:off x="10410602" y="4720371"/>
+            <a:ext cx="304693" cy="2752623"/>
+          </a:xfrm>
+          <a:prstGeom prst="leftBracket">
+            <a:avLst/>
+          </a:prstGeom>
+        </p:spPr>
+        <p:style>
+          <a:lnRef idx="2">
+            <a:schemeClr val="dk1"/>
+          </a:lnRef>
+          <a:fillRef idx="0">
+            <a:schemeClr val="dk1"/>
+          </a:fillRef>
+          <a:effectRef idx="1">
+            <a:schemeClr val="dk1"/>
+          </a:effectRef>
+          <a:fontRef idx="minor">
+            <a:schemeClr val="tx1"/>
+          </a:fontRef>
+        </p:style>
+        <p:txBody>
+          <a:bodyPr rtlCol="0" anchor="ctr"/>
+          <a:lstStyle/>
+          <a:p>
+            <a:pPr algn="ctr"/>
+            <a:endParaRPr lang="en-US"/>
+          </a:p>
+        </p:txBody>
+      </p:sp>
+      <p:sp>
+        <p:nvSpPr>
+          <p:cNvPr id="51" name="TextBox 50">
+            <a:extLst>
+              <a:ext uri="{FF2B5EF4-FFF2-40B4-BE49-F238E27FC236}">
+                <a16:creationId xmlns:a16="http://schemas.microsoft.com/office/drawing/2014/main" id="{EDE1640F-98A9-36B4-22AD-A141996EBCF4}"/>
+              </a:ext>
+            </a:extLst>
+          </p:cNvPr>
+          <p:cNvSpPr txBox="1"/>
+          <p:nvPr/>
+        </p:nvSpPr>
+        <p:spPr>
+          <a:xfrm>
+            <a:off x="7011127" y="6294237"/>
+            <a:ext cx="1127051" cy="400110"/>
+          </a:xfrm>
+          <a:prstGeom prst="rect">
+            <a:avLst/>
+          </a:prstGeom>
+          <a:noFill/>
+        </p:spPr>
+        <p:txBody>
+          <a:bodyPr wrap="square" rtlCol="0">
+            <a:spAutoFit/>
+          </a:bodyPr>
+          <a:lstStyle/>
+          <a:p>
+            <a:pPr algn="ctr"/>
+            <a:r>
+              <a:rPr lang="en-US" sz="2000" dirty="0"/>
+              <a:t>row 0</a:t>
+            </a:r>
+          </a:p>
+        </p:txBody>
+      </p:sp>
+      <p:sp>
+        <p:nvSpPr>
+          <p:cNvPr id="52" name="TextBox 51">
+            <a:extLst>
+              <a:ext uri="{FF2B5EF4-FFF2-40B4-BE49-F238E27FC236}">
+                <a16:creationId xmlns:a16="http://schemas.microsoft.com/office/drawing/2014/main" id="{35C28F24-B987-8802-E87F-41DC185641A6}"/>
+              </a:ext>
+            </a:extLst>
+          </p:cNvPr>
+          <p:cNvSpPr txBox="1"/>
+          <p:nvPr/>
+        </p:nvSpPr>
+        <p:spPr>
+          <a:xfrm>
+            <a:off x="9846914" y="6311386"/>
+            <a:ext cx="1127051" cy="400110"/>
+          </a:xfrm>
+          <a:prstGeom prst="rect">
+            <a:avLst/>
+          </a:prstGeom>
+          <a:noFill/>
+        </p:spPr>
+        <p:txBody>
+          <a:bodyPr wrap="square" rtlCol="0">
+            <a:spAutoFit/>
+          </a:bodyPr>
+          <a:lstStyle/>
+          <a:p>
+            <a:pPr algn="ctr"/>
+            <a:r>
+              <a:rPr lang="en-US" sz="2000" dirty="0"/>
+              <a:t>row 1</a:t>
+            </a:r>
+          </a:p>
+        </p:txBody>
+      </p:sp>
+      <p:graphicFrame>
+        <p:nvGraphicFramePr>
+          <p:cNvPr id="56" name="Table 55">
+            <a:extLst>
+              <a:ext uri="{FF2B5EF4-FFF2-40B4-BE49-F238E27FC236}">
+                <a16:creationId xmlns:a16="http://schemas.microsoft.com/office/drawing/2014/main" id="{4DC62E9C-26CA-A712-EC2C-05478245BBDB}"/>
+              </a:ext>
+            </a:extLst>
+          </p:cNvPr>
+          <p:cNvGraphicFramePr>
+            <a:graphicFrameLocks noGrp="1"/>
+          </p:cNvGraphicFramePr>
+          <p:nvPr>
+            <p:extLst>
+              <p:ext uri="{D42A27DB-BD31-4B8C-83A1-F6EECF244321}">
+                <p14:modId xmlns:p14="http://schemas.microsoft.com/office/powerpoint/2010/main" val="821367378"/>
+              </p:ext>
+            </p:extLst>
+          </p:nvPr>
+        </p:nvGraphicFramePr>
+        <p:xfrm>
+          <a:off x="2138093" y="5161978"/>
+          <a:ext cx="3190131" cy="707886"/>
+        </p:xfrm>
+        <a:graphic>
+          <a:graphicData uri="http://schemas.openxmlformats.org/drawingml/2006/table">
+            <a:tbl>
+              <a:tblPr firstRow="1" bandRow="1">
+                <a:tableStyleId>{5940675A-B579-460E-94D1-54222C63F5DA}</a:tableStyleId>
+              </a:tblPr>
+              <a:tblGrid>
+                <a:gridCol w="1063377">
+                  <a:extLst>
+                    <a:ext uri="{9D8B030D-6E8A-4147-A177-3AD203B41FA5}">
+                      <a16:colId xmlns:a16="http://schemas.microsoft.com/office/drawing/2014/main" val="2803643667"/>
+                    </a:ext>
+                  </a:extLst>
+                </a:gridCol>
+                <a:gridCol w="1063377">
+                  <a:extLst>
+                    <a:ext uri="{9D8B030D-6E8A-4147-A177-3AD203B41FA5}">
+                      <a16:colId xmlns:a16="http://schemas.microsoft.com/office/drawing/2014/main" val="2661749885"/>
+                    </a:ext>
+                  </a:extLst>
+                </a:gridCol>
+                <a:gridCol w="1063377">
+                  <a:extLst>
+                    <a:ext uri="{9D8B030D-6E8A-4147-A177-3AD203B41FA5}">
+                      <a16:colId xmlns:a16="http://schemas.microsoft.com/office/drawing/2014/main" val="1057916831"/>
+                    </a:ext>
+                  </a:extLst>
+                </a:gridCol>
+              </a:tblGrid>
+              <a:tr h="707886">
+                <a:tc>
+                  <a:txBody>
+                    <a:bodyPr/>
+                    <a:lstStyle/>
+                    <a:p>
+                      <a:pPr marL="0" marR="0" lvl="0" indent="0" algn="ctr" defTabSz="914400" rtl="0" eaLnBrk="1" fontAlgn="auto" latinLnBrk="0" hangingPunct="1">
+                        <a:lnSpc>
+                          <a:spcPct val="100000"/>
+                        </a:lnSpc>
+                        <a:spcBef>
+                          <a:spcPts val="0"/>
+                        </a:spcBef>
+                        <a:spcAft>
+                          <a:spcPts val="0"/>
+                        </a:spcAft>
+                        <a:buClrTx/>
+                        <a:buSzTx/>
+                        <a:buFontTx/>
+                        <a:buNone/>
+                        <a:tabLst/>
+                        <a:defRPr/>
+                      </a:pPr>
+                      <a:r>
+                        <a:rPr lang="en-US" sz="2000" b="0" dirty="0">
+                          <a:solidFill>
+                            <a:schemeClr val="tx1"/>
+                          </a:solidFill>
+                        </a:rPr>
+                        <a:t>1</a:t>
+                      </a:r>
+                    </a:p>
+                    <a:p>
+                      <a:pPr marL="0" marR="0" lvl="0" indent="0" algn="ctr" defTabSz="914400" rtl="0" eaLnBrk="1" fontAlgn="auto" latinLnBrk="0" hangingPunct="1">
+                        <a:lnSpc>
+                          <a:spcPct val="100000"/>
+                        </a:lnSpc>
+                        <a:spcBef>
+                          <a:spcPts val="0"/>
+                        </a:spcBef>
+                        <a:spcAft>
+                          <a:spcPts val="0"/>
+                        </a:spcAft>
+                        <a:buClrTx/>
+                        <a:buSzTx/>
+                        <a:buFontTx/>
+                        <a:buNone/>
+                        <a:tabLst/>
+                        <a:defRPr/>
+                      </a:pPr>
+                      <a:r>
+                        <a:rPr lang="en-US" sz="2000" b="0" dirty="0">
+                          <a:solidFill>
+                            <a:schemeClr val="tx2">
+                              <a:lumMod val="75000"/>
+                              <a:lumOff val="25000"/>
+                            </a:schemeClr>
+                          </a:solidFill>
+                        </a:rPr>
+                        <a:t>0x7000</a:t>
+                      </a:r>
+                    </a:p>
+                  </a:txBody>
+                  <a:tcPr/>
+                </a:tc>
+                <a:tc>
+                  <a:txBody>
+                    <a:bodyPr/>
+                    <a:lstStyle/>
+                    <a:p>
+                      <a:pPr algn="ctr"/>
+                      <a:r>
+                        <a:rPr lang="en-US" sz="2000" dirty="0"/>
+                        <a:t>2</a:t>
+                      </a:r>
+                    </a:p>
+                    <a:p>
+                      <a:pPr marL="0" marR="0" lvl="0" indent="0" algn="ctr" defTabSz="914400" rtl="0" eaLnBrk="1" fontAlgn="auto" latinLnBrk="0" hangingPunct="1">
+                        <a:lnSpc>
+                          <a:spcPct val="100000"/>
+                        </a:lnSpc>
+                        <a:spcBef>
+                          <a:spcPts val="0"/>
+                        </a:spcBef>
+                        <a:spcAft>
+                          <a:spcPts val="0"/>
+                        </a:spcAft>
+                        <a:buClrTx/>
+                        <a:buSzTx/>
+                        <a:buFontTx/>
+                        <a:buNone/>
+                        <a:tabLst/>
+                        <a:defRPr/>
+                      </a:pPr>
+                      <a:r>
+                        <a:rPr lang="en-US" sz="2000" b="0" dirty="0">
+                          <a:solidFill>
+                            <a:schemeClr val="tx2">
+                              <a:lumMod val="75000"/>
+                              <a:lumOff val="25000"/>
+                            </a:schemeClr>
+                          </a:solidFill>
+                        </a:rPr>
+                        <a:t>0x7004</a:t>
+                      </a:r>
+                    </a:p>
+                  </a:txBody>
+                  <a:tcPr/>
+                </a:tc>
+                <a:tc>
+                  <a:txBody>
+                    <a:bodyPr/>
+                    <a:lstStyle/>
+                    <a:p>
+                      <a:pPr algn="ctr"/>
+                      <a:r>
+                        <a:rPr lang="en-US" sz="2000" dirty="0"/>
+                        <a:t>3</a:t>
+                      </a:r>
+                    </a:p>
+                    <a:p>
+                      <a:pPr marL="0" marR="0" lvl="0" indent="0" algn="ctr" defTabSz="914400" rtl="0" eaLnBrk="1" fontAlgn="auto" latinLnBrk="0" hangingPunct="1">
+                        <a:lnSpc>
+                          <a:spcPct val="100000"/>
+                        </a:lnSpc>
+                        <a:spcBef>
+                          <a:spcPts val="0"/>
+                        </a:spcBef>
+                        <a:spcAft>
+                          <a:spcPts val="0"/>
+                        </a:spcAft>
+                        <a:buClrTx/>
+                        <a:buSzTx/>
+                        <a:buFontTx/>
+                        <a:buNone/>
+                        <a:tabLst/>
+                        <a:defRPr/>
+                      </a:pPr>
+                      <a:r>
+                        <a:rPr lang="en-US" sz="2000" b="0" dirty="0">
+                          <a:solidFill>
+                            <a:schemeClr val="tx2">
+                              <a:lumMod val="75000"/>
+                              <a:lumOff val="25000"/>
+                            </a:schemeClr>
+                          </a:solidFill>
+                        </a:rPr>
+                        <a:t>0x7008</a:t>
+                      </a:r>
+                    </a:p>
+                  </a:txBody>
+                  <a:tcPr/>
+                </a:tc>
+                <a:extLst>
+                  <a:ext uri="{0D108BD9-81ED-4DB2-BD59-A6C34878D82A}">
+                    <a16:rowId xmlns:a16="http://schemas.microsoft.com/office/drawing/2014/main" val="2377271649"/>
+                  </a:ext>
+                </a:extLst>
+              </a:tr>
+            </a:tbl>
+          </a:graphicData>
+        </a:graphic>
+      </p:graphicFrame>
+      <p:sp>
+        <p:nvSpPr>
+          <p:cNvPr id="57" name="TextBox 56">
+            <a:extLst>
+              <a:ext uri="{FF2B5EF4-FFF2-40B4-BE49-F238E27FC236}">
+                <a16:creationId xmlns:a16="http://schemas.microsoft.com/office/drawing/2014/main" id="{199F5A99-003C-A1D2-FA17-B448763CCB1B}"/>
+              </a:ext>
+            </a:extLst>
+          </p:cNvPr>
+          <p:cNvSpPr txBox="1"/>
+          <p:nvPr/>
+        </p:nvSpPr>
+        <p:spPr>
+          <a:xfrm>
+            <a:off x="2392194" y="4636571"/>
+            <a:ext cx="2681926" cy="400110"/>
+          </a:xfrm>
+          <a:prstGeom prst="rect">
+            <a:avLst/>
+          </a:prstGeom>
+          <a:noFill/>
+        </p:spPr>
+        <p:txBody>
+          <a:bodyPr wrap="square">
+            <a:spAutoFit/>
+          </a:bodyPr>
+          <a:lstStyle/>
+          <a:p>
+            <a:pPr algn="ctr"/>
+            <a:r>
+              <a:rPr lang="en-US" sz="2000" dirty="0">
+                <a:solidFill>
+                  <a:schemeClr val="tx2">
+                    <a:lumMod val="75000"/>
+                    <a:lumOff val="25000"/>
+                  </a:schemeClr>
+                </a:solidFill>
+              </a:rPr>
+              <a:t>(heap 0x7000)</a:t>
+            </a:r>
+          </a:p>
+        </p:txBody>
+      </p:sp>
+      <p:sp>
+        <p:nvSpPr>
+          <p:cNvPr id="59" name="Rectangle 58">
+            <a:extLst>
+              <a:ext uri="{FF2B5EF4-FFF2-40B4-BE49-F238E27FC236}">
+                <a16:creationId xmlns:a16="http://schemas.microsoft.com/office/drawing/2014/main" id="{B83517C3-4FB0-A1BB-6C90-2A21566467BA}"/>
+              </a:ext>
+            </a:extLst>
+          </p:cNvPr>
+          <p:cNvSpPr/>
+          <p:nvPr/>
+        </p:nvSpPr>
+        <p:spPr>
+          <a:xfrm>
+            <a:off x="9427" y="5199686"/>
+            <a:ext cx="1424763" cy="543414"/>
+          </a:xfrm>
+          <a:prstGeom prst="rect">
+            <a:avLst/>
+          </a:prstGeom>
+          <a:noFill/>
+        </p:spPr>
+        <p:style>
+          <a:lnRef idx="2">
+            <a:schemeClr val="accent1">
+              <a:shade val="15000"/>
+            </a:schemeClr>
+          </a:lnRef>
+          <a:fillRef idx="1">
+            <a:schemeClr val="accent1"/>
+          </a:fillRef>
+          <a:effectRef idx="0">
+            <a:schemeClr val="accent1"/>
+          </a:effectRef>
+          <a:fontRef idx="minor">
+            <a:schemeClr val="lt1"/>
+          </a:fontRef>
+        </p:style>
+        <p:txBody>
+          <a:bodyPr rtlCol="0" anchor="ctr"/>
+          <a:lstStyle/>
+          <a:p>
+            <a:pPr algn="ctr"/>
+            <a:r>
+              <a:rPr lang="en-US" sz="2000" dirty="0">
+                <a:solidFill>
+                  <a:schemeClr val="tx1"/>
+                </a:solidFill>
+              </a:rPr>
+              <a:t>0x7000</a:t>
+            </a:r>
+          </a:p>
+        </p:txBody>
+      </p:sp>
+      <p:sp>
+        <p:nvSpPr>
+          <p:cNvPr id="60" name="TextBox 59">
+            <a:extLst>
+              <a:ext uri="{FF2B5EF4-FFF2-40B4-BE49-F238E27FC236}">
+                <a16:creationId xmlns:a16="http://schemas.microsoft.com/office/drawing/2014/main" id="{CC319C11-23A0-A81D-03EE-61D19E00F053}"/>
+              </a:ext>
+            </a:extLst>
+          </p:cNvPr>
+          <p:cNvSpPr txBox="1"/>
+          <p:nvPr/>
+        </p:nvSpPr>
+        <p:spPr>
+          <a:xfrm>
+            <a:off x="158281" y="4753118"/>
+            <a:ext cx="1127051" cy="400110"/>
+          </a:xfrm>
+          <a:prstGeom prst="rect">
+            <a:avLst/>
+          </a:prstGeom>
+          <a:noFill/>
+        </p:spPr>
+        <p:txBody>
+          <a:bodyPr wrap="square" rtlCol="0">
+            <a:spAutoFit/>
+          </a:bodyPr>
+          <a:lstStyle/>
+          <a:p>
+            <a:pPr algn="ctr"/>
+            <a:r>
+              <a:rPr lang="en-US" sz="2000" dirty="0" err="1"/>
+              <a:t>arr</a:t>
+            </a:r>
+            <a:endParaRPr lang="en-US" sz="2000" dirty="0"/>
+          </a:p>
+        </p:txBody>
+      </p:sp>
+      <p:cxnSp>
+        <p:nvCxnSpPr>
+          <p:cNvPr id="61" name="Straight Arrow Connector 60">
+            <a:extLst>
+              <a:ext uri="{FF2B5EF4-FFF2-40B4-BE49-F238E27FC236}">
+                <a16:creationId xmlns:a16="http://schemas.microsoft.com/office/drawing/2014/main" id="{8E94A2F5-3BC0-EFA4-6D89-0D2269A56AD4}"/>
+              </a:ext>
+            </a:extLst>
+          </p:cNvPr>
+          <p:cNvCxnSpPr>
+            <a:cxnSpLocks/>
+          </p:cNvCxnSpPr>
+          <p:nvPr/>
+        </p:nvCxnSpPr>
+        <p:spPr>
+          <a:xfrm>
+            <a:off x="1459746" y="5476610"/>
+            <a:ext cx="620216" cy="0"/>
+          </a:xfrm>
+          <a:prstGeom prst="straightConnector1">
+            <a:avLst/>
+          </a:prstGeom>
+          <a:ln>
+            <a:tailEnd type="triangle"/>
+          </a:ln>
+        </p:spPr>
+        <p:style>
+          <a:lnRef idx="2">
+            <a:schemeClr val="dk1"/>
+          </a:lnRef>
+          <a:fillRef idx="0">
+            <a:schemeClr val="dk1"/>
+          </a:fillRef>
+          <a:effectRef idx="1">
+            <a:schemeClr val="dk1"/>
+          </a:effectRef>
+          <a:fontRef idx="minor">
+            <a:schemeClr val="tx1"/>
+          </a:fontRef>
+        </p:style>
+      </p:cxnSp>
+    </p:spTree>
+    <p:extLst>
+      <p:ext uri="{BB962C8B-B14F-4D97-AF65-F5344CB8AC3E}">
+        <p14:creationId xmlns:p14="http://schemas.microsoft.com/office/powerpoint/2010/main" val="723341560"/>
+      </p:ext>
+    </p:extLst>
+  </p:cSld>
+  <p:clrMapOvr>
+    <a:masterClrMapping/>
+  </p:clrMapOvr>
+</p:sld>
+</file>
+
 <file path=ppt/slides/slide2.xml><?xml version="1.0" encoding="utf-8"?>
 <p:sld xmlns:a="http://schemas.openxmlformats.org/drawingml/2006/main" xmlns:r="http://schemas.openxmlformats.org/officeDocument/2006/relationships" xmlns:p="http://schemas.openxmlformats.org/presentationml/2006/main">
   <p:cSld>
@@ -8461,6 +13838,426 @@
     <p:extLst>
       <p:ext uri="{BB962C8B-B14F-4D97-AF65-F5344CB8AC3E}">
         <p14:creationId xmlns:p14="http://schemas.microsoft.com/office/powerpoint/2010/main" val="2816117596"/>
+      </p:ext>
+    </p:extLst>
+  </p:cSld>
+  <p:clrMapOvr>
+    <a:masterClrMapping/>
+  </p:clrMapOvr>
+</p:sld>
+</file>
+
+<file path=ppt/slides/slide20.xml><?xml version="1.0" encoding="utf-8"?>
+<p:sld xmlns:a="http://schemas.openxmlformats.org/drawingml/2006/main" xmlns:r="http://schemas.openxmlformats.org/officeDocument/2006/relationships" xmlns:p="http://schemas.openxmlformats.org/presentationml/2006/main">
+  <p:cSld>
+    <p:spTree>
+      <p:nvGrpSpPr>
+        <p:cNvPr id="1" name=""/>
+        <p:cNvGrpSpPr/>
+        <p:nvPr/>
+      </p:nvGrpSpPr>
+      <p:grpSpPr>
+        <a:xfrm>
+          <a:off x="0" y="0"/>
+          <a:ext cx="0" cy="0"/>
+          <a:chOff x="0" y="0"/>
+          <a:chExt cx="0" cy="0"/>
+        </a:xfrm>
+      </p:grpSpPr>
+      <p:graphicFrame>
+        <p:nvGraphicFramePr>
+          <p:cNvPr id="4" name="Table 3">
+            <a:extLst>
+              <a:ext uri="{FF2B5EF4-FFF2-40B4-BE49-F238E27FC236}">
+                <a16:creationId xmlns:a16="http://schemas.microsoft.com/office/drawing/2014/main" id="{5A077A89-EBCF-B5E1-7BC8-6F5CF8EEC3EF}"/>
+              </a:ext>
+            </a:extLst>
+          </p:cNvPr>
+          <p:cNvGraphicFramePr>
+            <a:graphicFrameLocks noGrp="1"/>
+          </p:cNvGraphicFramePr>
+          <p:nvPr>
+            <p:extLst>
+              <p:ext uri="{D42A27DB-BD31-4B8C-83A1-F6EECF244321}">
+                <p14:modId xmlns:p14="http://schemas.microsoft.com/office/powerpoint/2010/main" val="188010331"/>
+              </p:ext>
+            </p:extLst>
+          </p:nvPr>
+        </p:nvGraphicFramePr>
+        <p:xfrm>
+          <a:off x="5099901" y="3006203"/>
+          <a:ext cx="6221688" cy="1005840"/>
+        </p:xfrm>
+        <a:graphic>
+          <a:graphicData uri="http://schemas.openxmlformats.org/drawingml/2006/table">
+            <a:tbl>
+              <a:tblPr firstRow="1" bandRow="1">
+                <a:tableStyleId>{5940675A-B579-460E-94D1-54222C63F5DA}</a:tableStyleId>
+              </a:tblPr>
+              <a:tblGrid>
+                <a:gridCol w="2073896">
+                  <a:extLst>
+                    <a:ext uri="{9D8B030D-6E8A-4147-A177-3AD203B41FA5}">
+                      <a16:colId xmlns:a16="http://schemas.microsoft.com/office/drawing/2014/main" val="2803643667"/>
+                    </a:ext>
+                  </a:extLst>
+                </a:gridCol>
+                <a:gridCol w="2073896">
+                  <a:extLst>
+                    <a:ext uri="{9D8B030D-6E8A-4147-A177-3AD203B41FA5}">
+                      <a16:colId xmlns:a16="http://schemas.microsoft.com/office/drawing/2014/main" val="2661749885"/>
+                    </a:ext>
+                  </a:extLst>
+                </a:gridCol>
+                <a:gridCol w="2073896">
+                  <a:extLst>
+                    <a:ext uri="{9D8B030D-6E8A-4147-A177-3AD203B41FA5}">
+                      <a16:colId xmlns:a16="http://schemas.microsoft.com/office/drawing/2014/main" val="1057916831"/>
+                    </a:ext>
+                  </a:extLst>
+                </a:gridCol>
+              </a:tblGrid>
+              <a:tr h="707886">
+                <a:tc>
+                  <a:txBody>
+                    <a:bodyPr/>
+                    <a:lstStyle/>
+                    <a:p>
+                      <a:pPr marL="0" marR="0" lvl="0" indent="0" algn="ctr" defTabSz="914400" rtl="0" eaLnBrk="1" fontAlgn="auto" latinLnBrk="0" hangingPunct="1">
+                        <a:lnSpc>
+                          <a:spcPct val="100000"/>
+                        </a:lnSpc>
+                        <a:spcBef>
+                          <a:spcPts val="0"/>
+                        </a:spcBef>
+                        <a:spcAft>
+                          <a:spcPts val="0"/>
+                        </a:spcAft>
+                        <a:buClrTx/>
+                        <a:buSzTx/>
+                        <a:buFontTx/>
+                        <a:buNone/>
+                        <a:tabLst/>
+                        <a:defRPr/>
+                      </a:pPr>
+                      <a:r>
+                        <a:rPr lang="en-US" sz="2000" b="0" dirty="0">
+                          <a:solidFill>
+                            <a:schemeClr val="tx1"/>
+                          </a:solidFill>
+                        </a:rPr>
+                        <a:t>State </a:t>
+                      </a:r>
+                    </a:p>
+                    <a:p>
+                      <a:pPr marL="0" marR="0" lvl="0" indent="0" algn="ctr" defTabSz="914400" rtl="0" eaLnBrk="1" fontAlgn="auto" latinLnBrk="0" hangingPunct="1">
+                        <a:lnSpc>
+                          <a:spcPct val="100000"/>
+                        </a:lnSpc>
+                        <a:spcBef>
+                          <a:spcPts val="0"/>
+                        </a:spcBef>
+                        <a:spcAft>
+                          <a:spcPts val="0"/>
+                        </a:spcAft>
+                        <a:buClrTx/>
+                        <a:buSzTx/>
+                        <a:buFontTx/>
+                        <a:buNone/>
+                        <a:tabLst/>
+                        <a:defRPr/>
+                      </a:pPr>
+                      <a:r>
+                        <a:rPr lang="en-US" sz="2000" b="0" dirty="0">
+                          <a:solidFill>
+                            <a:schemeClr val="tx1"/>
+                          </a:solidFill>
+                        </a:rPr>
+                        <a:t>"Alabama"</a:t>
+                      </a:r>
+                    </a:p>
+                    <a:p>
+                      <a:pPr marL="0" marR="0" lvl="0" indent="0" algn="ctr" defTabSz="914400" rtl="0" eaLnBrk="1" fontAlgn="auto" latinLnBrk="0" hangingPunct="1">
+                        <a:lnSpc>
+                          <a:spcPct val="100000"/>
+                        </a:lnSpc>
+                        <a:spcBef>
+                          <a:spcPts val="0"/>
+                        </a:spcBef>
+                        <a:spcAft>
+                          <a:spcPts val="0"/>
+                        </a:spcAft>
+                        <a:buClrTx/>
+                        <a:buSzTx/>
+                        <a:buFontTx/>
+                        <a:buNone/>
+                        <a:tabLst/>
+                        <a:defRPr/>
+                      </a:pPr>
+                      <a:r>
+                        <a:rPr lang="en-US" sz="2000" b="0" dirty="0">
+                          <a:solidFill>
+                            <a:schemeClr val="tx2">
+                              <a:lumMod val="75000"/>
+                              <a:lumOff val="25000"/>
+                            </a:schemeClr>
+                          </a:solidFill>
+                        </a:rPr>
+                        <a:t>0x9000</a:t>
+                      </a:r>
+                    </a:p>
+                  </a:txBody>
+                  <a:tcPr/>
+                </a:tc>
+                <a:tc>
+                  <a:txBody>
+                    <a:bodyPr/>
+                    <a:lstStyle/>
+                    <a:p>
+                      <a:pPr algn="ctr"/>
+                      <a:r>
+                        <a:rPr lang="en-US" sz="2000" dirty="0"/>
+                        <a:t>State</a:t>
+                      </a:r>
+                    </a:p>
+                    <a:p>
+                      <a:pPr algn="ctr"/>
+                      <a:r>
+                        <a:rPr lang="en-US" sz="2000" dirty="0"/>
+                        <a:t>"Alabama"</a:t>
+                      </a:r>
+                    </a:p>
+                    <a:p>
+                      <a:pPr marL="0" marR="0" lvl="0" indent="0" algn="ctr" defTabSz="914400" rtl="0" eaLnBrk="1" fontAlgn="auto" latinLnBrk="0" hangingPunct="1">
+                        <a:lnSpc>
+                          <a:spcPct val="100000"/>
+                        </a:lnSpc>
+                        <a:spcBef>
+                          <a:spcPts val="0"/>
+                        </a:spcBef>
+                        <a:spcAft>
+                          <a:spcPts val="0"/>
+                        </a:spcAft>
+                        <a:buClrTx/>
+                        <a:buSzTx/>
+                        <a:buFontTx/>
+                        <a:buNone/>
+                        <a:tabLst/>
+                        <a:defRPr/>
+                      </a:pPr>
+                      <a:r>
+                        <a:rPr lang="en-US" sz="2000" b="0" dirty="0">
+                          <a:solidFill>
+                            <a:schemeClr val="tx2">
+                              <a:lumMod val="75000"/>
+                              <a:lumOff val="25000"/>
+                            </a:schemeClr>
+                          </a:solidFill>
+                        </a:rPr>
+                        <a:t>next address</a:t>
+                      </a:r>
+                    </a:p>
+                  </a:txBody>
+                  <a:tcPr/>
+                </a:tc>
+                <a:tc>
+                  <a:txBody>
+                    <a:bodyPr/>
+                    <a:lstStyle/>
+                    <a:p>
+                      <a:pPr algn="ctr"/>
+                      <a:r>
+                        <a:rPr lang="en-US" sz="2000" dirty="0"/>
+                        <a:t>State</a:t>
+                      </a:r>
+                    </a:p>
+                    <a:p>
+                      <a:pPr algn="ctr"/>
+                      <a:r>
+                        <a:rPr lang="en-US" sz="2000" dirty="0"/>
+                        <a:t>"Alabama"</a:t>
+                      </a:r>
+                    </a:p>
+                    <a:p>
+                      <a:pPr marL="0" marR="0" lvl="0" indent="0" algn="ctr" defTabSz="914400" rtl="0" eaLnBrk="1" fontAlgn="auto" latinLnBrk="0" hangingPunct="1">
+                        <a:lnSpc>
+                          <a:spcPct val="100000"/>
+                        </a:lnSpc>
+                        <a:spcBef>
+                          <a:spcPts val="0"/>
+                        </a:spcBef>
+                        <a:spcAft>
+                          <a:spcPts val="0"/>
+                        </a:spcAft>
+                        <a:buClrTx/>
+                        <a:buSzTx/>
+                        <a:buFontTx/>
+                        <a:buNone/>
+                        <a:tabLst/>
+                        <a:defRPr/>
+                      </a:pPr>
+                      <a:r>
+                        <a:rPr lang="en-US" sz="2000" b="0" dirty="0">
+                          <a:solidFill>
+                            <a:schemeClr val="tx2">
+                              <a:lumMod val="75000"/>
+                              <a:lumOff val="25000"/>
+                            </a:schemeClr>
+                          </a:solidFill>
+                        </a:rPr>
+                        <a:t>next address</a:t>
+                      </a:r>
+                    </a:p>
+                  </a:txBody>
+                  <a:tcPr/>
+                </a:tc>
+                <a:extLst>
+                  <a:ext uri="{0D108BD9-81ED-4DB2-BD59-A6C34878D82A}">
+                    <a16:rowId xmlns:a16="http://schemas.microsoft.com/office/drawing/2014/main" val="2377271649"/>
+                  </a:ext>
+                </a:extLst>
+              </a:tr>
+            </a:tbl>
+          </a:graphicData>
+        </a:graphic>
+      </p:graphicFrame>
+      <p:sp>
+        <p:nvSpPr>
+          <p:cNvPr id="5" name="TextBox 4">
+            <a:extLst>
+              <a:ext uri="{FF2B5EF4-FFF2-40B4-BE49-F238E27FC236}">
+                <a16:creationId xmlns:a16="http://schemas.microsoft.com/office/drawing/2014/main" id="{C8AEB86D-A076-D377-5713-DB140F8200CC}"/>
+              </a:ext>
+            </a:extLst>
+          </p:cNvPr>
+          <p:cNvSpPr txBox="1"/>
+          <p:nvPr/>
+        </p:nvSpPr>
+        <p:spPr>
+          <a:xfrm>
+            <a:off x="6869782" y="2386528"/>
+            <a:ext cx="2681926" cy="400110"/>
+          </a:xfrm>
+          <a:prstGeom prst="rect">
+            <a:avLst/>
+          </a:prstGeom>
+          <a:noFill/>
+        </p:spPr>
+        <p:txBody>
+          <a:bodyPr wrap="square">
+            <a:spAutoFit/>
+          </a:bodyPr>
+          <a:lstStyle/>
+          <a:p>
+            <a:pPr algn="ctr"/>
+            <a:r>
+              <a:rPr lang="en-US" sz="2000" dirty="0">
+                <a:solidFill>
+                  <a:schemeClr val="tx2">
+                    <a:lumMod val="75000"/>
+                    <a:lumOff val="25000"/>
+                  </a:schemeClr>
+                </a:solidFill>
+              </a:rPr>
+              <a:t>(heap 0x9000)</a:t>
+            </a:r>
+          </a:p>
+        </p:txBody>
+      </p:sp>
+      <p:sp>
+        <p:nvSpPr>
+          <p:cNvPr id="6" name="Rectangle 5">
+            <a:extLst>
+              <a:ext uri="{FF2B5EF4-FFF2-40B4-BE49-F238E27FC236}">
+                <a16:creationId xmlns:a16="http://schemas.microsoft.com/office/drawing/2014/main" id="{951F60E4-F136-C7B9-7DDA-97451F5A017A}"/>
+              </a:ext>
+            </a:extLst>
+          </p:cNvPr>
+          <p:cNvSpPr/>
+          <p:nvPr/>
+        </p:nvSpPr>
+        <p:spPr>
+          <a:xfrm>
+            <a:off x="2128158" y="3157293"/>
+            <a:ext cx="1424763" cy="543414"/>
+          </a:xfrm>
+          <a:prstGeom prst="rect">
+            <a:avLst/>
+          </a:prstGeom>
+          <a:noFill/>
+        </p:spPr>
+        <p:style>
+          <a:lnRef idx="2">
+            <a:schemeClr val="accent1">
+              <a:shade val="15000"/>
+            </a:schemeClr>
+          </a:lnRef>
+          <a:fillRef idx="1">
+            <a:schemeClr val="accent1"/>
+          </a:fillRef>
+          <a:effectRef idx="0">
+            <a:schemeClr val="accent1"/>
+          </a:effectRef>
+          <a:fontRef idx="minor">
+            <a:schemeClr val="lt1"/>
+          </a:fontRef>
+        </p:style>
+        <p:txBody>
+          <a:bodyPr rtlCol="0" anchor="ctr"/>
+          <a:lstStyle/>
+          <a:p>
+            <a:pPr algn="ctr"/>
+            <a:r>
+              <a:rPr lang="en-US" sz="2000" dirty="0">
+                <a:solidFill>
+                  <a:schemeClr val="tx1"/>
+                </a:solidFill>
+              </a:rPr>
+              <a:t>0x9000</a:t>
+            </a:r>
+          </a:p>
+        </p:txBody>
+      </p:sp>
+      <p:sp>
+        <p:nvSpPr>
+          <p:cNvPr id="7" name="TextBox 6">
+            <a:extLst>
+              <a:ext uri="{FF2B5EF4-FFF2-40B4-BE49-F238E27FC236}">
+                <a16:creationId xmlns:a16="http://schemas.microsoft.com/office/drawing/2014/main" id="{683D02A7-0D11-902C-8423-4793DA1DDA2D}"/>
+              </a:ext>
+            </a:extLst>
+          </p:cNvPr>
+          <p:cNvSpPr txBox="1"/>
+          <p:nvPr/>
+        </p:nvSpPr>
+        <p:spPr>
+          <a:xfrm>
+            <a:off x="2277012" y="2710725"/>
+            <a:ext cx="1127051" cy="400110"/>
+          </a:xfrm>
+          <a:prstGeom prst="rect">
+            <a:avLst/>
+          </a:prstGeom>
+          <a:noFill/>
+        </p:spPr>
+        <p:txBody>
+          <a:bodyPr wrap="square" rtlCol="0">
+            <a:spAutoFit/>
+          </a:bodyPr>
+          <a:lstStyle/>
+          <a:p>
+            <a:pPr algn="ctr"/>
+            <a:r>
+              <a:rPr lang="en-US" sz="2000" dirty="0"/>
+              <a:t>states</a:t>
+            </a:r>
+          </a:p>
+        </p:txBody>
+      </p:sp>
+    </p:spTree>
+    <p:extLst>
+      <p:ext uri="{BB962C8B-B14F-4D97-AF65-F5344CB8AC3E}">
+        <p14:creationId xmlns:p14="http://schemas.microsoft.com/office/powerpoint/2010/main" val="1596421729"/>
       </p:ext>
     </p:extLst>
   </p:cSld>

--- a/_static/images/concurrency/Presentation1.pptx
+++ b/_static/images/concurrency/Presentation1.pptx
@@ -13879,14 +13879,14 @@
           <p:nvPr>
             <p:extLst>
               <p:ext uri="{D42A27DB-BD31-4B8C-83A1-F6EECF244321}">
-                <p14:modId xmlns:p14="http://schemas.microsoft.com/office/powerpoint/2010/main" val="188010331"/>
+                <p14:modId xmlns:p14="http://schemas.microsoft.com/office/powerpoint/2010/main" val="3331910852"/>
               </p:ext>
             </p:extLst>
           </p:nvPr>
         </p:nvGraphicFramePr>
         <p:xfrm>
-          <a:off x="5099901" y="3006203"/>
-          <a:ext cx="6221688" cy="1005840"/>
+          <a:off x="5099901" y="1028545"/>
+          <a:ext cx="5948313" cy="1005840"/>
         </p:xfrm>
         <a:graphic>
           <a:graphicData uri="http://schemas.openxmlformats.org/drawingml/2006/table">
@@ -13895,21 +13895,21 @@
                 <a:tableStyleId>{5940675A-B579-460E-94D1-54222C63F5DA}</a:tableStyleId>
               </a:tblPr>
               <a:tblGrid>
-                <a:gridCol w="2073896">
+                <a:gridCol w="1982771">
                   <a:extLst>
                     <a:ext uri="{9D8B030D-6E8A-4147-A177-3AD203B41FA5}">
                       <a16:colId xmlns:a16="http://schemas.microsoft.com/office/drawing/2014/main" val="2803643667"/>
                     </a:ext>
                   </a:extLst>
                 </a:gridCol>
-                <a:gridCol w="2073896">
+                <a:gridCol w="1982771">
                   <a:extLst>
                     <a:ext uri="{9D8B030D-6E8A-4147-A177-3AD203B41FA5}">
                       <a16:colId xmlns:a16="http://schemas.microsoft.com/office/drawing/2014/main" val="2661749885"/>
                     </a:ext>
                   </a:extLst>
                 </a:gridCol>
-                <a:gridCol w="2073896">
+                <a:gridCol w="1982771">
                   <a:extLst>
                     <a:ext uri="{9D8B030D-6E8A-4147-A177-3AD203B41FA5}">
                       <a16:colId xmlns:a16="http://schemas.microsoft.com/office/drawing/2014/main" val="1057916831"/>
@@ -14135,7 +14135,7 @@
         </p:nvSpPr>
         <p:spPr>
           <a:xfrm>
-            <a:off x="6869782" y="2386528"/>
+            <a:off x="6733094" y="413080"/>
             <a:ext cx="2681926" cy="400110"/>
           </a:xfrm>
           <a:prstGeom prst="rect">
@@ -14178,7 +14178,7 @@
         </p:nvSpPr>
         <p:spPr>
           <a:xfrm>
-            <a:off x="2128158" y="3157293"/>
+            <a:off x="2552365" y="1259758"/>
             <a:ext cx="1424763" cy="543414"/>
           </a:xfrm>
           <a:prstGeom prst="rect">
@@ -14232,7 +14232,7 @@
         </p:nvSpPr>
         <p:spPr>
           <a:xfrm>
-            <a:off x="2277012" y="2710725"/>
+            <a:off x="2701219" y="813190"/>
             <a:ext cx="1127051" cy="400110"/>
           </a:xfrm>
           <a:prstGeom prst="rect">
@@ -14254,6 +14254,752 @@
           </a:p>
         </p:txBody>
       </p:sp>
+      <p:cxnSp>
+        <p:nvCxnSpPr>
+          <p:cNvPr id="9" name="Straight Arrow Connector 8">
+            <a:extLst>
+              <a:ext uri="{FF2B5EF4-FFF2-40B4-BE49-F238E27FC236}">
+                <a16:creationId xmlns:a16="http://schemas.microsoft.com/office/drawing/2014/main" id="{DD9ADB71-C1A3-CCAA-F4D2-D534BE293E6E}"/>
+              </a:ext>
+            </a:extLst>
+          </p:cNvPr>
+          <p:cNvCxnSpPr>
+            <a:cxnSpLocks/>
+            <a:stCxn id="6" idx="3"/>
+            <a:endCxn id="4" idx="1"/>
+          </p:cNvCxnSpPr>
+          <p:nvPr/>
+        </p:nvCxnSpPr>
+        <p:spPr>
+          <a:xfrm>
+            <a:off x="3977128" y="1531465"/>
+            <a:ext cx="1122773" cy="0"/>
+          </a:xfrm>
+          <a:prstGeom prst="straightConnector1">
+            <a:avLst/>
+          </a:prstGeom>
+          <a:ln>
+            <a:tailEnd type="triangle"/>
+          </a:ln>
+        </p:spPr>
+        <p:style>
+          <a:lnRef idx="2">
+            <a:schemeClr val="dk1"/>
+          </a:lnRef>
+          <a:fillRef idx="0">
+            <a:schemeClr val="dk1"/>
+          </a:fillRef>
+          <a:effectRef idx="1">
+            <a:schemeClr val="dk1"/>
+          </a:effectRef>
+          <a:fontRef idx="minor">
+            <a:schemeClr val="tx1"/>
+          </a:fontRef>
+        </p:style>
+      </p:cxnSp>
+      <p:graphicFrame>
+        <p:nvGraphicFramePr>
+          <p:cNvPr id="2" name="Table 1">
+            <a:extLst>
+              <a:ext uri="{FF2B5EF4-FFF2-40B4-BE49-F238E27FC236}">
+                <a16:creationId xmlns:a16="http://schemas.microsoft.com/office/drawing/2014/main" id="{7E089B8F-E236-D1DF-69CF-19C60CA8CE22}"/>
+              </a:ext>
+            </a:extLst>
+          </p:cNvPr>
+          <p:cNvGraphicFramePr>
+            <a:graphicFrameLocks noGrp="1"/>
+          </p:cNvGraphicFramePr>
+          <p:nvPr>
+            <p:extLst>
+              <p:ext uri="{D42A27DB-BD31-4B8C-83A1-F6EECF244321}">
+                <p14:modId xmlns:p14="http://schemas.microsoft.com/office/powerpoint/2010/main" val="860989950"/>
+              </p:ext>
+            </p:extLst>
+          </p:nvPr>
+        </p:nvGraphicFramePr>
+        <p:xfrm>
+          <a:off x="3977128" y="4546771"/>
+          <a:ext cx="5946954" cy="707886"/>
+        </p:xfrm>
+        <a:graphic>
+          <a:graphicData uri="http://schemas.openxmlformats.org/drawingml/2006/table">
+            <a:tbl>
+              <a:tblPr firstRow="1" bandRow="1">
+                <a:tableStyleId>{5940675A-B579-460E-94D1-54222C63F5DA}</a:tableStyleId>
+              </a:tblPr>
+              <a:tblGrid>
+                <a:gridCol w="991159">
+                  <a:extLst>
+                    <a:ext uri="{9D8B030D-6E8A-4147-A177-3AD203B41FA5}">
+                      <a16:colId xmlns:a16="http://schemas.microsoft.com/office/drawing/2014/main" val="2803643667"/>
+                    </a:ext>
+                  </a:extLst>
+                </a:gridCol>
+                <a:gridCol w="991159">
+                  <a:extLst>
+                    <a:ext uri="{9D8B030D-6E8A-4147-A177-3AD203B41FA5}">
+                      <a16:colId xmlns:a16="http://schemas.microsoft.com/office/drawing/2014/main" val="2661749885"/>
+                    </a:ext>
+                  </a:extLst>
+                </a:gridCol>
+                <a:gridCol w="991159">
+                  <a:extLst>
+                    <a:ext uri="{9D8B030D-6E8A-4147-A177-3AD203B41FA5}">
+                      <a16:colId xmlns:a16="http://schemas.microsoft.com/office/drawing/2014/main" val="1057916831"/>
+                    </a:ext>
+                  </a:extLst>
+                </a:gridCol>
+                <a:gridCol w="991159">
+                  <a:extLst>
+                    <a:ext uri="{9D8B030D-6E8A-4147-A177-3AD203B41FA5}">
+                      <a16:colId xmlns:a16="http://schemas.microsoft.com/office/drawing/2014/main" val="1412991784"/>
+                    </a:ext>
+                  </a:extLst>
+                </a:gridCol>
+                <a:gridCol w="991159">
+                  <a:extLst>
+                    <a:ext uri="{9D8B030D-6E8A-4147-A177-3AD203B41FA5}">
+                      <a16:colId xmlns:a16="http://schemas.microsoft.com/office/drawing/2014/main" val="2530980497"/>
+                    </a:ext>
+                  </a:extLst>
+                </a:gridCol>
+                <a:gridCol w="991159">
+                  <a:extLst>
+                    <a:ext uri="{9D8B030D-6E8A-4147-A177-3AD203B41FA5}">
+                      <a16:colId xmlns:a16="http://schemas.microsoft.com/office/drawing/2014/main" val="3474105227"/>
+                    </a:ext>
+                  </a:extLst>
+                </a:gridCol>
+              </a:tblGrid>
+              <a:tr h="707886">
+                <a:tc>
+                  <a:txBody>
+                    <a:bodyPr/>
+                    <a:lstStyle/>
+                    <a:p>
+                      <a:pPr marL="0" marR="0" lvl="0" indent="0" algn="ctr" defTabSz="914400" rtl="0" eaLnBrk="1" fontAlgn="auto" latinLnBrk="0" hangingPunct="1">
+                        <a:lnSpc>
+                          <a:spcPct val="100000"/>
+                        </a:lnSpc>
+                        <a:spcBef>
+                          <a:spcPts val="0"/>
+                        </a:spcBef>
+                        <a:spcAft>
+                          <a:spcPts val="0"/>
+                        </a:spcAft>
+                        <a:buClrTx/>
+                        <a:buSzTx/>
+                        <a:buFontTx/>
+                        <a:buNone/>
+                        <a:tabLst/>
+                        <a:defRPr/>
+                      </a:pPr>
+                      <a:r>
+                        <a:rPr lang="en-US" sz="2000" b="0" dirty="0">
+                          <a:solidFill>
+                            <a:schemeClr val="tx1"/>
+                          </a:solidFill>
+                        </a:rPr>
+                        <a:t>1</a:t>
+                      </a:r>
+                    </a:p>
+                    <a:p>
+                      <a:pPr marL="0" marR="0" lvl="0" indent="0" algn="ctr" defTabSz="914400" rtl="0" eaLnBrk="1" fontAlgn="auto" latinLnBrk="0" hangingPunct="1">
+                        <a:lnSpc>
+                          <a:spcPct val="100000"/>
+                        </a:lnSpc>
+                        <a:spcBef>
+                          <a:spcPts val="0"/>
+                        </a:spcBef>
+                        <a:spcAft>
+                          <a:spcPts val="0"/>
+                        </a:spcAft>
+                        <a:buClrTx/>
+                        <a:buSzTx/>
+                        <a:buFontTx/>
+                        <a:buNone/>
+                        <a:tabLst/>
+                        <a:defRPr/>
+                      </a:pPr>
+                      <a:r>
+                        <a:rPr lang="en-US" sz="2000" b="0" dirty="0">
+                          <a:solidFill>
+                            <a:schemeClr val="tx2">
+                              <a:lumMod val="75000"/>
+                              <a:lumOff val="25000"/>
+                            </a:schemeClr>
+                          </a:solidFill>
+                        </a:rPr>
+                        <a:t>0x7000</a:t>
+                      </a:r>
+                    </a:p>
+                  </a:txBody>
+                  <a:tcPr/>
+                </a:tc>
+                <a:tc>
+                  <a:txBody>
+                    <a:bodyPr/>
+                    <a:lstStyle/>
+                    <a:p>
+                      <a:pPr algn="ctr"/>
+                      <a:r>
+                        <a:rPr lang="en-US" sz="2000" dirty="0"/>
+                        <a:t>2</a:t>
+                      </a:r>
+                    </a:p>
+                    <a:p>
+                      <a:pPr marL="0" marR="0" lvl="0" indent="0" algn="ctr" defTabSz="914400" rtl="0" eaLnBrk="1" fontAlgn="auto" latinLnBrk="0" hangingPunct="1">
+                        <a:lnSpc>
+                          <a:spcPct val="100000"/>
+                        </a:lnSpc>
+                        <a:spcBef>
+                          <a:spcPts val="0"/>
+                        </a:spcBef>
+                        <a:spcAft>
+                          <a:spcPts val="0"/>
+                        </a:spcAft>
+                        <a:buClrTx/>
+                        <a:buSzTx/>
+                        <a:buFontTx/>
+                        <a:buNone/>
+                        <a:tabLst/>
+                        <a:defRPr/>
+                      </a:pPr>
+                      <a:r>
+                        <a:rPr lang="en-US" sz="2000" b="0" dirty="0">
+                          <a:solidFill>
+                            <a:schemeClr val="tx2">
+                              <a:lumMod val="75000"/>
+                              <a:lumOff val="25000"/>
+                            </a:schemeClr>
+                          </a:solidFill>
+                        </a:rPr>
+                        <a:t>0x7004</a:t>
+                      </a:r>
+                    </a:p>
+                  </a:txBody>
+                  <a:tcPr/>
+                </a:tc>
+                <a:tc>
+                  <a:txBody>
+                    <a:bodyPr/>
+                    <a:lstStyle/>
+                    <a:p>
+                      <a:pPr algn="ctr"/>
+                      <a:r>
+                        <a:rPr lang="en-US" sz="2000" dirty="0"/>
+                        <a:t>3</a:t>
+                      </a:r>
+                    </a:p>
+                    <a:p>
+                      <a:pPr marL="0" marR="0" lvl="0" indent="0" algn="ctr" defTabSz="914400" rtl="0" eaLnBrk="1" fontAlgn="auto" latinLnBrk="0" hangingPunct="1">
+                        <a:lnSpc>
+                          <a:spcPct val="100000"/>
+                        </a:lnSpc>
+                        <a:spcBef>
+                          <a:spcPts val="0"/>
+                        </a:spcBef>
+                        <a:spcAft>
+                          <a:spcPts val="0"/>
+                        </a:spcAft>
+                        <a:buClrTx/>
+                        <a:buSzTx/>
+                        <a:buFontTx/>
+                        <a:buNone/>
+                        <a:tabLst/>
+                        <a:defRPr/>
+                      </a:pPr>
+                      <a:r>
+                        <a:rPr lang="en-US" sz="2000" b="0" dirty="0">
+                          <a:solidFill>
+                            <a:schemeClr val="tx2">
+                              <a:lumMod val="75000"/>
+                              <a:lumOff val="25000"/>
+                            </a:schemeClr>
+                          </a:solidFill>
+                        </a:rPr>
+                        <a:t>0x7008</a:t>
+                      </a:r>
+                    </a:p>
+                  </a:txBody>
+                  <a:tcPr/>
+                </a:tc>
+                <a:tc>
+                  <a:txBody>
+                    <a:bodyPr/>
+                    <a:lstStyle/>
+                    <a:p>
+                      <a:pPr algn="ctr"/>
+                      <a:r>
+                        <a:rPr lang="en-US" sz="2000" dirty="0"/>
+                        <a:t>4</a:t>
+                      </a:r>
+                    </a:p>
+                    <a:p>
+                      <a:pPr marL="0" marR="0" lvl="0" indent="0" algn="ctr" defTabSz="914400" rtl="0" eaLnBrk="1" fontAlgn="auto" latinLnBrk="0" hangingPunct="1">
+                        <a:lnSpc>
+                          <a:spcPct val="100000"/>
+                        </a:lnSpc>
+                        <a:spcBef>
+                          <a:spcPts val="0"/>
+                        </a:spcBef>
+                        <a:spcAft>
+                          <a:spcPts val="0"/>
+                        </a:spcAft>
+                        <a:buClrTx/>
+                        <a:buSzTx/>
+                        <a:buFontTx/>
+                        <a:buNone/>
+                        <a:tabLst/>
+                        <a:defRPr/>
+                      </a:pPr>
+                      <a:r>
+                        <a:rPr lang="en-US" sz="2000" b="0" dirty="0">
+                          <a:solidFill>
+                            <a:schemeClr val="tx2">
+                              <a:lumMod val="75000"/>
+                              <a:lumOff val="25000"/>
+                            </a:schemeClr>
+                          </a:solidFill>
+                        </a:rPr>
+                        <a:t>0x7012</a:t>
+                      </a:r>
+                    </a:p>
+                  </a:txBody>
+                  <a:tcPr/>
+                </a:tc>
+                <a:tc>
+                  <a:txBody>
+                    <a:bodyPr/>
+                    <a:lstStyle/>
+                    <a:p>
+                      <a:pPr algn="ctr"/>
+                      <a:r>
+                        <a:rPr lang="en-US" sz="2000" dirty="0"/>
+                        <a:t>5</a:t>
+                      </a:r>
+                    </a:p>
+                    <a:p>
+                      <a:pPr marL="0" marR="0" lvl="0" indent="0" algn="ctr" defTabSz="914400" rtl="0" eaLnBrk="1" fontAlgn="auto" latinLnBrk="0" hangingPunct="1">
+                        <a:lnSpc>
+                          <a:spcPct val="100000"/>
+                        </a:lnSpc>
+                        <a:spcBef>
+                          <a:spcPts val="0"/>
+                        </a:spcBef>
+                        <a:spcAft>
+                          <a:spcPts val="0"/>
+                        </a:spcAft>
+                        <a:buClrTx/>
+                        <a:buSzTx/>
+                        <a:buFontTx/>
+                        <a:buNone/>
+                        <a:tabLst/>
+                        <a:defRPr/>
+                      </a:pPr>
+                      <a:r>
+                        <a:rPr lang="en-US" sz="2000" b="0" dirty="0">
+                          <a:solidFill>
+                            <a:schemeClr val="tx2">
+                              <a:lumMod val="75000"/>
+                              <a:lumOff val="25000"/>
+                            </a:schemeClr>
+                          </a:solidFill>
+                        </a:rPr>
+                        <a:t>0x7016</a:t>
+                      </a:r>
+                    </a:p>
+                  </a:txBody>
+                  <a:tcPr/>
+                </a:tc>
+                <a:tc>
+                  <a:txBody>
+                    <a:bodyPr/>
+                    <a:lstStyle/>
+                    <a:p>
+                      <a:pPr algn="ctr"/>
+                      <a:r>
+                        <a:rPr lang="en-US" sz="2000" dirty="0"/>
+                        <a:t>6</a:t>
+                      </a:r>
+                    </a:p>
+                    <a:p>
+                      <a:pPr marL="0" marR="0" lvl="0" indent="0" algn="ctr" defTabSz="914400" rtl="0" eaLnBrk="1" fontAlgn="auto" latinLnBrk="0" hangingPunct="1">
+                        <a:lnSpc>
+                          <a:spcPct val="100000"/>
+                        </a:lnSpc>
+                        <a:spcBef>
+                          <a:spcPts val="0"/>
+                        </a:spcBef>
+                        <a:spcAft>
+                          <a:spcPts val="0"/>
+                        </a:spcAft>
+                        <a:buClrTx/>
+                        <a:buSzTx/>
+                        <a:buFontTx/>
+                        <a:buNone/>
+                        <a:tabLst/>
+                        <a:defRPr/>
+                      </a:pPr>
+                      <a:r>
+                        <a:rPr lang="en-US" sz="2000" b="0" dirty="0">
+                          <a:solidFill>
+                            <a:schemeClr val="tx2">
+                              <a:lumMod val="75000"/>
+                              <a:lumOff val="25000"/>
+                            </a:schemeClr>
+                          </a:solidFill>
+                        </a:rPr>
+                        <a:t>0x7020</a:t>
+                      </a:r>
+                    </a:p>
+                  </a:txBody>
+                  <a:tcPr/>
+                </a:tc>
+                <a:extLst>
+                  <a:ext uri="{0D108BD9-81ED-4DB2-BD59-A6C34878D82A}">
+                    <a16:rowId xmlns:a16="http://schemas.microsoft.com/office/drawing/2014/main" val="2377271649"/>
+                  </a:ext>
+                </a:extLst>
+              </a:tr>
+            </a:tbl>
+          </a:graphicData>
+        </a:graphic>
+      </p:graphicFrame>
+      <p:sp>
+        <p:nvSpPr>
+          <p:cNvPr id="3" name="TextBox 2">
+            <a:extLst>
+              <a:ext uri="{FF2B5EF4-FFF2-40B4-BE49-F238E27FC236}">
+                <a16:creationId xmlns:a16="http://schemas.microsoft.com/office/drawing/2014/main" id="{F8286581-86D6-59A3-4A04-73CE18C89390}"/>
+              </a:ext>
+            </a:extLst>
+          </p:cNvPr>
+          <p:cNvSpPr txBox="1"/>
+          <p:nvPr/>
+        </p:nvSpPr>
+        <p:spPr>
+          <a:xfrm>
+            <a:off x="5609642" y="3992773"/>
+            <a:ext cx="2681926" cy="400110"/>
+          </a:xfrm>
+          <a:prstGeom prst="rect">
+            <a:avLst/>
+          </a:prstGeom>
+          <a:noFill/>
+        </p:spPr>
+        <p:txBody>
+          <a:bodyPr wrap="square">
+            <a:spAutoFit/>
+          </a:bodyPr>
+          <a:lstStyle/>
+          <a:p>
+            <a:pPr algn="ctr"/>
+            <a:r>
+              <a:rPr lang="en-US" sz="2000" dirty="0">
+                <a:solidFill>
+                  <a:schemeClr val="tx2">
+                    <a:lumMod val="75000"/>
+                    <a:lumOff val="25000"/>
+                  </a:schemeClr>
+                </a:solidFill>
+              </a:rPr>
+              <a:t>(heap 0x7000)</a:t>
+            </a:r>
+          </a:p>
+        </p:txBody>
+      </p:sp>
+      <p:sp>
+        <p:nvSpPr>
+          <p:cNvPr id="8" name="Left Bracket 7">
+            <a:extLst>
+              <a:ext uri="{FF2B5EF4-FFF2-40B4-BE49-F238E27FC236}">
+                <a16:creationId xmlns:a16="http://schemas.microsoft.com/office/drawing/2014/main" id="{20F9E2AC-E9AA-B2DF-602A-1BCCB550C734}"/>
+              </a:ext>
+            </a:extLst>
+          </p:cNvPr>
+          <p:cNvSpPr/>
+          <p:nvPr/>
+        </p:nvSpPr>
+        <p:spPr>
+          <a:xfrm rot="16200000">
+            <a:off x="5303435" y="4093050"/>
+            <a:ext cx="304693" cy="2752623"/>
+          </a:xfrm>
+          <a:prstGeom prst="leftBracket">
+            <a:avLst/>
+          </a:prstGeom>
+        </p:spPr>
+        <p:style>
+          <a:lnRef idx="2">
+            <a:schemeClr val="dk1"/>
+          </a:lnRef>
+          <a:fillRef idx="0">
+            <a:schemeClr val="dk1"/>
+          </a:fillRef>
+          <a:effectRef idx="1">
+            <a:schemeClr val="dk1"/>
+          </a:effectRef>
+          <a:fontRef idx="minor">
+            <a:schemeClr val="tx1"/>
+          </a:fontRef>
+        </p:style>
+        <p:txBody>
+          <a:bodyPr rtlCol="0" anchor="ctr"/>
+          <a:lstStyle/>
+          <a:p>
+            <a:pPr algn="ctr"/>
+            <a:endParaRPr lang="en-US"/>
+          </a:p>
+        </p:txBody>
+      </p:sp>
+      <p:sp>
+        <p:nvSpPr>
+          <p:cNvPr id="10" name="Left Bracket 9">
+            <a:extLst>
+              <a:ext uri="{FF2B5EF4-FFF2-40B4-BE49-F238E27FC236}">
+                <a16:creationId xmlns:a16="http://schemas.microsoft.com/office/drawing/2014/main" id="{253B155A-EBC9-49B3-B54A-67A2662F6081}"/>
+              </a:ext>
+            </a:extLst>
+          </p:cNvPr>
+          <p:cNvSpPr/>
+          <p:nvPr/>
+        </p:nvSpPr>
+        <p:spPr>
+          <a:xfrm rot="16200000">
+            <a:off x="8291730" y="4093050"/>
+            <a:ext cx="304693" cy="2752623"/>
+          </a:xfrm>
+          <a:prstGeom prst="leftBracket">
+            <a:avLst/>
+          </a:prstGeom>
+        </p:spPr>
+        <p:style>
+          <a:lnRef idx="2">
+            <a:schemeClr val="dk1"/>
+          </a:lnRef>
+          <a:fillRef idx="0">
+            <a:schemeClr val="dk1"/>
+          </a:fillRef>
+          <a:effectRef idx="1">
+            <a:schemeClr val="dk1"/>
+          </a:effectRef>
+          <a:fontRef idx="minor">
+            <a:schemeClr val="tx1"/>
+          </a:fontRef>
+        </p:style>
+        <p:txBody>
+          <a:bodyPr rtlCol="0" anchor="ctr"/>
+          <a:lstStyle/>
+          <a:p>
+            <a:pPr algn="ctr"/>
+            <a:endParaRPr lang="en-US"/>
+          </a:p>
+        </p:txBody>
+      </p:sp>
+      <p:sp>
+        <p:nvSpPr>
+          <p:cNvPr id="11" name="TextBox 10">
+            <a:extLst>
+              <a:ext uri="{FF2B5EF4-FFF2-40B4-BE49-F238E27FC236}">
+                <a16:creationId xmlns:a16="http://schemas.microsoft.com/office/drawing/2014/main" id="{497C741B-A794-0F54-5722-C01BA53EC973}"/>
+              </a:ext>
+            </a:extLst>
+          </p:cNvPr>
+          <p:cNvSpPr txBox="1"/>
+          <p:nvPr/>
+        </p:nvSpPr>
+        <p:spPr>
+          <a:xfrm>
+            <a:off x="4892255" y="5666916"/>
+            <a:ext cx="1127051" cy="400110"/>
+          </a:xfrm>
+          <a:prstGeom prst="rect">
+            <a:avLst/>
+          </a:prstGeom>
+          <a:noFill/>
+        </p:spPr>
+        <p:txBody>
+          <a:bodyPr wrap="square" rtlCol="0">
+            <a:spAutoFit/>
+          </a:bodyPr>
+          <a:lstStyle/>
+          <a:p>
+            <a:pPr algn="ctr"/>
+            <a:r>
+              <a:rPr lang="en-US" sz="2000" dirty="0"/>
+              <a:t>row 0</a:t>
+            </a:r>
+          </a:p>
+        </p:txBody>
+      </p:sp>
+      <p:sp>
+        <p:nvSpPr>
+          <p:cNvPr id="12" name="TextBox 11">
+            <a:extLst>
+              <a:ext uri="{FF2B5EF4-FFF2-40B4-BE49-F238E27FC236}">
+                <a16:creationId xmlns:a16="http://schemas.microsoft.com/office/drawing/2014/main" id="{8836E659-A691-5DC1-EA50-A5F3BE399E03}"/>
+              </a:ext>
+            </a:extLst>
+          </p:cNvPr>
+          <p:cNvSpPr txBox="1"/>
+          <p:nvPr/>
+        </p:nvSpPr>
+        <p:spPr>
+          <a:xfrm>
+            <a:off x="7728042" y="5684065"/>
+            <a:ext cx="1127051" cy="400110"/>
+          </a:xfrm>
+          <a:prstGeom prst="rect">
+            <a:avLst/>
+          </a:prstGeom>
+          <a:noFill/>
+        </p:spPr>
+        <p:txBody>
+          <a:bodyPr wrap="square" rtlCol="0">
+            <a:spAutoFit/>
+          </a:bodyPr>
+          <a:lstStyle/>
+          <a:p>
+            <a:pPr algn="ctr"/>
+            <a:r>
+              <a:rPr lang="en-US" sz="2000" dirty="0"/>
+              <a:t>row 1</a:t>
+            </a:r>
+          </a:p>
+        </p:txBody>
+      </p:sp>
+      <p:sp>
+        <p:nvSpPr>
+          <p:cNvPr id="13" name="Rectangle 12">
+            <a:extLst>
+              <a:ext uri="{FF2B5EF4-FFF2-40B4-BE49-F238E27FC236}">
+                <a16:creationId xmlns:a16="http://schemas.microsoft.com/office/drawing/2014/main" id="{72E4E1DF-A39C-054E-8D1C-6414E080D1EB}"/>
+              </a:ext>
+            </a:extLst>
+          </p:cNvPr>
+          <p:cNvSpPr/>
+          <p:nvPr/>
+        </p:nvSpPr>
+        <p:spPr>
+          <a:xfrm>
+            <a:off x="1386328" y="4623190"/>
+            <a:ext cx="1424763" cy="543414"/>
+          </a:xfrm>
+          <a:prstGeom prst="rect">
+            <a:avLst/>
+          </a:prstGeom>
+          <a:noFill/>
+        </p:spPr>
+        <p:style>
+          <a:lnRef idx="2">
+            <a:schemeClr val="accent1">
+              <a:shade val="15000"/>
+            </a:schemeClr>
+          </a:lnRef>
+          <a:fillRef idx="1">
+            <a:schemeClr val="accent1"/>
+          </a:fillRef>
+          <a:effectRef idx="0">
+            <a:schemeClr val="accent1"/>
+          </a:effectRef>
+          <a:fontRef idx="minor">
+            <a:schemeClr val="lt1"/>
+          </a:fontRef>
+        </p:style>
+        <p:txBody>
+          <a:bodyPr rtlCol="0" anchor="ctr"/>
+          <a:lstStyle/>
+          <a:p>
+            <a:pPr algn="ctr"/>
+            <a:r>
+              <a:rPr lang="en-US" sz="2000" dirty="0">
+                <a:solidFill>
+                  <a:schemeClr val="tx1"/>
+                </a:solidFill>
+              </a:rPr>
+              <a:t>0x7000</a:t>
+            </a:r>
+          </a:p>
+        </p:txBody>
+      </p:sp>
+      <p:sp>
+        <p:nvSpPr>
+          <p:cNvPr id="14" name="TextBox 13">
+            <a:extLst>
+              <a:ext uri="{FF2B5EF4-FFF2-40B4-BE49-F238E27FC236}">
+                <a16:creationId xmlns:a16="http://schemas.microsoft.com/office/drawing/2014/main" id="{92EE7120-7DBA-7402-CE5D-BDD787FC6005}"/>
+              </a:ext>
+            </a:extLst>
+          </p:cNvPr>
+          <p:cNvSpPr txBox="1"/>
+          <p:nvPr/>
+        </p:nvSpPr>
+        <p:spPr>
+          <a:xfrm>
+            <a:off x="1535182" y="4176622"/>
+            <a:ext cx="1127051" cy="400110"/>
+          </a:xfrm>
+          <a:prstGeom prst="rect">
+            <a:avLst/>
+          </a:prstGeom>
+          <a:noFill/>
+        </p:spPr>
+        <p:txBody>
+          <a:bodyPr wrap="square" rtlCol="0">
+            <a:spAutoFit/>
+          </a:bodyPr>
+          <a:lstStyle/>
+          <a:p>
+            <a:pPr algn="ctr"/>
+            <a:r>
+              <a:rPr lang="en-US" sz="2000" dirty="0"/>
+              <a:t>data</a:t>
+            </a:r>
+          </a:p>
+        </p:txBody>
+      </p:sp>
+      <p:cxnSp>
+        <p:nvCxnSpPr>
+          <p:cNvPr id="15" name="Straight Arrow Connector 14">
+            <a:extLst>
+              <a:ext uri="{FF2B5EF4-FFF2-40B4-BE49-F238E27FC236}">
+                <a16:creationId xmlns:a16="http://schemas.microsoft.com/office/drawing/2014/main" id="{A6045E01-6E48-9E7D-60D4-9670F14DE70F}"/>
+              </a:ext>
+            </a:extLst>
+          </p:cNvPr>
+          <p:cNvCxnSpPr>
+            <a:cxnSpLocks/>
+          </p:cNvCxnSpPr>
+          <p:nvPr/>
+        </p:nvCxnSpPr>
+        <p:spPr>
+          <a:xfrm>
+            <a:off x="2821724" y="4894897"/>
+            <a:ext cx="1122773" cy="0"/>
+          </a:xfrm>
+          <a:prstGeom prst="straightConnector1">
+            <a:avLst/>
+          </a:prstGeom>
+          <a:ln>
+            <a:tailEnd type="triangle"/>
+          </a:ln>
+        </p:spPr>
+        <p:style>
+          <a:lnRef idx="2">
+            <a:schemeClr val="dk1"/>
+          </a:lnRef>
+          <a:fillRef idx="0">
+            <a:schemeClr val="dk1"/>
+          </a:fillRef>
+          <a:effectRef idx="1">
+            <a:schemeClr val="dk1"/>
+          </a:effectRef>
+          <a:fontRef idx="minor">
+            <a:schemeClr val="tx1"/>
+          </a:fontRef>
+        </p:style>
+      </p:cxnSp>
     </p:spTree>
     <p:extLst>
       <p:ext uri="{BB962C8B-B14F-4D97-AF65-F5344CB8AC3E}">

--- a/_static/images/concurrency/Presentation1.pptx
+++ b/_static/images/concurrency/Presentation1.pptx
@@ -25,6 +25,7 @@
     <p:sldId id="273" r:id="rId19"/>
     <p:sldId id="274" r:id="rId20"/>
     <p:sldId id="275" r:id="rId21"/>
+    <p:sldId id="276" r:id="rId22"/>
   </p:sldIdLst>
   <p:sldSz cx="12192000" cy="6858000"/>
   <p:notesSz cx="6858000" cy="9144000"/>
@@ -278,7 +279,7 @@
           <a:p>
             <a:fld id="{8864B806-D088-C24B-BAA0-8204A6CA2F81}" type="datetimeFigureOut">
               <a:rPr lang="en-US" smtClean="0"/>
-              <a:t>9/1/26</a:t>
+              <a:t>9/5/26</a:t>
             </a:fld>
             <a:endParaRPr lang="en-US"/>
           </a:p>
@@ -476,7 +477,7 @@
           <a:p>
             <a:fld id="{8864B806-D088-C24B-BAA0-8204A6CA2F81}" type="datetimeFigureOut">
               <a:rPr lang="en-US" smtClean="0"/>
-              <a:t>9/1/26</a:t>
+              <a:t>9/5/26</a:t>
             </a:fld>
             <a:endParaRPr lang="en-US"/>
           </a:p>
@@ -684,7 +685,7 @@
           <a:p>
             <a:fld id="{8864B806-D088-C24B-BAA0-8204A6CA2F81}" type="datetimeFigureOut">
               <a:rPr lang="en-US" smtClean="0"/>
-              <a:t>9/1/26</a:t>
+              <a:t>9/5/26</a:t>
             </a:fld>
             <a:endParaRPr lang="en-US"/>
           </a:p>
@@ -882,7 +883,7 @@
           <a:p>
             <a:fld id="{8864B806-D088-C24B-BAA0-8204A6CA2F81}" type="datetimeFigureOut">
               <a:rPr lang="en-US" smtClean="0"/>
-              <a:t>9/1/26</a:t>
+              <a:t>9/5/26</a:t>
             </a:fld>
             <a:endParaRPr lang="en-US"/>
           </a:p>
@@ -1157,7 +1158,7 @@
           <a:p>
             <a:fld id="{8864B806-D088-C24B-BAA0-8204A6CA2F81}" type="datetimeFigureOut">
               <a:rPr lang="en-US" smtClean="0"/>
-              <a:t>9/1/26</a:t>
+              <a:t>9/5/26</a:t>
             </a:fld>
             <a:endParaRPr lang="en-US"/>
           </a:p>
@@ -1422,7 +1423,7 @@
           <a:p>
             <a:fld id="{8864B806-D088-C24B-BAA0-8204A6CA2F81}" type="datetimeFigureOut">
               <a:rPr lang="en-US" smtClean="0"/>
-              <a:t>9/1/26</a:t>
+              <a:t>9/5/26</a:t>
             </a:fld>
             <a:endParaRPr lang="en-US"/>
           </a:p>
@@ -1834,7 +1835,7 @@
           <a:p>
             <a:fld id="{8864B806-D088-C24B-BAA0-8204A6CA2F81}" type="datetimeFigureOut">
               <a:rPr lang="en-US" smtClean="0"/>
-              <a:t>9/1/26</a:t>
+              <a:t>9/5/26</a:t>
             </a:fld>
             <a:endParaRPr lang="en-US"/>
           </a:p>
@@ -1975,7 +1976,7 @@
           <a:p>
             <a:fld id="{8864B806-D088-C24B-BAA0-8204A6CA2F81}" type="datetimeFigureOut">
               <a:rPr lang="en-US" smtClean="0"/>
-              <a:t>9/1/26</a:t>
+              <a:t>9/5/26</a:t>
             </a:fld>
             <a:endParaRPr lang="en-US"/>
           </a:p>
@@ -2088,7 +2089,7 @@
           <a:p>
             <a:fld id="{8864B806-D088-C24B-BAA0-8204A6CA2F81}" type="datetimeFigureOut">
               <a:rPr lang="en-US" smtClean="0"/>
-              <a:t>9/1/26</a:t>
+              <a:t>9/5/26</a:t>
             </a:fld>
             <a:endParaRPr lang="en-US"/>
           </a:p>
@@ -2399,7 +2400,7 @@
           <a:p>
             <a:fld id="{8864B806-D088-C24B-BAA0-8204A6CA2F81}" type="datetimeFigureOut">
               <a:rPr lang="en-US" smtClean="0"/>
-              <a:t>9/1/26</a:t>
+              <a:t>9/5/26</a:t>
             </a:fld>
             <a:endParaRPr lang="en-US"/>
           </a:p>
@@ -2687,7 +2688,7 @@
           <a:p>
             <a:fld id="{8864B806-D088-C24B-BAA0-8204A6CA2F81}" type="datetimeFigureOut">
               <a:rPr lang="en-US" smtClean="0"/>
-              <a:t>9/1/26</a:t>
+              <a:t>9/5/26</a:t>
             </a:fld>
             <a:endParaRPr lang="en-US"/>
           </a:p>
@@ -2928,7 +2929,7 @@
           <a:p>
             <a:fld id="{8864B806-D088-C24B-BAA0-8204A6CA2F81}" type="datetimeFigureOut">
               <a:rPr lang="en-US" smtClean="0"/>
-              <a:t>9/1/26</a:t>
+              <a:t>9/5/26</a:t>
             </a:fld>
             <a:endParaRPr lang="en-US"/>
           </a:p>
@@ -12461,7 +12462,7 @@
           <p:nvPr>
             <p:extLst>
               <p:ext uri="{D42A27DB-BD31-4B8C-83A1-F6EECF244321}">
-                <p14:modId xmlns:p14="http://schemas.microsoft.com/office/powerpoint/2010/main" val="821367378"/>
+                <p14:modId xmlns:p14="http://schemas.microsoft.com/office/powerpoint/2010/main" val="2417778361"/>
               </p:ext>
             </p:extLst>
           </p:nvPr>
@@ -14312,7 +14313,7 @@
           <p:nvPr>
             <p:extLst>
               <p:ext uri="{D42A27DB-BD31-4B8C-83A1-F6EECF244321}">
-                <p14:modId xmlns:p14="http://schemas.microsoft.com/office/powerpoint/2010/main" val="860989950"/>
+                <p14:modId xmlns:p14="http://schemas.microsoft.com/office/powerpoint/2010/main" val="3879758332"/>
               </p:ext>
             </p:extLst>
           </p:nvPr>
@@ -15013,6 +15014,3640 @@
 </p:sld>
 </file>
 
+<file path=ppt/slides/slide21.xml><?xml version="1.0" encoding="utf-8"?>
+<p:sld xmlns:a="http://schemas.openxmlformats.org/drawingml/2006/main" xmlns:r="http://schemas.openxmlformats.org/officeDocument/2006/relationships" xmlns:p="http://schemas.openxmlformats.org/presentationml/2006/main">
+  <p:cSld>
+    <p:spTree>
+      <p:nvGrpSpPr>
+        <p:cNvPr id="1" name=""/>
+        <p:cNvGrpSpPr/>
+        <p:nvPr/>
+      </p:nvGrpSpPr>
+      <p:grpSpPr>
+        <a:xfrm>
+          <a:off x="0" y="0"/>
+          <a:ext cx="0" cy="0"/>
+          <a:chOff x="0" y="0"/>
+          <a:chExt cx="0" cy="0"/>
+        </a:xfrm>
+      </p:grpSpPr>
+      <p:sp>
+        <p:nvSpPr>
+          <p:cNvPr id="4" name="Shape 1">
+            <a:extLst>
+              <a:ext uri="{FF2B5EF4-FFF2-40B4-BE49-F238E27FC236}">
+                <a16:creationId xmlns:a16="http://schemas.microsoft.com/office/drawing/2014/main" id="{78DCE094-14BE-179A-9B3B-D7C8652F192A}"/>
+              </a:ext>
+            </a:extLst>
+          </p:cNvPr>
+          <p:cNvSpPr/>
+          <p:nvPr/>
+        </p:nvSpPr>
+        <p:spPr>
+          <a:xfrm>
+            <a:off x="182880" y="640080"/>
+            <a:ext cx="2926080" cy="2423160"/>
+          </a:xfrm>
+          <a:prstGeom prst="roundRect">
+            <a:avLst>
+              <a:gd name="adj" fmla="val 3019"/>
+            </a:avLst>
+          </a:prstGeom>
+          <a:solidFill>
+            <a:srgbClr val="EAF6FF"/>
+          </a:solidFill>
+          <a:ln w="17780">
+            <a:solidFill>
+              <a:srgbClr val="0E76D8"/>
+            </a:solidFill>
+            <a:prstDash val="solid"/>
+          </a:ln>
+          <a:effectLst>
+            <a:outerShdw blurRad="19050" dist="7620" dir="2700000" algn="bl" rotWithShape="0">
+              <a:srgbClr val="000000">
+                <a:alpha val="10000"/>
+              </a:srgbClr>
+            </a:outerShdw>
+          </a:effectLst>
+        </p:spPr>
+        <p:txBody>
+          <a:bodyPr/>
+          <a:lstStyle/>
+          <a:p>
+            <a:endParaRPr lang="en-US"/>
+          </a:p>
+        </p:txBody>
+      </p:sp>
+      <p:sp>
+        <p:nvSpPr>
+          <p:cNvPr id="5" name="Text 2">
+            <a:extLst>
+              <a:ext uri="{FF2B5EF4-FFF2-40B4-BE49-F238E27FC236}">
+                <a16:creationId xmlns:a16="http://schemas.microsoft.com/office/drawing/2014/main" id="{DBACFE59-665C-8601-F6F6-0C36AC4F4F0B}"/>
+              </a:ext>
+            </a:extLst>
+          </p:cNvPr>
+          <p:cNvSpPr/>
+          <p:nvPr/>
+        </p:nvSpPr>
+        <p:spPr>
+          <a:xfrm>
+            <a:off x="292608" y="749808"/>
+            <a:ext cx="256032" cy="228600"/>
+          </a:xfrm>
+          <a:prstGeom prst="rect">
+            <a:avLst/>
+          </a:prstGeom>
+          <a:noFill/>
+          <a:ln/>
+        </p:spPr>
+        <p:txBody>
+          <a:bodyPr wrap="square" lIns="0" tIns="0" rIns="0" bIns="0" rtlCol="0" anchor="ctr"/>
+          <a:lstStyle/>
+          <a:p>
+            <a:pPr marL="0" indent="0" algn="ctr">
+              <a:buNone/>
+            </a:pPr>
+            <a:endParaRPr lang="en-US" sz="1800" dirty="0"/>
+          </a:p>
+        </p:txBody>
+      </p:sp>
+      <p:sp>
+        <p:nvSpPr>
+          <p:cNvPr id="6" name="Text 3">
+            <a:extLst>
+              <a:ext uri="{FF2B5EF4-FFF2-40B4-BE49-F238E27FC236}">
+                <a16:creationId xmlns:a16="http://schemas.microsoft.com/office/drawing/2014/main" id="{840C4E4D-7315-E9D6-05F8-D80FFDDF69EB}"/>
+              </a:ext>
+            </a:extLst>
+          </p:cNvPr>
+          <p:cNvSpPr/>
+          <p:nvPr/>
+        </p:nvSpPr>
+        <p:spPr>
+          <a:xfrm>
+            <a:off x="640080" y="722376"/>
+            <a:ext cx="2359152" cy="228600"/>
+          </a:xfrm>
+          <a:prstGeom prst="rect">
+            <a:avLst/>
+          </a:prstGeom>
+          <a:noFill/>
+          <a:ln/>
+        </p:spPr>
+        <p:txBody>
+          <a:bodyPr wrap="square" lIns="127" tIns="127" rIns="127" bIns="127" rtlCol="0" anchor="ctr">
+            <a:normAutofit lnSpcReduction="10000"/>
+          </a:bodyPr>
+          <a:lstStyle/>
+          <a:p>
+            <a:pPr marL="0" indent="0">
+              <a:buNone/>
+            </a:pPr>
+            <a:r>
+              <a:rPr lang="en-US" sz="1600" b="1" dirty="0">
+                <a:solidFill>
+                  <a:srgbClr val="0E76D8"/>
+                </a:solidFill>
+              </a:rPr>
+              <a:t>MainApp.java</a:t>
+            </a:r>
+            <a:endParaRPr lang="en-US" sz="1600" dirty="0"/>
+          </a:p>
+        </p:txBody>
+      </p:sp>
+      <p:sp>
+        <p:nvSpPr>
+          <p:cNvPr id="7" name="Text 4">
+            <a:extLst>
+              <a:ext uri="{FF2B5EF4-FFF2-40B4-BE49-F238E27FC236}">
+                <a16:creationId xmlns:a16="http://schemas.microsoft.com/office/drawing/2014/main" id="{D7280A48-5764-7515-CAF5-2C17C10C808F}"/>
+              </a:ext>
+            </a:extLst>
+          </p:cNvPr>
+          <p:cNvSpPr/>
+          <p:nvPr/>
+        </p:nvSpPr>
+        <p:spPr>
+          <a:xfrm>
+            <a:off x="640080" y="987552"/>
+            <a:ext cx="2359152" cy="164592"/>
+          </a:xfrm>
+          <a:prstGeom prst="rect">
+            <a:avLst/>
+          </a:prstGeom>
+          <a:noFill/>
+          <a:ln/>
+        </p:spPr>
+        <p:txBody>
+          <a:bodyPr wrap="square" lIns="127" tIns="127" rIns="127" bIns="127" rtlCol="0" anchor="ctr">
+            <a:normAutofit/>
+          </a:bodyPr>
+          <a:lstStyle/>
+          <a:p>
+            <a:pPr marL="0" indent="0">
+              <a:buNone/>
+            </a:pPr>
+            <a:r>
+              <a:rPr lang="en-US" sz="880" dirty="0">
+                <a:solidFill>
+                  <a:srgbClr val="0E76D8"/>
+                </a:solidFill>
+              </a:rPr>
+              <a:t>(Application entry point)</a:t>
+            </a:r>
+            <a:endParaRPr lang="en-US" sz="880" dirty="0"/>
+          </a:p>
+        </p:txBody>
+      </p:sp>
+      <p:sp>
+        <p:nvSpPr>
+          <p:cNvPr id="8" name="Shape 5">
+            <a:extLst>
+              <a:ext uri="{FF2B5EF4-FFF2-40B4-BE49-F238E27FC236}">
+                <a16:creationId xmlns:a16="http://schemas.microsoft.com/office/drawing/2014/main" id="{37F2EEE8-738B-FDF8-D8D0-00B463432512}"/>
+              </a:ext>
+            </a:extLst>
+          </p:cNvPr>
+          <p:cNvSpPr/>
+          <p:nvPr/>
+        </p:nvSpPr>
+        <p:spPr>
+          <a:xfrm>
+            <a:off x="274320" y="1170432"/>
+            <a:ext cx="2743200" cy="1600200"/>
+          </a:xfrm>
+          <a:prstGeom prst="roundRect">
+            <a:avLst>
+              <a:gd name="adj" fmla="val 2857"/>
+            </a:avLst>
+          </a:prstGeom>
+          <a:solidFill>
+            <a:srgbClr val="FFFFFF">
+              <a:alpha val="96000"/>
+            </a:srgbClr>
+          </a:solidFill>
+          <a:ln w="8890">
+            <a:solidFill>
+              <a:srgbClr val="D9E2EA"/>
+            </a:solidFill>
+            <a:prstDash val="solid"/>
+          </a:ln>
+        </p:spPr>
+        <p:txBody>
+          <a:bodyPr/>
+          <a:lstStyle/>
+          <a:p>
+            <a:endParaRPr lang="en-US"/>
+          </a:p>
+        </p:txBody>
+      </p:sp>
+      <p:sp>
+        <p:nvSpPr>
+          <p:cNvPr id="9" name="Text 6">
+            <a:extLst>
+              <a:ext uri="{FF2B5EF4-FFF2-40B4-BE49-F238E27FC236}">
+                <a16:creationId xmlns:a16="http://schemas.microsoft.com/office/drawing/2014/main" id="{0E2942B0-FA06-D630-DD3F-86FBF94A2B17}"/>
+              </a:ext>
+            </a:extLst>
+          </p:cNvPr>
+          <p:cNvSpPr/>
+          <p:nvPr/>
+        </p:nvSpPr>
+        <p:spPr>
+          <a:xfrm>
+            <a:off x="338328" y="1243584"/>
+            <a:ext cx="2615184" cy="1490472"/>
+          </a:xfrm>
+          <a:prstGeom prst="rect">
+            <a:avLst/>
+          </a:prstGeom>
+          <a:noFill/>
+          <a:ln/>
+        </p:spPr>
+        <p:txBody>
+          <a:bodyPr wrap="square" lIns="0" tIns="0" rIns="0" bIns="0" rtlCol="0" anchor="t">
+            <a:normAutofit/>
+          </a:bodyPr>
+          <a:lstStyle/>
+          <a:p>
+            <a:pPr marL="0" indent="0">
+              <a:buNone/>
+            </a:pPr>
+            <a:r>
+              <a:rPr lang="en-US" sz="800" dirty="0">
+                <a:solidFill>
+                  <a:srgbClr val="111111"/>
+                </a:solidFill>
+                <a:latin typeface="Courier New" pitchFamily="34" charset="0"/>
+                <a:ea typeface="Courier New" pitchFamily="34" charset="-122"/>
+                <a:cs typeface="Courier New" pitchFamily="34" charset="-120"/>
+              </a:rPr>
+              <a:t>@Override</a:t>
+            </a:r>
+            <a:endParaRPr lang="en-US" sz="800" dirty="0"/>
+          </a:p>
+          <a:p>
+            <a:pPr marL="0" indent="0">
+              <a:buNone/>
+            </a:pPr>
+            <a:r>
+              <a:rPr lang="en-US" sz="800" dirty="0">
+                <a:solidFill>
+                  <a:srgbClr val="111111"/>
+                </a:solidFill>
+                <a:latin typeface="Courier New" pitchFamily="34" charset="0"/>
+                <a:ea typeface="Courier New" pitchFamily="34" charset="-122"/>
+                <a:cs typeface="Courier New" pitchFamily="34" charset="-120"/>
+              </a:rPr>
+              <a:t>public void start(Stage stage)</a:t>
+            </a:r>
+            <a:endParaRPr lang="en-US" sz="800" dirty="0"/>
+          </a:p>
+          <a:p>
+            <a:pPr marL="0" indent="0">
+              <a:buNone/>
+            </a:pPr>
+            <a:r>
+              <a:rPr lang="en-US" sz="800" dirty="0">
+                <a:solidFill>
+                  <a:srgbClr val="111111"/>
+                </a:solidFill>
+                <a:latin typeface="Courier New" pitchFamily="34" charset="0"/>
+                <a:ea typeface="Courier New" pitchFamily="34" charset="-122"/>
+                <a:cs typeface="Courier New" pitchFamily="34" charset="-120"/>
+              </a:rPr>
+              <a:t>    throws Exception {</a:t>
+            </a:r>
+            <a:endParaRPr lang="en-US" sz="800" dirty="0"/>
+          </a:p>
+          <a:p>
+            <a:pPr marL="0" indent="0">
+              <a:buNone/>
+            </a:pPr>
+            <a:r>
+              <a:rPr lang="en-US" sz="800" dirty="0">
+                <a:solidFill>
+                  <a:srgbClr val="111111"/>
+                </a:solidFill>
+                <a:latin typeface="Courier New" pitchFamily="34" charset="0"/>
+                <a:ea typeface="Courier New" pitchFamily="34" charset="-122"/>
+                <a:cs typeface="Courier New" pitchFamily="34" charset="-120"/>
+              </a:rPr>
+              <a:t>  Parent root = FXMLLoader.load(</a:t>
+            </a:r>
+            <a:endParaRPr lang="en-US" sz="800" dirty="0"/>
+          </a:p>
+          <a:p>
+            <a:pPr marL="0" indent="0">
+              <a:buNone/>
+            </a:pPr>
+            <a:r>
+              <a:rPr lang="en-US" sz="800" dirty="0">
+                <a:solidFill>
+                  <a:srgbClr val="111111"/>
+                </a:solidFill>
+                <a:latin typeface="Courier New" pitchFamily="34" charset="0"/>
+                <a:ea typeface="Courier New" pitchFamily="34" charset="-122"/>
+                <a:cs typeface="Courier New" pitchFamily="34" charset="-120"/>
+              </a:rPr>
+              <a:t>    getClass().getResource("login.fxml"));</a:t>
+            </a:r>
+            <a:endParaRPr lang="en-US" sz="800" dirty="0"/>
+          </a:p>
+          <a:p>
+            <a:pPr marL="0" indent="0">
+              <a:buNone/>
+            </a:pPr>
+            <a:endParaRPr lang="en-US" sz="800" dirty="0"/>
+          </a:p>
+          <a:p>
+            <a:pPr marL="0" indent="0">
+              <a:buNone/>
+            </a:pPr>
+            <a:r>
+              <a:rPr lang="en-US" sz="800" dirty="0">
+                <a:solidFill>
+                  <a:srgbClr val="111111"/>
+                </a:solidFill>
+                <a:latin typeface="Courier New" pitchFamily="34" charset="0"/>
+                <a:ea typeface="Courier New" pitchFamily="34" charset="-122"/>
+                <a:cs typeface="Courier New" pitchFamily="34" charset="-120"/>
+              </a:rPr>
+              <a:t>  Scene scene = new Scene(root);</a:t>
+            </a:r>
+            <a:endParaRPr lang="en-US" sz="800" dirty="0"/>
+          </a:p>
+          <a:p>
+            <a:pPr marL="0" indent="0">
+              <a:buNone/>
+            </a:pPr>
+            <a:r>
+              <a:rPr lang="en-US" sz="800" dirty="0">
+                <a:solidFill>
+                  <a:srgbClr val="111111"/>
+                </a:solidFill>
+                <a:latin typeface="Courier New" pitchFamily="34" charset="0"/>
+                <a:ea typeface="Courier New" pitchFamily="34" charset="-122"/>
+                <a:cs typeface="Courier New" pitchFamily="34" charset="-120"/>
+              </a:rPr>
+              <a:t>  stage.setScene(scene);</a:t>
+            </a:r>
+            <a:endParaRPr lang="en-US" sz="800" dirty="0"/>
+          </a:p>
+          <a:p>
+            <a:pPr marL="0" indent="0">
+              <a:buNone/>
+            </a:pPr>
+            <a:r>
+              <a:rPr lang="en-US" sz="800" dirty="0">
+                <a:solidFill>
+                  <a:srgbClr val="111111"/>
+                </a:solidFill>
+                <a:latin typeface="Courier New" pitchFamily="34" charset="0"/>
+                <a:ea typeface="Courier New" pitchFamily="34" charset="-122"/>
+                <a:cs typeface="Courier New" pitchFamily="34" charset="-120"/>
+              </a:rPr>
+              <a:t>  stage.setTitle("My App");</a:t>
+            </a:r>
+            <a:endParaRPr lang="en-US" sz="800" dirty="0"/>
+          </a:p>
+          <a:p>
+            <a:pPr marL="0" indent="0">
+              <a:buNone/>
+            </a:pPr>
+            <a:r>
+              <a:rPr lang="en-US" sz="800" dirty="0">
+                <a:solidFill>
+                  <a:srgbClr val="111111"/>
+                </a:solidFill>
+                <a:latin typeface="Courier New" pitchFamily="34" charset="0"/>
+                <a:ea typeface="Courier New" pitchFamily="34" charset="-122"/>
+                <a:cs typeface="Courier New" pitchFamily="34" charset="-120"/>
+              </a:rPr>
+              <a:t>  stage.show();</a:t>
+            </a:r>
+            <a:endParaRPr lang="en-US" sz="800" dirty="0"/>
+          </a:p>
+          <a:p>
+            <a:pPr marL="0" indent="0">
+              <a:buNone/>
+            </a:pPr>
+            <a:r>
+              <a:rPr lang="en-US" sz="800" dirty="0">
+                <a:solidFill>
+                  <a:srgbClr val="111111"/>
+                </a:solidFill>
+                <a:latin typeface="Courier New" pitchFamily="34" charset="0"/>
+                <a:ea typeface="Courier New" pitchFamily="34" charset="-122"/>
+                <a:cs typeface="Courier New" pitchFamily="34" charset="-120"/>
+              </a:rPr>
+              <a:t>}</a:t>
+            </a:r>
+            <a:endParaRPr lang="en-US" sz="800" dirty="0"/>
+          </a:p>
+        </p:txBody>
+      </p:sp>
+      <p:sp>
+        <p:nvSpPr>
+          <p:cNvPr id="10" name="Text 7">
+            <a:extLst>
+              <a:ext uri="{FF2B5EF4-FFF2-40B4-BE49-F238E27FC236}">
+                <a16:creationId xmlns:a16="http://schemas.microsoft.com/office/drawing/2014/main" id="{32A6386F-3E7D-A9B3-6CC3-A69591248FA7}"/>
+              </a:ext>
+            </a:extLst>
+          </p:cNvPr>
+          <p:cNvSpPr/>
+          <p:nvPr/>
+        </p:nvSpPr>
+        <p:spPr>
+          <a:xfrm>
+            <a:off x="292608" y="2770632"/>
+            <a:ext cx="2706624" cy="219456"/>
+          </a:xfrm>
+          <a:prstGeom prst="rect">
+            <a:avLst/>
+          </a:prstGeom>
+          <a:noFill/>
+          <a:ln/>
+        </p:spPr>
+        <p:txBody>
+          <a:bodyPr wrap="square" lIns="127" tIns="127" rIns="127" bIns="127" rtlCol="0" anchor="ctr">
+            <a:normAutofit/>
+          </a:bodyPr>
+          <a:lstStyle/>
+          <a:p>
+            <a:pPr marL="0" indent="0" algn="ctr">
+              <a:buNone/>
+            </a:pPr>
+            <a:r>
+              <a:rPr lang="en-US" sz="920" dirty="0">
+                <a:solidFill>
+                  <a:srgbClr val="0E76D8"/>
+                </a:solidFill>
+              </a:rPr>
+              <a:t>Loads the FXML and shows the window</a:t>
+            </a:r>
+            <a:endParaRPr lang="en-US" sz="920" dirty="0"/>
+          </a:p>
+        </p:txBody>
+      </p:sp>
+      <p:sp>
+        <p:nvSpPr>
+          <p:cNvPr id="11" name="Shape 8">
+            <a:extLst>
+              <a:ext uri="{FF2B5EF4-FFF2-40B4-BE49-F238E27FC236}">
+                <a16:creationId xmlns:a16="http://schemas.microsoft.com/office/drawing/2014/main" id="{174970EA-E6EE-310B-57F5-6DCE732A375A}"/>
+              </a:ext>
+            </a:extLst>
+          </p:cNvPr>
+          <p:cNvSpPr/>
+          <p:nvPr/>
+        </p:nvSpPr>
+        <p:spPr>
+          <a:xfrm>
+            <a:off x="6629400" y="640080"/>
+            <a:ext cx="2331720" cy="3063240"/>
+          </a:xfrm>
+          <a:prstGeom prst="roundRect">
+            <a:avLst>
+              <a:gd name="adj" fmla="val 3137"/>
+            </a:avLst>
+          </a:prstGeom>
+          <a:solidFill>
+            <a:srgbClr val="EAF8EE"/>
+          </a:solidFill>
+          <a:ln w="17780">
+            <a:solidFill>
+              <a:srgbClr val="12984B"/>
+            </a:solidFill>
+            <a:prstDash val="solid"/>
+          </a:ln>
+          <a:effectLst>
+            <a:outerShdw blurRad="19050" dist="7620" dir="2700000" algn="bl" rotWithShape="0">
+              <a:srgbClr val="000000">
+                <a:alpha val="10000"/>
+              </a:srgbClr>
+            </a:outerShdw>
+          </a:effectLst>
+        </p:spPr>
+        <p:txBody>
+          <a:bodyPr/>
+          <a:lstStyle/>
+          <a:p>
+            <a:endParaRPr lang="en-US"/>
+          </a:p>
+        </p:txBody>
+      </p:sp>
+      <p:sp>
+        <p:nvSpPr>
+          <p:cNvPr id="12" name="Text 9">
+            <a:extLst>
+              <a:ext uri="{FF2B5EF4-FFF2-40B4-BE49-F238E27FC236}">
+                <a16:creationId xmlns:a16="http://schemas.microsoft.com/office/drawing/2014/main" id="{B7DE323A-6FBE-55F4-B552-33F56AAE9ED3}"/>
+              </a:ext>
+            </a:extLst>
+          </p:cNvPr>
+          <p:cNvSpPr/>
+          <p:nvPr/>
+        </p:nvSpPr>
+        <p:spPr>
+          <a:xfrm>
+            <a:off x="6739128" y="749808"/>
+            <a:ext cx="256032" cy="228600"/>
+          </a:xfrm>
+          <a:prstGeom prst="rect">
+            <a:avLst/>
+          </a:prstGeom>
+          <a:noFill/>
+          <a:ln/>
+        </p:spPr>
+        <p:txBody>
+          <a:bodyPr wrap="square" lIns="0" tIns="0" rIns="0" bIns="0" rtlCol="0" anchor="ctr"/>
+          <a:lstStyle/>
+          <a:p>
+            <a:pPr marL="0" indent="0" algn="ctr">
+              <a:buNone/>
+            </a:pPr>
+            <a:endParaRPr lang="en-US" sz="1800" dirty="0"/>
+          </a:p>
+        </p:txBody>
+      </p:sp>
+      <p:sp>
+        <p:nvSpPr>
+          <p:cNvPr id="13" name="Text 10">
+            <a:extLst>
+              <a:ext uri="{FF2B5EF4-FFF2-40B4-BE49-F238E27FC236}">
+                <a16:creationId xmlns:a16="http://schemas.microsoft.com/office/drawing/2014/main" id="{403BE45D-9F2D-F71C-AE55-A366543EF0FC}"/>
+              </a:ext>
+            </a:extLst>
+          </p:cNvPr>
+          <p:cNvSpPr/>
+          <p:nvPr/>
+        </p:nvSpPr>
+        <p:spPr>
+          <a:xfrm>
+            <a:off x="7086600" y="722376"/>
+            <a:ext cx="1764792" cy="228600"/>
+          </a:xfrm>
+          <a:prstGeom prst="rect">
+            <a:avLst/>
+          </a:prstGeom>
+          <a:noFill/>
+          <a:ln/>
+        </p:spPr>
+        <p:txBody>
+          <a:bodyPr wrap="square" lIns="127" tIns="127" rIns="127" bIns="127" rtlCol="0" anchor="ctr">
+            <a:normAutofit lnSpcReduction="10000"/>
+          </a:bodyPr>
+          <a:lstStyle/>
+          <a:p>
+            <a:pPr marL="0" indent="0">
+              <a:buNone/>
+            </a:pPr>
+            <a:r>
+              <a:rPr lang="en-US" sz="1600" b="1" dirty="0">
+                <a:solidFill>
+                  <a:srgbClr val="12984B"/>
+                </a:solidFill>
+              </a:rPr>
+              <a:t>login.fxml</a:t>
+            </a:r>
+            <a:endParaRPr lang="en-US" sz="1600" dirty="0"/>
+          </a:p>
+        </p:txBody>
+      </p:sp>
+      <p:sp>
+        <p:nvSpPr>
+          <p:cNvPr id="14" name="Text 11">
+            <a:extLst>
+              <a:ext uri="{FF2B5EF4-FFF2-40B4-BE49-F238E27FC236}">
+                <a16:creationId xmlns:a16="http://schemas.microsoft.com/office/drawing/2014/main" id="{6E88F52A-47A9-A1ED-5492-EB345E607132}"/>
+              </a:ext>
+            </a:extLst>
+          </p:cNvPr>
+          <p:cNvSpPr/>
+          <p:nvPr/>
+        </p:nvSpPr>
+        <p:spPr>
+          <a:xfrm>
+            <a:off x="7086600" y="987552"/>
+            <a:ext cx="1764792" cy="164592"/>
+          </a:xfrm>
+          <a:prstGeom prst="rect">
+            <a:avLst/>
+          </a:prstGeom>
+          <a:noFill/>
+          <a:ln/>
+        </p:spPr>
+        <p:txBody>
+          <a:bodyPr wrap="square" lIns="127" tIns="127" rIns="127" bIns="127" rtlCol="0" anchor="ctr">
+            <a:normAutofit/>
+          </a:bodyPr>
+          <a:lstStyle/>
+          <a:p>
+            <a:pPr marL="0" indent="0">
+              <a:buNone/>
+            </a:pPr>
+            <a:r>
+              <a:rPr lang="en-US" sz="880" dirty="0">
+                <a:solidFill>
+                  <a:srgbClr val="12984B"/>
+                </a:solidFill>
+              </a:rPr>
+              <a:t>(UI layout definition)</a:t>
+            </a:r>
+            <a:endParaRPr lang="en-US" sz="880" dirty="0"/>
+          </a:p>
+        </p:txBody>
+      </p:sp>
+      <p:sp>
+        <p:nvSpPr>
+          <p:cNvPr id="15" name="Shape 12">
+            <a:extLst>
+              <a:ext uri="{FF2B5EF4-FFF2-40B4-BE49-F238E27FC236}">
+                <a16:creationId xmlns:a16="http://schemas.microsoft.com/office/drawing/2014/main" id="{6B286EBA-7F3C-6F6C-C235-65D6F812D8E4}"/>
+              </a:ext>
+            </a:extLst>
+          </p:cNvPr>
+          <p:cNvSpPr/>
+          <p:nvPr/>
+        </p:nvSpPr>
+        <p:spPr>
+          <a:xfrm>
+            <a:off x="6720840" y="1170432"/>
+            <a:ext cx="2148840" cy="2048256"/>
+          </a:xfrm>
+          <a:prstGeom prst="roundRect">
+            <a:avLst>
+              <a:gd name="adj" fmla="val 2128"/>
+            </a:avLst>
+          </a:prstGeom>
+          <a:solidFill>
+            <a:srgbClr val="FFFFFF">
+              <a:alpha val="96000"/>
+            </a:srgbClr>
+          </a:solidFill>
+          <a:ln w="8890">
+            <a:solidFill>
+              <a:srgbClr val="D9E2EA"/>
+            </a:solidFill>
+            <a:prstDash val="solid"/>
+          </a:ln>
+        </p:spPr>
+        <p:txBody>
+          <a:bodyPr/>
+          <a:lstStyle/>
+          <a:p>
+            <a:endParaRPr lang="en-US"/>
+          </a:p>
+        </p:txBody>
+      </p:sp>
+      <p:sp>
+        <p:nvSpPr>
+          <p:cNvPr id="16" name="Text 13">
+            <a:extLst>
+              <a:ext uri="{FF2B5EF4-FFF2-40B4-BE49-F238E27FC236}">
+                <a16:creationId xmlns:a16="http://schemas.microsoft.com/office/drawing/2014/main" id="{776D7073-9103-33E5-A3D8-A348D087F236}"/>
+              </a:ext>
+            </a:extLst>
+          </p:cNvPr>
+          <p:cNvSpPr/>
+          <p:nvPr/>
+        </p:nvSpPr>
+        <p:spPr>
+          <a:xfrm>
+            <a:off x="6784847" y="1243584"/>
+            <a:ext cx="2097081" cy="1944792"/>
+          </a:xfrm>
+          <a:prstGeom prst="rect">
+            <a:avLst/>
+          </a:prstGeom>
+          <a:noFill/>
+          <a:ln/>
+        </p:spPr>
+        <p:txBody>
+          <a:bodyPr wrap="square" lIns="0" tIns="0" rIns="0" bIns="0" rtlCol="0" anchor="t">
+            <a:noAutofit/>
+          </a:bodyPr>
+          <a:lstStyle/>
+          <a:p>
+            <a:pPr marL="0" indent="0">
+              <a:buNone/>
+            </a:pPr>
+            <a:r>
+              <a:rPr lang="en-US" sz="700" dirty="0">
+                <a:solidFill>
+                  <a:srgbClr val="111111"/>
+                </a:solidFill>
+                <a:latin typeface="Courier New" pitchFamily="34" charset="0"/>
+                <a:ea typeface="Courier New" pitchFamily="34" charset="-122"/>
+                <a:cs typeface="Courier New" pitchFamily="34" charset="-120"/>
+              </a:rPr>
+              <a:t>&lt;?import </a:t>
+            </a:r>
+            <a:r>
+              <a:rPr lang="en-US" sz="700" dirty="0" err="1">
+                <a:solidFill>
+                  <a:srgbClr val="111111"/>
+                </a:solidFill>
+                <a:latin typeface="Courier New" pitchFamily="34" charset="0"/>
+                <a:ea typeface="Courier New" pitchFamily="34" charset="-122"/>
+                <a:cs typeface="Courier New" pitchFamily="34" charset="-120"/>
+              </a:rPr>
+              <a:t>javafx.scene.control.Button</a:t>
+            </a:r>
+            <a:r>
+              <a:rPr lang="en-US" sz="700" dirty="0">
+                <a:solidFill>
+                  <a:srgbClr val="111111"/>
+                </a:solidFill>
+                <a:latin typeface="Courier New" pitchFamily="34" charset="0"/>
+                <a:ea typeface="Courier New" pitchFamily="34" charset="-122"/>
+                <a:cs typeface="Courier New" pitchFamily="34" charset="-120"/>
+              </a:rPr>
+              <a:t>?&gt;</a:t>
+            </a:r>
+            <a:endParaRPr lang="en-US" sz="700" dirty="0"/>
+          </a:p>
+          <a:p>
+            <a:pPr marL="0" indent="0">
+              <a:buNone/>
+            </a:pPr>
+            <a:r>
+              <a:rPr lang="en-US" sz="700" dirty="0">
+                <a:solidFill>
+                  <a:srgbClr val="111111"/>
+                </a:solidFill>
+                <a:latin typeface="Courier New" pitchFamily="34" charset="0"/>
+                <a:ea typeface="Courier New" pitchFamily="34" charset="-122"/>
+                <a:cs typeface="Courier New" pitchFamily="34" charset="-120"/>
+              </a:rPr>
+              <a:t>&lt;?import javafx.scene.layout.VBox?&gt;</a:t>
+            </a:r>
+            <a:endParaRPr lang="en-US" sz="700" dirty="0"/>
+          </a:p>
+          <a:p>
+            <a:pPr marL="0" indent="0">
+              <a:buNone/>
+            </a:pPr>
+            <a:endParaRPr lang="en-US" sz="700" dirty="0"/>
+          </a:p>
+          <a:p>
+            <a:pPr marL="0" indent="0">
+              <a:buNone/>
+            </a:pPr>
+            <a:r>
+              <a:rPr lang="en-US" sz="700" dirty="0">
+                <a:solidFill>
+                  <a:srgbClr val="111111"/>
+                </a:solidFill>
+                <a:latin typeface="Courier New" pitchFamily="34" charset="0"/>
+                <a:ea typeface="Courier New" pitchFamily="34" charset="-122"/>
+                <a:cs typeface="Courier New" pitchFamily="34" charset="-120"/>
+              </a:rPr>
+              <a:t>&lt;VBox spacing="10" alignment="CENTER"</a:t>
+            </a:r>
+            <a:endParaRPr lang="en-US" sz="700" dirty="0"/>
+          </a:p>
+          <a:p>
+            <a:pPr marL="0" indent="0">
+              <a:buNone/>
+            </a:pPr>
+            <a:r>
+              <a:rPr lang="en-US" sz="700" dirty="0">
+                <a:solidFill>
+                  <a:srgbClr val="111111"/>
+                </a:solidFill>
+                <a:latin typeface="Courier New" pitchFamily="34" charset="0"/>
+                <a:ea typeface="Courier New" pitchFamily="34" charset="-122"/>
+                <a:cs typeface="Courier New" pitchFamily="34" charset="-120"/>
+              </a:rPr>
+              <a:t>     </a:t>
+            </a:r>
+            <a:r>
+              <a:rPr lang="en-US" sz="700" dirty="0" err="1">
+                <a:solidFill>
+                  <a:srgbClr val="111111"/>
+                </a:solidFill>
+                <a:latin typeface="Courier New" pitchFamily="34" charset="0"/>
+                <a:ea typeface="Courier New" pitchFamily="34" charset="-122"/>
+                <a:cs typeface="Courier New" pitchFamily="34" charset="-120"/>
+              </a:rPr>
+              <a:t>xmlns:fx</a:t>
+            </a:r>
+            <a:r>
+              <a:rPr lang="en-US" sz="700" dirty="0">
+                <a:solidFill>
+                  <a:srgbClr val="111111"/>
+                </a:solidFill>
+                <a:latin typeface="Courier New" pitchFamily="34" charset="0"/>
+                <a:ea typeface="Courier New" pitchFamily="34" charset="-122"/>
+                <a:cs typeface="Courier New" pitchFamily="34" charset="-120"/>
+              </a:rPr>
+              <a:t>="http://javafx.com/fxml"</a:t>
+            </a:r>
+            <a:endParaRPr lang="en-US" sz="700" dirty="0"/>
+          </a:p>
+          <a:p>
+            <a:pPr marL="0" indent="0">
+              <a:buNone/>
+            </a:pPr>
+            <a:r>
+              <a:rPr lang="en-US" sz="700" dirty="0">
+                <a:solidFill>
+                  <a:srgbClr val="111111"/>
+                </a:solidFill>
+                <a:latin typeface="Courier New" pitchFamily="34" charset="0"/>
+                <a:ea typeface="Courier New" pitchFamily="34" charset="-122"/>
+                <a:cs typeface="Courier New" pitchFamily="34" charset="-120"/>
+              </a:rPr>
+              <a:t>      fx:controller="Controller"&gt;</a:t>
+            </a:r>
+            <a:endParaRPr lang="en-US" sz="700" dirty="0"/>
+          </a:p>
+          <a:p>
+            <a:pPr marL="0" indent="0">
+              <a:buNone/>
+            </a:pPr>
+            <a:endParaRPr lang="en-US" sz="700" dirty="0"/>
+          </a:p>
+          <a:p>
+            <a:pPr marL="0" indent="0">
+              <a:buNone/>
+            </a:pPr>
+            <a:r>
+              <a:rPr lang="en-US" sz="700" dirty="0">
+                <a:solidFill>
+                  <a:srgbClr val="111111"/>
+                </a:solidFill>
+                <a:latin typeface="Courier New" pitchFamily="34" charset="0"/>
+                <a:ea typeface="Courier New" pitchFamily="34" charset="-122"/>
+                <a:cs typeface="Courier New" pitchFamily="34" charset="-120"/>
+              </a:rPr>
+              <a:t>  &lt;Button fx:id="loginButton"</a:t>
+            </a:r>
+            <a:endParaRPr lang="en-US" sz="700" dirty="0"/>
+          </a:p>
+          <a:p>
+            <a:pPr marL="0" indent="0">
+              <a:buNone/>
+            </a:pPr>
+            <a:r>
+              <a:rPr lang="en-US" sz="700" dirty="0">
+                <a:solidFill>
+                  <a:srgbClr val="111111"/>
+                </a:solidFill>
+                <a:latin typeface="Courier New" pitchFamily="34" charset="0"/>
+                <a:ea typeface="Courier New" pitchFamily="34" charset="-122"/>
+                <a:cs typeface="Courier New" pitchFamily="34" charset="-120"/>
+              </a:rPr>
+              <a:t>          text="Sign In"</a:t>
+            </a:r>
+            <a:endParaRPr lang="en-US" sz="700" dirty="0"/>
+          </a:p>
+          <a:p>
+            <a:pPr marL="0" indent="0">
+              <a:buNone/>
+            </a:pPr>
+            <a:r>
+              <a:rPr lang="en-US" sz="700" dirty="0">
+                <a:solidFill>
+                  <a:srgbClr val="111111"/>
+                </a:solidFill>
+                <a:latin typeface="Courier New" pitchFamily="34" charset="0"/>
+                <a:ea typeface="Courier New" pitchFamily="34" charset="-122"/>
+                <a:cs typeface="Courier New" pitchFamily="34" charset="-120"/>
+              </a:rPr>
+              <a:t>          onAction="#handleLogin"</a:t>
+            </a:r>
+            <a:endParaRPr lang="en-US" sz="700" dirty="0"/>
+          </a:p>
+          <a:p>
+            <a:pPr marL="0" indent="0">
+              <a:buNone/>
+            </a:pPr>
+            <a:r>
+              <a:rPr lang="en-US" sz="700" dirty="0">
+                <a:solidFill>
+                  <a:srgbClr val="111111"/>
+                </a:solidFill>
+                <a:latin typeface="Courier New" pitchFamily="34" charset="0"/>
+                <a:ea typeface="Courier New" pitchFamily="34" charset="-122"/>
+                <a:cs typeface="Courier New" pitchFamily="34" charset="-120"/>
+              </a:rPr>
+              <a:t>          styleClass="primary"/&gt;</a:t>
+            </a:r>
+            <a:endParaRPr lang="en-US" sz="700" dirty="0"/>
+          </a:p>
+          <a:p>
+            <a:pPr marL="0" indent="0">
+              <a:buNone/>
+            </a:pPr>
+            <a:endParaRPr lang="en-US" sz="700" dirty="0"/>
+          </a:p>
+          <a:p>
+            <a:pPr marL="0" indent="0">
+              <a:buNone/>
+            </a:pPr>
+            <a:r>
+              <a:rPr lang="en-US" sz="700" dirty="0">
+                <a:solidFill>
+                  <a:srgbClr val="111111"/>
+                </a:solidFill>
+                <a:latin typeface="Courier New" pitchFamily="34" charset="0"/>
+                <a:ea typeface="Courier New" pitchFamily="34" charset="-122"/>
+                <a:cs typeface="Courier New" pitchFamily="34" charset="-120"/>
+              </a:rPr>
+              <a:t>  &lt;stylesheets&gt;</a:t>
+            </a:r>
+            <a:endParaRPr lang="en-US" sz="700" dirty="0"/>
+          </a:p>
+          <a:p>
+            <a:pPr marL="0" indent="0">
+              <a:buNone/>
+            </a:pPr>
+            <a:r>
+              <a:rPr lang="en-US" sz="700" dirty="0">
+                <a:solidFill>
+                  <a:srgbClr val="111111"/>
+                </a:solidFill>
+                <a:latin typeface="Courier New" pitchFamily="34" charset="0"/>
+                <a:ea typeface="Courier New" pitchFamily="34" charset="-122"/>
+                <a:cs typeface="Courier New" pitchFamily="34" charset="-120"/>
+              </a:rPr>
+              <a:t>    &lt;URL value="@login.css"/&gt;</a:t>
+            </a:r>
+            <a:endParaRPr lang="en-US" sz="700" dirty="0"/>
+          </a:p>
+          <a:p>
+            <a:pPr marL="0" indent="0">
+              <a:buNone/>
+            </a:pPr>
+            <a:r>
+              <a:rPr lang="en-US" sz="700" dirty="0">
+                <a:solidFill>
+                  <a:srgbClr val="111111"/>
+                </a:solidFill>
+                <a:latin typeface="Courier New" pitchFamily="34" charset="0"/>
+                <a:ea typeface="Courier New" pitchFamily="34" charset="-122"/>
+                <a:cs typeface="Courier New" pitchFamily="34" charset="-120"/>
+              </a:rPr>
+              <a:t>  &lt;/stylesheets&gt;</a:t>
+            </a:r>
+            <a:endParaRPr lang="en-US" sz="700" dirty="0"/>
+          </a:p>
+          <a:p>
+            <a:pPr marL="0" indent="0">
+              <a:buNone/>
+            </a:pPr>
+            <a:r>
+              <a:rPr lang="en-US" sz="700" dirty="0">
+                <a:solidFill>
+                  <a:srgbClr val="111111"/>
+                </a:solidFill>
+                <a:latin typeface="Courier New" pitchFamily="34" charset="0"/>
+                <a:ea typeface="Courier New" pitchFamily="34" charset="-122"/>
+                <a:cs typeface="Courier New" pitchFamily="34" charset="-120"/>
+              </a:rPr>
+              <a:t>&lt;/VBox&gt;</a:t>
+            </a:r>
+            <a:endParaRPr lang="en-US" sz="700" dirty="0"/>
+          </a:p>
+        </p:txBody>
+      </p:sp>
+      <p:sp>
+        <p:nvSpPr>
+          <p:cNvPr id="17" name="Text 14">
+            <a:extLst>
+              <a:ext uri="{FF2B5EF4-FFF2-40B4-BE49-F238E27FC236}">
+                <a16:creationId xmlns:a16="http://schemas.microsoft.com/office/drawing/2014/main" id="{C32E29AB-F548-4BAD-47BF-61569B3BBC5A}"/>
+              </a:ext>
+            </a:extLst>
+          </p:cNvPr>
+          <p:cNvSpPr/>
+          <p:nvPr/>
+        </p:nvSpPr>
+        <p:spPr>
+          <a:xfrm>
+            <a:off x="6739128" y="3336120"/>
+            <a:ext cx="2112264" cy="219456"/>
+          </a:xfrm>
+          <a:prstGeom prst="rect">
+            <a:avLst/>
+          </a:prstGeom>
+          <a:noFill/>
+          <a:ln/>
+        </p:spPr>
+        <p:txBody>
+          <a:bodyPr wrap="square" lIns="127" tIns="127" rIns="127" bIns="127" rtlCol="0" anchor="ctr">
+            <a:normAutofit fontScale="85000" lnSpcReduction="20000"/>
+          </a:bodyPr>
+          <a:lstStyle/>
+          <a:p>
+            <a:pPr marL="0" indent="0" algn="ctr">
+              <a:buNone/>
+            </a:pPr>
+            <a:r>
+              <a:rPr lang="en-US" sz="920" dirty="0">
+                <a:solidFill>
+                  <a:srgbClr val="12984B"/>
+                </a:solidFill>
+              </a:rPr>
+              <a:t>Defines the UI structure and connects to controller and CSS</a:t>
+            </a:r>
+            <a:endParaRPr lang="en-US" sz="920" dirty="0"/>
+          </a:p>
+        </p:txBody>
+      </p:sp>
+      <p:sp>
+        <p:nvSpPr>
+          <p:cNvPr id="18" name="Shape 15">
+            <a:extLst>
+              <a:ext uri="{FF2B5EF4-FFF2-40B4-BE49-F238E27FC236}">
+                <a16:creationId xmlns:a16="http://schemas.microsoft.com/office/drawing/2014/main" id="{AA00EE1F-8965-7AD1-A154-F27263FF2C52}"/>
+              </a:ext>
+            </a:extLst>
+          </p:cNvPr>
+          <p:cNvSpPr/>
+          <p:nvPr/>
+        </p:nvSpPr>
+        <p:spPr>
+          <a:xfrm>
+            <a:off x="3221735" y="1572768"/>
+            <a:ext cx="2039111" cy="2212848"/>
+          </a:xfrm>
+          <a:prstGeom prst="roundRect">
+            <a:avLst>
+              <a:gd name="adj" fmla="val 3902"/>
+            </a:avLst>
+          </a:prstGeom>
+          <a:solidFill>
+            <a:srgbClr val="FFF4E6"/>
+          </a:solidFill>
+          <a:ln w="17780">
+            <a:solidFill>
+              <a:srgbClr val="F27616"/>
+            </a:solidFill>
+            <a:prstDash val="solid"/>
+          </a:ln>
+          <a:effectLst>
+            <a:outerShdw blurRad="19050" dist="7620" dir="2700000" algn="bl" rotWithShape="0">
+              <a:srgbClr val="000000">
+                <a:alpha val="10000"/>
+              </a:srgbClr>
+            </a:outerShdw>
+          </a:effectLst>
+        </p:spPr>
+        <p:txBody>
+          <a:bodyPr/>
+          <a:lstStyle/>
+          <a:p>
+            <a:endParaRPr lang="en-US"/>
+          </a:p>
+        </p:txBody>
+      </p:sp>
+      <p:sp>
+        <p:nvSpPr>
+          <p:cNvPr id="19" name="Text 16">
+            <a:extLst>
+              <a:ext uri="{FF2B5EF4-FFF2-40B4-BE49-F238E27FC236}">
+                <a16:creationId xmlns:a16="http://schemas.microsoft.com/office/drawing/2014/main" id="{2CD09467-1206-6B88-667A-99AE42CEC703}"/>
+              </a:ext>
+            </a:extLst>
+          </p:cNvPr>
+          <p:cNvSpPr/>
+          <p:nvPr/>
+        </p:nvSpPr>
+        <p:spPr>
+          <a:xfrm>
+            <a:off x="3331464" y="1682496"/>
+            <a:ext cx="256032" cy="228600"/>
+          </a:xfrm>
+          <a:prstGeom prst="rect">
+            <a:avLst/>
+          </a:prstGeom>
+          <a:noFill/>
+          <a:ln/>
+        </p:spPr>
+        <p:txBody>
+          <a:bodyPr wrap="square" lIns="0" tIns="0" rIns="0" bIns="0" rtlCol="0" anchor="ctr"/>
+          <a:lstStyle/>
+          <a:p>
+            <a:pPr marL="0" indent="0" algn="ctr">
+              <a:buNone/>
+            </a:pPr>
+            <a:endParaRPr lang="en-US" sz="1800" dirty="0"/>
+          </a:p>
+        </p:txBody>
+      </p:sp>
+      <p:sp>
+        <p:nvSpPr>
+          <p:cNvPr id="20" name="Text 17">
+            <a:extLst>
+              <a:ext uri="{FF2B5EF4-FFF2-40B4-BE49-F238E27FC236}">
+                <a16:creationId xmlns:a16="http://schemas.microsoft.com/office/drawing/2014/main" id="{54B06C37-85CB-2A18-30F4-7B083D9E88E5}"/>
+              </a:ext>
+            </a:extLst>
+          </p:cNvPr>
+          <p:cNvSpPr/>
+          <p:nvPr/>
+        </p:nvSpPr>
+        <p:spPr>
+          <a:xfrm>
+            <a:off x="3678936" y="1655064"/>
+            <a:ext cx="1490470" cy="228600"/>
+          </a:xfrm>
+          <a:prstGeom prst="rect">
+            <a:avLst/>
+          </a:prstGeom>
+          <a:noFill/>
+          <a:ln/>
+        </p:spPr>
+        <p:txBody>
+          <a:bodyPr wrap="square" lIns="127" tIns="127" rIns="127" bIns="127" rtlCol="0" anchor="ctr">
+            <a:normAutofit lnSpcReduction="10000"/>
+          </a:bodyPr>
+          <a:lstStyle/>
+          <a:p>
+            <a:pPr marL="0" indent="0">
+              <a:buNone/>
+            </a:pPr>
+            <a:r>
+              <a:rPr lang="en-US" sz="1600" b="1" dirty="0">
+                <a:solidFill>
+                  <a:srgbClr val="F27616"/>
+                </a:solidFill>
+              </a:rPr>
+              <a:t>Controller.java</a:t>
+            </a:r>
+            <a:endParaRPr lang="en-US" sz="1600" dirty="0"/>
+          </a:p>
+        </p:txBody>
+      </p:sp>
+      <p:sp>
+        <p:nvSpPr>
+          <p:cNvPr id="21" name="Text 18">
+            <a:extLst>
+              <a:ext uri="{FF2B5EF4-FFF2-40B4-BE49-F238E27FC236}">
+                <a16:creationId xmlns:a16="http://schemas.microsoft.com/office/drawing/2014/main" id="{43F26ACF-B0D3-8E04-14F5-452B991C4181}"/>
+              </a:ext>
+            </a:extLst>
+          </p:cNvPr>
+          <p:cNvSpPr/>
+          <p:nvPr/>
+        </p:nvSpPr>
+        <p:spPr>
+          <a:xfrm>
+            <a:off x="3678936" y="1920240"/>
+            <a:ext cx="1307592" cy="164592"/>
+          </a:xfrm>
+          <a:prstGeom prst="rect">
+            <a:avLst/>
+          </a:prstGeom>
+          <a:noFill/>
+          <a:ln/>
+        </p:spPr>
+        <p:txBody>
+          <a:bodyPr wrap="square" lIns="127" tIns="127" rIns="127" bIns="127" rtlCol="0" anchor="ctr">
+            <a:normAutofit/>
+          </a:bodyPr>
+          <a:lstStyle/>
+          <a:p>
+            <a:pPr marL="0" indent="0">
+              <a:buNone/>
+            </a:pPr>
+            <a:r>
+              <a:rPr lang="en-US" sz="880" dirty="0">
+                <a:solidFill>
+                  <a:srgbClr val="F27616"/>
+                </a:solidFill>
+              </a:rPr>
+              <a:t>(Handles user behavior)</a:t>
+            </a:r>
+            <a:endParaRPr lang="en-US" sz="880" dirty="0"/>
+          </a:p>
+        </p:txBody>
+      </p:sp>
+      <p:sp>
+        <p:nvSpPr>
+          <p:cNvPr id="22" name="Shape 19">
+            <a:extLst>
+              <a:ext uri="{FF2B5EF4-FFF2-40B4-BE49-F238E27FC236}">
+                <a16:creationId xmlns:a16="http://schemas.microsoft.com/office/drawing/2014/main" id="{861FCE34-36F7-165D-ADD4-733F654D1863}"/>
+              </a:ext>
+            </a:extLst>
+          </p:cNvPr>
+          <p:cNvSpPr/>
+          <p:nvPr/>
+        </p:nvSpPr>
+        <p:spPr>
+          <a:xfrm>
+            <a:off x="3313176" y="2103120"/>
+            <a:ext cx="1837942" cy="1389888"/>
+          </a:xfrm>
+          <a:prstGeom prst="roundRect">
+            <a:avLst>
+              <a:gd name="adj" fmla="val 3289"/>
+            </a:avLst>
+          </a:prstGeom>
+          <a:solidFill>
+            <a:srgbClr val="FFFFFF">
+              <a:alpha val="96000"/>
+            </a:srgbClr>
+          </a:solidFill>
+          <a:ln w="8890">
+            <a:solidFill>
+              <a:srgbClr val="D9E2EA"/>
+            </a:solidFill>
+            <a:prstDash val="solid"/>
+          </a:ln>
+        </p:spPr>
+        <p:txBody>
+          <a:bodyPr/>
+          <a:lstStyle/>
+          <a:p>
+            <a:endParaRPr lang="en-US"/>
+          </a:p>
+        </p:txBody>
+      </p:sp>
+      <p:sp>
+        <p:nvSpPr>
+          <p:cNvPr id="23" name="Text 20">
+            <a:extLst>
+              <a:ext uri="{FF2B5EF4-FFF2-40B4-BE49-F238E27FC236}">
+                <a16:creationId xmlns:a16="http://schemas.microsoft.com/office/drawing/2014/main" id="{C493EBE9-10E5-16DD-4FCE-A8FA1AB438C1}"/>
+              </a:ext>
+            </a:extLst>
+          </p:cNvPr>
+          <p:cNvSpPr/>
+          <p:nvPr/>
+        </p:nvSpPr>
+        <p:spPr>
+          <a:xfrm>
+            <a:off x="3372612" y="2119251"/>
+            <a:ext cx="1796794" cy="1280160"/>
+          </a:xfrm>
+          <a:prstGeom prst="rect">
+            <a:avLst/>
+          </a:prstGeom>
+          <a:noFill/>
+          <a:ln/>
+        </p:spPr>
+        <p:txBody>
+          <a:bodyPr wrap="square" lIns="0" tIns="0" rIns="0" bIns="0" rtlCol="0" anchor="t">
+            <a:noAutofit/>
+          </a:bodyPr>
+          <a:lstStyle/>
+          <a:p>
+            <a:pPr marL="0" indent="0">
+              <a:buNone/>
+            </a:pPr>
+            <a:r>
+              <a:rPr lang="en-US" sz="700" dirty="0">
+                <a:solidFill>
+                  <a:srgbClr val="111111"/>
+                </a:solidFill>
+                <a:latin typeface="Courier New" pitchFamily="34" charset="0"/>
+                <a:ea typeface="Courier New" pitchFamily="34" charset="-122"/>
+                <a:cs typeface="Courier New" pitchFamily="34" charset="-120"/>
+              </a:rPr>
+              <a:t>public class Controller {</a:t>
+            </a:r>
+            <a:endParaRPr lang="en-US" sz="700" dirty="0"/>
+          </a:p>
+          <a:p>
+            <a:pPr marL="0" indent="0">
+              <a:buNone/>
+            </a:pPr>
+            <a:r>
+              <a:rPr lang="en-US" sz="700" dirty="0">
+                <a:solidFill>
+                  <a:srgbClr val="111111"/>
+                </a:solidFill>
+                <a:latin typeface="Courier New" pitchFamily="34" charset="0"/>
+                <a:ea typeface="Courier New" pitchFamily="34" charset="-122"/>
+                <a:cs typeface="Courier New" pitchFamily="34" charset="-120"/>
+              </a:rPr>
+              <a:t>  @FXML</a:t>
+            </a:r>
+            <a:endParaRPr lang="en-US" sz="700" dirty="0"/>
+          </a:p>
+          <a:p>
+            <a:pPr marL="0" indent="0">
+              <a:buNone/>
+            </a:pPr>
+            <a:r>
+              <a:rPr lang="en-US" sz="700" dirty="0">
+                <a:solidFill>
+                  <a:srgbClr val="111111"/>
+                </a:solidFill>
+                <a:latin typeface="Courier New" pitchFamily="34" charset="0"/>
+                <a:ea typeface="Courier New" pitchFamily="34" charset="-122"/>
+                <a:cs typeface="Courier New" pitchFamily="34" charset="-120"/>
+              </a:rPr>
+              <a:t>  private Button loginButton;</a:t>
+            </a:r>
+            <a:endParaRPr lang="en-US" sz="700" dirty="0"/>
+          </a:p>
+          <a:p>
+            <a:pPr marL="0" indent="0">
+              <a:buNone/>
+            </a:pPr>
+            <a:endParaRPr lang="en-US" sz="700" dirty="0"/>
+          </a:p>
+          <a:p>
+            <a:pPr marL="0" indent="0">
+              <a:buNone/>
+            </a:pPr>
+            <a:r>
+              <a:rPr lang="en-US" sz="700" dirty="0">
+                <a:solidFill>
+                  <a:srgbClr val="111111"/>
+                </a:solidFill>
+                <a:latin typeface="Courier New" pitchFamily="34" charset="0"/>
+                <a:ea typeface="Courier New" pitchFamily="34" charset="-122"/>
+                <a:cs typeface="Courier New" pitchFamily="34" charset="-120"/>
+              </a:rPr>
+              <a:t>  @FXML</a:t>
+            </a:r>
+            <a:endParaRPr lang="en-US" sz="700" dirty="0"/>
+          </a:p>
+          <a:p>
+            <a:pPr marL="0" indent="0">
+              <a:buNone/>
+            </a:pPr>
+            <a:r>
+              <a:rPr lang="en-US" sz="700" dirty="0">
+                <a:solidFill>
+                  <a:srgbClr val="111111"/>
+                </a:solidFill>
+                <a:latin typeface="Courier New" pitchFamily="34" charset="0"/>
+                <a:ea typeface="Courier New" pitchFamily="34" charset="-122"/>
+                <a:cs typeface="Courier New" pitchFamily="34" charset="-120"/>
+              </a:rPr>
+              <a:t>  private void handleLogin(</a:t>
+            </a:r>
+            <a:endParaRPr lang="en-US" sz="700" dirty="0"/>
+          </a:p>
+          <a:p>
+            <a:pPr marL="0" indent="0">
+              <a:buNone/>
+            </a:pPr>
+            <a:r>
+              <a:rPr lang="en-US" sz="700" dirty="0">
+                <a:solidFill>
+                  <a:srgbClr val="111111"/>
+                </a:solidFill>
+                <a:latin typeface="Courier New" pitchFamily="34" charset="0"/>
+                <a:ea typeface="Courier New" pitchFamily="34" charset="-122"/>
+                <a:cs typeface="Courier New" pitchFamily="34" charset="-120"/>
+              </a:rPr>
+              <a:t>      ActionEvent event) {</a:t>
+            </a:r>
+            <a:endParaRPr lang="en-US" sz="700" dirty="0"/>
+          </a:p>
+          <a:p>
+            <a:pPr marL="0" indent="0">
+              <a:buNone/>
+            </a:pPr>
+            <a:r>
+              <a:rPr lang="en-US" sz="700" dirty="0">
+                <a:solidFill>
+                  <a:srgbClr val="111111"/>
+                </a:solidFill>
+                <a:latin typeface="Courier New" pitchFamily="34" charset="0"/>
+                <a:ea typeface="Courier New" pitchFamily="34" charset="-122"/>
+                <a:cs typeface="Courier New" pitchFamily="34" charset="-120"/>
+              </a:rPr>
+              <a:t>    System.out.println(</a:t>
+            </a:r>
+            <a:endParaRPr lang="en-US" sz="700" dirty="0"/>
+          </a:p>
+          <a:p>
+            <a:pPr marL="0" indent="0">
+              <a:buNone/>
+            </a:pPr>
+            <a:r>
+              <a:rPr lang="en-US" sz="700" dirty="0">
+                <a:solidFill>
+                  <a:srgbClr val="111111"/>
+                </a:solidFill>
+                <a:latin typeface="Courier New" pitchFamily="34" charset="0"/>
+                <a:ea typeface="Courier New" pitchFamily="34" charset="-122"/>
+                <a:cs typeface="Courier New" pitchFamily="34" charset="-120"/>
+              </a:rPr>
+              <a:t>      "Login button clicked!");</a:t>
+            </a:r>
+            <a:endParaRPr lang="en-US" sz="700" dirty="0"/>
+          </a:p>
+          <a:p>
+            <a:pPr marL="0" indent="0">
+              <a:buNone/>
+            </a:pPr>
+            <a:r>
+              <a:rPr lang="en-US" sz="700" dirty="0">
+                <a:solidFill>
+                  <a:srgbClr val="111111"/>
+                </a:solidFill>
+                <a:latin typeface="Courier New" pitchFamily="34" charset="0"/>
+                <a:ea typeface="Courier New" pitchFamily="34" charset="-122"/>
+                <a:cs typeface="Courier New" pitchFamily="34" charset="-120"/>
+              </a:rPr>
+              <a:t>  }</a:t>
+            </a:r>
+            <a:endParaRPr lang="en-US" sz="700" dirty="0"/>
+          </a:p>
+          <a:p>
+            <a:pPr marL="0" indent="0">
+              <a:buNone/>
+            </a:pPr>
+            <a:r>
+              <a:rPr lang="en-US" sz="700" dirty="0">
+                <a:solidFill>
+                  <a:srgbClr val="111111"/>
+                </a:solidFill>
+                <a:latin typeface="Courier New" pitchFamily="34" charset="0"/>
+                <a:ea typeface="Courier New" pitchFamily="34" charset="-122"/>
+                <a:cs typeface="Courier New" pitchFamily="34" charset="-120"/>
+              </a:rPr>
+              <a:t>}</a:t>
+            </a:r>
+            <a:endParaRPr lang="en-US" sz="700" dirty="0"/>
+          </a:p>
+        </p:txBody>
+      </p:sp>
+      <p:sp>
+        <p:nvSpPr>
+          <p:cNvPr id="24" name="Text 21">
+            <a:extLst>
+              <a:ext uri="{FF2B5EF4-FFF2-40B4-BE49-F238E27FC236}">
+                <a16:creationId xmlns:a16="http://schemas.microsoft.com/office/drawing/2014/main" id="{D40D4A17-5350-09BE-7F23-515AC0ACBA91}"/>
+              </a:ext>
+            </a:extLst>
+          </p:cNvPr>
+          <p:cNvSpPr/>
+          <p:nvPr/>
+        </p:nvSpPr>
+        <p:spPr>
+          <a:xfrm>
+            <a:off x="3331464" y="3493008"/>
+            <a:ext cx="1655064" cy="219456"/>
+          </a:xfrm>
+          <a:prstGeom prst="rect">
+            <a:avLst/>
+          </a:prstGeom>
+          <a:noFill/>
+          <a:ln/>
+        </p:spPr>
+        <p:txBody>
+          <a:bodyPr wrap="square" lIns="127" tIns="127" rIns="127" bIns="127" rtlCol="0" anchor="ctr">
+            <a:normAutofit/>
+          </a:bodyPr>
+          <a:lstStyle/>
+          <a:p>
+            <a:pPr marL="0" indent="0" algn="ctr">
+              <a:buNone/>
+            </a:pPr>
+            <a:r>
+              <a:rPr lang="en-US" sz="920" dirty="0">
+                <a:solidFill>
+                  <a:srgbClr val="F27616"/>
+                </a:solidFill>
+              </a:rPr>
+              <a:t>Processes user actions</a:t>
+            </a:r>
+            <a:endParaRPr lang="en-US" sz="920" dirty="0"/>
+          </a:p>
+        </p:txBody>
+      </p:sp>
+      <p:sp>
+        <p:nvSpPr>
+          <p:cNvPr id="25" name="Shape 22">
+            <a:extLst>
+              <a:ext uri="{FF2B5EF4-FFF2-40B4-BE49-F238E27FC236}">
+                <a16:creationId xmlns:a16="http://schemas.microsoft.com/office/drawing/2014/main" id="{74BBEB32-07C5-C5D8-F8AB-68D4334F7B14}"/>
+              </a:ext>
+            </a:extLst>
+          </p:cNvPr>
+          <p:cNvSpPr/>
+          <p:nvPr/>
+        </p:nvSpPr>
+        <p:spPr>
+          <a:xfrm>
+            <a:off x="228600" y="4297680"/>
+            <a:ext cx="3995351" cy="2011680"/>
+          </a:xfrm>
+          <a:prstGeom prst="roundRect">
+            <a:avLst>
+              <a:gd name="adj" fmla="val 3636"/>
+            </a:avLst>
+          </a:prstGeom>
+          <a:solidFill>
+            <a:srgbClr val="F1EAFF"/>
+          </a:solidFill>
+          <a:ln w="17780">
+            <a:solidFill>
+              <a:srgbClr val="7B49D6"/>
+            </a:solidFill>
+            <a:prstDash val="solid"/>
+          </a:ln>
+          <a:effectLst>
+            <a:outerShdw blurRad="15240" dist="6350" dir="2700000" algn="bl" rotWithShape="0">
+              <a:srgbClr val="000000">
+                <a:alpha val="8000"/>
+              </a:srgbClr>
+            </a:outerShdw>
+          </a:effectLst>
+        </p:spPr>
+        <p:txBody>
+          <a:bodyPr/>
+          <a:lstStyle/>
+          <a:p>
+            <a:endParaRPr lang="en-US"/>
+          </a:p>
+        </p:txBody>
+      </p:sp>
+      <p:sp>
+        <p:nvSpPr>
+          <p:cNvPr id="27" name="Text 24">
+            <a:extLst>
+              <a:ext uri="{FF2B5EF4-FFF2-40B4-BE49-F238E27FC236}">
+                <a16:creationId xmlns:a16="http://schemas.microsoft.com/office/drawing/2014/main" id="{24A3453B-D8CF-4BA9-C30A-D80CC478FE77}"/>
+              </a:ext>
+            </a:extLst>
+          </p:cNvPr>
+          <p:cNvSpPr/>
+          <p:nvPr/>
+        </p:nvSpPr>
+        <p:spPr>
+          <a:xfrm>
+            <a:off x="512982" y="4370832"/>
+            <a:ext cx="2977277" cy="219456"/>
+          </a:xfrm>
+          <a:prstGeom prst="rect">
+            <a:avLst/>
+          </a:prstGeom>
+          <a:noFill/>
+          <a:ln/>
+        </p:spPr>
+        <p:txBody>
+          <a:bodyPr wrap="square" lIns="127" tIns="127" rIns="127" bIns="127" rtlCol="0" anchor="ctr">
+            <a:normAutofit lnSpcReduction="10000"/>
+          </a:bodyPr>
+          <a:lstStyle/>
+          <a:p>
+            <a:pPr marL="0" indent="0">
+              <a:buNone/>
+            </a:pPr>
+            <a:r>
+              <a:rPr lang="en-US" sz="1580" b="1" dirty="0">
+                <a:solidFill>
+                  <a:srgbClr val="2F196E"/>
+                </a:solidFill>
+              </a:rPr>
+              <a:t>Runtime UI Window</a:t>
+            </a:r>
+            <a:endParaRPr lang="en-US" sz="1580" dirty="0"/>
+          </a:p>
+        </p:txBody>
+      </p:sp>
+      <p:sp>
+        <p:nvSpPr>
+          <p:cNvPr id="28" name="Text 25">
+            <a:extLst>
+              <a:ext uri="{FF2B5EF4-FFF2-40B4-BE49-F238E27FC236}">
+                <a16:creationId xmlns:a16="http://schemas.microsoft.com/office/drawing/2014/main" id="{650174D3-A6B3-DBA5-645C-E2253474568C}"/>
+              </a:ext>
+            </a:extLst>
+          </p:cNvPr>
+          <p:cNvSpPr/>
+          <p:nvPr/>
+        </p:nvSpPr>
+        <p:spPr>
+          <a:xfrm>
+            <a:off x="512982" y="4617720"/>
+            <a:ext cx="3657600" cy="155448"/>
+          </a:xfrm>
+          <a:prstGeom prst="rect">
+            <a:avLst/>
+          </a:prstGeom>
+          <a:noFill/>
+          <a:ln/>
+        </p:spPr>
+        <p:txBody>
+          <a:bodyPr wrap="square" lIns="127" tIns="127" rIns="127" bIns="127" rtlCol="0" anchor="ctr">
+            <a:normAutofit/>
+          </a:bodyPr>
+          <a:lstStyle/>
+          <a:p>
+            <a:pPr marL="0" indent="0">
+              <a:buNone/>
+            </a:pPr>
+            <a:r>
+              <a:rPr lang="en-US" sz="880" dirty="0">
+                <a:solidFill>
+                  <a:srgbClr val="2F196E"/>
+                </a:solidFill>
+              </a:rPr>
+              <a:t>(What the user sees)</a:t>
+            </a:r>
+            <a:endParaRPr lang="en-US" sz="880" dirty="0"/>
+          </a:p>
+        </p:txBody>
+      </p:sp>
+      <p:sp>
+        <p:nvSpPr>
+          <p:cNvPr id="29" name="Shape 26">
+            <a:extLst>
+              <a:ext uri="{FF2B5EF4-FFF2-40B4-BE49-F238E27FC236}">
+                <a16:creationId xmlns:a16="http://schemas.microsoft.com/office/drawing/2014/main" id="{F42B1C3A-4797-D115-9898-5CCD9E86E5FE}"/>
+              </a:ext>
+            </a:extLst>
+          </p:cNvPr>
+          <p:cNvSpPr/>
+          <p:nvPr/>
+        </p:nvSpPr>
+        <p:spPr>
+          <a:xfrm>
+            <a:off x="604422" y="4828032"/>
+            <a:ext cx="3154680" cy="1298448"/>
+          </a:xfrm>
+          <a:prstGeom prst="roundRect">
+            <a:avLst>
+              <a:gd name="adj" fmla="val 4225"/>
+            </a:avLst>
+          </a:prstGeom>
+          <a:solidFill>
+            <a:srgbClr val="FFFFFF"/>
+          </a:solidFill>
+          <a:ln w="10160">
+            <a:solidFill>
+              <a:srgbClr val="BFC7D1"/>
+            </a:solidFill>
+            <a:prstDash val="solid"/>
+          </a:ln>
+          <a:effectLst>
+            <a:outerShdw blurRad="19050" dist="10160" dir="2700000" algn="bl" rotWithShape="0">
+              <a:srgbClr val="000000">
+                <a:alpha val="12000"/>
+              </a:srgbClr>
+            </a:outerShdw>
+          </a:effectLst>
+        </p:spPr>
+        <p:txBody>
+          <a:bodyPr/>
+          <a:lstStyle/>
+          <a:p>
+            <a:endParaRPr lang="en-US"/>
+          </a:p>
+        </p:txBody>
+      </p:sp>
+      <p:sp>
+        <p:nvSpPr>
+          <p:cNvPr id="30" name="Shape 27">
+            <a:extLst>
+              <a:ext uri="{FF2B5EF4-FFF2-40B4-BE49-F238E27FC236}">
+                <a16:creationId xmlns:a16="http://schemas.microsoft.com/office/drawing/2014/main" id="{27CC98EA-42FA-C23E-ECFE-EB744258DCC3}"/>
+              </a:ext>
+            </a:extLst>
+          </p:cNvPr>
+          <p:cNvSpPr/>
+          <p:nvPr/>
+        </p:nvSpPr>
+        <p:spPr>
+          <a:xfrm>
+            <a:off x="604422" y="4828032"/>
+            <a:ext cx="3154680" cy="256032"/>
+          </a:xfrm>
+          <a:prstGeom prst="rect">
+            <a:avLst/>
+          </a:prstGeom>
+          <a:solidFill>
+            <a:srgbClr val="ECEFF4"/>
+          </a:solidFill>
+          <a:ln w="6350">
+            <a:solidFill>
+              <a:srgbClr val="BFC7D1"/>
+            </a:solidFill>
+            <a:prstDash val="solid"/>
+          </a:ln>
+        </p:spPr>
+        <p:txBody>
+          <a:bodyPr/>
+          <a:lstStyle/>
+          <a:p>
+            <a:endParaRPr lang="en-US"/>
+          </a:p>
+        </p:txBody>
+      </p:sp>
+      <p:sp>
+        <p:nvSpPr>
+          <p:cNvPr id="31" name="Shape 28">
+            <a:extLst>
+              <a:ext uri="{FF2B5EF4-FFF2-40B4-BE49-F238E27FC236}">
+                <a16:creationId xmlns:a16="http://schemas.microsoft.com/office/drawing/2014/main" id="{3CFA829B-95E4-8A52-19D7-6AEF6C5C0405}"/>
+              </a:ext>
+            </a:extLst>
+          </p:cNvPr>
+          <p:cNvSpPr/>
+          <p:nvPr/>
+        </p:nvSpPr>
+        <p:spPr>
+          <a:xfrm>
+            <a:off x="723294" y="4910328"/>
+            <a:ext cx="73152" cy="73152"/>
+          </a:xfrm>
+          <a:prstGeom prst="ellipse">
+            <a:avLst/>
+          </a:prstGeom>
+          <a:solidFill>
+            <a:srgbClr val="F25F5C"/>
+          </a:solidFill>
+          <a:ln w="12700">
+            <a:solidFill>
+              <a:srgbClr val="F25F5C"/>
+            </a:solidFill>
+            <a:prstDash val="solid"/>
+          </a:ln>
+        </p:spPr>
+        <p:txBody>
+          <a:bodyPr/>
+          <a:lstStyle/>
+          <a:p>
+            <a:endParaRPr lang="en-US"/>
+          </a:p>
+        </p:txBody>
+      </p:sp>
+      <p:sp>
+        <p:nvSpPr>
+          <p:cNvPr id="32" name="Shape 29">
+            <a:extLst>
+              <a:ext uri="{FF2B5EF4-FFF2-40B4-BE49-F238E27FC236}">
+                <a16:creationId xmlns:a16="http://schemas.microsoft.com/office/drawing/2014/main" id="{9E7C45B3-D1FB-DD92-0494-C02B75591357}"/>
+              </a:ext>
+            </a:extLst>
+          </p:cNvPr>
+          <p:cNvSpPr/>
+          <p:nvPr/>
+        </p:nvSpPr>
+        <p:spPr>
+          <a:xfrm>
+            <a:off x="860454" y="4910328"/>
+            <a:ext cx="73152" cy="73152"/>
+          </a:xfrm>
+          <a:prstGeom prst="ellipse">
+            <a:avLst/>
+          </a:prstGeom>
+          <a:solidFill>
+            <a:srgbClr val="FFBD4A"/>
+          </a:solidFill>
+          <a:ln w="12700">
+            <a:solidFill>
+              <a:srgbClr val="FFBD4A"/>
+            </a:solidFill>
+            <a:prstDash val="solid"/>
+          </a:ln>
+        </p:spPr>
+        <p:txBody>
+          <a:bodyPr/>
+          <a:lstStyle/>
+          <a:p>
+            <a:endParaRPr lang="en-US"/>
+          </a:p>
+        </p:txBody>
+      </p:sp>
+      <p:sp>
+        <p:nvSpPr>
+          <p:cNvPr id="33" name="Shape 30">
+            <a:extLst>
+              <a:ext uri="{FF2B5EF4-FFF2-40B4-BE49-F238E27FC236}">
+                <a16:creationId xmlns:a16="http://schemas.microsoft.com/office/drawing/2014/main" id="{F9271F76-743F-4783-B81F-7ED7403DD0EC}"/>
+              </a:ext>
+            </a:extLst>
+          </p:cNvPr>
+          <p:cNvSpPr/>
+          <p:nvPr/>
+        </p:nvSpPr>
+        <p:spPr>
+          <a:xfrm>
+            <a:off x="997614" y="4910328"/>
+            <a:ext cx="73152" cy="73152"/>
+          </a:xfrm>
+          <a:prstGeom prst="ellipse">
+            <a:avLst/>
+          </a:prstGeom>
+          <a:solidFill>
+            <a:srgbClr val="30C05B"/>
+          </a:solidFill>
+          <a:ln w="12700">
+            <a:solidFill>
+              <a:srgbClr val="30C05B"/>
+            </a:solidFill>
+            <a:prstDash val="solid"/>
+          </a:ln>
+        </p:spPr>
+        <p:txBody>
+          <a:bodyPr/>
+          <a:lstStyle/>
+          <a:p>
+            <a:endParaRPr lang="en-US"/>
+          </a:p>
+        </p:txBody>
+      </p:sp>
+      <p:sp>
+        <p:nvSpPr>
+          <p:cNvPr id="34" name="Text 31">
+            <a:extLst>
+              <a:ext uri="{FF2B5EF4-FFF2-40B4-BE49-F238E27FC236}">
+                <a16:creationId xmlns:a16="http://schemas.microsoft.com/office/drawing/2014/main" id="{4406823F-267A-A0F8-9ADD-7C31A7D8C49D}"/>
+              </a:ext>
+            </a:extLst>
+          </p:cNvPr>
+          <p:cNvSpPr/>
+          <p:nvPr/>
+        </p:nvSpPr>
+        <p:spPr>
+          <a:xfrm>
+            <a:off x="604422" y="4882896"/>
+            <a:ext cx="3154680" cy="146304"/>
+          </a:xfrm>
+          <a:prstGeom prst="rect">
+            <a:avLst/>
+          </a:prstGeom>
+          <a:noFill/>
+          <a:ln/>
+        </p:spPr>
+        <p:txBody>
+          <a:bodyPr wrap="square" lIns="0" tIns="0" rIns="0" bIns="0" rtlCol="0" anchor="ctr"/>
+          <a:lstStyle/>
+          <a:p>
+            <a:pPr marL="0" indent="0" algn="ctr">
+              <a:buNone/>
+            </a:pPr>
+            <a:r>
+              <a:rPr lang="en-US" sz="800" dirty="0">
+                <a:solidFill>
+                  <a:srgbClr val="111111"/>
+                </a:solidFill>
+              </a:rPr>
+              <a:t>My App</a:t>
+            </a:r>
+            <a:endParaRPr lang="en-US" sz="800" dirty="0"/>
+          </a:p>
+        </p:txBody>
+      </p:sp>
+      <p:sp>
+        <p:nvSpPr>
+          <p:cNvPr id="35" name="Text 32">
+            <a:extLst>
+              <a:ext uri="{FF2B5EF4-FFF2-40B4-BE49-F238E27FC236}">
+                <a16:creationId xmlns:a16="http://schemas.microsoft.com/office/drawing/2014/main" id="{677DC87D-5119-4130-F298-AF2CD7793EAA}"/>
+              </a:ext>
+            </a:extLst>
+          </p:cNvPr>
+          <p:cNvSpPr/>
+          <p:nvPr/>
+        </p:nvSpPr>
+        <p:spPr>
+          <a:xfrm>
+            <a:off x="924462" y="5184648"/>
+            <a:ext cx="685800" cy="164592"/>
+          </a:xfrm>
+          <a:prstGeom prst="rect">
+            <a:avLst/>
+          </a:prstGeom>
+          <a:noFill/>
+          <a:ln/>
+        </p:spPr>
+        <p:txBody>
+          <a:bodyPr wrap="square" lIns="0" tIns="0" rIns="0" bIns="0" rtlCol="0" anchor="ctr">
+            <a:normAutofit/>
+          </a:bodyPr>
+          <a:lstStyle/>
+          <a:p>
+            <a:pPr marL="0" indent="0">
+              <a:buNone/>
+            </a:pPr>
+            <a:r>
+              <a:rPr lang="en-US" sz="800" dirty="0">
+                <a:solidFill>
+                  <a:srgbClr val="111111"/>
+                </a:solidFill>
+              </a:rPr>
+              <a:t>Username:</a:t>
+            </a:r>
+            <a:endParaRPr lang="en-US" sz="800" dirty="0"/>
+          </a:p>
+        </p:txBody>
+      </p:sp>
+      <p:sp>
+        <p:nvSpPr>
+          <p:cNvPr id="36" name="Shape 33">
+            <a:extLst>
+              <a:ext uri="{FF2B5EF4-FFF2-40B4-BE49-F238E27FC236}">
+                <a16:creationId xmlns:a16="http://schemas.microsoft.com/office/drawing/2014/main" id="{7BCE766D-37EA-49A2-307F-23E94BC022BC}"/>
+              </a:ext>
+            </a:extLst>
+          </p:cNvPr>
+          <p:cNvSpPr/>
+          <p:nvPr/>
+        </p:nvSpPr>
+        <p:spPr>
+          <a:xfrm>
+            <a:off x="1701702" y="5157216"/>
+            <a:ext cx="1737360" cy="246888"/>
+          </a:xfrm>
+          <a:prstGeom prst="roundRect">
+            <a:avLst>
+              <a:gd name="adj" fmla="val 11111"/>
+            </a:avLst>
+          </a:prstGeom>
+          <a:solidFill>
+            <a:srgbClr val="FFFFFF"/>
+          </a:solidFill>
+          <a:ln w="10160">
+            <a:solidFill>
+              <a:srgbClr val="C5CDD5"/>
+            </a:solidFill>
+            <a:prstDash val="solid"/>
+          </a:ln>
+        </p:spPr>
+        <p:txBody>
+          <a:bodyPr/>
+          <a:lstStyle/>
+          <a:p>
+            <a:endParaRPr lang="en-US"/>
+          </a:p>
+        </p:txBody>
+      </p:sp>
+      <p:sp>
+        <p:nvSpPr>
+          <p:cNvPr id="37" name="Text 34">
+            <a:extLst>
+              <a:ext uri="{FF2B5EF4-FFF2-40B4-BE49-F238E27FC236}">
+                <a16:creationId xmlns:a16="http://schemas.microsoft.com/office/drawing/2014/main" id="{A6C40210-4A0B-A1C2-F473-C71AE8510F6D}"/>
+              </a:ext>
+            </a:extLst>
+          </p:cNvPr>
+          <p:cNvSpPr/>
+          <p:nvPr/>
+        </p:nvSpPr>
+        <p:spPr>
+          <a:xfrm>
+            <a:off x="1774854" y="5207508"/>
+            <a:ext cx="1600200" cy="118872"/>
+          </a:xfrm>
+          <a:prstGeom prst="rect">
+            <a:avLst/>
+          </a:prstGeom>
+          <a:noFill/>
+          <a:ln/>
+        </p:spPr>
+        <p:txBody>
+          <a:bodyPr wrap="square" lIns="0" tIns="0" rIns="0" bIns="0" rtlCol="0" anchor="ctr"/>
+          <a:lstStyle/>
+          <a:p>
+            <a:pPr marL="0" indent="0">
+              <a:buNone/>
+            </a:pPr>
+            <a:r>
+              <a:rPr lang="en-US" sz="750" dirty="0">
+                <a:solidFill>
+                  <a:srgbClr val="7A7A7A"/>
+                </a:solidFill>
+              </a:rPr>
+              <a:t>Enter username</a:t>
+            </a:r>
+            <a:endParaRPr lang="en-US" sz="750" dirty="0"/>
+          </a:p>
+        </p:txBody>
+      </p:sp>
+      <p:sp>
+        <p:nvSpPr>
+          <p:cNvPr id="38" name="Text 35">
+            <a:extLst>
+              <a:ext uri="{FF2B5EF4-FFF2-40B4-BE49-F238E27FC236}">
+                <a16:creationId xmlns:a16="http://schemas.microsoft.com/office/drawing/2014/main" id="{228F2B2C-2C53-2109-62C9-5B2A145719A2}"/>
+              </a:ext>
+            </a:extLst>
+          </p:cNvPr>
+          <p:cNvSpPr/>
+          <p:nvPr/>
+        </p:nvSpPr>
+        <p:spPr>
+          <a:xfrm>
+            <a:off x="924462" y="5468112"/>
+            <a:ext cx="685800" cy="164592"/>
+          </a:xfrm>
+          <a:prstGeom prst="rect">
+            <a:avLst/>
+          </a:prstGeom>
+          <a:noFill/>
+          <a:ln/>
+        </p:spPr>
+        <p:txBody>
+          <a:bodyPr wrap="square" lIns="0" tIns="0" rIns="0" bIns="0" rtlCol="0" anchor="ctr">
+            <a:normAutofit/>
+          </a:bodyPr>
+          <a:lstStyle/>
+          <a:p>
+            <a:pPr marL="0" indent="0">
+              <a:buNone/>
+            </a:pPr>
+            <a:r>
+              <a:rPr lang="en-US" sz="800" dirty="0">
+                <a:solidFill>
+                  <a:srgbClr val="111111"/>
+                </a:solidFill>
+              </a:rPr>
+              <a:t>Password:</a:t>
+            </a:r>
+            <a:endParaRPr lang="en-US" sz="800" dirty="0"/>
+          </a:p>
+        </p:txBody>
+      </p:sp>
+      <p:sp>
+        <p:nvSpPr>
+          <p:cNvPr id="39" name="Shape 36">
+            <a:extLst>
+              <a:ext uri="{FF2B5EF4-FFF2-40B4-BE49-F238E27FC236}">
+                <a16:creationId xmlns:a16="http://schemas.microsoft.com/office/drawing/2014/main" id="{78D72C9C-7456-3625-3938-1512EEF6CAD0}"/>
+              </a:ext>
+            </a:extLst>
+          </p:cNvPr>
+          <p:cNvSpPr/>
+          <p:nvPr/>
+        </p:nvSpPr>
+        <p:spPr>
+          <a:xfrm>
+            <a:off x="1701702" y="5431536"/>
+            <a:ext cx="1737360" cy="246888"/>
+          </a:xfrm>
+          <a:prstGeom prst="roundRect">
+            <a:avLst>
+              <a:gd name="adj" fmla="val 11111"/>
+            </a:avLst>
+          </a:prstGeom>
+          <a:solidFill>
+            <a:srgbClr val="FFFFFF"/>
+          </a:solidFill>
+          <a:ln w="10160">
+            <a:solidFill>
+              <a:srgbClr val="C5CDD5"/>
+            </a:solidFill>
+            <a:prstDash val="solid"/>
+          </a:ln>
+        </p:spPr>
+        <p:txBody>
+          <a:bodyPr/>
+          <a:lstStyle/>
+          <a:p>
+            <a:endParaRPr lang="en-US"/>
+          </a:p>
+        </p:txBody>
+      </p:sp>
+      <p:sp>
+        <p:nvSpPr>
+          <p:cNvPr id="40" name="Text 37">
+            <a:extLst>
+              <a:ext uri="{FF2B5EF4-FFF2-40B4-BE49-F238E27FC236}">
+                <a16:creationId xmlns:a16="http://schemas.microsoft.com/office/drawing/2014/main" id="{02F6AED4-95B0-00D5-0DA4-4D6C6BE7E4C6}"/>
+              </a:ext>
+            </a:extLst>
+          </p:cNvPr>
+          <p:cNvSpPr/>
+          <p:nvPr/>
+        </p:nvSpPr>
+        <p:spPr>
+          <a:xfrm>
+            <a:off x="1774854" y="5477256"/>
+            <a:ext cx="1600200" cy="128016"/>
+          </a:xfrm>
+          <a:prstGeom prst="rect">
+            <a:avLst/>
+          </a:prstGeom>
+          <a:noFill/>
+          <a:ln/>
+        </p:spPr>
+        <p:txBody>
+          <a:bodyPr wrap="square" lIns="0" tIns="0" rIns="0" bIns="0" rtlCol="0" anchor="ctr"/>
+          <a:lstStyle/>
+          <a:p>
+            <a:pPr marL="0" indent="0">
+              <a:buNone/>
+            </a:pPr>
+            <a:r>
+              <a:rPr lang="en-US" sz="800" dirty="0">
+                <a:solidFill>
+                  <a:srgbClr val="111111"/>
+                </a:solidFill>
+              </a:rPr>
+              <a:t>••••••••</a:t>
+            </a:r>
+            <a:endParaRPr lang="en-US" sz="800" dirty="0"/>
+          </a:p>
+        </p:txBody>
+      </p:sp>
+      <p:sp>
+        <p:nvSpPr>
+          <p:cNvPr id="41" name="Shape 38">
+            <a:extLst>
+              <a:ext uri="{FF2B5EF4-FFF2-40B4-BE49-F238E27FC236}">
+                <a16:creationId xmlns:a16="http://schemas.microsoft.com/office/drawing/2014/main" id="{DA8F3F1E-7BF2-2D35-FEF0-4CFD5475176C}"/>
+              </a:ext>
+            </a:extLst>
+          </p:cNvPr>
+          <p:cNvSpPr/>
+          <p:nvPr/>
+        </p:nvSpPr>
+        <p:spPr>
+          <a:xfrm>
+            <a:off x="1610262" y="5815584"/>
+            <a:ext cx="1143000" cy="320040"/>
+          </a:xfrm>
+          <a:prstGeom prst="roundRect">
+            <a:avLst>
+              <a:gd name="adj" fmla="val 17143"/>
+            </a:avLst>
+          </a:prstGeom>
+          <a:solidFill>
+            <a:srgbClr val="0E76D8"/>
+          </a:solidFill>
+          <a:ln w="10160">
+            <a:solidFill>
+              <a:srgbClr val="0560B7"/>
+            </a:solidFill>
+            <a:prstDash val="solid"/>
+          </a:ln>
+        </p:spPr>
+        <p:txBody>
+          <a:bodyPr/>
+          <a:lstStyle/>
+          <a:p>
+            <a:endParaRPr lang="en-US"/>
+          </a:p>
+        </p:txBody>
+      </p:sp>
+      <p:sp>
+        <p:nvSpPr>
+          <p:cNvPr id="42" name="Text 39">
+            <a:extLst>
+              <a:ext uri="{FF2B5EF4-FFF2-40B4-BE49-F238E27FC236}">
+                <a16:creationId xmlns:a16="http://schemas.microsoft.com/office/drawing/2014/main" id="{ABF3CF85-8559-39A0-471F-75232EDBDE17}"/>
+              </a:ext>
+            </a:extLst>
+          </p:cNvPr>
+          <p:cNvSpPr/>
+          <p:nvPr/>
+        </p:nvSpPr>
+        <p:spPr>
+          <a:xfrm>
+            <a:off x="1610262" y="5897880"/>
+            <a:ext cx="1143000" cy="128016"/>
+          </a:xfrm>
+          <a:prstGeom prst="rect">
+            <a:avLst/>
+          </a:prstGeom>
+          <a:noFill/>
+          <a:ln/>
+        </p:spPr>
+        <p:txBody>
+          <a:bodyPr wrap="square" lIns="0" tIns="0" rIns="0" bIns="0" rtlCol="0" anchor="ctr"/>
+          <a:lstStyle/>
+          <a:p>
+            <a:pPr marL="0" indent="0" algn="ctr">
+              <a:buNone/>
+            </a:pPr>
+            <a:r>
+              <a:rPr lang="en-US" sz="940" b="1" dirty="0">
+                <a:solidFill>
+                  <a:srgbClr val="FFFFFF"/>
+                </a:solidFill>
+              </a:rPr>
+              <a:t>Sign In</a:t>
+            </a:r>
+            <a:endParaRPr lang="en-US" sz="940" dirty="0"/>
+          </a:p>
+        </p:txBody>
+      </p:sp>
+      <p:sp>
+        <p:nvSpPr>
+          <p:cNvPr id="43" name="Shape 40">
+            <a:extLst>
+              <a:ext uri="{FF2B5EF4-FFF2-40B4-BE49-F238E27FC236}">
+                <a16:creationId xmlns:a16="http://schemas.microsoft.com/office/drawing/2014/main" id="{5AF86C96-F9BC-9977-8C91-C7C9741C58FE}"/>
+              </a:ext>
+            </a:extLst>
+          </p:cNvPr>
+          <p:cNvSpPr/>
+          <p:nvPr/>
+        </p:nvSpPr>
+        <p:spPr>
+          <a:xfrm>
+            <a:off x="6824529" y="4805199"/>
+            <a:ext cx="2084832" cy="1417320"/>
+          </a:xfrm>
+          <a:prstGeom prst="roundRect">
+            <a:avLst>
+              <a:gd name="adj" fmla="val 5161"/>
+            </a:avLst>
+          </a:prstGeom>
+          <a:solidFill>
+            <a:srgbClr val="FFF0F7"/>
+          </a:solidFill>
+          <a:ln w="17780">
+            <a:solidFill>
+              <a:srgbClr val="E61E73"/>
+            </a:solidFill>
+            <a:prstDash val="solid"/>
+          </a:ln>
+          <a:effectLst>
+            <a:outerShdw blurRad="19050" dist="7620" dir="2700000" algn="bl" rotWithShape="0">
+              <a:srgbClr val="000000">
+                <a:alpha val="10000"/>
+              </a:srgbClr>
+            </a:outerShdw>
+          </a:effectLst>
+        </p:spPr>
+        <p:txBody>
+          <a:bodyPr/>
+          <a:lstStyle/>
+          <a:p>
+            <a:endParaRPr lang="en-US"/>
+          </a:p>
+        </p:txBody>
+      </p:sp>
+      <p:sp>
+        <p:nvSpPr>
+          <p:cNvPr id="44" name="Text 42">
+            <a:extLst>
+              <a:ext uri="{FF2B5EF4-FFF2-40B4-BE49-F238E27FC236}">
+                <a16:creationId xmlns:a16="http://schemas.microsoft.com/office/drawing/2014/main" id="{63A18DEC-30EE-2542-F96A-C06E744BA087}"/>
+              </a:ext>
+            </a:extLst>
+          </p:cNvPr>
+          <p:cNvSpPr/>
+          <p:nvPr/>
+        </p:nvSpPr>
+        <p:spPr>
+          <a:xfrm>
+            <a:off x="7400601" y="4887495"/>
+            <a:ext cx="1399032" cy="228600"/>
+          </a:xfrm>
+          <a:prstGeom prst="rect">
+            <a:avLst/>
+          </a:prstGeom>
+          <a:noFill/>
+          <a:ln/>
+        </p:spPr>
+        <p:txBody>
+          <a:bodyPr wrap="square" lIns="127" tIns="127" rIns="127" bIns="127" rtlCol="0" anchor="ctr">
+            <a:normAutofit lnSpcReduction="10000"/>
+          </a:bodyPr>
+          <a:lstStyle/>
+          <a:p>
+            <a:pPr marL="0" indent="0">
+              <a:buNone/>
+            </a:pPr>
+            <a:r>
+              <a:rPr lang="en-US" sz="1600" b="1" dirty="0">
+                <a:solidFill>
+                  <a:srgbClr val="E61E73"/>
+                </a:solidFill>
+              </a:rPr>
+              <a:t>Login.css</a:t>
+            </a:r>
+            <a:endParaRPr lang="en-US" sz="1600" dirty="0"/>
+          </a:p>
+        </p:txBody>
+      </p:sp>
+      <p:sp>
+        <p:nvSpPr>
+          <p:cNvPr id="45" name="Text 43">
+            <a:extLst>
+              <a:ext uri="{FF2B5EF4-FFF2-40B4-BE49-F238E27FC236}">
+                <a16:creationId xmlns:a16="http://schemas.microsoft.com/office/drawing/2014/main" id="{CFBA937E-522D-2B35-82E2-777674DA6083}"/>
+              </a:ext>
+            </a:extLst>
+          </p:cNvPr>
+          <p:cNvSpPr/>
+          <p:nvPr/>
+        </p:nvSpPr>
+        <p:spPr>
+          <a:xfrm>
+            <a:off x="7400601" y="5135418"/>
+            <a:ext cx="1399032" cy="164592"/>
+          </a:xfrm>
+          <a:prstGeom prst="rect">
+            <a:avLst/>
+          </a:prstGeom>
+          <a:noFill/>
+          <a:ln/>
+        </p:spPr>
+        <p:txBody>
+          <a:bodyPr wrap="square" lIns="127" tIns="127" rIns="127" bIns="127" rtlCol="0" anchor="ctr">
+            <a:normAutofit/>
+          </a:bodyPr>
+          <a:lstStyle/>
+          <a:p>
+            <a:pPr marL="0" indent="0">
+              <a:buNone/>
+            </a:pPr>
+            <a:r>
+              <a:rPr lang="en-US" sz="880" dirty="0">
+                <a:solidFill>
+                  <a:srgbClr val="E61E73"/>
+                </a:solidFill>
+              </a:rPr>
+              <a:t>(Styles / Appearance)</a:t>
+            </a:r>
+            <a:endParaRPr lang="en-US" sz="880" dirty="0"/>
+          </a:p>
+        </p:txBody>
+      </p:sp>
+      <p:sp>
+        <p:nvSpPr>
+          <p:cNvPr id="46" name="Shape 44">
+            <a:extLst>
+              <a:ext uri="{FF2B5EF4-FFF2-40B4-BE49-F238E27FC236}">
+                <a16:creationId xmlns:a16="http://schemas.microsoft.com/office/drawing/2014/main" id="{EC8F95DD-E5AA-0135-535A-ADADC9EFA05D}"/>
+              </a:ext>
+            </a:extLst>
+          </p:cNvPr>
+          <p:cNvSpPr/>
+          <p:nvPr/>
+        </p:nvSpPr>
+        <p:spPr>
+          <a:xfrm>
+            <a:off x="6895381" y="5335550"/>
+            <a:ext cx="1922540" cy="672057"/>
+          </a:xfrm>
+          <a:prstGeom prst="roundRect">
+            <a:avLst>
+              <a:gd name="adj" fmla="val 7692"/>
+            </a:avLst>
+          </a:prstGeom>
+          <a:solidFill>
+            <a:srgbClr val="FFFFFF">
+              <a:alpha val="96000"/>
+            </a:srgbClr>
+          </a:solidFill>
+          <a:ln w="8890">
+            <a:solidFill>
+              <a:srgbClr val="D9E2EA"/>
+            </a:solidFill>
+            <a:prstDash val="solid"/>
+          </a:ln>
+        </p:spPr>
+        <p:txBody>
+          <a:bodyPr/>
+          <a:lstStyle/>
+          <a:p>
+            <a:endParaRPr lang="en-US"/>
+          </a:p>
+        </p:txBody>
+      </p:sp>
+      <p:sp>
+        <p:nvSpPr>
+          <p:cNvPr id="47" name="Text 45">
+            <a:extLst>
+              <a:ext uri="{FF2B5EF4-FFF2-40B4-BE49-F238E27FC236}">
+                <a16:creationId xmlns:a16="http://schemas.microsoft.com/office/drawing/2014/main" id="{88A4250D-0A4F-3098-5C9B-489C12A4C30C}"/>
+              </a:ext>
+            </a:extLst>
+          </p:cNvPr>
+          <p:cNvSpPr/>
+          <p:nvPr/>
+        </p:nvSpPr>
+        <p:spPr>
+          <a:xfrm>
+            <a:off x="6925113" y="5359446"/>
+            <a:ext cx="1956816" cy="529317"/>
+          </a:xfrm>
+          <a:prstGeom prst="rect">
+            <a:avLst/>
+          </a:prstGeom>
+          <a:noFill/>
+          <a:ln/>
+        </p:spPr>
+        <p:txBody>
+          <a:bodyPr wrap="square" lIns="0" tIns="0" rIns="0" bIns="0" rtlCol="0" anchor="t">
+            <a:noAutofit/>
+          </a:bodyPr>
+          <a:lstStyle/>
+          <a:p>
+            <a:pPr marL="0" indent="0">
+              <a:buNone/>
+            </a:pPr>
+            <a:r>
+              <a:rPr lang="en-US" sz="700" dirty="0">
+                <a:solidFill>
+                  <a:srgbClr val="111111"/>
+                </a:solidFill>
+                <a:latin typeface="Courier New" pitchFamily="34" charset="0"/>
+                <a:ea typeface="Courier New" pitchFamily="34" charset="-122"/>
+                <a:cs typeface="Courier New" pitchFamily="34" charset="-120"/>
+              </a:rPr>
+              <a:t>.primary {</a:t>
+            </a:r>
+            <a:endParaRPr lang="en-US" sz="700" dirty="0"/>
+          </a:p>
+          <a:p>
+            <a:pPr marL="0" indent="0">
+              <a:buNone/>
+            </a:pPr>
+            <a:r>
+              <a:rPr lang="en-US" sz="700" dirty="0">
+                <a:solidFill>
+                  <a:srgbClr val="111111"/>
+                </a:solidFill>
+                <a:latin typeface="Courier New" pitchFamily="34" charset="0"/>
+                <a:ea typeface="Courier New" pitchFamily="34" charset="-122"/>
+                <a:cs typeface="Courier New" pitchFamily="34" charset="-120"/>
+              </a:rPr>
+              <a:t>  -fx-font-weight: bold;</a:t>
+            </a:r>
+            <a:endParaRPr lang="en-US" sz="700" dirty="0"/>
+          </a:p>
+          <a:p>
+            <a:pPr marL="0" indent="0">
+              <a:buNone/>
+            </a:pPr>
+            <a:r>
+              <a:rPr lang="en-US" sz="700" dirty="0">
+                <a:solidFill>
+                  <a:srgbClr val="111111"/>
+                </a:solidFill>
+                <a:latin typeface="Courier New" pitchFamily="34" charset="0"/>
+                <a:ea typeface="Courier New" pitchFamily="34" charset="-122"/>
+                <a:cs typeface="Courier New" pitchFamily="34" charset="-120"/>
+              </a:rPr>
+              <a:t>  -</a:t>
+            </a:r>
+            <a:r>
+              <a:rPr lang="en-US" sz="700" dirty="0" err="1">
+                <a:solidFill>
+                  <a:srgbClr val="111111"/>
+                </a:solidFill>
+                <a:latin typeface="Courier New" pitchFamily="34" charset="0"/>
+                <a:ea typeface="Courier New" pitchFamily="34" charset="-122"/>
+                <a:cs typeface="Courier New" pitchFamily="34" charset="-120"/>
+              </a:rPr>
+              <a:t>fx</a:t>
+            </a:r>
+            <a:r>
+              <a:rPr lang="en-US" sz="700" dirty="0">
+                <a:solidFill>
+                  <a:srgbClr val="111111"/>
+                </a:solidFill>
+                <a:latin typeface="Courier New" pitchFamily="34" charset="0"/>
+                <a:ea typeface="Courier New" pitchFamily="34" charset="-122"/>
+                <a:cs typeface="Courier New" pitchFamily="34" charset="-120"/>
+              </a:rPr>
+              <a:t>-background-color: #0078D7;</a:t>
+            </a:r>
+            <a:endParaRPr lang="en-US" sz="700" dirty="0"/>
+          </a:p>
+          <a:p>
+            <a:pPr marL="0" indent="0">
+              <a:buNone/>
+            </a:pPr>
+            <a:r>
+              <a:rPr lang="en-US" sz="700" dirty="0">
+                <a:solidFill>
+                  <a:srgbClr val="111111"/>
+                </a:solidFill>
+                <a:latin typeface="Courier New" pitchFamily="34" charset="0"/>
+                <a:ea typeface="Courier New" pitchFamily="34" charset="-122"/>
+                <a:cs typeface="Courier New" pitchFamily="34" charset="-120"/>
+              </a:rPr>
+              <a:t>  -fx-text-fill: white;</a:t>
+            </a:r>
+            <a:endParaRPr lang="en-US" sz="700" dirty="0"/>
+          </a:p>
+          <a:p>
+            <a:pPr marL="0" indent="0">
+              <a:buNone/>
+            </a:pPr>
+            <a:r>
+              <a:rPr lang="en-US" sz="700" dirty="0">
+                <a:solidFill>
+                  <a:srgbClr val="111111"/>
+                </a:solidFill>
+                <a:latin typeface="Courier New" pitchFamily="34" charset="0"/>
+                <a:ea typeface="Courier New" pitchFamily="34" charset="-122"/>
+                <a:cs typeface="Courier New" pitchFamily="34" charset="-120"/>
+              </a:rPr>
+              <a:t>  -fx-background-radius: 5;</a:t>
+            </a:r>
+            <a:endParaRPr lang="en-US" sz="700" dirty="0"/>
+          </a:p>
+          <a:p>
+            <a:pPr marL="0" indent="0">
+              <a:buNone/>
+            </a:pPr>
+            <a:r>
+              <a:rPr lang="en-US" sz="700" dirty="0">
+                <a:solidFill>
+                  <a:srgbClr val="111111"/>
+                </a:solidFill>
+                <a:latin typeface="Courier New" pitchFamily="34" charset="0"/>
+                <a:ea typeface="Courier New" pitchFamily="34" charset="-122"/>
+                <a:cs typeface="Courier New" pitchFamily="34" charset="-120"/>
+              </a:rPr>
+              <a:t>}</a:t>
+            </a:r>
+            <a:endParaRPr lang="en-US" sz="700" dirty="0"/>
+          </a:p>
+        </p:txBody>
+      </p:sp>
+      <p:sp>
+        <p:nvSpPr>
+          <p:cNvPr id="48" name="Text 46">
+            <a:extLst>
+              <a:ext uri="{FF2B5EF4-FFF2-40B4-BE49-F238E27FC236}">
+                <a16:creationId xmlns:a16="http://schemas.microsoft.com/office/drawing/2014/main" id="{DAE24EBA-4375-3994-A6FC-AB39D8A10C8F}"/>
+              </a:ext>
+            </a:extLst>
+          </p:cNvPr>
+          <p:cNvSpPr/>
+          <p:nvPr/>
+        </p:nvSpPr>
+        <p:spPr>
+          <a:xfrm>
+            <a:off x="7053129" y="5987421"/>
+            <a:ext cx="1746504" cy="219456"/>
+          </a:xfrm>
+          <a:prstGeom prst="rect">
+            <a:avLst/>
+          </a:prstGeom>
+          <a:noFill/>
+          <a:ln/>
+        </p:spPr>
+        <p:txBody>
+          <a:bodyPr wrap="square" lIns="127" tIns="127" rIns="127" bIns="127" rtlCol="0" anchor="ctr">
+            <a:normAutofit/>
+          </a:bodyPr>
+          <a:lstStyle/>
+          <a:p>
+            <a:pPr marL="0" indent="0" algn="ctr">
+              <a:buNone/>
+            </a:pPr>
+            <a:r>
+              <a:rPr lang="en-US" sz="920" dirty="0">
+                <a:solidFill>
+                  <a:srgbClr val="E61E73"/>
+                </a:solidFill>
+              </a:rPr>
+              <a:t>Defines the appearance (styles)</a:t>
+            </a:r>
+            <a:endParaRPr lang="en-US" sz="920" dirty="0"/>
+          </a:p>
+        </p:txBody>
+      </p:sp>
+      <p:sp>
+        <p:nvSpPr>
+          <p:cNvPr id="49" name="Shape 47">
+            <a:extLst>
+              <a:ext uri="{FF2B5EF4-FFF2-40B4-BE49-F238E27FC236}">
+                <a16:creationId xmlns:a16="http://schemas.microsoft.com/office/drawing/2014/main" id="{CCED7FDD-CB20-0C63-3030-9A6A13BE563D}"/>
+              </a:ext>
+            </a:extLst>
+          </p:cNvPr>
+          <p:cNvSpPr/>
+          <p:nvPr/>
+        </p:nvSpPr>
+        <p:spPr>
+          <a:xfrm flipH="1" flipV="1">
+            <a:off x="3108960" y="1188720"/>
+            <a:ext cx="3520440" cy="18288"/>
+          </a:xfrm>
+          <a:prstGeom prst="line">
+            <a:avLst/>
+          </a:prstGeom>
+          <a:noFill/>
+          <a:ln w="33020">
+            <a:solidFill>
+              <a:srgbClr val="0E76D8"/>
+            </a:solidFill>
+            <a:prstDash val="solid"/>
+            <a:headEnd type="none"/>
+            <a:tailEnd type="triangle"/>
+          </a:ln>
+        </p:spPr>
+        <p:txBody>
+          <a:bodyPr/>
+          <a:lstStyle/>
+          <a:p>
+            <a:endParaRPr lang="en-US"/>
+          </a:p>
+        </p:txBody>
+      </p:sp>
+      <p:sp>
+        <p:nvSpPr>
+          <p:cNvPr id="50" name="Text 48">
+            <a:extLst>
+              <a:ext uri="{FF2B5EF4-FFF2-40B4-BE49-F238E27FC236}">
+                <a16:creationId xmlns:a16="http://schemas.microsoft.com/office/drawing/2014/main" id="{322C5C91-32BC-F266-7C11-9CF8D37B2290}"/>
+              </a:ext>
+            </a:extLst>
+          </p:cNvPr>
+          <p:cNvSpPr/>
+          <p:nvPr/>
+        </p:nvSpPr>
+        <p:spPr>
+          <a:xfrm>
+            <a:off x="3886200" y="932688"/>
+            <a:ext cx="2148840" cy="228600"/>
+          </a:xfrm>
+          <a:prstGeom prst="rect">
+            <a:avLst/>
+          </a:prstGeom>
+          <a:noFill/>
+          <a:ln/>
+        </p:spPr>
+        <p:txBody>
+          <a:bodyPr wrap="square" lIns="127" tIns="127" rIns="127" bIns="127" rtlCol="0" anchor="ctr">
+            <a:normAutofit/>
+          </a:bodyPr>
+          <a:lstStyle/>
+          <a:p>
+            <a:pPr marL="0" indent="0" algn="ctr">
+              <a:buNone/>
+            </a:pPr>
+            <a:r>
+              <a:rPr lang="en-US" sz="1250" b="1" dirty="0">
+                <a:solidFill>
+                  <a:srgbClr val="0E76D8"/>
+                </a:solidFill>
+                <a:latin typeface="Arial" pitchFamily="34" charset="0"/>
+                <a:ea typeface="Arial" pitchFamily="34" charset="-122"/>
+                <a:cs typeface="Arial" pitchFamily="34" charset="-120"/>
+              </a:rPr>
+              <a:t>loaded by </a:t>
+            </a:r>
+            <a:r>
+              <a:rPr lang="en-US" sz="1200" b="1" dirty="0">
+                <a:solidFill>
+                  <a:srgbClr val="0E76D8"/>
+                </a:solidFill>
+                <a:latin typeface="Arial" pitchFamily="34" charset="0"/>
+                <a:ea typeface="Arial" pitchFamily="34" charset="-122"/>
+                <a:cs typeface="Arial" pitchFamily="34" charset="-120"/>
+              </a:rPr>
+              <a:t>MainApp</a:t>
+            </a:r>
+            <a:endParaRPr lang="en-US" sz="1200" dirty="0"/>
+          </a:p>
+        </p:txBody>
+      </p:sp>
+      <p:sp>
+        <p:nvSpPr>
+          <p:cNvPr id="51" name="Text 49">
+            <a:extLst>
+              <a:ext uri="{FF2B5EF4-FFF2-40B4-BE49-F238E27FC236}">
+                <a16:creationId xmlns:a16="http://schemas.microsoft.com/office/drawing/2014/main" id="{957F0BE1-57E9-0379-A5DA-C9930BF34182}"/>
+              </a:ext>
+            </a:extLst>
+          </p:cNvPr>
+          <p:cNvSpPr/>
+          <p:nvPr/>
+        </p:nvSpPr>
+        <p:spPr>
+          <a:xfrm>
+            <a:off x="4023360" y="1232283"/>
+            <a:ext cx="1874520" cy="164592"/>
+          </a:xfrm>
+          <a:prstGeom prst="rect">
+            <a:avLst/>
+          </a:prstGeom>
+          <a:noFill/>
+          <a:ln/>
+        </p:spPr>
+        <p:txBody>
+          <a:bodyPr wrap="square" lIns="127" tIns="127" rIns="127" bIns="127" rtlCol="0" anchor="ctr">
+            <a:normAutofit/>
+          </a:bodyPr>
+          <a:lstStyle/>
+          <a:p>
+            <a:pPr marL="0" indent="0" algn="ctr">
+              <a:buNone/>
+            </a:pPr>
+            <a:r>
+              <a:rPr lang="en-US" sz="1000" dirty="0">
+                <a:solidFill>
+                  <a:srgbClr val="0E2D63"/>
+                </a:solidFill>
+                <a:latin typeface="Arial" pitchFamily="34" charset="0"/>
+                <a:ea typeface="Arial" pitchFamily="34" charset="-122"/>
+                <a:cs typeface="Arial" pitchFamily="34" charset="-120"/>
+              </a:rPr>
+              <a:t>MainApp loads the FXML</a:t>
+            </a:r>
+            <a:endParaRPr lang="en-US" sz="1000" dirty="0"/>
+          </a:p>
+        </p:txBody>
+      </p:sp>
+      <p:sp>
+        <p:nvSpPr>
+          <p:cNvPr id="52" name="Shape 50">
+            <a:extLst>
+              <a:ext uri="{FF2B5EF4-FFF2-40B4-BE49-F238E27FC236}">
+                <a16:creationId xmlns:a16="http://schemas.microsoft.com/office/drawing/2014/main" id="{F2812693-B9CE-328A-1776-E1E36DA3C2AC}"/>
+              </a:ext>
+            </a:extLst>
+          </p:cNvPr>
+          <p:cNvSpPr/>
+          <p:nvPr/>
+        </p:nvSpPr>
+        <p:spPr>
+          <a:xfrm>
+            <a:off x="1664208" y="3063240"/>
+            <a:ext cx="0" cy="1234440"/>
+          </a:xfrm>
+          <a:prstGeom prst="line">
+            <a:avLst/>
+          </a:prstGeom>
+          <a:noFill/>
+          <a:ln w="35560">
+            <a:solidFill>
+              <a:srgbClr val="0E76D8"/>
+            </a:solidFill>
+            <a:prstDash val="solid"/>
+            <a:headEnd type="none"/>
+            <a:tailEnd type="triangle"/>
+          </a:ln>
+        </p:spPr>
+        <p:txBody>
+          <a:bodyPr/>
+          <a:lstStyle/>
+          <a:p>
+            <a:endParaRPr lang="en-US"/>
+          </a:p>
+        </p:txBody>
+      </p:sp>
+      <p:sp>
+        <p:nvSpPr>
+          <p:cNvPr id="53" name="Text 51">
+            <a:extLst>
+              <a:ext uri="{FF2B5EF4-FFF2-40B4-BE49-F238E27FC236}">
+                <a16:creationId xmlns:a16="http://schemas.microsoft.com/office/drawing/2014/main" id="{3D9C2D4D-C5B4-5C2B-A778-DB6C772121A4}"/>
+              </a:ext>
+            </a:extLst>
+          </p:cNvPr>
+          <p:cNvSpPr/>
+          <p:nvPr/>
+        </p:nvSpPr>
+        <p:spPr>
+          <a:xfrm>
+            <a:off x="348390" y="3364992"/>
+            <a:ext cx="1371600" cy="256032"/>
+          </a:xfrm>
+          <a:prstGeom prst="rect">
+            <a:avLst/>
+          </a:prstGeom>
+          <a:noFill/>
+          <a:ln/>
+        </p:spPr>
+        <p:txBody>
+          <a:bodyPr wrap="square" lIns="127" tIns="127" rIns="127" bIns="127" rtlCol="0" anchor="ctr">
+            <a:noAutofit/>
+          </a:bodyPr>
+          <a:lstStyle/>
+          <a:p>
+            <a:pPr marL="0" indent="0" algn="ctr">
+              <a:buNone/>
+            </a:pPr>
+            <a:r>
+              <a:rPr lang="en-US" sz="1200" b="1" dirty="0">
+                <a:solidFill>
+                  <a:srgbClr val="0E76D8"/>
+                </a:solidFill>
+                <a:latin typeface="Arial" pitchFamily="34" charset="0"/>
+                <a:ea typeface="Arial" pitchFamily="34" charset="-122"/>
+                <a:cs typeface="Arial" pitchFamily="34" charset="-120"/>
+              </a:rPr>
+              <a:t>Sets Scene and </a:t>
+            </a:r>
+          </a:p>
+          <a:p>
+            <a:pPr marL="0" indent="0" algn="ctr">
+              <a:buNone/>
+            </a:pPr>
+            <a:r>
+              <a:rPr lang="en-US" sz="1200" b="1" dirty="0">
+                <a:solidFill>
+                  <a:srgbClr val="0E76D8"/>
+                </a:solidFill>
+                <a:latin typeface="Arial" pitchFamily="34" charset="0"/>
+                <a:ea typeface="Arial" pitchFamily="34" charset="-122"/>
+                <a:cs typeface="Arial" pitchFamily="34" charset="-120"/>
+              </a:rPr>
+              <a:t>shows stage</a:t>
+            </a:r>
+            <a:endParaRPr lang="en-US" sz="1200" dirty="0"/>
+          </a:p>
+        </p:txBody>
+      </p:sp>
+      <p:sp>
+        <p:nvSpPr>
+          <p:cNvPr id="54" name="Text 52">
+            <a:extLst>
+              <a:ext uri="{FF2B5EF4-FFF2-40B4-BE49-F238E27FC236}">
+                <a16:creationId xmlns:a16="http://schemas.microsoft.com/office/drawing/2014/main" id="{861AB8D1-D7A0-2486-8BCB-4903B11331A6}"/>
+              </a:ext>
+            </a:extLst>
+          </p:cNvPr>
+          <p:cNvSpPr/>
+          <p:nvPr/>
+        </p:nvSpPr>
+        <p:spPr>
+          <a:xfrm>
+            <a:off x="338328" y="3717036"/>
+            <a:ext cx="1325877" cy="320040"/>
+          </a:xfrm>
+          <a:prstGeom prst="rect">
+            <a:avLst/>
+          </a:prstGeom>
+          <a:noFill/>
+          <a:ln/>
+        </p:spPr>
+        <p:txBody>
+          <a:bodyPr wrap="square" lIns="127" tIns="127" rIns="127" bIns="127" rtlCol="0" anchor="ctr">
+            <a:noAutofit/>
+          </a:bodyPr>
+          <a:lstStyle/>
+          <a:p>
+            <a:pPr marL="0" indent="0" algn="ctr">
+              <a:buNone/>
+            </a:pPr>
+            <a:r>
+              <a:rPr lang="en-US" sz="1000" dirty="0">
+                <a:solidFill>
+                  <a:srgbClr val="0E2D63"/>
+                </a:solidFill>
+                <a:latin typeface="Arial" pitchFamily="34" charset="0"/>
+                <a:ea typeface="Arial" pitchFamily="34" charset="-122"/>
+                <a:cs typeface="Arial" pitchFamily="34" charset="-120"/>
+              </a:rPr>
+              <a:t>MainApp creates</a:t>
+            </a:r>
+            <a:endParaRPr lang="en-US" sz="1000" dirty="0"/>
+          </a:p>
+          <a:p>
+            <a:pPr marL="0" indent="0" algn="ctr">
+              <a:buNone/>
+            </a:pPr>
+            <a:r>
+              <a:rPr lang="en-US" sz="1000" dirty="0">
+                <a:solidFill>
+                  <a:srgbClr val="0E2D63"/>
+                </a:solidFill>
+                <a:latin typeface="Arial" pitchFamily="34" charset="0"/>
+                <a:ea typeface="Arial" pitchFamily="34" charset="-122"/>
+                <a:cs typeface="Arial" pitchFamily="34" charset="-120"/>
+              </a:rPr>
+              <a:t>and shows the window</a:t>
+            </a:r>
+            <a:endParaRPr lang="en-US" sz="1000" dirty="0"/>
+          </a:p>
+        </p:txBody>
+      </p:sp>
+      <p:sp>
+        <p:nvSpPr>
+          <p:cNvPr id="55" name="Shape 53">
+            <a:extLst>
+              <a:ext uri="{FF2B5EF4-FFF2-40B4-BE49-F238E27FC236}">
+                <a16:creationId xmlns:a16="http://schemas.microsoft.com/office/drawing/2014/main" id="{FE0F6479-5B5F-2DE3-C360-28DA17DD1F61}"/>
+              </a:ext>
+            </a:extLst>
+          </p:cNvPr>
+          <p:cNvSpPr/>
+          <p:nvPr/>
+        </p:nvSpPr>
+        <p:spPr>
+          <a:xfrm flipH="1">
+            <a:off x="5285230" y="2212848"/>
+            <a:ext cx="1344170" cy="0"/>
+          </a:xfrm>
+          <a:prstGeom prst="line">
+            <a:avLst/>
+          </a:prstGeom>
+          <a:noFill/>
+          <a:ln w="33020">
+            <a:solidFill>
+              <a:srgbClr val="12984B"/>
+            </a:solidFill>
+            <a:prstDash val="solid"/>
+            <a:headEnd type="none"/>
+            <a:tailEnd type="triangle"/>
+          </a:ln>
+        </p:spPr>
+        <p:txBody>
+          <a:bodyPr/>
+          <a:lstStyle/>
+          <a:p>
+            <a:endParaRPr lang="en-US"/>
+          </a:p>
+        </p:txBody>
+      </p:sp>
+      <p:sp>
+        <p:nvSpPr>
+          <p:cNvPr id="56" name="Text 54">
+            <a:extLst>
+              <a:ext uri="{FF2B5EF4-FFF2-40B4-BE49-F238E27FC236}">
+                <a16:creationId xmlns:a16="http://schemas.microsoft.com/office/drawing/2014/main" id="{010D8255-AC1A-FE25-0295-F06566ADE516}"/>
+              </a:ext>
+            </a:extLst>
+          </p:cNvPr>
+          <p:cNvSpPr/>
+          <p:nvPr/>
+        </p:nvSpPr>
+        <p:spPr>
+          <a:xfrm>
+            <a:off x="5218177" y="1847088"/>
+            <a:ext cx="1453891" cy="310897"/>
+          </a:xfrm>
+          <a:prstGeom prst="rect">
+            <a:avLst/>
+          </a:prstGeom>
+          <a:noFill/>
+          <a:ln/>
+        </p:spPr>
+        <p:txBody>
+          <a:bodyPr wrap="square" lIns="127" tIns="127" rIns="127" bIns="127" rtlCol="0" anchor="ctr">
+            <a:noAutofit/>
+          </a:bodyPr>
+          <a:lstStyle/>
+          <a:p>
+            <a:pPr marL="0" indent="0" algn="ctr">
+              <a:buNone/>
+            </a:pPr>
+            <a:r>
+              <a:rPr lang="en-US" sz="1200" b="1" dirty="0" err="1">
+                <a:solidFill>
+                  <a:srgbClr val="12984B"/>
+                </a:solidFill>
+                <a:latin typeface="Arial" pitchFamily="34" charset="0"/>
+                <a:ea typeface="Arial" pitchFamily="34" charset="-122"/>
+                <a:cs typeface="Arial" pitchFamily="34" charset="-120"/>
+              </a:rPr>
+              <a:t>fx:controller</a:t>
+            </a:r>
+            <a:r>
+              <a:rPr lang="en-US" sz="1200" b="1" dirty="0">
+                <a:solidFill>
+                  <a:srgbClr val="12984B"/>
+                </a:solidFill>
+                <a:latin typeface="Arial" pitchFamily="34" charset="0"/>
+                <a:ea typeface="Arial" pitchFamily="34" charset="-122"/>
+                <a:cs typeface="Arial" pitchFamily="34" charset="-120"/>
+              </a:rPr>
+              <a:t>, </a:t>
+            </a:r>
+            <a:r>
+              <a:rPr lang="en-US" sz="1200" b="1" dirty="0" err="1">
+                <a:solidFill>
+                  <a:srgbClr val="12984B"/>
+                </a:solidFill>
+                <a:latin typeface="Arial" pitchFamily="34" charset="0"/>
+                <a:ea typeface="Arial" pitchFamily="34" charset="-122"/>
+                <a:cs typeface="Arial" pitchFamily="34" charset="-120"/>
+              </a:rPr>
+              <a:t>fx:id</a:t>
+            </a:r>
+            <a:endParaRPr lang="en-US" sz="1200" b="1" dirty="0">
+              <a:solidFill>
+                <a:srgbClr val="12984B"/>
+              </a:solidFill>
+              <a:latin typeface="Arial" pitchFamily="34" charset="0"/>
+              <a:ea typeface="Arial" pitchFamily="34" charset="-122"/>
+              <a:cs typeface="Arial" pitchFamily="34" charset="-120"/>
+            </a:endParaRPr>
+          </a:p>
+          <a:p>
+            <a:pPr marL="0" indent="0" algn="ctr">
+              <a:buNone/>
+            </a:pPr>
+            <a:r>
+              <a:rPr lang="en-US" sz="1200" b="1" dirty="0">
+                <a:solidFill>
+                  <a:srgbClr val="12984B"/>
+                </a:solidFill>
+                <a:latin typeface="Arial" pitchFamily="34" charset="0"/>
+                <a:ea typeface="Arial" pitchFamily="34" charset="-122"/>
+                <a:cs typeface="Arial" pitchFamily="34" charset="-120"/>
+              </a:rPr>
+              <a:t> </a:t>
+            </a:r>
+            <a:r>
+              <a:rPr lang="en-US" sz="1200" b="1" dirty="0" err="1">
+                <a:solidFill>
+                  <a:srgbClr val="12984B"/>
+                </a:solidFill>
+                <a:latin typeface="Arial" pitchFamily="34" charset="0"/>
+                <a:ea typeface="Arial" pitchFamily="34" charset="-122"/>
+                <a:cs typeface="Arial" pitchFamily="34" charset="-120"/>
+              </a:rPr>
+              <a:t>onAcrtion</a:t>
+            </a:r>
+            <a:endParaRPr lang="en-US" sz="1200" dirty="0"/>
+          </a:p>
+        </p:txBody>
+      </p:sp>
+      <p:sp>
+        <p:nvSpPr>
+          <p:cNvPr id="57" name="Text 55">
+            <a:extLst>
+              <a:ext uri="{FF2B5EF4-FFF2-40B4-BE49-F238E27FC236}">
+                <a16:creationId xmlns:a16="http://schemas.microsoft.com/office/drawing/2014/main" id="{D5D0E6CF-26DD-4222-6497-8424EC7D96DE}"/>
+              </a:ext>
+            </a:extLst>
+          </p:cNvPr>
+          <p:cNvSpPr/>
+          <p:nvPr/>
+        </p:nvSpPr>
+        <p:spPr>
+          <a:xfrm>
+            <a:off x="5305646" y="2203704"/>
+            <a:ext cx="1307591" cy="502920"/>
+          </a:xfrm>
+          <a:prstGeom prst="rect">
+            <a:avLst/>
+          </a:prstGeom>
+          <a:noFill/>
+          <a:ln/>
+        </p:spPr>
+        <p:txBody>
+          <a:bodyPr wrap="square" lIns="127" tIns="127" rIns="127" bIns="127" rtlCol="0" anchor="ctr">
+            <a:normAutofit/>
+          </a:bodyPr>
+          <a:lstStyle/>
+          <a:p>
+            <a:pPr marL="0" indent="0" algn="ctr">
+              <a:buNone/>
+            </a:pPr>
+            <a:r>
+              <a:rPr lang="en-US" sz="1000" dirty="0">
+                <a:solidFill>
+                  <a:srgbClr val="0E2D63"/>
+                </a:solidFill>
+                <a:latin typeface="Arial" pitchFamily="34" charset="0"/>
+                <a:ea typeface="Arial" pitchFamily="34" charset="-122"/>
+                <a:cs typeface="Arial" pitchFamily="34" charset="-120"/>
+              </a:rPr>
+              <a:t>FXML specifies</a:t>
+            </a:r>
+            <a:endParaRPr lang="en-US" sz="1000" dirty="0"/>
+          </a:p>
+          <a:p>
+            <a:pPr marL="0" indent="0" algn="ctr">
+              <a:buNone/>
+            </a:pPr>
+            <a:r>
+              <a:rPr lang="en-US" sz="1000" dirty="0">
+                <a:solidFill>
+                  <a:srgbClr val="0E2D63"/>
+                </a:solidFill>
+                <a:latin typeface="Arial" pitchFamily="34" charset="0"/>
+                <a:ea typeface="Arial" pitchFamily="34" charset="-122"/>
+                <a:cs typeface="Arial" pitchFamily="34" charset="-120"/>
+              </a:rPr>
+              <a:t>which controller</a:t>
+            </a:r>
+            <a:r>
+              <a:rPr lang="en-US" sz="1000" dirty="0"/>
+              <a:t> </a:t>
+            </a:r>
+            <a:r>
+              <a:rPr lang="en-US" sz="1000" dirty="0">
+                <a:solidFill>
+                  <a:srgbClr val="0E2D63"/>
+                </a:solidFill>
+                <a:latin typeface="Arial" pitchFamily="34" charset="0"/>
+                <a:ea typeface="Arial" pitchFamily="34" charset="-122"/>
+                <a:cs typeface="Arial" pitchFamily="34" charset="-120"/>
+              </a:rPr>
+              <a:t>to use</a:t>
+            </a:r>
+            <a:endParaRPr lang="en-US" sz="1000" dirty="0"/>
+          </a:p>
+        </p:txBody>
+      </p:sp>
+      <p:sp>
+        <p:nvSpPr>
+          <p:cNvPr id="58" name="Shape 56">
+            <a:extLst>
+              <a:ext uri="{FF2B5EF4-FFF2-40B4-BE49-F238E27FC236}">
+                <a16:creationId xmlns:a16="http://schemas.microsoft.com/office/drawing/2014/main" id="{A492F135-85B6-1925-DC07-68E2C7D7DCD4}"/>
+              </a:ext>
+            </a:extLst>
+          </p:cNvPr>
+          <p:cNvSpPr/>
+          <p:nvPr/>
+        </p:nvSpPr>
+        <p:spPr>
+          <a:xfrm>
+            <a:off x="4187952" y="3785616"/>
+            <a:ext cx="0" cy="512064"/>
+          </a:xfrm>
+          <a:prstGeom prst="line">
+            <a:avLst/>
+          </a:prstGeom>
+          <a:noFill/>
+          <a:ln w="33020">
+            <a:solidFill>
+              <a:srgbClr val="F27616"/>
+            </a:solidFill>
+            <a:prstDash val="solid"/>
+            <a:headEnd type="none"/>
+            <a:tailEnd type="triangle"/>
+          </a:ln>
+        </p:spPr>
+        <p:txBody>
+          <a:bodyPr/>
+          <a:lstStyle/>
+          <a:p>
+            <a:endParaRPr lang="en-US"/>
+          </a:p>
+        </p:txBody>
+      </p:sp>
+      <p:sp>
+        <p:nvSpPr>
+          <p:cNvPr id="59" name="Text 57">
+            <a:extLst>
+              <a:ext uri="{FF2B5EF4-FFF2-40B4-BE49-F238E27FC236}">
+                <a16:creationId xmlns:a16="http://schemas.microsoft.com/office/drawing/2014/main" id="{04F52105-CDC0-0748-8974-E8BE7949E8DB}"/>
+              </a:ext>
+            </a:extLst>
+          </p:cNvPr>
+          <p:cNvSpPr/>
+          <p:nvPr/>
+        </p:nvSpPr>
+        <p:spPr>
+          <a:xfrm>
+            <a:off x="4223951" y="3886199"/>
+            <a:ext cx="1384365" cy="182880"/>
+          </a:xfrm>
+          <a:prstGeom prst="rect">
+            <a:avLst/>
+          </a:prstGeom>
+          <a:noFill/>
+          <a:ln/>
+        </p:spPr>
+        <p:txBody>
+          <a:bodyPr wrap="square" lIns="127" tIns="127" rIns="127" bIns="127" rtlCol="0" anchor="ctr">
+            <a:noAutofit/>
+          </a:bodyPr>
+          <a:lstStyle/>
+          <a:p>
+            <a:pPr marL="0" indent="0" algn="ctr">
+              <a:buNone/>
+            </a:pPr>
+            <a:r>
+              <a:rPr lang="en-US" sz="1200" b="1" dirty="0">
+                <a:solidFill>
+                  <a:srgbClr val="F27616"/>
+                </a:solidFill>
+                <a:latin typeface="Arial" pitchFamily="34" charset="0"/>
+                <a:ea typeface="Arial" pitchFamily="34" charset="-122"/>
+                <a:cs typeface="Arial" pitchFamily="34" charset="-120"/>
+              </a:rPr>
+              <a:t>handles behavior</a:t>
+            </a:r>
+            <a:endParaRPr lang="en-US" sz="1200" dirty="0"/>
+          </a:p>
+        </p:txBody>
+      </p:sp>
+      <p:sp>
+        <p:nvSpPr>
+          <p:cNvPr id="60" name="Text 58">
+            <a:extLst>
+              <a:ext uri="{FF2B5EF4-FFF2-40B4-BE49-F238E27FC236}">
+                <a16:creationId xmlns:a16="http://schemas.microsoft.com/office/drawing/2014/main" id="{9470C28E-7FF0-E399-8EEF-B2C958009609}"/>
+              </a:ext>
+            </a:extLst>
+          </p:cNvPr>
+          <p:cNvSpPr/>
+          <p:nvPr/>
+        </p:nvSpPr>
+        <p:spPr>
+          <a:xfrm>
+            <a:off x="4294689" y="4085208"/>
+            <a:ext cx="1097280" cy="146304"/>
+          </a:xfrm>
+          <a:prstGeom prst="rect">
+            <a:avLst/>
+          </a:prstGeom>
+          <a:noFill/>
+          <a:ln/>
+        </p:spPr>
+        <p:txBody>
+          <a:bodyPr wrap="square" lIns="127" tIns="127" rIns="127" bIns="127" rtlCol="0" anchor="ctr">
+            <a:noAutofit/>
+          </a:bodyPr>
+          <a:lstStyle/>
+          <a:p>
+            <a:pPr marL="0" indent="0" algn="ctr">
+              <a:buNone/>
+            </a:pPr>
+            <a:r>
+              <a:rPr lang="en-US" sz="1000" dirty="0">
+                <a:solidFill>
+                  <a:srgbClr val="0E2D63"/>
+                </a:solidFill>
+                <a:latin typeface="Arial" pitchFamily="34" charset="0"/>
+                <a:ea typeface="Arial" pitchFamily="34" charset="-122"/>
+                <a:cs typeface="Arial" pitchFamily="34" charset="-120"/>
+              </a:rPr>
+              <a:t>Updates the UI</a:t>
+            </a:r>
+            <a:endParaRPr lang="en-US" sz="1000" dirty="0"/>
+          </a:p>
+        </p:txBody>
+      </p:sp>
+      <p:sp>
+        <p:nvSpPr>
+          <p:cNvPr id="61" name="Shape 59">
+            <a:extLst>
+              <a:ext uri="{FF2B5EF4-FFF2-40B4-BE49-F238E27FC236}">
+                <a16:creationId xmlns:a16="http://schemas.microsoft.com/office/drawing/2014/main" id="{C3F0B8B6-A04D-C4E3-B848-60D514BC0B9F}"/>
+              </a:ext>
+            </a:extLst>
+          </p:cNvPr>
+          <p:cNvSpPr/>
+          <p:nvPr/>
+        </p:nvSpPr>
+        <p:spPr>
+          <a:xfrm>
+            <a:off x="6654475" y="3691186"/>
+            <a:ext cx="1" cy="1344168"/>
+          </a:xfrm>
+          <a:prstGeom prst="line">
+            <a:avLst/>
+          </a:prstGeom>
+          <a:noFill/>
+          <a:ln w="35560">
+            <a:solidFill>
+              <a:srgbClr val="12984B"/>
+            </a:solidFill>
+            <a:prstDash val="solid"/>
+          </a:ln>
+        </p:spPr>
+        <p:txBody>
+          <a:bodyPr/>
+          <a:lstStyle/>
+          <a:p>
+            <a:endParaRPr lang="en-US"/>
+          </a:p>
+        </p:txBody>
+      </p:sp>
+      <p:sp>
+        <p:nvSpPr>
+          <p:cNvPr id="62" name="Shape 60">
+            <a:extLst>
+              <a:ext uri="{FF2B5EF4-FFF2-40B4-BE49-F238E27FC236}">
+                <a16:creationId xmlns:a16="http://schemas.microsoft.com/office/drawing/2014/main" id="{99C624D6-A708-83B0-1E6E-B44E367B1909}"/>
+              </a:ext>
+            </a:extLst>
+          </p:cNvPr>
+          <p:cNvSpPr/>
+          <p:nvPr/>
+        </p:nvSpPr>
+        <p:spPr>
+          <a:xfrm flipH="1" flipV="1">
+            <a:off x="4223951" y="5047486"/>
+            <a:ext cx="2451169" cy="1"/>
+          </a:xfrm>
+          <a:prstGeom prst="line">
+            <a:avLst/>
+          </a:prstGeom>
+          <a:noFill/>
+          <a:ln w="35560">
+            <a:solidFill>
+              <a:srgbClr val="12984B"/>
+            </a:solidFill>
+            <a:prstDash val="solid"/>
+            <a:headEnd type="none"/>
+            <a:tailEnd type="triangle"/>
+          </a:ln>
+        </p:spPr>
+        <p:txBody>
+          <a:bodyPr/>
+          <a:lstStyle/>
+          <a:p>
+            <a:endParaRPr lang="en-US"/>
+          </a:p>
+        </p:txBody>
+      </p:sp>
+      <p:sp>
+        <p:nvSpPr>
+          <p:cNvPr id="63" name="Text 61">
+            <a:extLst>
+              <a:ext uri="{FF2B5EF4-FFF2-40B4-BE49-F238E27FC236}">
+                <a16:creationId xmlns:a16="http://schemas.microsoft.com/office/drawing/2014/main" id="{EAB606A9-C147-DBE8-F581-50E2D488A569}"/>
+              </a:ext>
+            </a:extLst>
+          </p:cNvPr>
+          <p:cNvSpPr/>
+          <p:nvPr/>
+        </p:nvSpPr>
+        <p:spPr>
+          <a:xfrm>
+            <a:off x="4655560" y="4799421"/>
+            <a:ext cx="1737360" cy="201168"/>
+          </a:xfrm>
+          <a:prstGeom prst="rect">
+            <a:avLst/>
+          </a:prstGeom>
+          <a:noFill/>
+          <a:ln/>
+        </p:spPr>
+        <p:txBody>
+          <a:bodyPr wrap="square" lIns="127" tIns="127" rIns="127" bIns="127" rtlCol="0" anchor="ctr">
+            <a:normAutofit/>
+          </a:bodyPr>
+          <a:lstStyle/>
+          <a:p>
+            <a:pPr marL="0" indent="0" algn="ctr">
+              <a:buNone/>
+            </a:pPr>
+            <a:r>
+              <a:rPr lang="en-US" sz="1200" b="1" dirty="0">
+                <a:solidFill>
+                  <a:srgbClr val="12984B"/>
+                </a:solidFill>
+                <a:latin typeface="Arial" pitchFamily="34" charset="0"/>
+                <a:ea typeface="Arial" pitchFamily="34" charset="-122"/>
+                <a:cs typeface="Arial" pitchFamily="34" charset="-120"/>
+              </a:rPr>
+              <a:t>defines UI structure</a:t>
+            </a:r>
+            <a:endParaRPr lang="en-US" sz="1200" dirty="0"/>
+          </a:p>
+        </p:txBody>
+      </p:sp>
+      <p:sp>
+        <p:nvSpPr>
+          <p:cNvPr id="64" name="Text 62">
+            <a:extLst>
+              <a:ext uri="{FF2B5EF4-FFF2-40B4-BE49-F238E27FC236}">
+                <a16:creationId xmlns:a16="http://schemas.microsoft.com/office/drawing/2014/main" id="{F6418945-9B42-2BBF-9A91-564ADAA5C1B3}"/>
+              </a:ext>
+            </a:extLst>
+          </p:cNvPr>
+          <p:cNvSpPr/>
+          <p:nvPr/>
+        </p:nvSpPr>
+        <p:spPr>
+          <a:xfrm>
+            <a:off x="4574128" y="5092460"/>
+            <a:ext cx="1965960" cy="347472"/>
+          </a:xfrm>
+          <a:prstGeom prst="rect">
+            <a:avLst/>
+          </a:prstGeom>
+          <a:noFill/>
+          <a:ln/>
+        </p:spPr>
+        <p:txBody>
+          <a:bodyPr wrap="square" lIns="127" tIns="127" rIns="127" bIns="127" rtlCol="0" anchor="ctr">
+            <a:normAutofit/>
+          </a:bodyPr>
+          <a:lstStyle/>
+          <a:p>
+            <a:pPr marL="0" indent="0" algn="ctr">
+              <a:buNone/>
+            </a:pPr>
+            <a:r>
+              <a:rPr lang="en-US" sz="1000" dirty="0">
+                <a:solidFill>
+                  <a:srgbClr val="0E2D63"/>
+                </a:solidFill>
+                <a:latin typeface="Arial" pitchFamily="34" charset="0"/>
+                <a:ea typeface="Arial" pitchFamily="34" charset="-122"/>
+                <a:cs typeface="Arial" pitchFamily="34" charset="-120"/>
+              </a:rPr>
+              <a:t>FXML defines what the UI</a:t>
+            </a:r>
+            <a:endParaRPr lang="en-US" sz="1000" dirty="0"/>
+          </a:p>
+          <a:p>
+            <a:pPr marL="0" indent="0" algn="ctr">
+              <a:buNone/>
+            </a:pPr>
+            <a:r>
+              <a:rPr lang="en-US" sz="1000" dirty="0">
+                <a:solidFill>
+                  <a:srgbClr val="0E2D63"/>
+                </a:solidFill>
+                <a:latin typeface="Arial" pitchFamily="34" charset="0"/>
+                <a:ea typeface="Arial" pitchFamily="34" charset="-122"/>
+                <a:cs typeface="Arial" pitchFamily="34" charset="-120"/>
+              </a:rPr>
+              <a:t>looks like (layout and controls)</a:t>
+            </a:r>
+            <a:endParaRPr lang="en-US" sz="1000" dirty="0"/>
+          </a:p>
+        </p:txBody>
+      </p:sp>
+      <p:sp>
+        <p:nvSpPr>
+          <p:cNvPr id="65" name="Shape 63">
+            <a:extLst>
+              <a:ext uri="{FF2B5EF4-FFF2-40B4-BE49-F238E27FC236}">
+                <a16:creationId xmlns:a16="http://schemas.microsoft.com/office/drawing/2014/main" id="{5EDD88DA-CE7E-D9B2-190D-AACF32A6BC13}"/>
+              </a:ext>
+            </a:extLst>
+          </p:cNvPr>
+          <p:cNvSpPr/>
+          <p:nvPr/>
+        </p:nvSpPr>
+        <p:spPr>
+          <a:xfrm flipH="1" flipV="1">
+            <a:off x="7757216" y="3717063"/>
+            <a:ext cx="1" cy="1088136"/>
+          </a:xfrm>
+          <a:prstGeom prst="line">
+            <a:avLst/>
+          </a:prstGeom>
+          <a:noFill/>
+          <a:ln w="33020">
+            <a:solidFill>
+              <a:srgbClr val="E61E73"/>
+            </a:solidFill>
+            <a:prstDash val="solid"/>
+            <a:headEnd type="none"/>
+            <a:tailEnd type="triangle"/>
+          </a:ln>
+        </p:spPr>
+        <p:txBody>
+          <a:bodyPr/>
+          <a:lstStyle/>
+          <a:p>
+            <a:endParaRPr lang="en-US"/>
+          </a:p>
+        </p:txBody>
+      </p:sp>
+      <p:sp>
+        <p:nvSpPr>
+          <p:cNvPr id="66" name="Text 64">
+            <a:extLst>
+              <a:ext uri="{FF2B5EF4-FFF2-40B4-BE49-F238E27FC236}">
+                <a16:creationId xmlns:a16="http://schemas.microsoft.com/office/drawing/2014/main" id="{EBAAA20D-FC62-9C20-EEBC-EED274042813}"/>
+              </a:ext>
+            </a:extLst>
+          </p:cNvPr>
+          <p:cNvSpPr/>
+          <p:nvPr/>
+        </p:nvSpPr>
+        <p:spPr>
+          <a:xfrm>
+            <a:off x="7863953" y="3890799"/>
+            <a:ext cx="1086347" cy="347472"/>
+          </a:xfrm>
+          <a:prstGeom prst="rect">
+            <a:avLst/>
+          </a:prstGeom>
+          <a:noFill/>
+          <a:ln/>
+        </p:spPr>
+        <p:txBody>
+          <a:bodyPr wrap="square" lIns="127" tIns="127" rIns="127" bIns="127" rtlCol="0" anchor="ctr">
+            <a:noAutofit/>
+          </a:bodyPr>
+          <a:lstStyle/>
+          <a:p>
+            <a:pPr marL="0" indent="0" algn="ctr">
+              <a:buNone/>
+            </a:pPr>
+            <a:r>
+              <a:rPr lang="en-US" sz="1200" b="1" dirty="0">
+                <a:solidFill>
+                  <a:srgbClr val="E61E73"/>
+                </a:solidFill>
+                <a:latin typeface="Arial" pitchFamily="34" charset="0"/>
+                <a:ea typeface="Arial" pitchFamily="34" charset="-122"/>
+                <a:cs typeface="Arial" pitchFamily="34" charset="-120"/>
+              </a:rPr>
+              <a:t>referenced in</a:t>
+            </a:r>
+            <a:endParaRPr lang="en-US" sz="1200" dirty="0"/>
+          </a:p>
+          <a:p>
+            <a:pPr marL="0" indent="0" algn="ctr">
+              <a:buNone/>
+            </a:pPr>
+            <a:r>
+              <a:rPr lang="en-US" sz="1200" b="1" dirty="0">
+                <a:solidFill>
+                  <a:srgbClr val="E61E73"/>
+                </a:solidFill>
+                <a:latin typeface="Arial" pitchFamily="34" charset="0"/>
+                <a:ea typeface="Arial" pitchFamily="34" charset="-122"/>
+                <a:cs typeface="Arial" pitchFamily="34" charset="-120"/>
+              </a:rPr>
+              <a:t>&lt;stylesheets&gt;</a:t>
+            </a:r>
+            <a:endParaRPr lang="en-US" sz="1200" dirty="0"/>
+          </a:p>
+        </p:txBody>
+      </p:sp>
+      <p:sp>
+        <p:nvSpPr>
+          <p:cNvPr id="67" name="Text 65">
+            <a:extLst>
+              <a:ext uri="{FF2B5EF4-FFF2-40B4-BE49-F238E27FC236}">
+                <a16:creationId xmlns:a16="http://schemas.microsoft.com/office/drawing/2014/main" id="{D009F1E7-F006-4A90-8549-330FBE52B629}"/>
+              </a:ext>
+            </a:extLst>
+          </p:cNvPr>
+          <p:cNvSpPr/>
+          <p:nvPr/>
+        </p:nvSpPr>
+        <p:spPr>
+          <a:xfrm>
+            <a:off x="7863953" y="4267629"/>
+            <a:ext cx="1039365" cy="438912"/>
+          </a:xfrm>
+          <a:prstGeom prst="rect">
+            <a:avLst/>
+          </a:prstGeom>
+          <a:noFill/>
+          <a:ln/>
+        </p:spPr>
+        <p:txBody>
+          <a:bodyPr wrap="square" lIns="127" tIns="127" rIns="127" bIns="127" rtlCol="0" anchor="ctr">
+            <a:noAutofit/>
+          </a:bodyPr>
+          <a:lstStyle/>
+          <a:p>
+            <a:pPr marL="0" indent="0" algn="ctr">
+              <a:buNone/>
+            </a:pPr>
+            <a:r>
+              <a:rPr lang="en-US" sz="1000" dirty="0">
+                <a:solidFill>
+                  <a:srgbClr val="0E2D63"/>
+                </a:solidFill>
+                <a:latin typeface="Arial" pitchFamily="34" charset="0"/>
+                <a:ea typeface="Arial" pitchFamily="34" charset="-122"/>
+                <a:cs typeface="Arial" pitchFamily="34" charset="-120"/>
+              </a:rPr>
+              <a:t>CSS controls the</a:t>
+            </a:r>
+            <a:endParaRPr lang="en-US" sz="1000" dirty="0"/>
+          </a:p>
+          <a:p>
+            <a:pPr marL="0" indent="0" algn="ctr">
+              <a:buNone/>
+            </a:pPr>
+            <a:r>
+              <a:rPr lang="en-US" sz="1000" dirty="0">
+                <a:solidFill>
+                  <a:srgbClr val="0E2D63"/>
+                </a:solidFill>
+                <a:latin typeface="Arial" pitchFamily="34" charset="0"/>
+                <a:ea typeface="Arial" pitchFamily="34" charset="-122"/>
+                <a:cs typeface="Arial" pitchFamily="34" charset="-120"/>
+              </a:rPr>
+              <a:t>appearance</a:t>
+            </a:r>
+            <a:endParaRPr lang="en-US" sz="1000" dirty="0"/>
+          </a:p>
+          <a:p>
+            <a:pPr marL="0" indent="0" algn="ctr">
+              <a:buNone/>
+            </a:pPr>
+            <a:r>
+              <a:rPr lang="en-US" sz="1000" dirty="0">
+                <a:solidFill>
+                  <a:srgbClr val="0E2D63"/>
+                </a:solidFill>
+                <a:latin typeface="Arial" pitchFamily="34" charset="0"/>
+                <a:ea typeface="Arial" pitchFamily="34" charset="-122"/>
+                <a:cs typeface="Arial" pitchFamily="34" charset="-120"/>
+              </a:rPr>
+              <a:t>(colors, fonts)</a:t>
+            </a:r>
+            <a:endParaRPr lang="en-US" sz="1000" dirty="0"/>
+          </a:p>
+        </p:txBody>
+      </p:sp>
+    </p:spTree>
+    <p:extLst>
+      <p:ext uri="{BB962C8B-B14F-4D97-AF65-F5344CB8AC3E}">
+        <p14:creationId xmlns:p14="http://schemas.microsoft.com/office/powerpoint/2010/main" val="1485039361"/>
+      </p:ext>
+    </p:extLst>
+  </p:cSld>
+  <p:clrMapOvr>
+    <a:masterClrMapping/>
+  </p:clrMapOvr>
+</p:sld>
+</file>
+
 <file path=ppt/slides/slide3.xml><?xml version="1.0" encoding="utf-8"?>
 <p:sld xmlns:a="http://schemas.openxmlformats.org/drawingml/2006/main" xmlns:r="http://schemas.openxmlformats.org/officeDocument/2006/relationships" xmlns:p="http://schemas.openxmlformats.org/presentationml/2006/main">
   <p:cSld>
